--- a/Stroop自适应训练系统-期末汇报.pptx
+++ b/Stroop自适应训练系统-期末汇报.pptx
@@ -1862,8 +1862,8 @@
         </p:nvSpPr>
         <p:spPr>
           <a:xfrm>
-            <a:off x="731520" y="1371600"/>
-            <a:ext cx="10515600" cy="2286000"/>
+            <a:off x="731520" y="1188720"/>
+            <a:ext cx="10515600" cy="2743200"/>
           </a:xfrm>
           <a:prstGeom prst="rect">
             <a:avLst/>
@@ -1879,7 +1879,7 @@
               <a:buNone/>
             </a:pPr>
             <a:r>
-              <a:rPr lang="en-US" sz="3600" b="1" dirty="0">
+              <a:rPr lang="en-US" sz="4000" b="1" dirty="0">
                 <a:solidFill>
                   <a:srgbClr val="FFFFFF"/>
                 </a:solidFill>
@@ -1889,14 +1889,14 @@
               </a:rPr>
               <a:t>基于Stroop效应的</a:t>
             </a:r>
-            <a:endParaRPr lang="en-US" sz="3600" dirty="0"/>
+            <a:endParaRPr lang="en-US" sz="4000" dirty="0"/>
           </a:p>
           <a:p>
             <a:pPr algn="ctr" indent="0" marL="0">
               <a:buNone/>
             </a:pPr>
             <a:r>
-              <a:rPr lang="en-US" sz="3600" b="1" dirty="0">
+              <a:rPr lang="en-US" sz="4000" b="1" dirty="0">
                 <a:solidFill>
                   <a:srgbClr val="FFFFFF"/>
                 </a:solidFill>
@@ -1906,7 +1906,7 @@
               </a:rPr>
               <a:t>认知注意力自适应训练系统</a:t>
             </a:r>
-            <a:endParaRPr lang="en-US" sz="3600" dirty="0"/>
+            <a:endParaRPr lang="en-US" sz="4000" dirty="0"/>
           </a:p>
         </p:txBody>
       </p:sp>
@@ -1919,7 +1919,7 @@
         <p:spPr>
           <a:xfrm>
             <a:off x="731520" y="3840480"/>
-            <a:ext cx="10515600" cy="548640"/>
+            <a:ext cx="10515600" cy="640080"/>
           </a:xfrm>
           <a:prstGeom prst="rect">
             <a:avLst/>
@@ -1935,7 +1935,7 @@
               <a:buNone/>
             </a:pPr>
             <a:r>
-              <a:rPr lang="en-US" sz="1800" dirty="0">
+              <a:rPr lang="en-US" sz="2200" dirty="0">
                 <a:solidFill>
                   <a:srgbClr val="3498DB"/>
                 </a:solidFill>
@@ -1945,7 +1945,7 @@
               </a:rPr>
               <a:t>《脑与认知科学基础》期末项目展示</a:t>
             </a:r>
-            <a:endParaRPr lang="en-US" sz="1800" dirty="0"/>
+            <a:endParaRPr lang="en-US" sz="2200" dirty="0"/>
           </a:p>
         </p:txBody>
       </p:sp>
@@ -1957,8 +1957,8 @@
         </p:nvSpPr>
         <p:spPr>
           <a:xfrm>
-            <a:off x="731520" y="4937760"/>
-            <a:ext cx="10515600" cy="457200"/>
+            <a:off x="731520" y="5029200"/>
+            <a:ext cx="10515600" cy="548640"/>
           </a:xfrm>
           <a:prstGeom prst="rect">
             <a:avLst/>
@@ -1974,7 +1974,7 @@
               <a:buNone/>
             </a:pPr>
             <a:r>
-              <a:rPr lang="en-US" sz="1400" dirty="0">
+              <a:rPr lang="en-US" sz="1600" dirty="0">
                 <a:solidFill>
                   <a:srgbClr val="7F8C8D"/>
                 </a:solidFill>
@@ -1984,7 +1984,7 @@
               </a:rPr>
               <a:t>王熙（2024211965）  李卓洲（2024212009）  陈其乐（2024212027）</a:t>
             </a:r>
-            <a:endParaRPr lang="en-US" sz="1400" dirty="0"/>
+            <a:endParaRPr lang="en-US" sz="1600" dirty="0"/>
           </a:p>
         </p:txBody>
       </p:sp>
@@ -1996,7 +1996,7 @@
         </p:nvSpPr>
         <p:spPr>
           <a:xfrm>
-            <a:off x="731520" y="5486400"/>
+            <a:off x="731520" y="5577840"/>
             <a:ext cx="10515600" cy="457200"/>
           </a:xfrm>
           <a:prstGeom prst="rect">
@@ -2013,7 +2013,7 @@
               <a:buNone/>
             </a:pPr>
             <a:r>
-              <a:rPr lang="en-US" sz="1300" dirty="0">
+              <a:rPr lang="en-US" sz="1500" dirty="0">
                 <a:solidFill>
                   <a:srgbClr val="7F8C8D"/>
                 </a:solidFill>
@@ -2023,7 +2023,7 @@
               </a:rPr>
               <a:t>北京邮电大学 · 智能医学工程 · 大二</a:t>
             </a:r>
-            <a:endParaRPr lang="en-US" sz="1300" dirty="0"/>
+            <a:endParaRPr lang="en-US" sz="1500" dirty="0"/>
           </a:p>
         </p:txBody>
       </p:sp>
@@ -2061,7 +2061,7 @@
         <p:spPr>
           <a:xfrm>
             <a:off x="548640" y="274320"/>
-            <a:ext cx="10972800" cy="640080"/>
+            <a:ext cx="10972800" cy="731520"/>
           </a:xfrm>
           <a:prstGeom prst="rect">
             <a:avLst/>
@@ -2077,7 +2077,7 @@
               <a:buNone/>
             </a:pPr>
             <a:r>
-              <a:rPr lang="en-US" sz="2600" b="1" dirty="0">
+              <a:rPr lang="en-US" sz="3000" b="1" dirty="0">
                 <a:solidFill>
                   <a:srgbClr val="2C3E50"/>
                 </a:solidFill>
@@ -2087,7 +2087,7 @@
               </a:rPr>
               <a:t>技术架构与创新点</a:t>
             </a:r>
-            <a:endParaRPr lang="en-US" sz="2600" dirty="0"/>
+            <a:endParaRPr lang="en-US" sz="3000" dirty="0"/>
           </a:p>
         </p:txBody>
       </p:sp>
@@ -2099,7 +2099,7 @@
         </p:nvSpPr>
         <p:spPr>
           <a:xfrm>
-            <a:off x="548640" y="960120"/>
+            <a:off x="548640" y="1051560"/>
             <a:ext cx="10972800" cy="0"/>
           </a:xfrm>
           <a:prstGeom prst="line">
@@ -2122,12 +2122,12 @@
         </p:nvSpPr>
         <p:spPr>
           <a:xfrm>
-            <a:off x="548640" y="1188720"/>
-            <a:ext cx="5303520" cy="5029200"/>
+            <a:off x="548640" y="1280160"/>
+            <a:ext cx="5303520" cy="4846320"/>
           </a:xfrm>
           <a:prstGeom prst="roundRect">
             <a:avLst>
-              <a:gd name="adj" fmla="val 2182"/>
+              <a:gd name="adj" fmla="val 2264"/>
             </a:avLst>
           </a:prstGeom>
           <a:solidFill>
@@ -2144,8 +2144,8 @@
         </p:nvSpPr>
         <p:spPr>
           <a:xfrm>
-            <a:off x="822960" y="1371600"/>
-            <a:ext cx="4754880" cy="4663440"/>
+            <a:off x="822960" y="1463040"/>
+            <a:ext cx="4754880" cy="4480560"/>
           </a:xfrm>
           <a:prstGeom prst="rect">
             <a:avLst/>
@@ -2157,130 +2157,130 @@
           <a:bodyPr wrap="square" rtlCol="0" anchor="t"/>
           <a:lstStyle/>
           <a:p>
-            <a:pPr algn="l" indent="0" marL="0">
+            <a:pPr indent="0" marL="0">
+              <a:buNone/>
+            </a:pPr>
+            <a:r>
+              <a:rPr lang="en-US" sz="2000" b="1" dirty="0">
+                <a:solidFill>
+                  <a:srgbClr val="3498DB"/>
+                </a:solidFill>
+                <a:latin typeface="Microsoft YaHei" pitchFamily="34" charset="0"/>
+                <a:ea typeface="Microsoft YaHei" pitchFamily="34" charset="-122"/>
+                <a:cs typeface="Microsoft YaHei" pitchFamily="34" charset="-120"/>
+              </a:rPr>
+              <a:t>技术栈（零服务器架构）</a:t>
+            </a:r>
+            <a:pPr indent="0" marL="0">
+              <a:buNone/>
+            </a:pPr>
+            <a:pPr indent="0" marL="0">
+              <a:buNone/>
+            </a:pPr>
+            <a:r>
+              <a:rPr lang="en-US" sz="1600" dirty="0">
+                <a:solidFill>
+                  <a:srgbClr val="2C3E50"/>
+                </a:solidFill>
+                <a:latin typeface="Microsoft YaHei" pitchFamily="34" charset="0"/>
+                <a:ea typeface="Microsoft YaHei" pitchFamily="34" charset="-122"/>
+                <a:cs typeface="Microsoft YaHei" pitchFamily="34" charset="-120"/>
+              </a:rPr>
+              <a:t>• HTML5 + CSS3：响应式界面</a:t>
+            </a:r>
+            <a:pPr indent="0" marL="0">
+              <a:buNone/>
+            </a:pPr>
+            <a:r>
+              <a:rPr lang="en-US" sz="1600" dirty="0">
+                <a:solidFill>
+                  <a:srgbClr val="2C3E50"/>
+                </a:solidFill>
+                <a:latin typeface="Microsoft YaHei" pitchFamily="34" charset="0"/>
+                <a:ea typeface="Microsoft YaHei" pitchFamily="34" charset="-122"/>
+                <a:cs typeface="Microsoft YaHei" pitchFamily="34" charset="-120"/>
+              </a:rPr>
+              <a:t>• 原生JavaScript：零依赖，单文件</a:t>
+            </a:r>
+            <a:pPr indent="0" marL="0">
+              <a:buNone/>
+            </a:pPr>
+            <a:r>
+              <a:rPr lang="en-US" sz="1600" dirty="0">
+                <a:solidFill>
+                  <a:srgbClr val="2C3E50"/>
+                </a:solidFill>
+                <a:latin typeface="Microsoft YaHei" pitchFamily="34" charset="0"/>
+                <a:ea typeface="Microsoft YaHei" pitchFamily="34" charset="-122"/>
+                <a:cs typeface="Microsoft YaHei" pitchFamily="34" charset="-120"/>
+              </a:rPr>
+              <a:t>• Canvas API：三张数据图表</a:t>
+            </a:r>
+            <a:pPr indent="0" marL="0">
+              <a:buNone/>
+            </a:pPr>
+            <a:r>
+              <a:rPr lang="en-US" sz="1600" dirty="0">
+                <a:solidFill>
+                  <a:srgbClr val="2C3E50"/>
+                </a:solidFill>
+                <a:latin typeface="Microsoft YaHei" pitchFamily="34" charset="0"/>
+                <a:ea typeface="Microsoft YaHei" pitchFamily="34" charset="-122"/>
+                <a:cs typeface="Microsoft YaHei" pitchFamily="34" charset="-120"/>
+              </a:rPr>
+              <a:t>• localStorage：数据本地存储</a:t>
+            </a:r>
+            <a:pPr indent="0" marL="0">
+              <a:buNone/>
+            </a:pPr>
+            <a:r>
+              <a:rPr lang="en-US" sz="1600" dirty="0">
+                <a:solidFill>
+                  <a:srgbClr val="2C3E50"/>
+                </a:solidFill>
+                <a:latin typeface="Microsoft YaHei" pitchFamily="34" charset="0"/>
+                <a:ea typeface="Microsoft YaHei" pitchFamily="34" charset="-122"/>
+                <a:cs typeface="Microsoft YaHei" pitchFamily="34" charset="-120"/>
+              </a:rPr>
+              <a:t>• performance.now：高精度计时</a:t>
+            </a:r>
+            <a:pPr indent="0" marL="0">
+              <a:buNone/>
+            </a:pPr>
+            <a:r>
+              <a:rPr lang="en-US" sz="1600" dirty="0">
+                <a:solidFill>
+                  <a:srgbClr val="2C3E50"/>
+                </a:solidFill>
+                <a:latin typeface="Microsoft YaHei" pitchFamily="34" charset="0"/>
+                <a:ea typeface="Microsoft YaHei" pitchFamily="34" charset="-122"/>
+                <a:cs typeface="Microsoft YaHei" pitchFamily="34" charset="-120"/>
+              </a:rPr>
+              <a:t>• ~800行代码，浏览器即用</a:t>
+            </a:r>
+            <a:pPr indent="0" marL="0">
+              <a:buNone/>
+            </a:pPr>
+            <a:pPr indent="0" marL="0">
               <a:buNone/>
             </a:pPr>
             <a:r>
               <a:rPr lang="en-US" sz="1600" b="1" dirty="0">
                 <a:solidFill>
-                  <a:srgbClr val="3498DB"/>
-                </a:solidFill>
-                <a:latin typeface="Microsoft YaHei" pitchFamily="34" charset="0"/>
-                <a:ea typeface="Microsoft YaHei" pitchFamily="34" charset="-122"/>
-                <a:cs typeface="Microsoft YaHei" pitchFamily="34" charset="-120"/>
-              </a:rPr>
-              <a:t>技术栈（零服务器架构）</a:t>
-            </a:r>
-            <a:pPr algn="l" indent="0" marL="0">
-              <a:buNone/>
-            </a:pPr>
-            <a:pPr algn="l" indent="0" marL="0">
+                  <a:srgbClr val="2C3E50"/>
+                </a:solidFill>
+                <a:latin typeface="Microsoft YaHei" pitchFamily="34" charset="0"/>
+                <a:ea typeface="Microsoft YaHei" pitchFamily="34" charset="-122"/>
+                <a:cs typeface="Microsoft YaHei" pitchFamily="34" charset="-120"/>
+              </a:rPr>
+              <a:t>GitHub</a:t>
+            </a:r>
+            <a:pPr indent="0" marL="0">
               <a:buNone/>
             </a:pPr>
             <a:r>
               <a:rPr lang="en-US" sz="1300" dirty="0">
                 <a:solidFill>
-                  <a:srgbClr val="2C3E50"/>
-                </a:solidFill>
-                <a:latin typeface="Microsoft YaHei" pitchFamily="34" charset="0"/>
-                <a:ea typeface="Microsoft YaHei" pitchFamily="34" charset="-122"/>
-                <a:cs typeface="Microsoft YaHei" pitchFamily="34" charset="-120"/>
-              </a:rPr>
-              <a:t>• HTML5 + CSS3：响应式界面</a:t>
-            </a:r>
-            <a:pPr algn="l" indent="0" marL="0">
-              <a:buNone/>
-            </a:pPr>
-            <a:r>
-              <a:rPr lang="en-US" sz="1300" dirty="0">
-                <a:solidFill>
-                  <a:srgbClr val="2C3E50"/>
-                </a:solidFill>
-                <a:latin typeface="Microsoft YaHei" pitchFamily="34" charset="0"/>
-                <a:ea typeface="Microsoft YaHei" pitchFamily="34" charset="-122"/>
-                <a:cs typeface="Microsoft YaHei" pitchFamily="34" charset="-120"/>
-              </a:rPr>
-              <a:t>• 原生JavaScript：零依赖，单文件</a:t>
-            </a:r>
-            <a:pPr algn="l" indent="0" marL="0">
-              <a:buNone/>
-            </a:pPr>
-            <a:r>
-              <a:rPr lang="en-US" sz="1300" dirty="0">
-                <a:solidFill>
-                  <a:srgbClr val="2C3E50"/>
-                </a:solidFill>
-                <a:latin typeface="Microsoft YaHei" pitchFamily="34" charset="0"/>
-                <a:ea typeface="Microsoft YaHei" pitchFamily="34" charset="-122"/>
-                <a:cs typeface="Microsoft YaHei" pitchFamily="34" charset="-120"/>
-              </a:rPr>
-              <a:t>• Canvas API：三张数据图表</a:t>
-            </a:r>
-            <a:pPr algn="l" indent="0" marL="0">
-              <a:buNone/>
-            </a:pPr>
-            <a:r>
-              <a:rPr lang="en-US" sz="1300" dirty="0">
-                <a:solidFill>
-                  <a:srgbClr val="2C3E50"/>
-                </a:solidFill>
-                <a:latin typeface="Microsoft YaHei" pitchFamily="34" charset="0"/>
-                <a:ea typeface="Microsoft YaHei" pitchFamily="34" charset="-122"/>
-                <a:cs typeface="Microsoft YaHei" pitchFamily="34" charset="-120"/>
-              </a:rPr>
-              <a:t>• localStorage：数据本地存储</a:t>
-            </a:r>
-            <a:pPr algn="l" indent="0" marL="0">
-              <a:buNone/>
-            </a:pPr>
-            <a:r>
-              <a:rPr lang="en-US" sz="1300" dirty="0">
-                <a:solidFill>
-                  <a:srgbClr val="2C3E50"/>
-                </a:solidFill>
-                <a:latin typeface="Microsoft YaHei" pitchFamily="34" charset="0"/>
-                <a:ea typeface="Microsoft YaHei" pitchFamily="34" charset="-122"/>
-                <a:cs typeface="Microsoft YaHei" pitchFamily="34" charset="-120"/>
-              </a:rPr>
-              <a:t>• performance.now：高精度计时</a:t>
-            </a:r>
-            <a:pPr algn="l" indent="0" marL="0">
-              <a:buNone/>
-            </a:pPr>
-            <a:r>
-              <a:rPr lang="en-US" sz="1300" dirty="0">
-                <a:solidFill>
-                  <a:srgbClr val="2C3E50"/>
-                </a:solidFill>
-                <a:latin typeface="Microsoft YaHei" pitchFamily="34" charset="0"/>
-                <a:ea typeface="Microsoft YaHei" pitchFamily="34" charset="-122"/>
-                <a:cs typeface="Microsoft YaHei" pitchFamily="34" charset="-120"/>
-              </a:rPr>
-              <a:t>• ~800行代码，浏览器即用</a:t>
-            </a:r>
-            <a:pPr algn="l" indent="0" marL="0">
-              <a:buNone/>
-            </a:pPr>
-            <a:pPr algn="l" indent="0" marL="0">
-              <a:buNone/>
-            </a:pPr>
-            <a:r>
-              <a:rPr lang="en-US" sz="1400" b="1" dirty="0">
-                <a:solidFill>
-                  <a:srgbClr val="2C3E50"/>
-                </a:solidFill>
-                <a:latin typeface="Microsoft YaHei" pitchFamily="34" charset="0"/>
-                <a:ea typeface="Microsoft YaHei" pitchFamily="34" charset="-122"/>
-                <a:cs typeface="Microsoft YaHei" pitchFamily="34" charset="-120"/>
-              </a:rPr>
-              <a:t>GitHub</a:t>
-            </a:r>
-            <a:pPr algn="l" indent="0" marL="0">
-              <a:buNone/>
-            </a:pPr>
-            <a:r>
-              <a:rPr lang="en-US" sz="1100" dirty="0">
-                <a:solidFill>
                   <a:srgbClr val="7F8C8D"/>
                 </a:solidFill>
                 <a:latin typeface="Microsoft YaHei" pitchFamily="34" charset="0"/>
@@ -2289,7 +2289,7 @@
               </a:rPr>
               <a:t>github.com/wangxi886/stroop-attention-trainer</a:t>
             </a:r>
-            <a:endParaRPr lang="en-US" sz="1600" dirty="0"/>
+            <a:endParaRPr lang="en-US" sz="2000" dirty="0"/>
           </a:p>
         </p:txBody>
       </p:sp>
@@ -2301,12 +2301,12 @@
         </p:nvSpPr>
         <p:spPr>
           <a:xfrm>
-            <a:off x="6400800" y="1188720"/>
-            <a:ext cx="5303520" cy="5029200"/>
+            <a:off x="6400800" y="1280160"/>
+            <a:ext cx="5303520" cy="4846320"/>
           </a:xfrm>
           <a:prstGeom prst="roundRect">
             <a:avLst>
-              <a:gd name="adj" fmla="val 2182"/>
+              <a:gd name="adj" fmla="val 2264"/>
             </a:avLst>
           </a:prstGeom>
           <a:solidFill>
@@ -2323,8 +2323,8 @@
         </p:nvSpPr>
         <p:spPr>
           <a:xfrm>
-            <a:off x="6675120" y="1371600"/>
-            <a:ext cx="4754880" cy="4663440"/>
+            <a:off x="6675120" y="1463040"/>
+            <a:ext cx="4754880" cy="4480560"/>
           </a:xfrm>
           <a:prstGeom prst="rect">
             <a:avLst/>
@@ -2336,11 +2336,11 @@
           <a:bodyPr wrap="square" rtlCol="0" anchor="t"/>
           <a:lstStyle/>
           <a:p>
-            <a:pPr algn="l" indent="0" marL="0">
-              <a:buNone/>
-            </a:pPr>
-            <a:r>
-              <a:rPr lang="en-US" sz="1600" b="1" dirty="0">
+            <a:pPr indent="0" marL="0">
+              <a:buNone/>
+            </a:pPr>
+            <a:r>
+              <a:rPr lang="en-US" sz="2000" b="1" dirty="0">
                 <a:solidFill>
                   <a:srgbClr val="3498DB"/>
                 </a:solidFill>
@@ -2350,14 +2350,14 @@
               </a:rPr>
               <a:t>四大创新点</a:t>
             </a:r>
-            <a:pPr algn="l" indent="0" marL="0">
-              <a:buNone/>
-            </a:pPr>
-            <a:pPr algn="l" indent="0" marL="0">
-              <a:buNone/>
-            </a:pPr>
-            <a:r>
-              <a:rPr lang="en-US" sz="1400" b="1" dirty="0">
+            <a:pPr indent="0" marL="0">
+              <a:buNone/>
+            </a:pPr>
+            <a:pPr indent="0" marL="0">
+              <a:buNone/>
+            </a:pPr>
+            <a:r>
+              <a:rPr lang="en-US" sz="1800" b="1" dirty="0">
                 <a:solidFill>
                   <a:srgbClr val="2C3E50"/>
                 </a:solidFill>
@@ -2367,11 +2367,11 @@
               </a:rPr>
               <a:t>❶ 范式转型</a:t>
             </a:r>
-            <a:pPr algn="l" indent="0" marL="0">
-              <a:buNone/>
-            </a:pPr>
-            <a:r>
-              <a:rPr lang="en-US" sz="1200" dirty="0">
+            <a:pPr indent="0" marL="0">
+              <a:buNone/>
+            </a:pPr>
+            <a:r>
+              <a:rPr lang="en-US" sz="1500" dirty="0">
                 <a:solidFill>
                   <a:srgbClr val="7F8C8D"/>
                 </a:solidFill>
@@ -2381,14 +2381,14 @@
               </a:rPr>
               <a:t>Stroop从测量工具 → 训练系统</a:t>
             </a:r>
-            <a:pPr algn="l" indent="0" marL="0">
-              <a:buNone/>
-            </a:pPr>
-            <a:pPr algn="l" indent="0" marL="0">
-              <a:buNone/>
-            </a:pPr>
-            <a:r>
-              <a:rPr lang="en-US" sz="1400" b="1" dirty="0">
+            <a:pPr indent="0" marL="0">
+              <a:buNone/>
+            </a:pPr>
+            <a:pPr indent="0" marL="0">
+              <a:buNone/>
+            </a:pPr>
+            <a:r>
+              <a:rPr lang="en-US" sz="1800" b="1" dirty="0">
                 <a:solidFill>
                   <a:srgbClr val="2C3E50"/>
                 </a:solidFill>
@@ -2398,11 +2398,11 @@
               </a:rPr>
               <a:t>❷ 双维度自适应</a:t>
             </a:r>
-            <a:pPr algn="l" indent="0" marL="0">
-              <a:buNone/>
-            </a:pPr>
-            <a:r>
-              <a:rPr lang="en-US" sz="1200" dirty="0">
+            <a:pPr indent="0" marL="0">
+              <a:buNone/>
+            </a:pPr>
+            <a:r>
+              <a:rPr lang="en-US" sz="1500" dirty="0">
                 <a:solidFill>
                   <a:srgbClr val="7F8C8D"/>
                 </a:solidFill>
@@ -2412,14 +2412,14 @@
               </a:rPr>
               <a:t>干扰强度（质）+ 呈现时间（量）</a:t>
             </a:r>
-            <a:pPr algn="l" indent="0" marL="0">
-              <a:buNone/>
-            </a:pPr>
-            <a:pPr algn="l" indent="0" marL="0">
-              <a:buNone/>
-            </a:pPr>
-            <a:r>
-              <a:rPr lang="en-US" sz="1400" b="1" dirty="0">
+            <a:pPr indent="0" marL="0">
+              <a:buNone/>
+            </a:pPr>
+            <a:pPr indent="0" marL="0">
+              <a:buNone/>
+            </a:pPr>
+            <a:r>
+              <a:rPr lang="en-US" sz="1800" b="1" dirty="0">
                 <a:solidFill>
                   <a:srgbClr val="2C3E50"/>
                 </a:solidFill>
@@ -2429,11 +2429,11 @@
               </a:rPr>
               <a:t>❸ 滞回控制机制</a:t>
             </a:r>
-            <a:pPr algn="l" indent="0" marL="0">
-              <a:buNone/>
-            </a:pPr>
-            <a:r>
-              <a:rPr lang="en-US" sz="1200" dirty="0">
+            <a:pPr indent="0" marL="0">
+              <a:buNone/>
+            </a:pPr>
+            <a:r>
+              <a:rPr lang="en-US" sz="1500" dirty="0">
                 <a:solidFill>
                   <a:srgbClr val="7F8C8D"/>
                 </a:solidFill>
@@ -2443,14 +2443,14 @@
               </a:rPr>
               <a:t>连续2组确认，防止难度过山车</a:t>
             </a:r>
-            <a:pPr algn="l" indent="0" marL="0">
-              <a:buNone/>
-            </a:pPr>
-            <a:pPr algn="l" indent="0" marL="0">
-              <a:buNone/>
-            </a:pPr>
-            <a:r>
-              <a:rPr lang="en-US" sz="1400" b="1" dirty="0">
+            <a:pPr indent="0" marL="0">
+              <a:buNone/>
+            </a:pPr>
+            <a:pPr indent="0" marL="0">
+              <a:buNone/>
+            </a:pPr>
+            <a:r>
+              <a:rPr lang="en-US" sz="1800" b="1" dirty="0">
                 <a:solidFill>
                   <a:srgbClr val="2C3E50"/>
                 </a:solidFill>
@@ -2460,11 +2460,11 @@
               </a:rPr>
               <a:t>❹ 隐私保护设计</a:t>
             </a:r>
-            <a:pPr algn="l" indent="0" marL="0">
-              <a:buNone/>
-            </a:pPr>
-            <a:r>
-              <a:rPr lang="en-US" sz="1200" dirty="0">
+            <a:pPr indent="0" marL="0">
+              <a:buNone/>
+            </a:pPr>
+            <a:r>
+              <a:rPr lang="en-US" sz="1500" dirty="0">
                 <a:solidFill>
                   <a:srgbClr val="7F8C8D"/>
                 </a:solidFill>
@@ -2474,7 +2474,7 @@
               </a:rPr>
               <a:t>纯前端，数据不上传不注册</a:t>
             </a:r>
-            <a:endParaRPr lang="en-US" sz="1600" dirty="0"/>
+            <a:endParaRPr lang="en-US" sz="2000" dirty="0"/>
           </a:p>
         </p:txBody>
       </p:sp>
@@ -2512,7 +2512,7 @@
         <p:spPr>
           <a:xfrm>
             <a:off x="548640" y="274320"/>
-            <a:ext cx="10972800" cy="640080"/>
+            <a:ext cx="10972800" cy="731520"/>
           </a:xfrm>
           <a:prstGeom prst="rect">
             <a:avLst/>
@@ -2528,7 +2528,7 @@
               <a:buNone/>
             </a:pPr>
             <a:r>
-              <a:rPr lang="en-US" sz="2600" b="1" dirty="0">
+              <a:rPr lang="en-US" sz="3000" b="1" dirty="0">
                 <a:solidFill>
                   <a:srgbClr val="2C3E50"/>
                 </a:solidFill>
@@ -2538,7 +2538,7 @@
               </a:rPr>
               <a:t>总结与展望</a:t>
             </a:r>
-            <a:endParaRPr lang="en-US" sz="2600" dirty="0"/>
+            <a:endParaRPr lang="en-US" sz="3000" dirty="0"/>
           </a:p>
         </p:txBody>
       </p:sp>
@@ -2550,7 +2550,7 @@
         </p:nvSpPr>
         <p:spPr>
           <a:xfrm>
-            <a:off x="548640" y="960120"/>
+            <a:off x="548640" y="1051560"/>
             <a:ext cx="10972800" cy="0"/>
           </a:xfrm>
           <a:prstGeom prst="line">
@@ -2573,7 +2573,7 @@
         </p:nvSpPr>
         <p:spPr>
           <a:xfrm>
-            <a:off x="548640" y="1188720"/>
+            <a:off x="548640" y="1280160"/>
             <a:ext cx="10972800" cy="2377440"/>
           </a:xfrm>
           <a:prstGeom prst="roundRect">
@@ -2595,7 +2595,7 @@
         </p:nvSpPr>
         <p:spPr>
           <a:xfrm>
-            <a:off x="822960" y="1371600"/>
+            <a:off x="822960" y="1463040"/>
             <a:ext cx="10424160" cy="2011680"/>
           </a:xfrm>
           <a:prstGeom prst="rect">
@@ -2608,11 +2608,11 @@
           <a:bodyPr wrap="square" rtlCol="0" anchor="t"/>
           <a:lstStyle/>
           <a:p>
-            <a:pPr algn="l" indent="0" marL="0">
-              <a:buNone/>
-            </a:pPr>
-            <a:r>
-              <a:rPr lang="en-US" sz="1800" b="1" dirty="0">
+            <a:pPr indent="0" marL="0">
+              <a:buNone/>
+            </a:pPr>
+            <a:r>
+              <a:rPr lang="en-US" sz="2200" b="1" dirty="0">
                 <a:solidFill>
                   <a:srgbClr val="27AE60"/>
                 </a:solidFill>
@@ -2622,14 +2622,14 @@
               </a:rPr>
               <a:t>✅ 已完成</a:t>
             </a:r>
-            <a:pPr algn="l" indent="0" marL="0">
-              <a:buNone/>
-            </a:pPr>
-            <a:pPr algn="l" indent="0" marL="0">
-              <a:buNone/>
-            </a:pPr>
-            <a:r>
-              <a:rPr lang="en-US" sz="1400" dirty="0">
+            <a:pPr indent="0" marL="0">
+              <a:buNone/>
+            </a:pPr>
+            <a:pPr indent="0" marL="0">
+              <a:buNone/>
+            </a:pPr>
+            <a:r>
+              <a:rPr lang="en-US" sz="1600" dirty="0">
                 <a:solidFill>
                   <a:srgbClr val="2C3E50"/>
                 </a:solidFill>
@@ -2639,11 +2639,11 @@
               </a:rPr>
               <a:t>• 基于Stroop效应的自适应训练系统，开发完成并可在线使用</a:t>
             </a:r>
-            <a:pPr algn="l" indent="0" marL="0">
-              <a:buNone/>
-            </a:pPr>
-            <a:r>
-              <a:rPr lang="en-US" sz="1400" dirty="0">
+            <a:pPr indent="0" marL="0">
+              <a:buNone/>
+            </a:pPr>
+            <a:r>
+              <a:rPr lang="en-US" sz="1600" dirty="0">
                 <a:solidFill>
                   <a:srgbClr val="2C3E50"/>
                 </a:solidFill>
@@ -2653,11 +2653,11 @@
               </a:rPr>
               <a:t>• 双维度自适应算法（干扰比例 + 呈现时间）+ 滞回机制</a:t>
             </a:r>
-            <a:pPr algn="l" indent="0" marL="0">
-              <a:buNone/>
-            </a:pPr>
-            <a:r>
-              <a:rPr lang="en-US" sz="1400" dirty="0">
+            <a:pPr indent="0" marL="0">
+              <a:buNone/>
+            </a:pPr>
+            <a:r>
+              <a:rPr lang="en-US" sz="1600" dirty="0">
                 <a:solidFill>
                   <a:srgbClr val="2C3E50"/>
                 </a:solidFill>
@@ -2665,13 +2665,13 @@
                 <a:ea typeface="Microsoft YaHei" pitchFamily="34" charset="-122"/>
                 <a:cs typeface="Microsoft YaHei" pitchFamily="34" charset="-120"/>
               </a:rPr>
-              <a:t>• 三张Canvas数据可视化图表 + CSV数据导出</a:t>
-            </a:r>
-            <a:pPr algn="l" indent="0" marL="0">
-              <a:buNone/>
-            </a:pPr>
-            <a:r>
-              <a:rPr lang="en-US" sz="1400" dirty="0">
+              <a:t>• 三张Canvas数据可视化图表 + CSV数据导出 + 实验组/对照组双模式</a:t>
+            </a:r>
+            <a:pPr indent="0" marL="0">
+              <a:buNone/>
+            </a:pPr>
+            <a:r>
+              <a:rPr lang="en-US" sz="1600" dirty="0">
                 <a:solidFill>
                   <a:srgbClr val="2C3E50"/>
                 </a:solidFill>
@@ -2679,23 +2679,9 @@
                 <a:ea typeface="Microsoft YaHei" pitchFamily="34" charset="-122"/>
                 <a:cs typeface="Microsoft YaHei" pitchFamily="34" charset="-120"/>
               </a:rPr>
-              <a:t>• 10次训练初步实验数据：反应时↓43% / 干扰效应↓83% / 难度50%→80%</a:t>
-            </a:r>
-            <a:pPr algn="l" indent="0" marL="0">
-              <a:buNone/>
-            </a:pPr>
-            <a:r>
-              <a:rPr lang="en-US" sz="1400" dirty="0">
-                <a:solidFill>
-                  <a:srgbClr val="2C3E50"/>
-                </a:solidFill>
-                <a:latin typeface="Microsoft YaHei" pitchFamily="34" charset="0"/>
-                <a:ea typeface="Microsoft YaHei" pitchFamily="34" charset="-122"/>
-                <a:cs typeface="Microsoft YaHei" pitchFamily="34" charset="-120"/>
-              </a:rPr>
-              <a:t>• 实验组/对照组双模式，支持正式用户实验</a:t>
-            </a:r>
-            <a:endParaRPr lang="en-US" sz="1800" dirty="0"/>
+              <a:t>• 10次训练初步数据：反应时↓43% / 干扰效应↓83% / 难度50%→80%</a:t>
+            </a:r>
+            <a:endParaRPr lang="en-US" sz="2200" dirty="0"/>
           </a:p>
         </p:txBody>
       </p:sp>
@@ -2707,12 +2693,12 @@
         </p:nvSpPr>
         <p:spPr>
           <a:xfrm>
-            <a:off x="548640" y="3931920"/>
-            <a:ext cx="10972800" cy="2560320"/>
+            <a:off x="548640" y="4023360"/>
+            <a:ext cx="10972800" cy="2468880"/>
           </a:xfrm>
           <a:prstGeom prst="roundRect">
             <a:avLst>
-              <a:gd name="adj" fmla="val 4286"/>
+              <a:gd name="adj" fmla="val 4444"/>
             </a:avLst>
           </a:prstGeom>
           <a:solidFill>
@@ -2729,8 +2715,8 @@
         </p:nvSpPr>
         <p:spPr>
           <a:xfrm>
-            <a:off x="822960" y="4114800"/>
-            <a:ext cx="10424160" cy="2194560"/>
+            <a:off x="822960" y="4206240"/>
+            <a:ext cx="10424160" cy="2103120"/>
           </a:xfrm>
           <a:prstGeom prst="rect">
             <a:avLst/>
@@ -2742,11 +2728,11 @@
           <a:bodyPr wrap="square" rtlCol="0" anchor="t"/>
           <a:lstStyle/>
           <a:p>
-            <a:pPr algn="l" indent="0" marL="0">
-              <a:buNone/>
-            </a:pPr>
-            <a:r>
-              <a:rPr lang="en-US" sz="1800" b="1" dirty="0">
+            <a:pPr indent="0" marL="0">
+              <a:buNone/>
+            </a:pPr>
+            <a:r>
+              <a:rPr lang="en-US" sz="2200" b="1" dirty="0">
                 <a:solidFill>
                   <a:srgbClr val="3498DB"/>
                 </a:solidFill>
@@ -2756,14 +2742,14 @@
               </a:rPr>
               <a:t>📋 待推进</a:t>
             </a:r>
-            <a:pPr algn="l" indent="0" marL="0">
-              <a:buNone/>
-            </a:pPr>
-            <a:pPr algn="l" indent="0" marL="0">
-              <a:buNone/>
-            </a:pPr>
-            <a:r>
-              <a:rPr lang="en-US" sz="1400" dirty="0">
+            <a:pPr indent="0" marL="0">
+              <a:buNone/>
+            </a:pPr>
+            <a:pPr indent="0" marL="0">
+              <a:buNone/>
+            </a:pPr>
+            <a:r>
+              <a:rPr lang="en-US" sz="1600" dirty="0">
                 <a:solidFill>
                   <a:srgbClr val="2C3E50"/>
                 </a:solidFill>
@@ -2773,11 +2759,11 @@
               </a:rPr>
               <a:t>• 招募30名被试完成正式对照实验（实验组15 + 对照组15）</a:t>
             </a:r>
-            <a:pPr algn="l" indent="0" marL="0">
-              <a:buNone/>
-            </a:pPr>
-            <a:r>
-              <a:rPr lang="en-US" sz="1400" dirty="0">
+            <a:pPr indent="0" marL="0">
+              <a:buNone/>
+            </a:pPr>
+            <a:r>
+              <a:rPr lang="en-US" sz="1600" dirty="0">
                 <a:solidFill>
                   <a:srgbClr val="2C3E50"/>
                 </a:solidFill>
@@ -2787,11 +2773,11 @@
               </a:rPr>
               <a:t>• 统计学检验：t检验对比两组干扰效应降低率的显著性差异</a:t>
             </a:r>
-            <a:pPr algn="l" indent="0" marL="0">
-              <a:buNone/>
-            </a:pPr>
-            <a:r>
-              <a:rPr lang="en-US" sz="1400" dirty="0">
+            <a:pPr indent="0" marL="0">
+              <a:buNone/>
+            </a:pPr>
+            <a:r>
+              <a:rPr lang="en-US" sz="1600" dirty="0">
                 <a:solidFill>
                   <a:srgbClr val="2C3E50"/>
                 </a:solidFill>
@@ -2801,11 +2787,11 @@
               </a:rPr>
               <a:t>• 增加中性条件和反向Stroop条件，完善实验设计</a:t>
             </a:r>
-            <a:pPr algn="l" indent="0" marL="0">
-              <a:buNone/>
-            </a:pPr>
-            <a:r>
-              <a:rPr lang="en-US" sz="1400" dirty="0">
+            <a:pPr indent="0" marL="0">
+              <a:buNone/>
+            </a:pPr>
+            <a:r>
+              <a:rPr lang="en-US" sz="1600" dirty="0">
                 <a:solidFill>
                   <a:srgbClr val="2C3E50"/>
                 </a:solidFill>
@@ -2813,13 +2799,13 @@
                 <a:ea typeface="Microsoft YaHei" pitchFamily="34" charset="-122"/>
                 <a:cs typeface="Microsoft YaHei" pitchFamily="34" charset="-120"/>
               </a:rPr>
-              <a:t>• 接入大语言模型（如通义千问），实现训练后的AI反馈和建议</a:t>
-            </a:r>
-            <a:pPr algn="l" indent="0" marL="0">
-              <a:buNone/>
-            </a:pPr>
-            <a:r>
-              <a:rPr lang="en-US" sz="1400" dirty="0">
+              <a:t>• 接入大语言模型，实现训练后的AI反馈和建议</a:t>
+            </a:r>
+            <a:pPr indent="0" marL="0">
+              <a:buNone/>
+            </a:pPr>
+            <a:r>
+              <a:rPr lang="en-US" sz="1600" dirty="0">
                 <a:solidFill>
                   <a:srgbClr val="2C3E50"/>
                 </a:solidFill>
@@ -2827,9 +2813,9 @@
                 <a:ea typeface="Microsoft YaHei" pitchFamily="34" charset="-122"/>
                 <a:cs typeface="Microsoft YaHei" pitchFamily="34" charset="-120"/>
               </a:rPr>
-              <a:t>• 发布为PWA（Progressive Web App），支持离线使用和移动端适配</a:t>
-            </a:r>
-            <a:endParaRPr lang="en-US" sz="1800" dirty="0"/>
+              <a:t>• 发布为PWA，支持离线使用和移动端适配</a:t>
+            </a:r>
+            <a:endParaRPr lang="en-US" sz="2200" dirty="0"/>
           </a:p>
         </p:txBody>
       </p:sp>
@@ -2890,7 +2876,7 @@
               <a:buNone/>
             </a:pPr>
             <a:r>
-              <a:rPr lang="en-US" sz="4800" b="1" dirty="0">
+              <a:rPr lang="en-US" sz="5400" b="1" dirty="0">
                 <a:solidFill>
                   <a:srgbClr val="FFFFFF"/>
                 </a:solidFill>
@@ -2900,7 +2886,7 @@
               </a:rPr>
               <a:t>谢谢！</a:t>
             </a:r>
-            <a:endParaRPr lang="en-US" sz="4800" dirty="0"/>
+            <a:endParaRPr lang="en-US" sz="5400" dirty="0"/>
           </a:p>
         </p:txBody>
       </p:sp>
@@ -2913,7 +2899,7 @@
         <p:spPr>
           <a:xfrm>
             <a:off x="731520" y="3657600"/>
-            <a:ext cx="10515600" cy="457200"/>
+            <a:ext cx="10515600" cy="548640"/>
           </a:xfrm>
           <a:prstGeom prst="rect">
             <a:avLst/>
@@ -2929,7 +2915,7 @@
               <a:buNone/>
             </a:pPr>
             <a:r>
-              <a:rPr lang="en-US" sz="1600" dirty="0">
+              <a:rPr lang="en-US" sz="1800" dirty="0">
                 <a:solidFill>
                   <a:srgbClr val="3498DB"/>
                 </a:solidFill>
@@ -2939,7 +2925,7 @@
               </a:rPr>
               <a:t>GitHub: github.com/wangxi886/stroop-attention-trainer</a:t>
             </a:r>
-            <a:endParaRPr lang="en-US" sz="1600" dirty="0"/>
+            <a:endParaRPr lang="en-US" sz="1800" dirty="0"/>
           </a:p>
         </p:txBody>
       </p:sp>
@@ -2951,8 +2937,8 @@
         </p:nvSpPr>
         <p:spPr>
           <a:xfrm>
-            <a:off x="731520" y="4572000"/>
-            <a:ext cx="10515600" cy="457200"/>
+            <a:off x="731520" y="4754880"/>
+            <a:ext cx="10515600" cy="548640"/>
           </a:xfrm>
           <a:prstGeom prst="rect">
             <a:avLst/>
@@ -2968,7 +2954,7 @@
               <a:buNone/>
             </a:pPr>
             <a:r>
-              <a:rPr lang="en-US" sz="1800" dirty="0">
+              <a:rPr lang="en-US" sz="2200" dirty="0">
                 <a:solidFill>
                   <a:srgbClr val="7F8C8D"/>
                 </a:solidFill>
@@ -2978,7 +2964,7 @@
               </a:rPr>
               <a:t>欢迎提问 🙋</a:t>
             </a:r>
-            <a:endParaRPr lang="en-US" sz="1800" dirty="0"/>
+            <a:endParaRPr lang="en-US" sz="2200" dirty="0"/>
           </a:p>
         </p:txBody>
       </p:sp>
@@ -3016,7 +3002,7 @@
         <p:spPr>
           <a:xfrm>
             <a:off x="548640" y="274320"/>
-            <a:ext cx="10972800" cy="640080"/>
+            <a:ext cx="10972800" cy="731520"/>
           </a:xfrm>
           <a:prstGeom prst="rect">
             <a:avLst/>
@@ -3032,7 +3018,7 @@
               <a:buNone/>
             </a:pPr>
             <a:r>
-              <a:rPr lang="en-US" sz="2600" b="1" dirty="0">
+              <a:rPr lang="en-US" sz="3000" b="1" dirty="0">
                 <a:solidFill>
                   <a:srgbClr val="2C3E50"/>
                 </a:solidFill>
@@ -3042,7 +3028,7 @@
               </a:rPr>
               <a:t>项目背景</a:t>
             </a:r>
-            <a:endParaRPr lang="en-US" sz="2600" dirty="0"/>
+            <a:endParaRPr lang="en-US" sz="3000" dirty="0"/>
           </a:p>
         </p:txBody>
       </p:sp>
@@ -3054,7 +3040,7 @@
         </p:nvSpPr>
         <p:spPr>
           <a:xfrm>
-            <a:off x="548640" y="960120"/>
+            <a:off x="548640" y="1051560"/>
             <a:ext cx="10972800" cy="0"/>
           </a:xfrm>
           <a:prstGeom prst="line">
@@ -3077,8 +3063,8 @@
         </p:nvSpPr>
         <p:spPr>
           <a:xfrm>
-            <a:off x="731520" y="1188720"/>
-            <a:ext cx="6400800" cy="365760"/>
+            <a:off x="731520" y="1280160"/>
+            <a:ext cx="6400800" cy="457200"/>
           </a:xfrm>
           <a:prstGeom prst="rect">
             <a:avLst/>
@@ -3094,9 +3080,9 @@
               <a:buNone/>
             </a:pPr>
             <a:r>
-              <a:rPr lang="en-US" sz="1400" dirty="0">
-                <a:solidFill>
-                  <a:srgbClr val="2C3E50"/>
+              <a:rPr lang="en-US" sz="1800" dirty="0">
+                <a:solidFill>
+                  <a:srgbClr val="000000"/>
                 </a:solidFill>
                 <a:latin typeface="Microsoft YaHei" pitchFamily="34" charset="0"/>
                 <a:ea typeface="Microsoft YaHei" pitchFamily="34" charset="-122"/>
@@ -3108,9 +3094,9 @@
               <a:buNone/>
             </a:pPr>
             <a:r>
-              <a:rPr lang="en-US" sz="1400" b="1" dirty="0">
-                <a:solidFill>
-                  <a:srgbClr val="3498DB"/>
+              <a:rPr lang="en-US" sz="1800" b="1" dirty="0">
+                <a:solidFill>
+                  <a:srgbClr val="E74C3C"/>
                 </a:solidFill>
                 <a:latin typeface="Microsoft YaHei" pitchFamily="34" charset="0"/>
                 <a:ea typeface="Microsoft YaHei" pitchFamily="34" charset="-122"/>
@@ -3122,9 +3108,9 @@
               <a:buNone/>
             </a:pPr>
             <a:r>
-              <a:rPr lang="en-US" sz="1400" dirty="0">
-                <a:solidFill>
-                  <a:srgbClr val="2C3E50"/>
+              <a:rPr lang="en-US" sz="1800" dirty="0">
+                <a:solidFill>
+                  <a:srgbClr val="000000"/>
                 </a:solidFill>
                 <a:latin typeface="Microsoft YaHei" pitchFamily="34" charset="0"/>
                 <a:ea typeface="Microsoft YaHei" pitchFamily="34" charset="-122"/>
@@ -3132,7 +3118,7 @@
               </a:rPr>
               <a:t>的反应时间显著长于一致条件</a:t>
             </a:r>
-            <a:endParaRPr lang="en-US" sz="1400" dirty="0"/>
+            <a:endParaRPr lang="en-US" sz="1800" dirty="0"/>
           </a:p>
         </p:txBody>
       </p:sp>
@@ -3144,8 +3130,8 @@
         </p:nvSpPr>
         <p:spPr>
           <a:xfrm>
-            <a:off x="731520" y="1920240"/>
-            <a:ext cx="6400800" cy="365760"/>
+            <a:off x="731520" y="2011680"/>
+            <a:ext cx="6400800" cy="457200"/>
           </a:xfrm>
           <a:prstGeom prst="rect">
             <a:avLst/>
@@ -3161,9 +3147,9 @@
               <a:buNone/>
             </a:pPr>
             <a:r>
-              <a:rPr lang="en-US" sz="1400" dirty="0">
-                <a:solidFill>
-                  <a:srgbClr val="2C3E50"/>
+              <a:rPr lang="en-US" sz="1700" dirty="0">
+                <a:solidFill>
+                  <a:srgbClr val="7F8C8D"/>
                 </a:solidFill>
                 <a:latin typeface="Microsoft YaHei" pitchFamily="34" charset="0"/>
                 <a:ea typeface="Microsoft YaHei" pitchFamily="34" charset="-122"/>
@@ -3171,7 +3157,7 @@
               </a:rPr>
               <a:t>本质：自动加工（阅读）与控制加工（颜色命名）的竞争</a:t>
             </a:r>
-            <a:endParaRPr lang="en-US" sz="1400" dirty="0"/>
+            <a:endParaRPr lang="en-US" sz="1700" dirty="0"/>
           </a:p>
         </p:txBody>
       </p:sp>
@@ -3183,8 +3169,8 @@
         </p:nvSpPr>
         <p:spPr>
           <a:xfrm>
-            <a:off x="731520" y="2560320"/>
-            <a:ext cx="6400800" cy="365760"/>
+            <a:off x="731520" y="2743200"/>
+            <a:ext cx="6400800" cy="548640"/>
           </a:xfrm>
           <a:prstGeom prst="rect">
             <a:avLst/>
@@ -3200,7 +3186,7 @@
               <a:buNone/>
             </a:pPr>
             <a:r>
-              <a:rPr lang="en-US" sz="1400" b="1" dirty="0">
+              <a:rPr lang="en-US" sz="1800" b="1" dirty="0">
                 <a:solidFill>
                   <a:srgbClr val="2C3E50"/>
                 </a:solidFill>
@@ -3208,23 +3194,23 @@
                 <a:ea typeface="Microsoft YaHei" pitchFamily="34" charset="-122"/>
                 <a:cs typeface="Microsoft YaHei" pitchFamily="34" charset="-120"/>
               </a:rPr>
-              <a:t>现实需求：</a:t>
-            </a:r>
-            <a:pPr indent="0" marL="0">
-              <a:buNone/>
-            </a:pPr>
-            <a:r>
-              <a:rPr lang="en-US" sz="1400" dirty="0">
-                <a:solidFill>
-                  <a:srgbClr val="2C3E50"/>
-                </a:solidFill>
-                <a:latin typeface="Microsoft YaHei" pitchFamily="34" charset="0"/>
-                <a:ea typeface="Microsoft YaHei" pitchFamily="34" charset="-122"/>
-                <a:cs typeface="Microsoft YaHei" pitchFamily="34" charset="-120"/>
-              </a:rPr>
-              <a:t>ADHD儿童注意缺陷（中国患病率6.26%）、信息过载导致成人注意力涣散、全球脑训练市场预计2027年达112亿美元</a:t>
-            </a:r>
-            <a:endParaRPr lang="en-US" sz="1400" dirty="0"/>
+              <a:t>现实需求  </a:t>
+            </a:r>
+            <a:pPr indent="0" marL="0">
+              <a:buNone/>
+            </a:pPr>
+            <a:r>
+              <a:rPr lang="en-US" sz="1700" dirty="0">
+                <a:solidFill>
+                  <a:srgbClr val="000000"/>
+                </a:solidFill>
+                <a:latin typeface="Microsoft YaHei" pitchFamily="34" charset="0"/>
+                <a:ea typeface="Microsoft YaHei" pitchFamily="34" charset="-122"/>
+                <a:cs typeface="Microsoft YaHei" pitchFamily="34" charset="-120"/>
+              </a:rPr>
+              <a:t>ADHD儿童注意缺陷（中国患病率6.26%）/ 信息过载 / 全球脑训练市场2027年达112亿美元</a:t>
+            </a:r>
+            <a:endParaRPr lang="en-US" sz="1800" dirty="0"/>
           </a:p>
         </p:txBody>
       </p:sp>
@@ -3236,8 +3222,8 @@
         </p:nvSpPr>
         <p:spPr>
           <a:xfrm>
-            <a:off x="731520" y="3291840"/>
-            <a:ext cx="6400800" cy="365760"/>
+            <a:off x="731520" y="3474720"/>
+            <a:ext cx="6400800" cy="548640"/>
           </a:xfrm>
           <a:prstGeom prst="rect">
             <a:avLst/>
@@ -3253,7 +3239,7 @@
               <a:buNone/>
             </a:pPr>
             <a:r>
-              <a:rPr lang="en-US" sz="1400" b="1" dirty="0">
+              <a:rPr lang="en-US" sz="1800" b="1" dirty="0">
                 <a:solidFill>
                   <a:srgbClr val="2C3E50"/>
                 </a:solidFill>
@@ -3261,15 +3247,15 @@
                 <a:ea typeface="Microsoft YaHei" pitchFamily="34" charset="-122"/>
                 <a:cs typeface="Microsoft YaHei" pitchFamily="34" charset="-120"/>
               </a:rPr>
-              <a:t>市场痛点：</a:t>
-            </a:r>
-            <a:pPr indent="0" marL="0">
-              <a:buNone/>
-            </a:pPr>
-            <a:r>
-              <a:rPr lang="en-US" sz="1400" dirty="0">
-                <a:solidFill>
-                  <a:srgbClr val="2C3E50"/>
+              <a:t>市场痛点  </a:t>
+            </a:r>
+            <a:pPr indent="0" marL="0">
+              <a:buNone/>
+            </a:pPr>
+            <a:r>
+              <a:rPr lang="en-US" sz="1700" dirty="0">
+                <a:solidFill>
+                  <a:srgbClr val="000000"/>
                 </a:solidFill>
                 <a:latin typeface="Microsoft YaHei" pitchFamily="34" charset="0"/>
                 <a:ea typeface="Microsoft YaHei" pitchFamily="34" charset="-122"/>
@@ -3277,7 +3263,7 @@
               </a:rPr>
               <a:t>现有产品难度固定 + 缺乏认知科学理论支撑 + 训练效果不可量化</a:t>
             </a:r>
-            <a:endParaRPr lang="en-US" sz="1400" dirty="0"/>
+            <a:endParaRPr lang="en-US" sz="1800" dirty="0"/>
           </a:p>
         </p:txBody>
       </p:sp>
@@ -3289,8 +3275,8 @@
         </p:nvSpPr>
         <p:spPr>
           <a:xfrm>
-            <a:off x="7498080" y="1188720"/>
-            <a:ext cx="4114800" cy="4754880"/>
+            <a:off x="7498080" y="1280160"/>
+            <a:ext cx="4114800" cy="4937760"/>
           </a:xfrm>
           <a:prstGeom prst="roundRect">
             <a:avLst>
@@ -3311,8 +3297,8 @@
         </p:nvSpPr>
         <p:spPr>
           <a:xfrm>
-            <a:off x="7772400" y="1371600"/>
-            <a:ext cx="3566160" cy="4389120"/>
+            <a:off x="7772400" y="1463040"/>
+            <a:ext cx="3566160" cy="4572000"/>
           </a:xfrm>
           <a:prstGeom prst="rect">
             <a:avLst/>
@@ -3324,11 +3310,11 @@
           <a:bodyPr wrap="square" rtlCol="0" anchor="t"/>
           <a:lstStyle/>
           <a:p>
-            <a:pPr algn="l" indent="0" marL="0">
-              <a:buNone/>
-            </a:pPr>
-            <a:r>
-              <a:rPr lang="en-US" sz="1600" b="1" dirty="0">
+            <a:pPr indent="0" marL="0">
+              <a:buNone/>
+            </a:pPr>
+            <a:r>
+              <a:rPr lang="en-US" sz="2000" b="1" dirty="0">
                 <a:solidFill>
                   <a:srgbClr val="2C3E50"/>
                 </a:solidFill>
@@ -3338,14 +3324,14 @@
               </a:rPr>
               <a:t>核心问题</a:t>
             </a:r>
-            <a:pPr algn="l" indent="0" marL="0">
-              <a:buNone/>
-            </a:pPr>
-            <a:pPr algn="l" indent="0" marL="0">
-              <a:buNone/>
-            </a:pPr>
-            <a:r>
-              <a:rPr lang="en-US" sz="1300" dirty="0">
+            <a:pPr indent="0" marL="0">
+              <a:buNone/>
+            </a:pPr>
+            <a:pPr indent="0" marL="0">
+              <a:buNone/>
+            </a:pPr>
+            <a:r>
+              <a:rPr lang="en-US" sz="1600" dirty="0">
                 <a:solidFill>
                   <a:srgbClr val="2C3E50"/>
                 </a:solidFill>
@@ -3355,11 +3341,11 @@
               </a:rPr>
               <a:t>如何将Stroop范式从</a:t>
             </a:r>
-            <a:pPr algn="l" indent="0" marL="0">
-              <a:buNone/>
-            </a:pPr>
-            <a:r>
-              <a:rPr lang="en-US" sz="1300" b="1" dirty="0">
+            <a:pPr indent="0" marL="0">
+              <a:buNone/>
+            </a:pPr>
+            <a:r>
+              <a:rPr lang="en-US" sz="1700" b="1" dirty="0">
                 <a:solidFill>
                   <a:srgbClr val="E74C3C"/>
                 </a:solidFill>
@@ -3369,11 +3355,11 @@
               </a:rPr>
               <a:t>一次性测量工具</a:t>
             </a:r>
-            <a:pPr algn="l" indent="0" marL="0">
-              <a:buNone/>
-            </a:pPr>
-            <a:r>
-              <a:rPr lang="en-US" sz="1300" dirty="0">
+            <a:pPr indent="0" marL="0">
+              <a:buNone/>
+            </a:pPr>
+            <a:r>
+              <a:rPr lang="en-US" sz="1600" dirty="0">
                 <a:solidFill>
                   <a:srgbClr val="2C3E50"/>
                 </a:solidFill>
@@ -3383,11 +3369,11 @@
               </a:rPr>
               <a:t>转变为</a:t>
             </a:r>
-            <a:pPr algn="l" indent="0" marL="0">
-              <a:buNone/>
-            </a:pPr>
-            <a:r>
-              <a:rPr lang="en-US" sz="1300" b="1" dirty="0">
+            <a:pPr indent="0" marL="0">
+              <a:buNone/>
+            </a:pPr>
+            <a:r>
+              <a:rPr lang="en-US" sz="1700" b="1" dirty="0">
                 <a:solidFill>
                   <a:srgbClr val="3498DB"/>
                 </a:solidFill>
@@ -3397,11 +3383,11 @@
               </a:rPr>
               <a:t>长期自适应训练系统</a:t>
             </a:r>
-            <a:pPr algn="l" indent="0" marL="0">
-              <a:buNone/>
-            </a:pPr>
-            <a:r>
-              <a:rPr lang="en-US" sz="1300" dirty="0">
+            <a:pPr indent="0" marL="0">
+              <a:buNone/>
+            </a:pPr>
+            <a:r>
+              <a:rPr lang="en-US" sz="1600" dirty="0">
                 <a:solidFill>
                   <a:srgbClr val="2C3E50"/>
                 </a:solidFill>
@@ -3411,14 +3397,14 @@
               </a:rPr>
               <a:t>？</a:t>
             </a:r>
-            <a:pPr algn="l" indent="0" marL="0">
-              <a:buNone/>
-            </a:pPr>
-            <a:pPr algn="l" indent="0" marL="0">
-              <a:buNone/>
-            </a:pPr>
-            <a:r>
-              <a:rPr lang="en-US" sz="1200" dirty="0">
+            <a:pPr indent="0" marL="0">
+              <a:buNone/>
+            </a:pPr>
+            <a:pPr indent="0" marL="0">
+              <a:buNone/>
+            </a:pPr>
+            <a:r>
+              <a:rPr lang="en-US" sz="1500" dirty="0">
                 <a:solidFill>
                   <a:srgbClr val="7F8C8D"/>
                 </a:solidFill>
@@ -3426,13 +3412,13 @@
                 <a:ea typeface="Microsoft YaHei" pitchFamily="34" charset="-122"/>
                 <a:cs typeface="Microsoft YaHei" pitchFamily="34" charset="-120"/>
               </a:rPr>
-              <a:t>→ 用经典范式做训练载体</a:t>
-            </a:r>
-            <a:pPr algn="l" indent="0" marL="0">
-              <a:buNone/>
-            </a:pPr>
-            <a:r>
-              <a:rPr lang="en-US" sz="1200" dirty="0">
+              <a:t>→ 经典范式做训练载体</a:t>
+            </a:r>
+            <a:pPr indent="0" marL="0">
+              <a:buNone/>
+            </a:pPr>
+            <a:r>
+              <a:rPr lang="en-US" sz="1500" dirty="0">
                 <a:solidFill>
                   <a:srgbClr val="7F8C8D"/>
                 </a:solidFill>
@@ -3440,13 +3426,13 @@
                 <a:ea typeface="Microsoft YaHei" pitchFamily="34" charset="-122"/>
                 <a:cs typeface="Microsoft YaHei" pitchFamily="34" charset="-120"/>
               </a:rPr>
-              <a:t>→ 用自适应算法做调节引擎</a:t>
-            </a:r>
-            <a:pPr algn="l" indent="0" marL="0">
-              <a:buNone/>
-            </a:pPr>
-            <a:r>
-              <a:rPr lang="en-US" sz="1200" dirty="0">
+              <a:t>→ 自适应算法做调节引擎</a:t>
+            </a:r>
+            <a:pPr indent="0" marL="0">
+              <a:buNone/>
+            </a:pPr>
+            <a:r>
+              <a:rPr lang="en-US" sz="1500" dirty="0">
                 <a:solidFill>
                   <a:srgbClr val="7F8C8D"/>
                 </a:solidFill>
@@ -3454,9 +3440,9 @@
                 <a:ea typeface="Microsoft YaHei" pitchFamily="34" charset="-122"/>
                 <a:cs typeface="Microsoft YaHei" pitchFamily="34" charset="-120"/>
               </a:rPr>
-              <a:t>→ 用数据可视化量化效果</a:t>
-            </a:r>
-            <a:endParaRPr lang="en-US" sz="1600" dirty="0"/>
+              <a:t>→ 数据可视化量化效果</a:t>
+            </a:r>
+            <a:endParaRPr lang="en-US" sz="2000" dirty="0"/>
           </a:p>
         </p:txBody>
       </p:sp>
@@ -3494,7 +3480,7 @@
         <p:spPr>
           <a:xfrm>
             <a:off x="548640" y="274320"/>
-            <a:ext cx="10972800" cy="640080"/>
+            <a:ext cx="10972800" cy="731520"/>
           </a:xfrm>
           <a:prstGeom prst="rect">
             <a:avLst/>
@@ -3510,7 +3496,7 @@
               <a:buNone/>
             </a:pPr>
             <a:r>
-              <a:rPr lang="en-US" sz="2600" b="1" dirty="0">
+              <a:rPr lang="en-US" sz="3000" b="1" dirty="0">
                 <a:solidFill>
                   <a:srgbClr val="2C3E50"/>
                 </a:solidFill>
@@ -3520,7 +3506,7 @@
               </a:rPr>
               <a:t>理论基础</a:t>
             </a:r>
-            <a:endParaRPr lang="en-US" sz="2600" dirty="0"/>
+            <a:endParaRPr lang="en-US" sz="3000" dirty="0"/>
           </a:p>
         </p:txBody>
       </p:sp>
@@ -3532,7 +3518,7 @@
         </p:nvSpPr>
         <p:spPr>
           <a:xfrm>
-            <a:off x="548640" y="960120"/>
+            <a:off x="548640" y="1051560"/>
             <a:ext cx="10972800" cy="0"/>
           </a:xfrm>
           <a:prstGeom prst="line">
@@ -3555,8 +3541,8 @@
         </p:nvSpPr>
         <p:spPr>
           <a:xfrm>
-            <a:off x="548640" y="1188720"/>
-            <a:ext cx="3566160" cy="4937760"/>
+            <a:off x="548640" y="1280160"/>
+            <a:ext cx="3566160" cy="4846320"/>
           </a:xfrm>
           <a:prstGeom prst="roundRect">
             <a:avLst>
@@ -3577,8 +3563,8 @@
         </p:nvSpPr>
         <p:spPr>
           <a:xfrm>
-            <a:off x="548640" y="1371600"/>
-            <a:ext cx="3566160" cy="457200"/>
+            <a:off x="548640" y="1463040"/>
+            <a:ext cx="3566160" cy="548640"/>
           </a:xfrm>
           <a:prstGeom prst="rect">
             <a:avLst/>
@@ -3594,7 +3580,7 @@
               <a:buNone/>
             </a:pPr>
             <a:r>
-              <a:rPr lang="en-US" sz="1600" b="1" dirty="0">
+              <a:rPr lang="en-US" sz="2000" b="1" dirty="0">
                 <a:solidFill>
                   <a:srgbClr val="3498DB"/>
                 </a:solidFill>
@@ -3604,7 +3590,7 @@
               </a:rPr>
               <a:t>Stroop效应</a:t>
             </a:r>
-            <a:endParaRPr lang="en-US" sz="1600" dirty="0"/>
+            <a:endParaRPr lang="en-US" sz="2000" dirty="0"/>
           </a:p>
         </p:txBody>
       </p:sp>
@@ -3616,7 +3602,7 @@
         </p:nvSpPr>
         <p:spPr>
           <a:xfrm>
-            <a:off x="548640" y="1828800"/>
+            <a:off x="548640" y="2011680"/>
             <a:ext cx="3566160" cy="365760"/>
           </a:xfrm>
           <a:prstGeom prst="rect">
@@ -3633,7 +3619,7 @@
               <a:buNone/>
             </a:pPr>
             <a:r>
-              <a:rPr lang="en-US" sz="1100" dirty="0">
+              <a:rPr lang="en-US" sz="1300" dirty="0">
                 <a:solidFill>
                   <a:srgbClr val="7F8C8D"/>
                 </a:solidFill>
@@ -3643,7 +3629,7 @@
               </a:rPr>
               <a:t>认知心理学</a:t>
             </a:r>
-            <a:endParaRPr lang="en-US" sz="1100" dirty="0"/>
+            <a:endParaRPr lang="en-US" sz="1300" dirty="0"/>
           </a:p>
         </p:txBody>
       </p:sp>
@@ -3655,14 +3641,14 @@
         </p:nvSpPr>
         <p:spPr>
           <a:xfrm>
-            <a:off x="1097280" y="2286000"/>
+            <a:off x="1097280" y="2468880"/>
             <a:ext cx="2468880" cy="0"/>
           </a:xfrm>
           <a:prstGeom prst="line">
             <a:avLst/>
           </a:prstGeom>
           <a:noFill/>
-          <a:ln w="12700">
+          <a:ln w="19050">
             <a:solidFill>
               <a:srgbClr val="3498DB"/>
             </a:solidFill>
@@ -3678,8 +3664,8 @@
         </p:nvSpPr>
         <p:spPr>
           <a:xfrm>
-            <a:off x="914400" y="2560320"/>
-            <a:ext cx="2834640" cy="457200"/>
+            <a:off x="914400" y="2834640"/>
+            <a:ext cx="2834640" cy="502920"/>
           </a:xfrm>
           <a:prstGeom prst="rect">
             <a:avLst/>
@@ -3695,7 +3681,7 @@
               <a:buNone/>
             </a:pPr>
             <a:r>
-              <a:rPr lang="en-US" sz="1200" dirty="0">
+              <a:rPr lang="en-US" sz="1500" dirty="0">
                 <a:solidFill>
                   <a:srgbClr val="2C3E50"/>
                 </a:solidFill>
@@ -3705,7 +3691,7 @@
               </a:rPr>
               <a:t>• 自动加工 vs 控制加工</a:t>
             </a:r>
-            <a:endParaRPr lang="en-US" sz="1200" dirty="0"/>
+            <a:endParaRPr lang="en-US" sz="1500" dirty="0"/>
           </a:p>
         </p:txBody>
       </p:sp>
@@ -3717,8 +3703,8 @@
         </p:nvSpPr>
         <p:spPr>
           <a:xfrm>
-            <a:off x="914400" y="3154680"/>
-            <a:ext cx="2834640" cy="457200"/>
+            <a:off x="914400" y="3520440"/>
+            <a:ext cx="2834640" cy="502920"/>
           </a:xfrm>
           <a:prstGeom prst="rect">
             <a:avLst/>
@@ -3734,7 +3720,7 @@
               <a:buNone/>
             </a:pPr>
             <a:r>
-              <a:rPr lang="en-US" sz="1200" dirty="0">
+              <a:rPr lang="en-US" sz="1500" dirty="0">
                 <a:solidFill>
                   <a:srgbClr val="2C3E50"/>
                 </a:solidFill>
@@ -3744,7 +3730,7 @@
               </a:rPr>
               <a:t>• 字义干扰 &gt; 颜色命名</a:t>
             </a:r>
-            <a:endParaRPr lang="en-US" sz="1200" dirty="0"/>
+            <a:endParaRPr lang="en-US" sz="1500" dirty="0"/>
           </a:p>
         </p:txBody>
       </p:sp>
@@ -3756,8 +3742,8 @@
         </p:nvSpPr>
         <p:spPr>
           <a:xfrm>
-            <a:off x="914400" y="3749040"/>
-            <a:ext cx="2834640" cy="457200"/>
+            <a:off x="914400" y="4206240"/>
+            <a:ext cx="2834640" cy="502920"/>
           </a:xfrm>
           <a:prstGeom prst="rect">
             <a:avLst/>
@@ -3773,7 +3759,7 @@
               <a:buNone/>
             </a:pPr>
             <a:r>
-              <a:rPr lang="en-US" sz="1200" dirty="0">
+              <a:rPr lang="en-US" sz="1500" dirty="0">
                 <a:solidFill>
                   <a:srgbClr val="2C3E50"/>
                 </a:solidFill>
@@ -3783,7 +3769,7 @@
               </a:rPr>
               <a:t>• 反应时差异 = 干扰效应量</a:t>
             </a:r>
-            <a:endParaRPr lang="en-US" sz="1200" dirty="0"/>
+            <a:endParaRPr lang="en-US" sz="1500" dirty="0"/>
           </a:p>
         </p:txBody>
       </p:sp>
@@ -3795,8 +3781,8 @@
         </p:nvSpPr>
         <p:spPr>
           <a:xfrm>
-            <a:off x="914400" y="4343400"/>
-            <a:ext cx="2834640" cy="457200"/>
+            <a:off x="914400" y="4892040"/>
+            <a:ext cx="2834640" cy="502920"/>
           </a:xfrm>
           <a:prstGeom prst="rect">
             <a:avLst/>
@@ -3812,7 +3798,7 @@
               <a:buNone/>
             </a:pPr>
             <a:r>
-              <a:rPr lang="en-US" sz="1200" dirty="0">
+              <a:rPr lang="en-US" sz="1500" dirty="0">
                 <a:solidFill>
                   <a:srgbClr val="2C3E50"/>
                 </a:solidFill>
@@ -3822,7 +3808,7 @@
               </a:rPr>
               <a:t>• 认知控制的经典范式</a:t>
             </a:r>
-            <a:endParaRPr lang="en-US" sz="1200" dirty="0"/>
+            <a:endParaRPr lang="en-US" sz="1500" dirty="0"/>
           </a:p>
         </p:txBody>
       </p:sp>
@@ -3834,8 +3820,8 @@
         </p:nvSpPr>
         <p:spPr>
           <a:xfrm>
-            <a:off x="4389120" y="1188720"/>
-            <a:ext cx="3566160" cy="4937760"/>
+            <a:off x="4389120" y="1280160"/>
+            <a:ext cx="3566160" cy="4846320"/>
           </a:xfrm>
           <a:prstGeom prst="roundRect">
             <a:avLst>
@@ -3856,8 +3842,8 @@
         </p:nvSpPr>
         <p:spPr>
           <a:xfrm>
-            <a:off x="4389120" y="1371600"/>
-            <a:ext cx="3566160" cy="457200"/>
+            <a:off x="4389120" y="1463040"/>
+            <a:ext cx="3566160" cy="548640"/>
           </a:xfrm>
           <a:prstGeom prst="rect">
             <a:avLst/>
@@ -3873,7 +3859,7 @@
               <a:buNone/>
             </a:pPr>
             <a:r>
-              <a:rPr lang="en-US" sz="1600" b="1" dirty="0">
+              <a:rPr lang="en-US" sz="2000" b="1" dirty="0">
                 <a:solidFill>
                   <a:srgbClr val="3498DB"/>
                 </a:solidFill>
@@ -3883,7 +3869,7 @@
               </a:rPr>
               <a:t>最近发展区（ZPD）</a:t>
             </a:r>
-            <a:endParaRPr lang="en-US" sz="1600" dirty="0"/>
+            <a:endParaRPr lang="en-US" sz="2000" dirty="0"/>
           </a:p>
         </p:txBody>
       </p:sp>
@@ -3895,7 +3881,7 @@
         </p:nvSpPr>
         <p:spPr>
           <a:xfrm>
-            <a:off x="4389120" y="1828800"/>
+            <a:off x="4389120" y="2011680"/>
             <a:ext cx="3566160" cy="365760"/>
           </a:xfrm>
           <a:prstGeom prst="rect">
@@ -3912,7 +3898,7 @@
               <a:buNone/>
             </a:pPr>
             <a:r>
-              <a:rPr lang="en-US" sz="1100" dirty="0">
+              <a:rPr lang="en-US" sz="1300" dirty="0">
                 <a:solidFill>
                   <a:srgbClr val="7F8C8D"/>
                 </a:solidFill>
@@ -3922,7 +3908,7 @@
               </a:rPr>
               <a:t>教育心理学</a:t>
             </a:r>
-            <a:endParaRPr lang="en-US" sz="1100" dirty="0"/>
+            <a:endParaRPr lang="en-US" sz="1300" dirty="0"/>
           </a:p>
         </p:txBody>
       </p:sp>
@@ -3934,14 +3920,14 @@
         </p:nvSpPr>
         <p:spPr>
           <a:xfrm>
-            <a:off x="4937760" y="2286000"/>
+            <a:off x="4937760" y="2468880"/>
             <a:ext cx="2468880" cy="0"/>
           </a:xfrm>
           <a:prstGeom prst="line">
             <a:avLst/>
           </a:prstGeom>
           <a:noFill/>
-          <a:ln w="12700">
+          <a:ln w="19050">
             <a:solidFill>
               <a:srgbClr val="3498DB"/>
             </a:solidFill>
@@ -3957,8 +3943,8 @@
         </p:nvSpPr>
         <p:spPr>
           <a:xfrm>
-            <a:off x="4754880" y="2560320"/>
-            <a:ext cx="2834640" cy="457200"/>
+            <a:off x="4754880" y="2834640"/>
+            <a:ext cx="2834640" cy="502920"/>
           </a:xfrm>
           <a:prstGeom prst="rect">
             <a:avLst/>
@@ -3974,7 +3960,7 @@
               <a:buNone/>
             </a:pPr>
             <a:r>
-              <a:rPr lang="en-US" sz="1200" dirty="0">
+              <a:rPr lang="en-US" sz="1500" dirty="0">
                 <a:solidFill>
                   <a:srgbClr val="2C3E50"/>
                 </a:solidFill>
@@ -3984,7 +3970,7 @@
               </a:rPr>
               <a:t>• Vygotsky, 1978</a:t>
             </a:r>
-            <a:endParaRPr lang="en-US" sz="1200" dirty="0"/>
+            <a:endParaRPr lang="en-US" sz="1500" dirty="0"/>
           </a:p>
         </p:txBody>
       </p:sp>
@@ -3996,8 +3982,8 @@
         </p:nvSpPr>
         <p:spPr>
           <a:xfrm>
-            <a:off x="4754880" y="3154680"/>
-            <a:ext cx="2834640" cy="457200"/>
+            <a:off x="4754880" y="3520440"/>
+            <a:ext cx="2834640" cy="502920"/>
           </a:xfrm>
           <a:prstGeom prst="rect">
             <a:avLst/>
@@ -4013,7 +3999,7 @@
               <a:buNone/>
             </a:pPr>
             <a:r>
-              <a:rPr lang="en-US" sz="1200" dirty="0">
+              <a:rPr lang="en-US" sz="1500" dirty="0">
                 <a:solidFill>
                   <a:srgbClr val="2C3E50"/>
                 </a:solidFill>
@@ -4023,7 +4009,7 @@
               </a:rPr>
               <a:t>• 当前能力 vs 潜在发展</a:t>
             </a:r>
-            <a:endParaRPr lang="en-US" sz="1200" dirty="0"/>
+            <a:endParaRPr lang="en-US" sz="1500" dirty="0"/>
           </a:p>
         </p:txBody>
       </p:sp>
@@ -4035,8 +4021,8 @@
         </p:nvSpPr>
         <p:spPr>
           <a:xfrm>
-            <a:off x="4754880" y="3749040"/>
-            <a:ext cx="2834640" cy="457200"/>
+            <a:off x="4754880" y="4206240"/>
+            <a:ext cx="2834640" cy="502920"/>
           </a:xfrm>
           <a:prstGeom prst="rect">
             <a:avLst/>
@@ -4052,7 +4038,7 @@
               <a:buNone/>
             </a:pPr>
             <a:r>
-              <a:rPr lang="en-US" sz="1200" dirty="0">
+              <a:rPr lang="en-US" sz="1500" dirty="0">
                 <a:solidFill>
                   <a:srgbClr val="2C3E50"/>
                 </a:solidFill>
@@ -4062,7 +4048,7 @@
               </a:rPr>
               <a:t>• 最佳挑战区间：60-85%</a:t>
             </a:r>
-            <a:endParaRPr lang="en-US" sz="1200" dirty="0"/>
+            <a:endParaRPr lang="en-US" sz="1500" dirty="0"/>
           </a:p>
         </p:txBody>
       </p:sp>
@@ -4074,8 +4060,8 @@
         </p:nvSpPr>
         <p:spPr>
           <a:xfrm>
-            <a:off x="4754880" y="4343400"/>
-            <a:ext cx="2834640" cy="457200"/>
+            <a:off x="4754880" y="4892040"/>
+            <a:ext cx="2834640" cy="502920"/>
           </a:xfrm>
           <a:prstGeom prst="rect">
             <a:avLst/>
@@ -4091,7 +4077,7 @@
               <a:buNone/>
             </a:pPr>
             <a:r>
-              <a:rPr lang="en-US" sz="1200" dirty="0">
+              <a:rPr lang="en-US" sz="1500" dirty="0">
                 <a:solidFill>
                   <a:srgbClr val="2C3E50"/>
                 </a:solidFill>
@@ -4101,7 +4087,7 @@
               </a:rPr>
               <a:t>• 太难→挫败 / 太简单→无聊</a:t>
             </a:r>
-            <a:endParaRPr lang="en-US" sz="1200" dirty="0"/>
+            <a:endParaRPr lang="en-US" sz="1500" dirty="0"/>
           </a:p>
         </p:txBody>
       </p:sp>
@@ -4113,8 +4099,8 @@
         </p:nvSpPr>
         <p:spPr>
           <a:xfrm>
-            <a:off x="8229600" y="1188720"/>
-            <a:ext cx="3566160" cy="4937760"/>
+            <a:off x="8229600" y="1280160"/>
+            <a:ext cx="3566160" cy="4846320"/>
           </a:xfrm>
           <a:prstGeom prst="roundRect">
             <a:avLst>
@@ -4135,8 +4121,8 @@
         </p:nvSpPr>
         <p:spPr>
           <a:xfrm>
-            <a:off x="8229600" y="1371600"/>
-            <a:ext cx="3566160" cy="457200"/>
+            <a:off x="8229600" y="1463040"/>
+            <a:ext cx="3566160" cy="548640"/>
           </a:xfrm>
           <a:prstGeom prst="rect">
             <a:avLst/>
@@ -4152,7 +4138,7 @@
               <a:buNone/>
             </a:pPr>
             <a:r>
-              <a:rPr lang="en-US" sz="1600" b="1" dirty="0">
+              <a:rPr lang="en-US" sz="2000" b="1" dirty="0">
                 <a:solidFill>
                   <a:srgbClr val="3498DB"/>
                 </a:solidFill>
@@ -4162,7 +4148,7 @@
               </a:rPr>
               <a:t>神经机制</a:t>
             </a:r>
-            <a:endParaRPr lang="en-US" sz="1600" dirty="0"/>
+            <a:endParaRPr lang="en-US" sz="2000" dirty="0"/>
           </a:p>
         </p:txBody>
       </p:sp>
@@ -4174,7 +4160,7 @@
         </p:nvSpPr>
         <p:spPr>
           <a:xfrm>
-            <a:off x="8229600" y="1828800"/>
+            <a:off x="8229600" y="2011680"/>
             <a:ext cx="3566160" cy="365760"/>
           </a:xfrm>
           <a:prstGeom prst="rect">
@@ -4191,7 +4177,7 @@
               <a:buNone/>
             </a:pPr>
             <a:r>
-              <a:rPr lang="en-US" sz="1100" dirty="0">
+              <a:rPr lang="en-US" sz="1300" dirty="0">
                 <a:solidFill>
                   <a:srgbClr val="7F8C8D"/>
                 </a:solidFill>
@@ -4201,7 +4187,7 @@
               </a:rPr>
               <a:t>认知神经科学</a:t>
             </a:r>
-            <a:endParaRPr lang="en-US" sz="1100" dirty="0"/>
+            <a:endParaRPr lang="en-US" sz="1300" dirty="0"/>
           </a:p>
         </p:txBody>
       </p:sp>
@@ -4213,14 +4199,14 @@
         </p:nvSpPr>
         <p:spPr>
           <a:xfrm>
-            <a:off x="8778240" y="2286000"/>
+            <a:off x="8778240" y="2468880"/>
             <a:ext cx="2468880" cy="0"/>
           </a:xfrm>
           <a:prstGeom prst="line">
             <a:avLst/>
           </a:prstGeom>
           <a:noFill/>
-          <a:ln w="12700">
+          <a:ln w="19050">
             <a:solidFill>
               <a:srgbClr val="3498DB"/>
             </a:solidFill>
@@ -4236,8 +4222,8 @@
         </p:nvSpPr>
         <p:spPr>
           <a:xfrm>
-            <a:off x="8595360" y="2560320"/>
-            <a:ext cx="2834640" cy="457200"/>
+            <a:off x="8595360" y="2834640"/>
+            <a:ext cx="2834640" cy="502920"/>
           </a:xfrm>
           <a:prstGeom prst="rect">
             <a:avLst/>
@@ -4253,7 +4239,7 @@
               <a:buNone/>
             </a:pPr>
             <a:r>
-              <a:rPr lang="en-US" sz="1200" dirty="0">
+              <a:rPr lang="en-US" sz="1500" dirty="0">
                 <a:solidFill>
                   <a:srgbClr val="2C3E50"/>
                 </a:solidFill>
@@ -4263,7 +4249,7 @@
               </a:rPr>
               <a:t>• ACC：冲突检测</a:t>
             </a:r>
-            <a:endParaRPr lang="en-US" sz="1200" dirty="0"/>
+            <a:endParaRPr lang="en-US" sz="1500" dirty="0"/>
           </a:p>
         </p:txBody>
       </p:sp>
@@ -4275,8 +4261,8 @@
         </p:nvSpPr>
         <p:spPr>
           <a:xfrm>
-            <a:off x="8595360" y="3154680"/>
-            <a:ext cx="2834640" cy="457200"/>
+            <a:off x="8595360" y="3520440"/>
+            <a:ext cx="2834640" cy="502920"/>
           </a:xfrm>
           <a:prstGeom prst="rect">
             <a:avLst/>
@@ -4292,7 +4278,7 @@
               <a:buNone/>
             </a:pPr>
             <a:r>
-              <a:rPr lang="en-US" sz="1200" dirty="0">
+              <a:rPr lang="en-US" sz="1500" dirty="0">
                 <a:solidFill>
                   <a:srgbClr val="2C3E50"/>
                 </a:solidFill>
@@ -4302,7 +4288,7 @@
               </a:rPr>
               <a:t>• dlPFC：认知控制</a:t>
             </a:r>
-            <a:endParaRPr lang="en-US" sz="1200" dirty="0"/>
+            <a:endParaRPr lang="en-US" sz="1500" dirty="0"/>
           </a:p>
         </p:txBody>
       </p:sp>
@@ -4314,8 +4300,8 @@
         </p:nvSpPr>
         <p:spPr>
           <a:xfrm>
-            <a:off x="8595360" y="3749040"/>
-            <a:ext cx="2834640" cy="457200"/>
+            <a:off x="8595360" y="4206240"/>
+            <a:ext cx="2834640" cy="502920"/>
           </a:xfrm>
           <a:prstGeom prst="rect">
             <a:avLst/>
@@ -4331,7 +4317,7 @@
               <a:buNone/>
             </a:pPr>
             <a:r>
-              <a:rPr lang="en-US" sz="1200" dirty="0">
+              <a:rPr lang="en-US" sz="1500" dirty="0">
                 <a:solidFill>
                   <a:srgbClr val="2C3E50"/>
                 </a:solidFill>
@@ -4341,7 +4327,7 @@
               </a:rPr>
               <a:t>• ACC→dlPFC 回路</a:t>
             </a:r>
-            <a:endParaRPr lang="en-US" sz="1200" dirty="0"/>
+            <a:endParaRPr lang="en-US" sz="1500" dirty="0"/>
           </a:p>
         </p:txBody>
       </p:sp>
@@ -4353,8 +4339,8 @@
         </p:nvSpPr>
         <p:spPr>
           <a:xfrm>
-            <a:off x="8595360" y="4343400"/>
-            <a:ext cx="2834640" cy="457200"/>
+            <a:off x="8595360" y="4892040"/>
+            <a:ext cx="2834640" cy="502920"/>
           </a:xfrm>
           <a:prstGeom prst="rect">
             <a:avLst/>
@@ -4370,7 +4356,7 @@
               <a:buNone/>
             </a:pPr>
             <a:r>
-              <a:rPr lang="en-US" sz="1200" dirty="0">
+              <a:rPr lang="en-US" sz="1500" dirty="0">
                 <a:solidFill>
                   <a:srgbClr val="2C3E50"/>
                 </a:solidFill>
@@ -4380,7 +4366,7 @@
               </a:rPr>
               <a:t>• 训练 → 功能可塑性</a:t>
             </a:r>
-            <a:endParaRPr lang="en-US" sz="1200" dirty="0"/>
+            <a:endParaRPr lang="en-US" sz="1500" dirty="0"/>
           </a:p>
         </p:txBody>
       </p:sp>
@@ -4418,7 +4404,7 @@
         <p:spPr>
           <a:xfrm>
             <a:off x="548640" y="274320"/>
-            <a:ext cx="10972800" cy="640080"/>
+            <a:ext cx="10972800" cy="731520"/>
           </a:xfrm>
           <a:prstGeom prst="rect">
             <a:avLst/>
@@ -4434,7 +4420,7 @@
               <a:buNone/>
             </a:pPr>
             <a:r>
-              <a:rPr lang="en-US" sz="2600" b="1" dirty="0">
+              <a:rPr lang="en-US" sz="3000" b="1" dirty="0">
                 <a:solidFill>
                   <a:srgbClr val="2C3E50"/>
                 </a:solidFill>
@@ -4444,7 +4430,7 @@
               </a:rPr>
               <a:t>系统设计：双维度自适应算法</a:t>
             </a:r>
-            <a:endParaRPr lang="en-US" sz="2600" dirty="0"/>
+            <a:endParaRPr lang="en-US" sz="3000" dirty="0"/>
           </a:p>
         </p:txBody>
       </p:sp>
@@ -4456,7 +4442,7 @@
         </p:nvSpPr>
         <p:spPr>
           <a:xfrm>
-            <a:off x="548640" y="960120"/>
+            <a:off x="548640" y="1051560"/>
             <a:ext cx="10972800" cy="0"/>
           </a:xfrm>
           <a:prstGeom prst="line">
@@ -4479,8 +4465,8 @@
         </p:nvSpPr>
         <p:spPr>
           <a:xfrm>
-            <a:off x="731520" y="1188720"/>
-            <a:ext cx="4572000" cy="365760"/>
+            <a:off x="731520" y="1280160"/>
+            <a:ext cx="4572000" cy="457200"/>
           </a:xfrm>
           <a:prstGeom prst="rect">
             <a:avLst/>
@@ -4496,7 +4482,7 @@
               <a:buNone/>
             </a:pPr>
             <a:r>
-              <a:rPr lang="en-US" sz="1600" b="1" dirty="0">
+              <a:rPr lang="en-US" sz="2000" b="1" dirty="0">
                 <a:solidFill>
                   <a:srgbClr val="3498DB"/>
                 </a:solidFill>
@@ -4506,7 +4492,7 @@
               </a:rPr>
               <a:t>算法规则</a:t>
             </a:r>
-            <a:endParaRPr lang="en-US" sz="1600" dirty="0"/>
+            <a:endParaRPr lang="en-US" sz="2000" dirty="0"/>
           </a:p>
         </p:txBody>
       </p:sp>
@@ -4518,8 +4504,8 @@
         </p:nvSpPr>
         <p:spPr>
           <a:xfrm>
-            <a:off x="731520" y="1737360"/>
-            <a:ext cx="5029200" cy="457200"/>
+            <a:off x="731520" y="1920240"/>
+            <a:ext cx="5486400" cy="457200"/>
           </a:xfrm>
           <a:prstGeom prst="rect">
             <a:avLst/>
@@ -4535,7 +4521,7 @@
               <a:buNone/>
             </a:pPr>
             <a:r>
-              <a:rPr lang="en-US" sz="1200" dirty="0">
+              <a:rPr lang="en-US" sz="1500" dirty="0">
                 <a:solidFill>
                   <a:srgbClr val="2C3E50"/>
                 </a:solidFill>
@@ -4545,7 +4531,7 @@
               </a:rPr>
               <a:t>① 每组20试次，含一致/不一致两种条件</a:t>
             </a:r>
-            <a:endParaRPr lang="en-US" sz="1200" dirty="0"/>
+            <a:endParaRPr lang="en-US" sz="1500" dirty="0"/>
           </a:p>
         </p:txBody>
       </p:sp>
@@ -4557,8 +4543,8 @@
         </p:nvSpPr>
         <p:spPr>
           <a:xfrm>
-            <a:off x="731520" y="2240280"/>
-            <a:ext cx="5029200" cy="457200"/>
+            <a:off x="731520" y="2450592"/>
+            <a:ext cx="5486400" cy="457200"/>
           </a:xfrm>
           <a:prstGeom prst="rect">
             <a:avLst/>
@@ -4574,7 +4560,7 @@
               <a:buNone/>
             </a:pPr>
             <a:r>
-              <a:rPr lang="en-US" sz="1200" dirty="0">
+              <a:rPr lang="en-US" sz="1500" dirty="0">
                 <a:solidFill>
                   <a:srgbClr val="2C3E50"/>
                 </a:solidFill>
@@ -4584,7 +4570,7 @@
               </a:rPr>
               <a:t>② 计算本组正确率 &amp; 干扰效应量</a:t>
             </a:r>
-            <a:endParaRPr lang="en-US" sz="1200" dirty="0"/>
+            <a:endParaRPr lang="en-US" sz="1500" dirty="0"/>
           </a:p>
         </p:txBody>
       </p:sp>
@@ -4596,8 +4582,8 @@
         </p:nvSpPr>
         <p:spPr>
           <a:xfrm>
-            <a:off x="731520" y="2743200"/>
-            <a:ext cx="5029200" cy="457200"/>
+            <a:off x="731520" y="2980944"/>
+            <a:ext cx="5486400" cy="457200"/>
           </a:xfrm>
           <a:prstGeom prst="rect">
             <a:avLst/>
@@ -4613,7 +4599,7 @@
               <a:buNone/>
             </a:pPr>
             <a:r>
-              <a:rPr lang="en-US" sz="1200" dirty="0">
+              <a:rPr lang="en-US" sz="1500" dirty="0">
                 <a:solidFill>
                   <a:srgbClr val="2C3E50"/>
                 </a:solidFill>
@@ -4623,7 +4609,7 @@
               </a:rPr>
               <a:t>③ 连续2组正确率 &gt; 85% → 难度上调</a:t>
             </a:r>
-            <a:endParaRPr lang="en-US" sz="1200" dirty="0"/>
+            <a:endParaRPr lang="en-US" sz="1500" dirty="0"/>
           </a:p>
         </p:txBody>
       </p:sp>
@@ -4635,8 +4621,8 @@
         </p:nvSpPr>
         <p:spPr>
           <a:xfrm>
-            <a:off x="731520" y="3246120"/>
-            <a:ext cx="5029200" cy="457200"/>
+            <a:off x="731520" y="3511296"/>
+            <a:ext cx="5486400" cy="457200"/>
           </a:xfrm>
           <a:prstGeom prst="rect">
             <a:avLst/>
@@ -4652,7 +4638,7 @@
               <a:buNone/>
             </a:pPr>
             <a:r>
-              <a:rPr lang="en-US" sz="1200" dirty="0">
+              <a:rPr lang="en-US" sz="1500" dirty="0">
                 <a:solidFill>
                   <a:srgbClr val="2C3E50"/>
                 </a:solidFill>
@@ -4662,7 +4648,7 @@
               </a:rPr>
               <a:t>   干扰比例 +5%（上限80%）</a:t>
             </a:r>
-            <a:endParaRPr lang="en-US" sz="1200" dirty="0"/>
+            <a:endParaRPr lang="en-US" sz="1500" dirty="0"/>
           </a:p>
         </p:txBody>
       </p:sp>
@@ -4674,8 +4660,8 @@
         </p:nvSpPr>
         <p:spPr>
           <a:xfrm>
-            <a:off x="731520" y="3749040"/>
-            <a:ext cx="5029200" cy="457200"/>
+            <a:off x="731520" y="4041648"/>
+            <a:ext cx="5486400" cy="457200"/>
           </a:xfrm>
           <a:prstGeom prst="rect">
             <a:avLst/>
@@ -4691,7 +4677,7 @@
               <a:buNone/>
             </a:pPr>
             <a:r>
-              <a:rPr lang="en-US" sz="1200" dirty="0">
+              <a:rPr lang="en-US" sz="1500" dirty="0">
                 <a:solidFill>
                   <a:srgbClr val="2C3E50"/>
                 </a:solidFill>
@@ -4701,7 +4687,7 @@
               </a:rPr>
               <a:t>   呈现时间 -100ms（下限500ms）</a:t>
             </a:r>
-            <a:endParaRPr lang="en-US" sz="1200" dirty="0"/>
+            <a:endParaRPr lang="en-US" sz="1500" dirty="0"/>
           </a:p>
         </p:txBody>
       </p:sp>
@@ -4713,8 +4699,8 @@
         </p:nvSpPr>
         <p:spPr>
           <a:xfrm>
-            <a:off x="731520" y="4251960"/>
-            <a:ext cx="5029200" cy="457200"/>
+            <a:off x="731520" y="4572000"/>
+            <a:ext cx="5486400" cy="457200"/>
           </a:xfrm>
           <a:prstGeom prst="rect">
             <a:avLst/>
@@ -4730,7 +4716,7 @@
               <a:buNone/>
             </a:pPr>
             <a:r>
-              <a:rPr lang="en-US" sz="1200" dirty="0">
+              <a:rPr lang="en-US" sz="1500" dirty="0">
                 <a:solidFill>
                   <a:srgbClr val="2C3E50"/>
                 </a:solidFill>
@@ -4740,7 +4726,7 @@
               </a:rPr>
               <a:t>④ 连续2组正确率 &lt; 60% → 难度下调</a:t>
             </a:r>
-            <a:endParaRPr lang="en-US" sz="1200" dirty="0"/>
+            <a:endParaRPr lang="en-US" sz="1500" dirty="0"/>
           </a:p>
         </p:txBody>
       </p:sp>
@@ -4752,8 +4738,8 @@
         </p:nvSpPr>
         <p:spPr>
           <a:xfrm>
-            <a:off x="731520" y="4754880"/>
-            <a:ext cx="5029200" cy="457200"/>
+            <a:off x="731520" y="5102352"/>
+            <a:ext cx="5486400" cy="457200"/>
           </a:xfrm>
           <a:prstGeom prst="rect">
             <a:avLst/>
@@ -4769,7 +4755,7 @@
               <a:buNone/>
             </a:pPr>
             <a:r>
-              <a:rPr lang="en-US" sz="1200" dirty="0">
+              <a:rPr lang="en-US" sz="1500" dirty="0">
                 <a:solidFill>
                   <a:srgbClr val="2C3E50"/>
                 </a:solidFill>
@@ -4779,7 +4765,7 @@
               </a:rPr>
               <a:t>⑤ 滞回机制：防止随机波动误调</a:t>
             </a:r>
-            <a:endParaRPr lang="en-US" sz="1200" dirty="0"/>
+            <a:endParaRPr lang="en-US" sz="1500" dirty="0"/>
           </a:p>
         </p:txBody>
       </p:sp>
@@ -4791,12 +4777,12 @@
         </p:nvSpPr>
         <p:spPr>
           <a:xfrm>
-            <a:off x="6583680" y="1188720"/>
-            <a:ext cx="4846320" cy="4937760"/>
+            <a:off x="6858000" y="1280160"/>
+            <a:ext cx="4572000" cy="4846320"/>
           </a:xfrm>
           <a:prstGeom prst="roundRect">
             <a:avLst>
-              <a:gd name="adj" fmla="val 2264"/>
+              <a:gd name="adj" fmla="val 2400"/>
             </a:avLst>
           </a:prstGeom>
           <a:solidFill>
@@ -4813,8 +4799,8 @@
         </p:nvSpPr>
         <p:spPr>
           <a:xfrm>
-            <a:off x="6858000" y="1371600"/>
-            <a:ext cx="4297680" cy="4572000"/>
+            <a:off x="7132320" y="1463040"/>
+            <a:ext cx="4023360" cy="4480560"/>
           </a:xfrm>
           <a:prstGeom prst="rect">
             <a:avLst/>
@@ -4826,28 +4812,132 @@
           <a:bodyPr wrap="square" rtlCol="0" anchor="t"/>
           <a:lstStyle/>
           <a:p>
-            <a:pPr algn="l" indent="0" marL="0">
+            <a:pPr indent="0" marL="0">
+              <a:buNone/>
+            </a:pPr>
+            <a:r>
+              <a:rPr lang="en-US" sz="2000" b="1" dirty="0">
+                <a:solidFill>
+                  <a:srgbClr val="3498DB"/>
+                </a:solidFill>
+                <a:latin typeface="Microsoft YaHei" pitchFamily="34" charset="0"/>
+                <a:ea typeface="Microsoft YaHei" pitchFamily="34" charset="-122"/>
+                <a:cs typeface="Microsoft YaHei" pitchFamily="34" charset="-120"/>
+              </a:rPr>
+              <a:t>双维度调节</a:t>
+            </a:r>
+            <a:pPr indent="0" marL="0">
+              <a:buNone/>
+            </a:pPr>
+            <a:pPr indent="0" marL="0">
+              <a:buNone/>
+            </a:pPr>
+            <a:r>
+              <a:rPr lang="en-US" sz="1700" b="1" dirty="0">
+                <a:solidFill>
+                  <a:srgbClr val="2C3E50"/>
+                </a:solidFill>
+                <a:latin typeface="Microsoft YaHei" pitchFamily="34" charset="0"/>
+                <a:ea typeface="Microsoft YaHei" pitchFamily="34" charset="-122"/>
+                <a:cs typeface="Microsoft YaHei" pitchFamily="34" charset="-120"/>
+              </a:rPr>
+              <a:t>维度一：干扰强度（质）</a:t>
+            </a:r>
+            <a:pPr indent="0" marL="0">
+              <a:buNone/>
+            </a:pPr>
+            <a:r>
+              <a:rPr lang="en-US" sz="1500" dirty="0">
+                <a:solidFill>
+                  <a:srgbClr val="7F8C8D"/>
+                </a:solidFill>
+                <a:latin typeface="Microsoft YaHei" pitchFamily="34" charset="0"/>
+                <a:ea typeface="Microsoft YaHei" pitchFamily="34" charset="-122"/>
+                <a:cs typeface="Microsoft YaHei" pitchFamily="34" charset="-120"/>
+              </a:rPr>
+              <a:t>不一致试次比例：40% ↔ 80%</a:t>
+            </a:r>
+            <a:pPr indent="0" marL="0">
+              <a:buNone/>
+            </a:pPr>
+            <a:r>
+              <a:rPr lang="en-US" sz="1500" dirty="0">
+                <a:solidFill>
+                  <a:srgbClr val="7F8C8D"/>
+                </a:solidFill>
+                <a:latin typeface="Microsoft YaHei" pitchFamily="34" charset="0"/>
+                <a:ea typeface="Microsoft YaHei" pitchFamily="34" charset="-122"/>
+                <a:cs typeface="Microsoft YaHei" pitchFamily="34" charset="-120"/>
+              </a:rPr>
+              <a:t>训练冲突处理能力</a:t>
+            </a:r>
+            <a:pPr indent="0" marL="0">
+              <a:buNone/>
+            </a:pPr>
+            <a:pPr indent="0" marL="0">
+              <a:buNone/>
+            </a:pPr>
+            <a:r>
+              <a:rPr lang="en-US" sz="1700" b="1" dirty="0">
+                <a:solidFill>
+                  <a:srgbClr val="2C3E50"/>
+                </a:solidFill>
+                <a:latin typeface="Microsoft YaHei" pitchFamily="34" charset="0"/>
+                <a:ea typeface="Microsoft YaHei" pitchFamily="34" charset="-122"/>
+                <a:cs typeface="Microsoft YaHei" pitchFamily="34" charset="-120"/>
+              </a:rPr>
+              <a:t>维度二：呈现时间（量）</a:t>
+            </a:r>
+            <a:pPr indent="0" marL="0">
+              <a:buNone/>
+            </a:pPr>
+            <a:r>
+              <a:rPr lang="en-US" sz="1500" dirty="0">
+                <a:solidFill>
+                  <a:srgbClr val="7F8C8D"/>
+                </a:solidFill>
+                <a:latin typeface="Microsoft YaHei" pitchFamily="34" charset="0"/>
+                <a:ea typeface="Microsoft YaHei" pitchFamily="34" charset="-122"/>
+                <a:cs typeface="Microsoft YaHei" pitchFamily="34" charset="-120"/>
+              </a:rPr>
+              <a:t>刺激呈现时间：500ms ↔ 2000ms</a:t>
+            </a:r>
+            <a:pPr indent="0" marL="0">
+              <a:buNone/>
+            </a:pPr>
+            <a:r>
+              <a:rPr lang="en-US" sz="1500" dirty="0">
+                <a:solidFill>
+                  <a:srgbClr val="7F8C8D"/>
+                </a:solidFill>
+                <a:latin typeface="Microsoft YaHei" pitchFamily="34" charset="0"/>
+                <a:ea typeface="Microsoft YaHei" pitchFamily="34" charset="-122"/>
+                <a:cs typeface="Microsoft YaHei" pitchFamily="34" charset="-120"/>
+              </a:rPr>
+              <a:t>训练加工速度</a:t>
+            </a:r>
+            <a:pPr indent="0" marL="0">
+              <a:buNone/>
+            </a:pPr>
+            <a:pPr indent="0" marL="0">
               <a:buNone/>
             </a:pPr>
             <a:r>
               <a:rPr lang="en-US" sz="1600" b="1" dirty="0">
                 <a:solidFill>
-                  <a:srgbClr val="3498DB"/>
-                </a:solidFill>
-                <a:latin typeface="Microsoft YaHei" pitchFamily="34" charset="0"/>
-                <a:ea typeface="Microsoft YaHei" pitchFamily="34" charset="-122"/>
-                <a:cs typeface="Microsoft YaHei" pitchFamily="34" charset="-120"/>
-              </a:rPr>
-              <a:t>双维度调节</a:t>
-            </a:r>
-            <a:pPr algn="l" indent="0" marL="0">
-              <a:buNone/>
-            </a:pPr>
-            <a:pPr algn="l" indent="0" marL="0">
-              <a:buNone/>
-            </a:pPr>
-            <a:r>
-              <a:rPr lang="en-US" sz="1400" b="1" dirty="0">
+                  <a:srgbClr val="E74C3C"/>
+                </a:solidFill>
+                <a:latin typeface="Microsoft YaHei" pitchFamily="34" charset="0"/>
+                <a:ea typeface="Microsoft YaHei" pitchFamily="34" charset="-122"/>
+                <a:cs typeface="Microsoft YaHei" pitchFamily="34" charset="-120"/>
+              </a:rPr>
+              <a:t>两个维度同时调节</a:t>
+            </a:r>
+            <a:pPr indent="0" marL="0">
+              <a:buNone/>
+            </a:pPr>
+            <a:r>
+              <a:rPr lang="en-US" sz="1600" dirty="0">
                 <a:solidFill>
                   <a:srgbClr val="2C3E50"/>
                 </a:solidFill>
@@ -4855,113 +4945,9 @@
                 <a:ea typeface="Microsoft YaHei" pitchFamily="34" charset="-122"/>
                 <a:cs typeface="Microsoft YaHei" pitchFamily="34" charset="-120"/>
               </a:rPr>
-              <a:t>维度一：干扰强度（质）</a:t>
-            </a:r>
-            <a:pPr algn="l" indent="0" marL="0">
-              <a:buNone/>
-            </a:pPr>
-            <a:r>
-              <a:rPr lang="en-US" sz="1200" dirty="0">
-                <a:solidFill>
-                  <a:srgbClr val="7F8C8D"/>
-                </a:solidFill>
-                <a:latin typeface="Microsoft YaHei" pitchFamily="34" charset="0"/>
-                <a:ea typeface="Microsoft YaHei" pitchFamily="34" charset="-122"/>
-                <a:cs typeface="Microsoft YaHei" pitchFamily="34" charset="-120"/>
-              </a:rPr>
-              <a:t>不一致试次比例：40% ↔ 80%</a:t>
-            </a:r>
-            <a:pPr algn="l" indent="0" marL="0">
-              <a:buNone/>
-            </a:pPr>
-            <a:r>
-              <a:rPr lang="en-US" sz="1200" dirty="0">
-                <a:solidFill>
-                  <a:srgbClr val="7F8C8D"/>
-                </a:solidFill>
-                <a:latin typeface="Microsoft YaHei" pitchFamily="34" charset="0"/>
-                <a:ea typeface="Microsoft YaHei" pitchFamily="34" charset="-122"/>
-                <a:cs typeface="Microsoft YaHei" pitchFamily="34" charset="-120"/>
-              </a:rPr>
-              <a:t>训练冲突处理能力</a:t>
-            </a:r>
-            <a:pPr algn="l" indent="0" marL="0">
-              <a:buNone/>
-            </a:pPr>
-            <a:pPr algn="l" indent="0" marL="0">
-              <a:buNone/>
-            </a:pPr>
-            <a:r>
-              <a:rPr lang="en-US" sz="1400" b="1" dirty="0">
-                <a:solidFill>
-                  <a:srgbClr val="2C3E50"/>
-                </a:solidFill>
-                <a:latin typeface="Microsoft YaHei" pitchFamily="34" charset="0"/>
-                <a:ea typeface="Microsoft YaHei" pitchFamily="34" charset="-122"/>
-                <a:cs typeface="Microsoft YaHei" pitchFamily="34" charset="-120"/>
-              </a:rPr>
-              <a:t>维度二：呈现时间（量）</a:t>
-            </a:r>
-            <a:pPr algn="l" indent="0" marL="0">
-              <a:buNone/>
-            </a:pPr>
-            <a:r>
-              <a:rPr lang="en-US" sz="1200" dirty="0">
-                <a:solidFill>
-                  <a:srgbClr val="7F8C8D"/>
-                </a:solidFill>
-                <a:latin typeface="Microsoft YaHei" pitchFamily="34" charset="0"/>
-                <a:ea typeface="Microsoft YaHei" pitchFamily="34" charset="-122"/>
-                <a:cs typeface="Microsoft YaHei" pitchFamily="34" charset="-120"/>
-              </a:rPr>
-              <a:t>刺激呈现时间：500ms ↔ 2000ms</a:t>
-            </a:r>
-            <a:pPr algn="l" indent="0" marL="0">
-              <a:buNone/>
-            </a:pPr>
-            <a:r>
-              <a:rPr lang="en-US" sz="1200" dirty="0">
-                <a:solidFill>
-                  <a:srgbClr val="7F8C8D"/>
-                </a:solidFill>
-                <a:latin typeface="Microsoft YaHei" pitchFamily="34" charset="0"/>
-                <a:ea typeface="Microsoft YaHei" pitchFamily="34" charset="-122"/>
-                <a:cs typeface="Microsoft YaHei" pitchFamily="34" charset="-120"/>
-              </a:rPr>
-              <a:t>训练加工速度</a:t>
-            </a:r>
-            <a:pPr algn="l" indent="0" marL="0">
-              <a:buNone/>
-            </a:pPr>
-            <a:pPr algn="l" indent="0" marL="0">
-              <a:buNone/>
-            </a:pPr>
-            <a:r>
-              <a:rPr lang="en-US" sz="1200" b="1" dirty="0">
-                <a:solidFill>
-                  <a:srgbClr val="E74C3C"/>
-                </a:solidFill>
-                <a:latin typeface="Microsoft YaHei" pitchFamily="34" charset="0"/>
-                <a:ea typeface="Microsoft YaHei" pitchFamily="34" charset="-122"/>
-                <a:cs typeface="Microsoft YaHei" pitchFamily="34" charset="-120"/>
-              </a:rPr>
-              <a:t>两个维度同时调节</a:t>
-            </a:r>
-            <a:pPr algn="l" indent="0" marL="0">
-              <a:buNone/>
-            </a:pPr>
-            <a:r>
-              <a:rPr lang="en-US" sz="1200" dirty="0">
-                <a:solidFill>
-                  <a:srgbClr val="2C3E50"/>
-                </a:solidFill>
-                <a:latin typeface="Microsoft YaHei" pitchFamily="34" charset="0"/>
-                <a:ea typeface="Microsoft YaHei" pitchFamily="34" charset="-122"/>
-                <a:cs typeface="Microsoft YaHei" pitchFamily="34" charset="-120"/>
-              </a:rPr>
               <a:t>难度随能力增长自动攀爬</a:t>
             </a:r>
-            <a:endParaRPr lang="en-US" sz="1600" dirty="0"/>
+            <a:endParaRPr lang="en-US" sz="2000" dirty="0"/>
           </a:p>
         </p:txBody>
       </p:sp>
@@ -4999,7 +4985,7 @@
         <p:spPr>
           <a:xfrm>
             <a:off x="548640" y="274320"/>
-            <a:ext cx="10972800" cy="640080"/>
+            <a:ext cx="10972800" cy="731520"/>
           </a:xfrm>
           <a:prstGeom prst="rect">
             <a:avLst/>
@@ -5015,7 +5001,7 @@
               <a:buNone/>
             </a:pPr>
             <a:r>
-              <a:rPr lang="en-US" sz="2600" b="1" dirty="0">
+              <a:rPr lang="en-US" sz="3000" b="1" dirty="0">
                 <a:solidFill>
                   <a:srgbClr val="2C3E50"/>
                 </a:solidFill>
@@ -5025,7 +5011,7 @@
               </a:rPr>
               <a:t>系统功能展示</a:t>
             </a:r>
-            <a:endParaRPr lang="en-US" sz="2600" dirty="0"/>
+            <a:endParaRPr lang="en-US" sz="3000" dirty="0"/>
           </a:p>
         </p:txBody>
       </p:sp>
@@ -5037,7 +5023,7 @@
         </p:nvSpPr>
         <p:spPr>
           <a:xfrm>
-            <a:off x="548640" y="960120"/>
+            <a:off x="548640" y="1051560"/>
             <a:ext cx="10972800" cy="0"/>
           </a:xfrm>
           <a:prstGeom prst="line">
@@ -5060,12 +5046,12 @@
         </p:nvSpPr>
         <p:spPr>
           <a:xfrm>
-            <a:off x="548640" y="1280160"/>
-            <a:ext cx="3566160" cy="2286000"/>
+            <a:off x="548640" y="1371600"/>
+            <a:ext cx="3566160" cy="2194560"/>
           </a:xfrm>
           <a:prstGeom prst="roundRect">
             <a:avLst>
-              <a:gd name="adj" fmla="val 4800"/>
+              <a:gd name="adj" fmla="val 5000"/>
             </a:avLst>
           </a:prstGeom>
           <a:solidFill>
@@ -5082,7 +5068,7 @@
         </p:nvSpPr>
         <p:spPr>
           <a:xfrm>
-            <a:off x="548640" y="1417320"/>
+            <a:off x="548640" y="1463040"/>
             <a:ext cx="3566160" cy="548640"/>
           </a:xfrm>
           <a:prstGeom prst="rect">
@@ -5099,14 +5085,14 @@
               <a:buNone/>
             </a:pPr>
             <a:r>
-              <a:rPr lang="en-US" sz="2800" dirty="0">
+              <a:rPr lang="en-US" sz="3200" dirty="0">
                 <a:solidFill>
                   <a:srgbClr val="000000"/>
                 </a:solidFill>
               </a:rPr>
               <a:t>🎮</a:t>
             </a:r>
-            <a:endParaRPr lang="en-US" sz="2800" dirty="0"/>
+            <a:endParaRPr lang="en-US" sz="3200" dirty="0"/>
           </a:p>
         </p:txBody>
       </p:sp>
@@ -5118,8 +5104,8 @@
         </p:nvSpPr>
         <p:spPr>
           <a:xfrm>
-            <a:off x="548640" y="2011680"/>
-            <a:ext cx="3566160" cy="365760"/>
+            <a:off x="548640" y="2103120"/>
+            <a:ext cx="3566160" cy="411480"/>
           </a:xfrm>
           <a:prstGeom prst="rect">
             <a:avLst/>
@@ -5135,7 +5121,7 @@
               <a:buNone/>
             </a:pPr>
             <a:r>
-              <a:rPr lang="en-US" sz="1500" b="1" dirty="0">
+              <a:rPr lang="en-US" sz="1800" b="1" dirty="0">
                 <a:solidFill>
                   <a:srgbClr val="3498DB"/>
                 </a:solidFill>
@@ -5145,7 +5131,7 @@
               </a:rPr>
               <a:t>Stroop训练</a:t>
             </a:r>
-            <a:endParaRPr lang="en-US" sz="1500" dirty="0"/>
+            <a:endParaRPr lang="en-US" sz="1800" dirty="0"/>
           </a:p>
         </p:txBody>
       </p:sp>
@@ -5157,8 +5143,8 @@
         </p:nvSpPr>
         <p:spPr>
           <a:xfrm>
-            <a:off x="822960" y="2468880"/>
-            <a:ext cx="3017520" cy="914400"/>
+            <a:off x="822960" y="2606040"/>
+            <a:ext cx="3017520" cy="822960"/>
           </a:xfrm>
           <a:prstGeom prst="rect">
             <a:avLst/>
@@ -5174,7 +5160,7 @@
               <a:buNone/>
             </a:pPr>
             <a:r>
-              <a:rPr lang="en-US" sz="1100" dirty="0">
+              <a:rPr lang="en-US" sz="1400" dirty="0">
                 <a:solidFill>
                   <a:srgbClr val="7F8C8D"/>
                 </a:solidFill>
@@ -5184,14 +5170,14 @@
               </a:rPr>
               <a:t>四色中文字符，按键1/2/3/4作答</a:t>
             </a:r>
-            <a:endParaRPr lang="en-US" sz="1100" dirty="0"/>
+            <a:endParaRPr lang="en-US" sz="1400" dirty="0"/>
           </a:p>
           <a:p>
             <a:pPr algn="ctr" indent="0" marL="0">
               <a:buNone/>
             </a:pPr>
             <a:r>
-              <a:rPr lang="en-US" sz="1100" dirty="0">
+              <a:rPr lang="en-US" sz="1400" dirty="0">
                 <a:solidFill>
                   <a:srgbClr val="7F8C8D"/>
                 </a:solidFill>
@@ -5199,9 +5185,9 @@
                 <a:ea typeface="Microsoft YaHei" pitchFamily="34" charset="-122"/>
                 <a:cs typeface="Microsoft YaHei" pitchFamily="34" charset="-120"/>
               </a:rPr>
-              <a:t>高精度计时（performance.now）</a:t>
-            </a:r>
-            <a:endParaRPr lang="en-US" sz="1100" dirty="0"/>
+              <a:t>高精度计时</a:t>
+            </a:r>
+            <a:endParaRPr lang="en-US" sz="1400" dirty="0"/>
           </a:p>
         </p:txBody>
       </p:sp>
@@ -5213,12 +5199,12 @@
         </p:nvSpPr>
         <p:spPr>
           <a:xfrm>
-            <a:off x="4389120" y="1280160"/>
-            <a:ext cx="3566160" cy="2286000"/>
+            <a:off x="4389120" y="1371600"/>
+            <a:ext cx="3566160" cy="2194560"/>
           </a:xfrm>
           <a:prstGeom prst="roundRect">
             <a:avLst>
-              <a:gd name="adj" fmla="val 4800"/>
+              <a:gd name="adj" fmla="val 5000"/>
             </a:avLst>
           </a:prstGeom>
           <a:solidFill>
@@ -5235,7 +5221,7 @@
         </p:nvSpPr>
         <p:spPr>
           <a:xfrm>
-            <a:off x="4389120" y="1417320"/>
+            <a:off x="4389120" y="1463040"/>
             <a:ext cx="3566160" cy="548640"/>
           </a:xfrm>
           <a:prstGeom prst="rect">
@@ -5252,14 +5238,14 @@
               <a:buNone/>
             </a:pPr>
             <a:r>
-              <a:rPr lang="en-US" sz="2800" dirty="0">
+              <a:rPr lang="en-US" sz="3200" dirty="0">
                 <a:solidFill>
                   <a:srgbClr val="000000"/>
                 </a:solidFill>
               </a:rPr>
               <a:t>🧠</a:t>
             </a:r>
-            <a:endParaRPr lang="en-US" sz="2800" dirty="0"/>
+            <a:endParaRPr lang="en-US" sz="3200" dirty="0"/>
           </a:p>
         </p:txBody>
       </p:sp>
@@ -5271,8 +5257,8 @@
         </p:nvSpPr>
         <p:spPr>
           <a:xfrm>
-            <a:off x="4389120" y="2011680"/>
-            <a:ext cx="3566160" cy="365760"/>
+            <a:off x="4389120" y="2103120"/>
+            <a:ext cx="3566160" cy="411480"/>
           </a:xfrm>
           <a:prstGeom prst="rect">
             <a:avLst/>
@@ -5288,7 +5274,7 @@
               <a:buNone/>
             </a:pPr>
             <a:r>
-              <a:rPr lang="en-US" sz="1500" b="1" dirty="0">
+              <a:rPr lang="en-US" sz="1800" b="1" dirty="0">
                 <a:solidFill>
                   <a:srgbClr val="3498DB"/>
                 </a:solidFill>
@@ -5298,7 +5284,7 @@
               </a:rPr>
               <a:t>自适应调节</a:t>
             </a:r>
-            <a:endParaRPr lang="en-US" sz="1500" dirty="0"/>
+            <a:endParaRPr lang="en-US" sz="1800" dirty="0"/>
           </a:p>
         </p:txBody>
       </p:sp>
@@ -5310,8 +5296,8 @@
         </p:nvSpPr>
         <p:spPr>
           <a:xfrm>
-            <a:off x="4663440" y="2468880"/>
-            <a:ext cx="3017520" cy="914400"/>
+            <a:off x="4663440" y="2606040"/>
+            <a:ext cx="3017520" cy="822960"/>
           </a:xfrm>
           <a:prstGeom prst="rect">
             <a:avLst/>
@@ -5327,7 +5313,7 @@
               <a:buNone/>
             </a:pPr>
             <a:r>
-              <a:rPr lang="en-US" sz="1100" dirty="0">
+              <a:rPr lang="en-US" sz="1400" dirty="0">
                 <a:solidFill>
                   <a:srgbClr val="7F8C8D"/>
                 </a:solidFill>
@@ -5337,14 +5323,14 @@
               </a:rPr>
               <a:t>双维度实时调整</a:t>
             </a:r>
-            <a:endParaRPr lang="en-US" sz="1100" dirty="0"/>
+            <a:endParaRPr lang="en-US" sz="1400" dirty="0"/>
           </a:p>
           <a:p>
             <a:pPr algn="ctr" indent="0" marL="0">
               <a:buNone/>
             </a:pPr>
             <a:r>
-              <a:rPr lang="en-US" sz="1100" dirty="0">
+              <a:rPr lang="en-US" sz="1400" dirty="0">
                 <a:solidFill>
                   <a:srgbClr val="7F8C8D"/>
                 </a:solidFill>
@@ -5354,7 +5340,7 @@
               </a:rPr>
               <a:t>滞回机制防抖动</a:t>
             </a:r>
-            <a:endParaRPr lang="en-US" sz="1100" dirty="0"/>
+            <a:endParaRPr lang="en-US" sz="1400" dirty="0"/>
           </a:p>
         </p:txBody>
       </p:sp>
@@ -5366,12 +5352,12 @@
         </p:nvSpPr>
         <p:spPr>
           <a:xfrm>
-            <a:off x="8229600" y="1280160"/>
-            <a:ext cx="3566160" cy="2286000"/>
+            <a:off x="8229600" y="1371600"/>
+            <a:ext cx="3566160" cy="2194560"/>
           </a:xfrm>
           <a:prstGeom prst="roundRect">
             <a:avLst>
-              <a:gd name="adj" fmla="val 4800"/>
+              <a:gd name="adj" fmla="val 5000"/>
             </a:avLst>
           </a:prstGeom>
           <a:solidFill>
@@ -5388,7 +5374,7 @@
         </p:nvSpPr>
         <p:spPr>
           <a:xfrm>
-            <a:off x="8229600" y="1417320"/>
+            <a:off x="8229600" y="1463040"/>
             <a:ext cx="3566160" cy="548640"/>
           </a:xfrm>
           <a:prstGeom prst="rect">
@@ -5405,14 +5391,14 @@
               <a:buNone/>
             </a:pPr>
             <a:r>
-              <a:rPr lang="en-US" sz="2800" dirty="0">
+              <a:rPr lang="en-US" sz="3200" dirty="0">
                 <a:solidFill>
                   <a:srgbClr val="000000"/>
                 </a:solidFill>
               </a:rPr>
               <a:t>📊</a:t>
             </a:r>
-            <a:endParaRPr lang="en-US" sz="2800" dirty="0"/>
+            <a:endParaRPr lang="en-US" sz="3200" dirty="0"/>
           </a:p>
         </p:txBody>
       </p:sp>
@@ -5424,8 +5410,8 @@
         </p:nvSpPr>
         <p:spPr>
           <a:xfrm>
-            <a:off x="8229600" y="2011680"/>
-            <a:ext cx="3566160" cy="365760"/>
+            <a:off x="8229600" y="2103120"/>
+            <a:ext cx="3566160" cy="411480"/>
           </a:xfrm>
           <a:prstGeom prst="rect">
             <a:avLst/>
@@ -5441,7 +5427,7 @@
               <a:buNone/>
             </a:pPr>
             <a:r>
-              <a:rPr lang="en-US" sz="1500" b="1" dirty="0">
+              <a:rPr lang="en-US" sz="1800" b="1" dirty="0">
                 <a:solidFill>
                   <a:srgbClr val="3498DB"/>
                 </a:solidFill>
@@ -5451,7 +5437,7 @@
               </a:rPr>
               <a:t>数据可视化</a:t>
             </a:r>
-            <a:endParaRPr lang="en-US" sz="1500" dirty="0"/>
+            <a:endParaRPr lang="en-US" sz="1800" dirty="0"/>
           </a:p>
         </p:txBody>
       </p:sp>
@@ -5463,8 +5449,8 @@
         </p:nvSpPr>
         <p:spPr>
           <a:xfrm>
-            <a:off x="8503920" y="2468880"/>
-            <a:ext cx="3017520" cy="914400"/>
+            <a:off x="8503920" y="2606040"/>
+            <a:ext cx="3017520" cy="822960"/>
           </a:xfrm>
           <a:prstGeom prst="rect">
             <a:avLst/>
@@ -5480,7 +5466,7 @@
               <a:buNone/>
             </a:pPr>
             <a:r>
-              <a:rPr lang="en-US" sz="1100" dirty="0">
+              <a:rPr lang="en-US" sz="1400" dirty="0">
                 <a:solidFill>
                   <a:srgbClr val="7F8C8D"/>
                 </a:solidFill>
@@ -5490,14 +5476,14 @@
               </a:rPr>
               <a:t>干扰效应趋势图 + 箱线图</a:t>
             </a:r>
-            <a:endParaRPr lang="en-US" sz="1100" dirty="0"/>
+            <a:endParaRPr lang="en-US" sz="1400" dirty="0"/>
           </a:p>
           <a:p>
             <a:pPr algn="ctr" indent="0" marL="0">
               <a:buNone/>
             </a:pPr>
             <a:r>
-              <a:rPr lang="en-US" sz="1100" dirty="0">
+              <a:rPr lang="en-US" sz="1400" dirty="0">
                 <a:solidFill>
                   <a:srgbClr val="7F8C8D"/>
                 </a:solidFill>
@@ -5505,9 +5491,9 @@
                 <a:ea typeface="Microsoft YaHei" pitchFamily="34" charset="-122"/>
                 <a:cs typeface="Microsoft YaHei" pitchFamily="34" charset="-120"/>
               </a:rPr>
-              <a:t>难度调节轨迹图 + 统计面板</a:t>
-            </a:r>
-            <a:endParaRPr lang="en-US" sz="1100" dirty="0"/>
+              <a:t>难度轨迹图 + 统计面板</a:t>
+            </a:r>
+            <a:endParaRPr lang="en-US" sz="1400" dirty="0"/>
           </a:p>
         </p:txBody>
       </p:sp>
@@ -5520,11 +5506,11 @@
         <p:spPr>
           <a:xfrm>
             <a:off x="548640" y="3931920"/>
-            <a:ext cx="3566160" cy="2286000"/>
+            <a:ext cx="3566160" cy="2194560"/>
           </a:xfrm>
           <a:prstGeom prst="roundRect">
             <a:avLst>
-              <a:gd name="adj" fmla="val 4800"/>
+              <a:gd name="adj" fmla="val 5000"/>
             </a:avLst>
           </a:prstGeom>
           <a:solidFill>
@@ -5541,7 +5527,7 @@
         </p:nvSpPr>
         <p:spPr>
           <a:xfrm>
-            <a:off x="548640" y="4069080"/>
+            <a:off x="548640" y="4023360"/>
             <a:ext cx="3566160" cy="548640"/>
           </a:xfrm>
           <a:prstGeom prst="rect">
@@ -5558,14 +5544,14 @@
               <a:buNone/>
             </a:pPr>
             <a:r>
-              <a:rPr lang="en-US" sz="2800" dirty="0">
+              <a:rPr lang="en-US" sz="3200" dirty="0">
                 <a:solidFill>
                   <a:srgbClr val="000000"/>
                 </a:solidFill>
               </a:rPr>
               <a:t>📝</a:t>
             </a:r>
-            <a:endParaRPr lang="en-US" sz="2800" dirty="0"/>
+            <a:endParaRPr lang="en-US" sz="3200" dirty="0"/>
           </a:p>
         </p:txBody>
       </p:sp>
@@ -5578,7 +5564,7 @@
         <p:spPr>
           <a:xfrm>
             <a:off x="548640" y="4663440"/>
-            <a:ext cx="3566160" cy="365760"/>
+            <a:ext cx="3566160" cy="411480"/>
           </a:xfrm>
           <a:prstGeom prst="rect">
             <a:avLst/>
@@ -5594,7 +5580,7 @@
               <a:buNone/>
             </a:pPr>
             <a:r>
-              <a:rPr lang="en-US" sz="1500" b="1" dirty="0">
+              <a:rPr lang="en-US" sz="1800" b="1" dirty="0">
                 <a:solidFill>
                   <a:srgbClr val="3498DB"/>
                 </a:solidFill>
@@ -5604,7 +5590,7 @@
               </a:rPr>
               <a:t>满意度问卷</a:t>
             </a:r>
-            <a:endParaRPr lang="en-US" sz="1500" dirty="0"/>
+            <a:endParaRPr lang="en-US" sz="1800" dirty="0"/>
           </a:p>
         </p:txBody>
       </p:sp>
@@ -5616,8 +5602,8 @@
         </p:nvSpPr>
         <p:spPr>
           <a:xfrm>
-            <a:off x="822960" y="5120640"/>
-            <a:ext cx="3017520" cy="914400"/>
+            <a:off x="822960" y="5166360"/>
+            <a:ext cx="3017520" cy="822960"/>
           </a:xfrm>
           <a:prstGeom prst="rect">
             <a:avLst/>
@@ -5633,7 +5619,7 @@
               <a:buNone/>
             </a:pPr>
             <a:r>
-              <a:rPr lang="en-US" sz="1100" dirty="0">
+              <a:rPr lang="en-US" sz="1400" dirty="0">
                 <a:solidFill>
                   <a:srgbClr val="7F8C8D"/>
                 </a:solidFill>
@@ -5643,14 +5629,14 @@
               </a:rPr>
               <a:t>5题Likert量表</a:t>
             </a:r>
-            <a:endParaRPr lang="en-US" sz="1100" dirty="0"/>
+            <a:endParaRPr lang="en-US" sz="1400" dirty="0"/>
           </a:p>
           <a:p>
             <a:pPr algn="ctr" indent="0" marL="0">
               <a:buNone/>
             </a:pPr>
             <a:r>
-              <a:rPr lang="en-US" sz="1100" dirty="0">
+              <a:rPr lang="en-US" sz="1400" dirty="0">
                 <a:solidFill>
                   <a:srgbClr val="7F8C8D"/>
                 </a:solidFill>
@@ -5660,7 +5646,7 @@
               </a:rPr>
               <a:t>训练后自动弹出</a:t>
             </a:r>
-            <a:endParaRPr lang="en-US" sz="1100" dirty="0"/>
+            <a:endParaRPr lang="en-US" sz="1400" dirty="0"/>
           </a:p>
         </p:txBody>
       </p:sp>
@@ -5673,11 +5659,11 @@
         <p:spPr>
           <a:xfrm>
             <a:off x="4389120" y="3931920"/>
-            <a:ext cx="3566160" cy="2286000"/>
+            <a:ext cx="3566160" cy="2194560"/>
           </a:xfrm>
           <a:prstGeom prst="roundRect">
             <a:avLst>
-              <a:gd name="adj" fmla="val 4800"/>
+              <a:gd name="adj" fmla="val 5000"/>
             </a:avLst>
           </a:prstGeom>
           <a:solidFill>
@@ -5694,7 +5680,7 @@
         </p:nvSpPr>
         <p:spPr>
           <a:xfrm>
-            <a:off x="4389120" y="4069080"/>
+            <a:off x="4389120" y="4023360"/>
             <a:ext cx="3566160" cy="548640"/>
           </a:xfrm>
           <a:prstGeom prst="rect">
@@ -5711,14 +5697,14 @@
               <a:buNone/>
             </a:pPr>
             <a:r>
-              <a:rPr lang="en-US" sz="2800" dirty="0">
+              <a:rPr lang="en-US" sz="3200" dirty="0">
                 <a:solidFill>
                   <a:srgbClr val="000000"/>
                 </a:solidFill>
               </a:rPr>
               <a:t>💾</a:t>
             </a:r>
-            <a:endParaRPr lang="en-US" sz="2800" dirty="0"/>
+            <a:endParaRPr lang="en-US" sz="3200" dirty="0"/>
           </a:p>
         </p:txBody>
       </p:sp>
@@ -5731,7 +5717,7 @@
         <p:spPr>
           <a:xfrm>
             <a:off x="4389120" y="4663440"/>
-            <a:ext cx="3566160" cy="365760"/>
+            <a:ext cx="3566160" cy="411480"/>
           </a:xfrm>
           <a:prstGeom prst="rect">
             <a:avLst/>
@@ -5747,7 +5733,7 @@
               <a:buNone/>
             </a:pPr>
             <a:r>
-              <a:rPr lang="en-US" sz="1500" b="1" dirty="0">
+              <a:rPr lang="en-US" sz="1800" b="1" dirty="0">
                 <a:solidFill>
                   <a:srgbClr val="3498DB"/>
                 </a:solidFill>
@@ -5757,7 +5743,7 @@
               </a:rPr>
               <a:t>本地存储</a:t>
             </a:r>
-            <a:endParaRPr lang="en-US" sz="1500" dirty="0"/>
+            <a:endParaRPr lang="en-US" sz="1800" dirty="0"/>
           </a:p>
         </p:txBody>
       </p:sp>
@@ -5769,8 +5755,8 @@
         </p:nvSpPr>
         <p:spPr>
           <a:xfrm>
-            <a:off x="4663440" y="5120640"/>
-            <a:ext cx="3017520" cy="914400"/>
+            <a:off x="4663440" y="5166360"/>
+            <a:ext cx="3017520" cy="822960"/>
           </a:xfrm>
           <a:prstGeom prst="rect">
             <a:avLst/>
@@ -5786,7 +5772,7 @@
               <a:buNone/>
             </a:pPr>
             <a:r>
-              <a:rPr lang="en-US" sz="1100" dirty="0">
+              <a:rPr lang="en-US" sz="1400" dirty="0">
                 <a:solidFill>
                   <a:srgbClr val="7F8C8D"/>
                 </a:solidFill>
@@ -5796,14 +5782,14 @@
               </a:rPr>
               <a:t>localStorage纯前端</a:t>
             </a:r>
-            <a:endParaRPr lang="en-US" sz="1100" dirty="0"/>
+            <a:endParaRPr lang="en-US" sz="1400" dirty="0"/>
           </a:p>
           <a:p>
             <a:pPr algn="ctr" indent="0" marL="0">
               <a:buNone/>
             </a:pPr>
             <a:r>
-              <a:rPr lang="en-US" sz="1100" dirty="0">
+              <a:rPr lang="en-US" sz="1400" dirty="0">
                 <a:solidFill>
                   <a:srgbClr val="7F8C8D"/>
                 </a:solidFill>
@@ -5813,7 +5799,7 @@
               </a:rPr>
               <a:t>不上传服务器，保护隐私</a:t>
             </a:r>
-            <a:endParaRPr lang="en-US" sz="1100" dirty="0"/>
+            <a:endParaRPr lang="en-US" sz="1400" dirty="0"/>
           </a:p>
         </p:txBody>
       </p:sp>
@@ -5826,11 +5812,11 @@
         <p:spPr>
           <a:xfrm>
             <a:off x="8229600" y="3931920"/>
-            <a:ext cx="3566160" cy="2286000"/>
+            <a:ext cx="3566160" cy="2194560"/>
           </a:xfrm>
           <a:prstGeom prst="roundRect">
             <a:avLst>
-              <a:gd name="adj" fmla="val 4800"/>
+              <a:gd name="adj" fmla="val 5000"/>
             </a:avLst>
           </a:prstGeom>
           <a:solidFill>
@@ -5847,7 +5833,7 @@
         </p:nvSpPr>
         <p:spPr>
           <a:xfrm>
-            <a:off x="8229600" y="4069080"/>
+            <a:off x="8229600" y="4023360"/>
             <a:ext cx="3566160" cy="548640"/>
           </a:xfrm>
           <a:prstGeom prst="rect">
@@ -5864,14 +5850,14 @@
               <a:buNone/>
             </a:pPr>
             <a:r>
-              <a:rPr lang="en-US" sz="2800" dirty="0">
+              <a:rPr lang="en-US" sz="3200" dirty="0">
                 <a:solidFill>
                   <a:srgbClr val="000000"/>
                 </a:solidFill>
               </a:rPr>
               <a:t>📥</a:t>
             </a:r>
-            <a:endParaRPr lang="en-US" sz="2800" dirty="0"/>
+            <a:endParaRPr lang="en-US" sz="3200" dirty="0"/>
           </a:p>
         </p:txBody>
       </p:sp>
@@ -5884,7 +5870,7 @@
         <p:spPr>
           <a:xfrm>
             <a:off x="8229600" y="4663440"/>
-            <a:ext cx="3566160" cy="365760"/>
+            <a:ext cx="3566160" cy="411480"/>
           </a:xfrm>
           <a:prstGeom prst="rect">
             <a:avLst/>
@@ -5900,7 +5886,7 @@
               <a:buNone/>
             </a:pPr>
             <a:r>
-              <a:rPr lang="en-US" sz="1500" b="1" dirty="0">
+              <a:rPr lang="en-US" sz="1800" b="1" dirty="0">
                 <a:solidFill>
                   <a:srgbClr val="3498DB"/>
                 </a:solidFill>
@@ -5910,7 +5896,7 @@
               </a:rPr>
               <a:t>数据导出</a:t>
             </a:r>
-            <a:endParaRPr lang="en-US" sz="1500" dirty="0"/>
+            <a:endParaRPr lang="en-US" sz="1800" dirty="0"/>
           </a:p>
         </p:txBody>
       </p:sp>
@@ -5922,8 +5908,8 @@
         </p:nvSpPr>
         <p:spPr>
           <a:xfrm>
-            <a:off x="8503920" y="5120640"/>
-            <a:ext cx="3017520" cy="914400"/>
+            <a:off x="8503920" y="5166360"/>
+            <a:ext cx="3017520" cy="822960"/>
           </a:xfrm>
           <a:prstGeom prst="rect">
             <a:avLst/>
@@ -5939,7 +5925,7 @@
               <a:buNone/>
             </a:pPr>
             <a:r>
-              <a:rPr lang="en-US" sz="1100" dirty="0">
+              <a:rPr lang="en-US" sz="1400" dirty="0">
                 <a:solidFill>
                   <a:srgbClr val="7F8C8D"/>
                 </a:solidFill>
@@ -5949,14 +5935,14 @@
               </a:rPr>
               <a:t>CSV格式含mode列</a:t>
             </a:r>
-            <a:endParaRPr lang="en-US" sz="1100" dirty="0"/>
+            <a:endParaRPr lang="en-US" sz="1400" dirty="0"/>
           </a:p>
           <a:p>
             <a:pPr algn="ctr" indent="0" marL="0">
               <a:buNone/>
             </a:pPr>
             <a:r>
-              <a:rPr lang="en-US" sz="1100" dirty="0">
+              <a:rPr lang="en-US" sz="1400" dirty="0">
                 <a:solidFill>
                   <a:srgbClr val="7F8C8D"/>
                 </a:solidFill>
@@ -5966,7 +5952,7 @@
               </a:rPr>
               <a:t>区分实验组/对照组</a:t>
             </a:r>
-            <a:endParaRPr lang="en-US" sz="1100" dirty="0"/>
+            <a:endParaRPr lang="en-US" sz="1400" dirty="0"/>
           </a:p>
         </p:txBody>
       </p:sp>
@@ -6004,7 +5990,7 @@
         <p:spPr>
           <a:xfrm>
             <a:off x="548640" y="274320"/>
-            <a:ext cx="10972800" cy="640080"/>
+            <a:ext cx="10972800" cy="731520"/>
           </a:xfrm>
           <a:prstGeom prst="rect">
             <a:avLst/>
@@ -6020,7 +6006,7 @@
               <a:buNone/>
             </a:pPr>
             <a:r>
-              <a:rPr lang="en-US" sz="2600" b="1" dirty="0">
+              <a:rPr lang="en-US" sz="3000" b="1" dirty="0">
                 <a:solidFill>
                   <a:srgbClr val="2C3E50"/>
                 </a:solidFill>
@@ -6030,7 +6016,7 @@
               </a:rPr>
               <a:t>实验设计</a:t>
             </a:r>
-            <a:endParaRPr lang="en-US" sz="2600" dirty="0"/>
+            <a:endParaRPr lang="en-US" sz="3000" dirty="0"/>
           </a:p>
         </p:txBody>
       </p:sp>
@@ -6042,7 +6028,7 @@
         </p:nvSpPr>
         <p:spPr>
           <a:xfrm>
-            <a:off x="548640" y="960120"/>
+            <a:off x="548640" y="1051560"/>
             <a:ext cx="10972800" cy="0"/>
           </a:xfrm>
           <a:prstGeom prst="line">
@@ -6065,12 +6051,12 @@
         </p:nvSpPr>
         <p:spPr>
           <a:xfrm>
-            <a:off x="731520" y="1371600"/>
-            <a:ext cx="5029200" cy="3657600"/>
+            <a:off x="731520" y="1463040"/>
+            <a:ext cx="5029200" cy="3840480"/>
           </a:xfrm>
           <a:prstGeom prst="roundRect">
             <a:avLst>
-              <a:gd name="adj" fmla="val 3000"/>
+              <a:gd name="adj" fmla="val 2857"/>
             </a:avLst>
           </a:prstGeom>
           <a:solidFill>
@@ -6087,8 +6073,8 @@
         </p:nvSpPr>
         <p:spPr>
           <a:xfrm>
-            <a:off x="1005840" y="1554480"/>
-            <a:ext cx="4480560" cy="3291840"/>
+            <a:off x="1005840" y="1645920"/>
+            <a:ext cx="4480560" cy="3474720"/>
           </a:xfrm>
           <a:prstGeom prst="rect">
             <a:avLst/>
@@ -6100,11 +6086,11 @@
           <a:bodyPr wrap="square" rtlCol="0" anchor="t"/>
           <a:lstStyle/>
           <a:p>
-            <a:pPr algn="l" indent="0" marL="0">
-              <a:buNone/>
-            </a:pPr>
-            <a:r>
-              <a:rPr lang="en-US" sz="1800" b="1" dirty="0">
+            <a:pPr indent="0" marL="0">
+              <a:buNone/>
+            </a:pPr>
+            <a:r>
+              <a:rPr lang="en-US" sz="2200" b="1" dirty="0">
                 <a:solidFill>
                   <a:srgbClr val="27AE60"/>
                 </a:solidFill>
@@ -6114,14 +6100,14 @@
               </a:rPr>
               <a:t>🧠 实验组（自适应）</a:t>
             </a:r>
-            <a:pPr algn="l" indent="0" marL="0">
-              <a:buNone/>
-            </a:pPr>
-            <a:pPr algn="l" indent="0" marL="0">
-              <a:buNone/>
-            </a:pPr>
-            <a:r>
-              <a:rPr lang="en-US" sz="1400" dirty="0">
+            <a:pPr indent="0" marL="0">
+              <a:buNone/>
+            </a:pPr>
+            <a:pPr indent="0" marL="0">
+              <a:buNone/>
+            </a:pPr>
+            <a:r>
+              <a:rPr lang="en-US" sz="1700" dirty="0">
                 <a:solidFill>
                   <a:srgbClr val="2C3E50"/>
                 </a:solidFill>
@@ -6131,11 +6117,11 @@
               </a:rPr>
               <a:t>• n ≈ 15</a:t>
             </a:r>
-            <a:pPr algn="l" indent="0" marL="0">
-              <a:buNone/>
-            </a:pPr>
-            <a:r>
-              <a:rPr lang="en-US" sz="1400" dirty="0">
+            <a:pPr indent="0" marL="0">
+              <a:buNone/>
+            </a:pPr>
+            <a:r>
+              <a:rPr lang="en-US" sz="1700" dirty="0">
                 <a:solidFill>
                   <a:srgbClr val="2C3E50"/>
                 </a:solidFill>
@@ -6145,11 +6131,11 @@
               </a:rPr>
               <a:t>• 自适应难度训练</a:t>
             </a:r>
-            <a:pPr algn="l" indent="0" marL="0">
-              <a:buNone/>
-            </a:pPr>
-            <a:r>
-              <a:rPr lang="en-US" sz="1400" dirty="0">
+            <a:pPr indent="0" marL="0">
+              <a:buNone/>
+            </a:pPr>
+            <a:r>
+              <a:rPr lang="en-US" sz="1700" dirty="0">
                 <a:solidFill>
                   <a:srgbClr val="2C3E50"/>
                 </a:solidFill>
@@ -6159,11 +6145,11 @@
               </a:rPr>
               <a:t>• 干扰比例 50%→80% 动态爬升</a:t>
             </a:r>
-            <a:pPr algn="l" indent="0" marL="0">
-              <a:buNone/>
-            </a:pPr>
-            <a:r>
-              <a:rPr lang="en-US" sz="1400" dirty="0">
+            <a:pPr indent="0" marL="0">
+              <a:buNone/>
+            </a:pPr>
+            <a:r>
+              <a:rPr lang="en-US" sz="1700" dirty="0">
                 <a:solidFill>
                   <a:srgbClr val="2C3E50"/>
                 </a:solidFill>
@@ -6173,11 +6159,11 @@
               </a:rPr>
               <a:t>• 呈现时间 1500ms→500ms</a:t>
             </a:r>
-            <a:pPr algn="l" indent="0" marL="0">
-              <a:buNone/>
-            </a:pPr>
-            <a:r>
-              <a:rPr lang="en-US" sz="1400" dirty="0">
+            <a:pPr indent="0" marL="0">
+              <a:buNone/>
+            </a:pPr>
+            <a:r>
+              <a:rPr lang="en-US" sz="1700" dirty="0">
                 <a:solidFill>
                   <a:srgbClr val="2C3E50"/>
                 </a:solidFill>
@@ -6187,7 +6173,7 @@
               </a:rPr>
               <a:t>• 每天1次 × 5组 × 7天</a:t>
             </a:r>
-            <a:endParaRPr lang="en-US" sz="1800" dirty="0"/>
+            <a:endParaRPr lang="en-US" sz="2200" dirty="0"/>
           </a:p>
         </p:txBody>
       </p:sp>
@@ -6199,12 +6185,12 @@
         </p:nvSpPr>
         <p:spPr>
           <a:xfrm>
-            <a:off x="6400800" y="1371600"/>
-            <a:ext cx="5029200" cy="3657600"/>
+            <a:off x="6400800" y="1463040"/>
+            <a:ext cx="5029200" cy="3840480"/>
           </a:xfrm>
           <a:prstGeom prst="roundRect">
             <a:avLst>
-              <a:gd name="adj" fmla="val 3000"/>
+              <a:gd name="adj" fmla="val 2857"/>
             </a:avLst>
           </a:prstGeom>
           <a:solidFill>
@@ -6221,8 +6207,8 @@
         </p:nvSpPr>
         <p:spPr>
           <a:xfrm>
-            <a:off x="6675120" y="1554480"/>
-            <a:ext cx="4480560" cy="3291840"/>
+            <a:off x="6675120" y="1645920"/>
+            <a:ext cx="4480560" cy="3474720"/>
           </a:xfrm>
           <a:prstGeom prst="rect">
             <a:avLst/>
@@ -6234,11 +6220,11 @@
           <a:bodyPr wrap="square" rtlCol="0" anchor="t"/>
           <a:lstStyle/>
           <a:p>
-            <a:pPr algn="l" indent="0" marL="0">
-              <a:buNone/>
-            </a:pPr>
-            <a:r>
-              <a:rPr lang="en-US" sz="1800" b="1" dirty="0">
+            <a:pPr indent="0" marL="0">
+              <a:buNone/>
+            </a:pPr>
+            <a:r>
+              <a:rPr lang="en-US" sz="2200" b="1" dirty="0">
                 <a:solidFill>
                   <a:srgbClr val="E74C3C"/>
                 </a:solidFill>
@@ -6248,14 +6234,14 @@
               </a:rPr>
               <a:t>📌 对照组（固定难度）</a:t>
             </a:r>
-            <a:pPr algn="l" indent="0" marL="0">
-              <a:buNone/>
-            </a:pPr>
-            <a:pPr algn="l" indent="0" marL="0">
-              <a:buNone/>
-            </a:pPr>
-            <a:r>
-              <a:rPr lang="en-US" sz="1400" dirty="0">
+            <a:pPr indent="0" marL="0">
+              <a:buNone/>
+            </a:pPr>
+            <a:pPr indent="0" marL="0">
+              <a:buNone/>
+            </a:pPr>
+            <a:r>
+              <a:rPr lang="en-US" sz="1700" dirty="0">
                 <a:solidFill>
                   <a:srgbClr val="2C3E50"/>
                 </a:solidFill>
@@ -6265,11 +6251,11 @@
               </a:rPr>
               <a:t>• n ≈ 15</a:t>
             </a:r>
-            <a:pPr algn="l" indent="0" marL="0">
-              <a:buNone/>
-            </a:pPr>
-            <a:r>
-              <a:rPr lang="en-US" sz="1400" dirty="0">
+            <a:pPr indent="0" marL="0">
+              <a:buNone/>
+            </a:pPr>
+            <a:r>
+              <a:rPr lang="en-US" sz="1700" dirty="0">
                 <a:solidFill>
                   <a:srgbClr val="2C3E50"/>
                 </a:solidFill>
@@ -6279,11 +6265,11 @@
               </a:rPr>
               <a:t>• 固定中等难度训练</a:t>
             </a:r>
-            <a:pPr algn="l" indent="0" marL="0">
-              <a:buNone/>
-            </a:pPr>
-            <a:r>
-              <a:rPr lang="en-US" sz="1400" dirty="0">
+            <a:pPr indent="0" marL="0">
+              <a:buNone/>
+            </a:pPr>
+            <a:r>
+              <a:rPr lang="en-US" sz="1700" dirty="0">
                 <a:solidFill>
                   <a:srgbClr val="2C3E50"/>
                 </a:solidFill>
@@ -6293,11 +6279,11 @@
               </a:rPr>
               <a:t>• 干扰比例始终 50%</a:t>
             </a:r>
-            <a:pPr algn="l" indent="0" marL="0">
-              <a:buNone/>
-            </a:pPr>
-            <a:r>
-              <a:rPr lang="en-US" sz="1400" dirty="0">
+            <a:pPr indent="0" marL="0">
+              <a:buNone/>
+            </a:pPr>
+            <a:r>
+              <a:rPr lang="en-US" sz="1700" dirty="0">
                 <a:solidFill>
                   <a:srgbClr val="2C3E50"/>
                 </a:solidFill>
@@ -6307,11 +6293,11 @@
               </a:rPr>
               <a:t>• 呈现时间始终 1500ms</a:t>
             </a:r>
-            <a:pPr algn="l" indent="0" marL="0">
-              <a:buNone/>
-            </a:pPr>
-            <a:r>
-              <a:rPr lang="en-US" sz="1400" dirty="0">
+            <a:pPr indent="0" marL="0">
+              <a:buNone/>
+            </a:pPr>
+            <a:r>
+              <a:rPr lang="en-US" sz="1700" dirty="0">
                 <a:solidFill>
                   <a:srgbClr val="2C3E50"/>
                 </a:solidFill>
@@ -6321,7 +6307,7 @@
               </a:rPr>
               <a:t>• 每天1次 × 5组 × 7天</a:t>
             </a:r>
-            <a:endParaRPr lang="en-US" sz="1800" dirty="0"/>
+            <a:endParaRPr lang="en-US" sz="2200" dirty="0"/>
           </a:p>
         </p:txBody>
       </p:sp>
@@ -6333,8 +6319,8 @@
         </p:nvSpPr>
         <p:spPr>
           <a:xfrm>
-            <a:off x="731520" y="5303520"/>
-            <a:ext cx="2743200" cy="365760"/>
+            <a:off x="731520" y="5486400"/>
+            <a:ext cx="2743200" cy="457200"/>
           </a:xfrm>
           <a:prstGeom prst="rect">
             <a:avLst/>
@@ -6350,7 +6336,7 @@
               <a:buNone/>
             </a:pPr>
             <a:r>
-              <a:rPr lang="en-US" sz="1400" b="1" dirty="0">
+              <a:rPr lang="en-US" sz="1800" b="1" dirty="0">
                 <a:solidFill>
                   <a:srgbClr val="3498DB"/>
                 </a:solidFill>
@@ -6360,7 +6346,7 @@
               </a:rPr>
               <a:t>评估指标</a:t>
             </a:r>
-            <a:endParaRPr lang="en-US" sz="1400" dirty="0"/>
+            <a:endParaRPr lang="en-US" sz="1800" dirty="0"/>
           </a:p>
         </p:txBody>
       </p:sp>
@@ -6372,8 +6358,8 @@
         </p:nvSpPr>
         <p:spPr>
           <a:xfrm>
-            <a:off x="731520" y="5669280"/>
-            <a:ext cx="6400800" cy="365760"/>
+            <a:off x="731520" y="5943600"/>
+            <a:ext cx="10972800" cy="457200"/>
           </a:xfrm>
           <a:prstGeom prst="rect">
             <a:avLst/>
@@ -6389,7 +6375,7 @@
               <a:buNone/>
             </a:pPr>
             <a:r>
-              <a:rPr lang="en-US" sz="1400" dirty="0">
+              <a:rPr lang="en-US" sz="1600" dirty="0">
                 <a:solidFill>
                   <a:srgbClr val="2C3E50"/>
                 </a:solidFill>
@@ -6397,9 +6383,9 @@
                 <a:ea typeface="Microsoft YaHei" pitchFamily="34" charset="-122"/>
                 <a:cs typeface="Microsoft YaHei" pitchFamily="34" charset="-120"/>
               </a:rPr>
-              <a:t>① 干扰效应降低率  ② 反应时变化趋势  ③ 训练坚持率  ④ 主观满意度</a:t>
-            </a:r>
-            <a:endParaRPr lang="en-US" sz="1400" dirty="0"/>
+              <a:t>① 干扰效应降低率    ② 反应时变化趋势    ③ 训练坚持率    ④ 主观满意度</a:t>
+            </a:r>
+            <a:endParaRPr lang="en-US" sz="1600" dirty="0"/>
           </a:p>
         </p:txBody>
       </p:sp>
@@ -6437,7 +6423,7 @@
         <p:spPr>
           <a:xfrm>
             <a:off x="548640" y="274320"/>
-            <a:ext cx="10972800" cy="640080"/>
+            <a:ext cx="10972800" cy="731520"/>
           </a:xfrm>
           <a:prstGeom prst="rect">
             <a:avLst/>
@@ -6453,7 +6439,7 @@
               <a:buNone/>
             </a:pPr>
             <a:r>
-              <a:rPr lang="en-US" sz="2600" b="1" dirty="0">
+              <a:rPr lang="en-US" sz="3000" b="1" dirty="0">
                 <a:solidFill>
                   <a:srgbClr val="2C3E50"/>
                 </a:solidFill>
@@ -6463,7 +6449,7 @@
               </a:rPr>
               <a:t>★ 初步实验结果（10次训练 · 真实数据）</a:t>
             </a:r>
-            <a:endParaRPr lang="en-US" sz="2600" dirty="0"/>
+            <a:endParaRPr lang="en-US" sz="3000" dirty="0"/>
           </a:p>
         </p:txBody>
       </p:sp>
@@ -6475,7 +6461,7 @@
         </p:nvSpPr>
         <p:spPr>
           <a:xfrm>
-            <a:off x="548640" y="960120"/>
+            <a:off x="548640" y="1051560"/>
             <a:ext cx="10972800" cy="0"/>
           </a:xfrm>
           <a:prstGeom prst="line">
@@ -6505,7 +6491,7 @@
           </p:nvPr>
         </p:nvGraphicFramePr>
         <p:xfrm>
-          <a:off x="731520" y="1188720"/>
+          <a:off x="731520" y="1280160"/>
           <a:ext cx="10515600" cy="914400"/>
         </p:xfrm>
         <a:graphic>
@@ -6518,7 +6504,7 @@
                 <a:gridCol w="2286000"/>
                 <a:gridCol w="2286000"/>
               </a:tblGrid>
-              <a:tr h="411480">
+              <a:tr h="502920">
                 <a:tc>
                   <a:txBody>
                     <a:bodyPr/>
@@ -6528,7 +6514,7 @@
                         <a:buNone/>
                       </a:pPr>
                       <a:r>
-                        <a:rPr lang="en-US" sz="1300" b="1" dirty="0">
+                        <a:rPr lang="en-US" sz="1600" b="1" dirty="0">
                           <a:solidFill>
                             <a:srgbClr val="FFFFFF"/>
                           </a:solidFill>
@@ -6538,7 +6524,7 @@
                         </a:rPr>
                         <a:t>指标</a:t>
                       </a:r>
-                      <a:endParaRPr lang="en-US" sz="1300" dirty="0">
+                      <a:endParaRPr lang="en-US" sz="1600" dirty="0">
                         <a:latin typeface="Microsoft YaHei" charset="0"/>
                         <a:ea typeface="Microsoft YaHei" charset="0"/>
                         <a:cs typeface="Microsoft YaHei" charset="0"/>
@@ -6596,7 +6582,7 @@
                         <a:buNone/>
                       </a:pPr>
                       <a:r>
-                        <a:rPr lang="en-US" sz="1300" b="1" dirty="0">
+                        <a:rPr lang="en-US" sz="1600" b="1" dirty="0">
                           <a:solidFill>
                             <a:srgbClr val="FFFFFF"/>
                           </a:solidFill>
@@ -6606,7 +6592,7 @@
                         </a:rPr>
                         <a:t>首次训练</a:t>
                       </a:r>
-                      <a:endParaRPr lang="en-US" sz="1300" dirty="0">
+                      <a:endParaRPr lang="en-US" sz="1600" dirty="0">
                         <a:latin typeface="Microsoft YaHei" charset="0"/>
                         <a:ea typeface="Microsoft YaHei" charset="0"/>
                         <a:cs typeface="Microsoft YaHei" charset="0"/>
@@ -6664,7 +6650,7 @@
                         <a:buNone/>
                       </a:pPr>
                       <a:r>
-                        <a:rPr lang="en-US" sz="1300" b="1" dirty="0">
+                        <a:rPr lang="en-US" sz="1600" b="1" dirty="0">
                           <a:solidFill>
                             <a:srgbClr val="FFFFFF"/>
                           </a:solidFill>
@@ -6674,7 +6660,7 @@
                         </a:rPr>
                         <a:t>末次训练</a:t>
                       </a:r>
-                      <a:endParaRPr lang="en-US" sz="1300" dirty="0">
+                      <a:endParaRPr lang="en-US" sz="1600" dirty="0">
                         <a:latin typeface="Microsoft YaHei" charset="0"/>
                         <a:ea typeface="Microsoft YaHei" charset="0"/>
                         <a:cs typeface="Microsoft YaHei" charset="0"/>
@@ -6732,7 +6718,7 @@
                         <a:buNone/>
                       </a:pPr>
                       <a:r>
-                        <a:rPr lang="en-US" sz="1300" b="1" dirty="0">
+                        <a:rPr lang="en-US" sz="1600" b="1" dirty="0">
                           <a:solidFill>
                             <a:srgbClr val="FFFFFF"/>
                           </a:solidFill>
@@ -6742,7 +6728,7 @@
                         </a:rPr>
                         <a:t>变化</a:t>
                       </a:r>
-                      <a:endParaRPr lang="en-US" sz="1300" dirty="0">
+                      <a:endParaRPr lang="en-US" sz="1600" dirty="0">
                         <a:latin typeface="Microsoft YaHei" charset="0"/>
                         <a:ea typeface="Microsoft YaHei" charset="0"/>
                         <a:cs typeface="Microsoft YaHei" charset="0"/>
@@ -6792,7 +6778,7 @@
                   </a:tcPr>
                 </a:tc>
               </a:tr>
-              <a:tr h="411480">
+              <a:tr h="502920">
                 <a:tc>
                   <a:txBody>
                     <a:bodyPr/>
@@ -6802,9 +6788,9 @@
                         <a:buNone/>
                       </a:pPr>
                       <a:r>
-                        <a:rPr lang="en-US" sz="1300" dirty="0">
+                        <a:rPr lang="en-US" sz="1600" dirty="0">
                           <a:solidFill>
-                            <a:srgbClr val="000000"/>
+                            <a:srgbClr val="2C3E50"/>
                           </a:solidFill>
                           <a:latin typeface="Microsoft YaHei" pitchFamily="34" charset="0"/>
                           <a:ea typeface="Microsoft YaHei" pitchFamily="34" charset="-122"/>
@@ -6812,7 +6798,7 @@
                         </a:rPr>
                         <a:t>平均反应时</a:t>
                       </a:r>
-                      <a:endParaRPr lang="en-US" sz="1300" dirty="0">
+                      <a:endParaRPr lang="en-US" sz="1600" dirty="0">
                         <a:latin typeface="Microsoft YaHei" charset="0"/>
                         <a:ea typeface="Microsoft YaHei" charset="0"/>
                         <a:cs typeface="Microsoft YaHei" charset="0"/>
@@ -6867,9 +6853,9 @@
                         <a:buNone/>
                       </a:pPr>
                       <a:r>
-                        <a:rPr lang="en-US" sz="1300" dirty="0">
+                        <a:rPr lang="en-US" sz="1600" dirty="0">
                           <a:solidFill>
-                            <a:srgbClr val="000000"/>
+                            <a:srgbClr val="2C3E50"/>
                           </a:solidFill>
                           <a:latin typeface="Microsoft YaHei" pitchFamily="34" charset="0"/>
                           <a:ea typeface="Microsoft YaHei" pitchFamily="34" charset="-122"/>
@@ -6877,7 +6863,7 @@
                         </a:rPr>
                         <a:t>744 ms</a:t>
                       </a:r>
-                      <a:endParaRPr lang="en-US" sz="1300" dirty="0">
+                      <a:endParaRPr lang="en-US" sz="1600" dirty="0">
                         <a:latin typeface="Microsoft YaHei" charset="0"/>
                         <a:ea typeface="Microsoft YaHei" charset="0"/>
                         <a:cs typeface="Microsoft YaHei" charset="0"/>
@@ -6932,9 +6918,9 @@
                         <a:buNone/>
                       </a:pPr>
                       <a:r>
-                        <a:rPr lang="en-US" sz="1300" dirty="0">
+                        <a:rPr lang="en-US" sz="1600" dirty="0">
                           <a:solidFill>
-                            <a:srgbClr val="000000"/>
+                            <a:srgbClr val="2C3E50"/>
                           </a:solidFill>
                           <a:latin typeface="Microsoft YaHei" pitchFamily="34" charset="0"/>
                           <a:ea typeface="Microsoft YaHei" pitchFamily="34" charset="-122"/>
@@ -6942,7 +6928,7 @@
                         </a:rPr>
                         <a:t>427 ms</a:t>
                       </a:r>
-                      <a:endParaRPr lang="en-US" sz="1300" dirty="0">
+                      <a:endParaRPr lang="en-US" sz="1600" dirty="0">
                         <a:latin typeface="Microsoft YaHei" charset="0"/>
                         <a:ea typeface="Microsoft YaHei" charset="0"/>
                         <a:cs typeface="Microsoft YaHei" charset="0"/>
@@ -6997,7 +6983,7 @@
                         <a:buNone/>
                       </a:pPr>
                       <a:r>
-                        <a:rPr lang="en-US" sz="1300" b="1" dirty="0">
+                        <a:rPr lang="en-US" sz="1600" b="1" dirty="0">
                           <a:solidFill>
                             <a:srgbClr val="27AE60"/>
                           </a:solidFill>
@@ -7007,7 +6993,7 @@
                         </a:rPr>
                         <a:t>↓ 42.6%</a:t>
                       </a:r>
-                      <a:endParaRPr lang="en-US" sz="1300" dirty="0">
+                      <a:endParaRPr lang="en-US" sz="1600" dirty="0">
                         <a:latin typeface="Microsoft YaHei" charset="0"/>
                         <a:ea typeface="Microsoft YaHei" charset="0"/>
                         <a:cs typeface="Microsoft YaHei" charset="0"/>
@@ -7054,7 +7040,7 @@
                   </a:tcPr>
                 </a:tc>
               </a:tr>
-              <a:tr h="411480">
+              <a:tr h="502920">
                 <a:tc>
                   <a:txBody>
                     <a:bodyPr/>
@@ -7064,9 +7050,9 @@
                         <a:buNone/>
                       </a:pPr>
                       <a:r>
-                        <a:rPr lang="en-US" sz="1300" dirty="0">
+                        <a:rPr lang="en-US" sz="1600" dirty="0">
                           <a:solidFill>
-                            <a:srgbClr val="000000"/>
+                            <a:srgbClr val="2C3E50"/>
                           </a:solidFill>
                           <a:latin typeface="Microsoft YaHei" pitchFamily="34" charset="0"/>
                           <a:ea typeface="Microsoft YaHei" pitchFamily="34" charset="-122"/>
@@ -7074,7 +7060,7 @@
                         </a:rPr>
                         <a:t>干扰效应量</a:t>
                       </a:r>
-                      <a:endParaRPr lang="en-US" sz="1300" dirty="0">
+                      <a:endParaRPr lang="en-US" sz="1600" dirty="0">
                         <a:latin typeface="Microsoft YaHei" charset="0"/>
                         <a:ea typeface="Microsoft YaHei" charset="0"/>
                         <a:cs typeface="Microsoft YaHei" charset="0"/>
@@ -7129,9 +7115,9 @@
                         <a:buNone/>
                       </a:pPr>
                       <a:r>
-                        <a:rPr lang="en-US" sz="1300" dirty="0">
+                        <a:rPr lang="en-US" sz="1600" dirty="0">
                           <a:solidFill>
-                            <a:srgbClr val="000000"/>
+                            <a:srgbClr val="2C3E50"/>
                           </a:solidFill>
                           <a:latin typeface="Microsoft YaHei" pitchFamily="34" charset="0"/>
                           <a:ea typeface="Microsoft YaHei" pitchFamily="34" charset="-122"/>
@@ -7139,7 +7125,7 @@
                         </a:rPr>
                         <a:t>~138 ms</a:t>
                       </a:r>
-                      <a:endParaRPr lang="en-US" sz="1300" dirty="0">
+                      <a:endParaRPr lang="en-US" sz="1600" dirty="0">
                         <a:latin typeface="Microsoft YaHei" charset="0"/>
                         <a:ea typeface="Microsoft YaHei" charset="0"/>
                         <a:cs typeface="Microsoft YaHei" charset="0"/>
@@ -7194,9 +7180,9 @@
                         <a:buNone/>
                       </a:pPr>
                       <a:r>
-                        <a:rPr lang="en-US" sz="1300" dirty="0">
+                        <a:rPr lang="en-US" sz="1600" dirty="0">
                           <a:solidFill>
-                            <a:srgbClr val="000000"/>
+                            <a:srgbClr val="2C3E50"/>
                           </a:solidFill>
                           <a:latin typeface="Microsoft YaHei" pitchFamily="34" charset="0"/>
                           <a:ea typeface="Microsoft YaHei" pitchFamily="34" charset="-122"/>
@@ -7204,7 +7190,7 @@
                         </a:rPr>
                         <a:t>~23 ms</a:t>
                       </a:r>
-                      <a:endParaRPr lang="en-US" sz="1300" dirty="0">
+                      <a:endParaRPr lang="en-US" sz="1600" dirty="0">
                         <a:latin typeface="Microsoft YaHei" charset="0"/>
                         <a:ea typeface="Microsoft YaHei" charset="0"/>
                         <a:cs typeface="Microsoft YaHei" charset="0"/>
@@ -7259,7 +7245,7 @@
                         <a:buNone/>
                       </a:pPr>
                       <a:r>
-                        <a:rPr lang="en-US" sz="1300" b="1" dirty="0">
+                        <a:rPr lang="en-US" sz="1600" b="1" dirty="0">
                           <a:solidFill>
                             <a:srgbClr val="27AE60"/>
                           </a:solidFill>
@@ -7269,7 +7255,7 @@
                         </a:rPr>
                         <a:t>↓ 83%</a:t>
                       </a:r>
-                      <a:endParaRPr lang="en-US" sz="1300" dirty="0">
+                      <a:endParaRPr lang="en-US" sz="1600" dirty="0">
                         <a:latin typeface="Microsoft YaHei" charset="0"/>
                         <a:ea typeface="Microsoft YaHei" charset="0"/>
                         <a:cs typeface="Microsoft YaHei" charset="0"/>
@@ -7316,7 +7302,7 @@
                   </a:tcPr>
                 </a:tc>
               </a:tr>
-              <a:tr h="411480">
+              <a:tr h="502920">
                 <a:tc>
                   <a:txBody>
                     <a:bodyPr/>
@@ -7326,9 +7312,9 @@
                         <a:buNone/>
                       </a:pPr>
                       <a:r>
-                        <a:rPr lang="en-US" sz="1300" dirty="0">
+                        <a:rPr lang="en-US" sz="1600" dirty="0">
                           <a:solidFill>
-                            <a:srgbClr val="000000"/>
+                            <a:srgbClr val="2C3E50"/>
                           </a:solidFill>
                           <a:latin typeface="Microsoft YaHei" pitchFamily="34" charset="0"/>
                           <a:ea typeface="Microsoft YaHei" pitchFamily="34" charset="-122"/>
@@ -7336,7 +7322,7 @@
                         </a:rPr>
                         <a:t>干扰比例</a:t>
                       </a:r>
-                      <a:endParaRPr lang="en-US" sz="1300" dirty="0">
+                      <a:endParaRPr lang="en-US" sz="1600" dirty="0">
                         <a:latin typeface="Microsoft YaHei" charset="0"/>
                         <a:ea typeface="Microsoft YaHei" charset="0"/>
                         <a:cs typeface="Microsoft YaHei" charset="0"/>
@@ -7391,9 +7377,9 @@
                         <a:buNone/>
                       </a:pPr>
                       <a:r>
-                        <a:rPr lang="en-US" sz="1300" dirty="0">
+                        <a:rPr lang="en-US" sz="1600" dirty="0">
                           <a:solidFill>
-                            <a:srgbClr val="000000"/>
+                            <a:srgbClr val="2C3E50"/>
                           </a:solidFill>
                           <a:latin typeface="Microsoft YaHei" pitchFamily="34" charset="0"/>
                           <a:ea typeface="Microsoft YaHei" pitchFamily="34" charset="-122"/>
@@ -7401,7 +7387,7 @@
                         </a:rPr>
                         <a:t>50%</a:t>
                       </a:r>
-                      <a:endParaRPr lang="en-US" sz="1300" dirty="0">
+                      <a:endParaRPr lang="en-US" sz="1600" dirty="0">
                         <a:latin typeface="Microsoft YaHei" charset="0"/>
                         <a:ea typeface="Microsoft YaHei" charset="0"/>
                         <a:cs typeface="Microsoft YaHei" charset="0"/>
@@ -7456,9 +7442,9 @@
                         <a:buNone/>
                       </a:pPr>
                       <a:r>
-                        <a:rPr lang="en-US" sz="1300" dirty="0">
+                        <a:rPr lang="en-US" sz="1600" dirty="0">
                           <a:solidFill>
-                            <a:srgbClr val="000000"/>
+                            <a:srgbClr val="2C3E50"/>
                           </a:solidFill>
                           <a:latin typeface="Microsoft YaHei" pitchFamily="34" charset="0"/>
                           <a:ea typeface="Microsoft YaHei" pitchFamily="34" charset="-122"/>
@@ -7466,7 +7452,7 @@
                         </a:rPr>
                         <a:t>80%</a:t>
                       </a:r>
-                      <a:endParaRPr lang="en-US" sz="1300" dirty="0">
+                      <a:endParaRPr lang="en-US" sz="1600" dirty="0">
                         <a:latin typeface="Microsoft YaHei" charset="0"/>
                         <a:ea typeface="Microsoft YaHei" charset="0"/>
                         <a:cs typeface="Microsoft YaHei" charset="0"/>
@@ -7521,7 +7507,7 @@
                         <a:buNone/>
                       </a:pPr>
                       <a:r>
-                        <a:rPr lang="en-US" sz="1300" b="1" dirty="0">
+                        <a:rPr lang="en-US" sz="1600" b="1" dirty="0">
                           <a:solidFill>
                             <a:srgbClr val="E67E22"/>
                           </a:solidFill>
@@ -7531,7 +7517,7 @@
                         </a:rPr>
                         <a:t>↑ 30pp</a:t>
                       </a:r>
-                      <a:endParaRPr lang="en-US" sz="1300" dirty="0">
+                      <a:endParaRPr lang="en-US" sz="1600" dirty="0">
                         <a:latin typeface="Microsoft YaHei" charset="0"/>
                         <a:ea typeface="Microsoft YaHei" charset="0"/>
                         <a:cs typeface="Microsoft YaHei" charset="0"/>
@@ -7578,7 +7564,7 @@
                   </a:tcPr>
                 </a:tc>
               </a:tr>
-              <a:tr h="411480">
+              <a:tr h="502920">
                 <a:tc>
                   <a:txBody>
                     <a:bodyPr/>
@@ -7588,9 +7574,9 @@
                         <a:buNone/>
                       </a:pPr>
                       <a:r>
-                        <a:rPr lang="en-US" sz="1300" dirty="0">
+                        <a:rPr lang="en-US" sz="1600" dirty="0">
                           <a:solidFill>
-                            <a:srgbClr val="000000"/>
+                            <a:srgbClr val="2C3E50"/>
                           </a:solidFill>
                           <a:latin typeface="Microsoft YaHei" pitchFamily="34" charset="0"/>
                           <a:ea typeface="Microsoft YaHei" pitchFamily="34" charset="-122"/>
@@ -7598,7 +7584,7 @@
                         </a:rPr>
                         <a:t>呈现时间</a:t>
                       </a:r>
-                      <a:endParaRPr lang="en-US" sz="1300" dirty="0">
+                      <a:endParaRPr lang="en-US" sz="1600" dirty="0">
                         <a:latin typeface="Microsoft YaHei" charset="0"/>
                         <a:ea typeface="Microsoft YaHei" charset="0"/>
                         <a:cs typeface="Microsoft YaHei" charset="0"/>
@@ -7653,9 +7639,9 @@
                         <a:buNone/>
                       </a:pPr>
                       <a:r>
-                        <a:rPr lang="en-US" sz="1300" dirty="0">
+                        <a:rPr lang="en-US" sz="1600" dirty="0">
                           <a:solidFill>
-                            <a:srgbClr val="000000"/>
+                            <a:srgbClr val="2C3E50"/>
                           </a:solidFill>
                           <a:latin typeface="Microsoft YaHei" pitchFamily="34" charset="0"/>
                           <a:ea typeface="Microsoft YaHei" pitchFamily="34" charset="-122"/>
@@ -7663,7 +7649,7 @@
                         </a:rPr>
                         <a:t>1500 ms</a:t>
                       </a:r>
-                      <a:endParaRPr lang="en-US" sz="1300" dirty="0">
+                      <a:endParaRPr lang="en-US" sz="1600" dirty="0">
                         <a:latin typeface="Microsoft YaHei" charset="0"/>
                         <a:ea typeface="Microsoft YaHei" charset="0"/>
                         <a:cs typeface="Microsoft YaHei" charset="0"/>
@@ -7718,9 +7704,9 @@
                         <a:buNone/>
                       </a:pPr>
                       <a:r>
-                        <a:rPr lang="en-US" sz="1300" dirty="0">
+                        <a:rPr lang="en-US" sz="1600" dirty="0">
                           <a:solidFill>
-                            <a:srgbClr val="000000"/>
+                            <a:srgbClr val="2C3E50"/>
                           </a:solidFill>
                           <a:latin typeface="Microsoft YaHei" pitchFamily="34" charset="0"/>
                           <a:ea typeface="Microsoft YaHei" pitchFamily="34" charset="-122"/>
@@ -7728,7 +7714,7 @@
                         </a:rPr>
                         <a:t>500 ms</a:t>
                       </a:r>
-                      <a:endParaRPr lang="en-US" sz="1300" dirty="0">
+                      <a:endParaRPr lang="en-US" sz="1600" dirty="0">
                         <a:latin typeface="Microsoft YaHei" charset="0"/>
                         <a:ea typeface="Microsoft YaHei" charset="0"/>
                         <a:cs typeface="Microsoft YaHei" charset="0"/>
@@ -7783,7 +7769,7 @@
                         <a:buNone/>
                       </a:pPr>
                       <a:r>
-                        <a:rPr lang="en-US" sz="1300" b="1" dirty="0">
+                        <a:rPr lang="en-US" sz="1600" b="1" dirty="0">
                           <a:solidFill>
                             <a:srgbClr val="E67E22"/>
                           </a:solidFill>
@@ -7793,7 +7779,7 @@
                         </a:rPr>
                         <a:t>↓ 67%</a:t>
                       </a:r>
-                      <a:endParaRPr lang="en-US" sz="1300" dirty="0">
+                      <a:endParaRPr lang="en-US" sz="1600" dirty="0">
                         <a:latin typeface="Microsoft YaHei" charset="0"/>
                         <a:ea typeface="Microsoft YaHei" charset="0"/>
                         <a:cs typeface="Microsoft YaHei" charset="0"/>
@@ -7852,12 +7838,12 @@
         </p:nvSpPr>
         <p:spPr>
           <a:xfrm>
-            <a:off x="731520" y="3840480"/>
-            <a:ext cx="10515600" cy="2560320"/>
+            <a:off x="731520" y="4114800"/>
+            <a:ext cx="10515600" cy="2377440"/>
           </a:xfrm>
           <a:prstGeom prst="roundRect">
             <a:avLst>
-              <a:gd name="adj" fmla="val 4286"/>
+              <a:gd name="adj" fmla="val 4615"/>
             </a:avLst>
           </a:prstGeom>
           <a:solidFill>
@@ -7874,8 +7860,8 @@
         </p:nvSpPr>
         <p:spPr>
           <a:xfrm>
-            <a:off x="1005840" y="4023360"/>
-            <a:ext cx="9966960" cy="2194560"/>
+            <a:off x="1005840" y="4297680"/>
+            <a:ext cx="9966960" cy="2011680"/>
           </a:xfrm>
           <a:prstGeom prst="rect">
             <a:avLst/>
@@ -7887,11 +7873,11 @@
           <a:bodyPr wrap="square" rtlCol="0" anchor="t"/>
           <a:lstStyle/>
           <a:p>
-            <a:pPr algn="l" indent="0" marL="0">
-              <a:buNone/>
-            </a:pPr>
-            <a:r>
-              <a:rPr lang="en-US" sz="1600" b="1" dirty="0">
+            <a:pPr indent="0" marL="0">
+              <a:buNone/>
+            </a:pPr>
+            <a:r>
+              <a:rPr lang="en-US" sz="2000" b="1" dirty="0">
                 <a:solidFill>
                   <a:srgbClr val="3498DB"/>
                 </a:solidFill>
@@ -7901,14 +7887,14 @@
               </a:rPr>
               <a:t>关键发现</a:t>
             </a:r>
-            <a:pPr algn="l" indent="0" marL="0">
-              <a:buNone/>
-            </a:pPr>
-            <a:pPr algn="l" indent="0" marL="0">
-              <a:buNone/>
-            </a:pPr>
-            <a:r>
-              <a:rPr lang="en-US" sz="1300" dirty="0">
+            <a:pPr indent="0" marL="0">
+              <a:buNone/>
+            </a:pPr>
+            <a:pPr indent="0" marL="0">
+              <a:buNone/>
+            </a:pPr>
+            <a:r>
+              <a:rPr lang="en-US" sz="1600" dirty="0">
                 <a:solidFill>
                   <a:srgbClr val="2C3E50"/>
                 </a:solidFill>
@@ -7916,13 +7902,13 @@
                 <a:ea typeface="Microsoft YaHei" pitchFamily="34" charset="-122"/>
                 <a:cs typeface="Microsoft YaHei" pitchFamily="34" charset="-120"/>
               </a:rPr>
-              <a:t>✅ 反应时下降43%且正确率维持在95%+ —— 速度提升不以牺牲准确性为代价</a:t>
-            </a:r>
-            <a:pPr algn="l" indent="0" marL="0">
-              <a:buNone/>
-            </a:pPr>
-            <a:r>
-              <a:rPr lang="en-US" sz="1300" dirty="0">
+              <a:t>✅ 反应时下降43% 且正确率维持95%+ —— 速度提升不以牺牲准确性为代价</a:t>
+            </a:r>
+            <a:pPr indent="0" marL="0">
+              <a:buNone/>
+            </a:pPr>
+            <a:r>
+              <a:rPr lang="en-US" sz="1600" dirty="0">
                 <a:solidFill>
                   <a:srgbClr val="2C3E50"/>
                 </a:solidFill>
@@ -7932,11 +7918,11 @@
               </a:rPr>
               <a:t>✅ 干扰效应下降83% —— Stroop抑制能力在训练中得到增强</a:t>
             </a:r>
-            <a:pPr algn="l" indent="0" marL="0">
-              <a:buNone/>
-            </a:pPr>
-            <a:r>
-              <a:rPr lang="en-US" sz="1300" dirty="0">
+            <a:pPr indent="0" marL="0">
+              <a:buNone/>
+            </a:pPr>
+            <a:r>
+              <a:rPr lang="en-US" sz="1600" dirty="0">
                 <a:solidFill>
                   <a:srgbClr val="2C3E50"/>
                 </a:solidFill>
@@ -7944,13 +7930,13 @@
                 <a:ea typeface="Microsoft YaHei" pitchFamily="34" charset="-122"/>
                 <a:cs typeface="Microsoft YaHei" pitchFamily="34" charset="-120"/>
               </a:rPr>
-              <a:t>✅ 难度从50%/1500ms自动攀爬至80%/500ms —— 自适应算法运行良好</a:t>
-            </a:r>
-            <a:pPr algn="l" indent="0" marL="0">
-              <a:buNone/>
-            </a:pPr>
-            <a:r>
-              <a:rPr lang="en-US" sz="1300" dirty="0">
+              <a:t>✅ 难度从50%/1500ms 自动攀爬至80%/500ms —— 自适应算法运行良好</a:t>
+            </a:r>
+            <a:pPr indent="0" marL="0">
+              <a:buNone/>
+            </a:pPr>
+            <a:r>
+              <a:rPr lang="en-US" sz="1600" dirty="0">
                 <a:solidFill>
                   <a:srgbClr val="2C3E50"/>
                 </a:solidFill>
@@ -7960,7 +7946,7 @@
               </a:rPr>
               <a:t>✅ 累计230+试次，10次训练，数据完整可复现</a:t>
             </a:r>
-            <a:endParaRPr lang="en-US" sz="1600" dirty="0"/>
+            <a:endParaRPr lang="en-US" sz="2000" dirty="0"/>
           </a:p>
         </p:txBody>
       </p:sp>
@@ -7998,7 +7984,7 @@
         <p:spPr>
           <a:xfrm>
             <a:off x="548640" y="274320"/>
-            <a:ext cx="10972800" cy="640080"/>
+            <a:ext cx="10972800" cy="731520"/>
           </a:xfrm>
           <a:prstGeom prst="rect">
             <a:avLst/>
@@ -8014,7 +8000,7 @@
               <a:buNone/>
             </a:pPr>
             <a:r>
-              <a:rPr lang="en-US" sz="2600" b="1" dirty="0">
+              <a:rPr lang="en-US" sz="3000" b="1" dirty="0">
                 <a:solidFill>
                   <a:srgbClr val="2C3E50"/>
                 </a:solidFill>
@@ -8022,9 +8008,9 @@
                 <a:ea typeface="Microsoft YaHei" pitchFamily="34" charset="-122"/>
                 <a:cs typeface="Microsoft YaHei" pitchFamily="34" charset="-120"/>
               </a:rPr>
-              <a:t>难度调节轨迹：从入门到地狱</a:t>
-            </a:r>
-            <a:endParaRPr lang="en-US" sz="2600" dirty="0"/>
+              <a:t>难度调节轨迹</a:t>
+            </a:r>
+            <a:endParaRPr lang="en-US" sz="3000" dirty="0"/>
           </a:p>
         </p:txBody>
       </p:sp>
@@ -8036,7 +8022,7 @@
         </p:nvSpPr>
         <p:spPr>
           <a:xfrm>
-            <a:off x="548640" y="960120"/>
+            <a:off x="548640" y="1051560"/>
             <a:ext cx="10972800" cy="0"/>
           </a:xfrm>
           <a:prstGeom prst="line">
@@ -8066,24 +8052,24 @@
           </p:nvPr>
         </p:nvGraphicFramePr>
         <p:xfrm>
-          <a:off x="548640" y="1371600"/>
-          <a:ext cx="10972800" cy="914400"/>
+          <a:off x="731520" y="1463040"/>
+          <a:ext cx="10515600" cy="914400"/>
         </p:xfrm>
         <a:graphic>
           <a:graphicData uri="http://schemas.openxmlformats.org/drawingml/2006/table">
             <a:tbl>
               <a:tblPr/>
               <a:tblGrid>
+                <a:gridCol w="1828800"/>
+                <a:gridCol w="1371600"/>
                 <a:gridCol w="1645920"/>
                 <a:gridCol w="1371600"/>
+                <a:gridCol w="1645920"/>
+                <a:gridCol w="1645920"/>
                 <a:gridCol w="1371600"/>
-                <a:gridCol w="1371600"/>
-                <a:gridCol w="1371600"/>
-                <a:gridCol w="1371600"/>
-                <a:gridCol w="1188720"/>
-                <a:gridCol w="1280160"/>
+                <a:gridCol w="1463040"/>
               </a:tblGrid>
-              <a:tr h="457200">
+              <a:tr h="548640">
                 <a:tc>
                   <a:txBody>
                     <a:bodyPr/>
@@ -8093,9 +8079,9 @@
                         <a:buNone/>
                       </a:pPr>
                       <a:r>
-                        <a:rPr lang="en-US" sz="1400" b="1" dirty="0">
+                        <a:rPr lang="en-US" sz="1500" b="1" dirty="0">
                           <a:solidFill>
-                            <a:srgbClr val="2C3E50"/>
+                            <a:srgbClr val="FFFFFF"/>
                           </a:solidFill>
                           <a:latin typeface="Microsoft YaHei" pitchFamily="34" charset="0"/>
                           <a:ea typeface="Microsoft YaHei" pitchFamily="34" charset="-122"/>
@@ -8103,7 +8089,7 @@
                         </a:rPr>
                         <a:t>训练次数</a:t>
                       </a:r>
-                      <a:endParaRPr lang="en-US" sz="1400" dirty="0">
+                      <a:endParaRPr lang="en-US" sz="1500" dirty="0">
                         <a:latin typeface="Microsoft YaHei" charset="0"/>
                         <a:ea typeface="Microsoft YaHei" charset="0"/>
                         <a:cs typeface="Microsoft YaHei" charset="0"/>
@@ -8148,7 +8134,7 @@
                       <a:tailEnd type="none" w="med" len="med"/>
                     </a:lnB>
                     <a:solidFill>
-                      <a:srgbClr val="ECF0F1"/>
+                      <a:srgbClr val="3498DB"/>
                     </a:solidFill>
                   </a:tcPr>
                 </a:tc>
@@ -8161,7 +8147,7 @@
                         <a:buNone/>
                       </a:pPr>
                       <a:r>
-                        <a:rPr lang="en-US" sz="1400" b="1" dirty="0">
+                        <a:rPr lang="en-US" sz="1500" b="1" dirty="0">
                           <a:solidFill>
                             <a:srgbClr val="2C3E50"/>
                           </a:solidFill>
@@ -8171,7 +8157,7 @@
                         </a:rPr>
                         <a:t>1-4</a:t>
                       </a:r>
-                      <a:endParaRPr lang="en-US" sz="1400" dirty="0">
+                      <a:endParaRPr lang="en-US" sz="1500" dirty="0">
                         <a:latin typeface="Microsoft YaHei" charset="0"/>
                         <a:ea typeface="Microsoft YaHei" charset="0"/>
                         <a:cs typeface="Microsoft YaHei" charset="0"/>
@@ -8215,8 +8201,465 @@
                       <a:headEnd type="none" w="med" len="med"/>
                       <a:tailEnd type="none" w="med" len="med"/>
                     </a:lnB>
+                  </a:tcPr>
+                </a:tc>
+                <a:tc>
+                  <a:txBody>
+                    <a:bodyPr/>
+                    <a:lstStyle/>
+                    <a:p>
+                      <a:pPr indent="0" marL="0">
+                        <a:buNone/>
+                      </a:pPr>
+                      <a:r>
+                        <a:rPr lang="en-US" sz="1500" b="1" dirty="0">
+                          <a:solidFill>
+                            <a:srgbClr val="2C3E50"/>
+                          </a:solidFill>
+                          <a:latin typeface="Microsoft YaHei" pitchFamily="34" charset="0"/>
+                          <a:ea typeface="Microsoft YaHei" pitchFamily="34" charset="-122"/>
+                          <a:cs typeface="Microsoft YaHei" pitchFamily="34" charset="-120"/>
+                        </a:rPr>
+                        <a:t>5</a:t>
+                      </a:r>
+                      <a:endParaRPr lang="en-US" sz="1500" dirty="0">
+                        <a:latin typeface="Microsoft YaHei" charset="0"/>
+                        <a:ea typeface="Microsoft YaHei" charset="0"/>
+                        <a:cs typeface="Microsoft YaHei" charset="0"/>
+                      </a:endParaRPr>
+                    </a:p>
+                  </a:txBody>
+                  <a:tcPr marL="91440" marR="91440" marT="45720" marB="45720">
+                    <a:lnL w="6350" cap="flat" cmpd="sng" algn="ctr">
+                      <a:solidFill>
+                        <a:srgbClr val="3498DB"/>
+                      </a:solidFill>
+                      <a:prstDash val="solid"/>
+                      <a:round/>
+                      <a:headEnd type="none" w="med" len="med"/>
+                      <a:tailEnd type="none" w="med" len="med"/>
+                    </a:lnL>
+                    <a:lnR w="6350" cap="flat" cmpd="sng" algn="ctr">
+                      <a:solidFill>
+                        <a:srgbClr val="3498DB"/>
+                      </a:solidFill>
+                      <a:prstDash val="solid"/>
+                      <a:round/>
+                      <a:headEnd type="none" w="med" len="med"/>
+                      <a:tailEnd type="none" w="med" len="med"/>
+                    </a:lnR>
+                    <a:lnT w="6350" cap="flat" cmpd="sng" algn="ctr">
+                      <a:solidFill>
+                        <a:srgbClr val="3498DB"/>
+                      </a:solidFill>
+                      <a:prstDash val="solid"/>
+                      <a:round/>
+                      <a:headEnd type="none" w="med" len="med"/>
+                      <a:tailEnd type="none" w="med" len="med"/>
+                    </a:lnT>
+                    <a:lnB w="6350" cap="flat" cmpd="sng" algn="ctr">
+                      <a:solidFill>
+                        <a:srgbClr val="3498DB"/>
+                      </a:solidFill>
+                      <a:prstDash val="solid"/>
+                      <a:round/>
+                      <a:headEnd type="none" w="med" len="med"/>
+                      <a:tailEnd type="none" w="med" len="med"/>
+                    </a:lnB>
+                  </a:tcPr>
+                </a:tc>
+                <a:tc>
+                  <a:txBody>
+                    <a:bodyPr/>
+                    <a:lstStyle/>
+                    <a:p>
+                      <a:pPr indent="0" marL="0">
+                        <a:buNone/>
+                      </a:pPr>
+                      <a:r>
+                        <a:rPr lang="en-US" sz="1500" b="1" strike="sngStrike" dirty="0">
+                          <a:solidFill>
+                            <a:srgbClr val="7F8C8D"/>
+                          </a:solidFill>
+                          <a:latin typeface="Microsoft YaHei" pitchFamily="34" charset="0"/>
+                          <a:ea typeface="Microsoft YaHei" pitchFamily="34" charset="-122"/>
+                          <a:cs typeface="Microsoft YaHei" pitchFamily="34" charset="-120"/>
+                        </a:rPr>
+                        <a:t>6</a:t>
+                      </a:r>
+                      <a:endParaRPr lang="en-US" sz="1500" dirty="0">
+                        <a:latin typeface="Microsoft YaHei" charset="0"/>
+                        <a:ea typeface="Microsoft YaHei" charset="0"/>
+                        <a:cs typeface="Microsoft YaHei" charset="0"/>
+                      </a:endParaRPr>
+                    </a:p>
+                  </a:txBody>
+                  <a:tcPr marL="91440" marR="91440" marT="45720" marB="45720">
+                    <a:lnL w="6350" cap="flat" cmpd="sng" algn="ctr">
+                      <a:solidFill>
+                        <a:srgbClr val="3498DB"/>
+                      </a:solidFill>
+                      <a:prstDash val="solid"/>
+                      <a:round/>
+                      <a:headEnd type="none" w="med" len="med"/>
+                      <a:tailEnd type="none" w="med" len="med"/>
+                    </a:lnL>
+                    <a:lnR w="6350" cap="flat" cmpd="sng" algn="ctr">
+                      <a:solidFill>
+                        <a:srgbClr val="3498DB"/>
+                      </a:solidFill>
+                      <a:prstDash val="solid"/>
+                      <a:round/>
+                      <a:headEnd type="none" w="med" len="med"/>
+                      <a:tailEnd type="none" w="med" len="med"/>
+                    </a:lnR>
+                    <a:lnT w="6350" cap="flat" cmpd="sng" algn="ctr">
+                      <a:solidFill>
+                        <a:srgbClr val="3498DB"/>
+                      </a:solidFill>
+                      <a:prstDash val="solid"/>
+                      <a:round/>
+                      <a:headEnd type="none" w="med" len="med"/>
+                      <a:tailEnd type="none" w="med" len="med"/>
+                    </a:lnT>
+                    <a:lnB w="6350" cap="flat" cmpd="sng" algn="ctr">
+                      <a:solidFill>
+                        <a:srgbClr val="3498DB"/>
+                      </a:solidFill>
+                      <a:prstDash val="solid"/>
+                      <a:round/>
+                      <a:headEnd type="none" w="med" len="med"/>
+                      <a:tailEnd type="none" w="med" len="med"/>
+                    </a:lnB>
+                  </a:tcPr>
+                </a:tc>
+                <a:tc>
+                  <a:txBody>
+                    <a:bodyPr/>
+                    <a:lstStyle/>
+                    <a:p>
+                      <a:pPr indent="0" marL="0">
+                        <a:buNone/>
+                      </a:pPr>
+                      <a:r>
+                        <a:rPr lang="en-US" sz="1500" b="1" dirty="0">
+                          <a:solidFill>
+                            <a:srgbClr val="2C3E50"/>
+                          </a:solidFill>
+                          <a:latin typeface="Microsoft YaHei" pitchFamily="34" charset="0"/>
+                          <a:ea typeface="Microsoft YaHei" pitchFamily="34" charset="-122"/>
+                          <a:cs typeface="Microsoft YaHei" pitchFamily="34" charset="-120"/>
+                        </a:rPr>
+                        <a:t>7</a:t>
+                      </a:r>
+                      <a:endParaRPr lang="en-US" sz="1500" dirty="0">
+                        <a:latin typeface="Microsoft YaHei" charset="0"/>
+                        <a:ea typeface="Microsoft YaHei" charset="0"/>
+                        <a:cs typeface="Microsoft YaHei" charset="0"/>
+                      </a:endParaRPr>
+                    </a:p>
+                  </a:txBody>
+                  <a:tcPr marL="91440" marR="91440" marT="45720" marB="45720">
+                    <a:lnL w="6350" cap="flat" cmpd="sng" algn="ctr">
+                      <a:solidFill>
+                        <a:srgbClr val="3498DB"/>
+                      </a:solidFill>
+                      <a:prstDash val="solid"/>
+                      <a:round/>
+                      <a:headEnd type="none" w="med" len="med"/>
+                      <a:tailEnd type="none" w="med" len="med"/>
+                    </a:lnL>
+                    <a:lnR w="6350" cap="flat" cmpd="sng" algn="ctr">
+                      <a:solidFill>
+                        <a:srgbClr val="3498DB"/>
+                      </a:solidFill>
+                      <a:prstDash val="solid"/>
+                      <a:round/>
+                      <a:headEnd type="none" w="med" len="med"/>
+                      <a:tailEnd type="none" w="med" len="med"/>
+                    </a:lnR>
+                    <a:lnT w="6350" cap="flat" cmpd="sng" algn="ctr">
+                      <a:solidFill>
+                        <a:srgbClr val="3498DB"/>
+                      </a:solidFill>
+                      <a:prstDash val="solid"/>
+                      <a:round/>
+                      <a:headEnd type="none" w="med" len="med"/>
+                      <a:tailEnd type="none" w="med" len="med"/>
+                    </a:lnT>
+                    <a:lnB w="6350" cap="flat" cmpd="sng" algn="ctr">
+                      <a:solidFill>
+                        <a:srgbClr val="3498DB"/>
+                      </a:solidFill>
+                      <a:prstDash val="solid"/>
+                      <a:round/>
+                      <a:headEnd type="none" w="med" len="med"/>
+                      <a:tailEnd type="none" w="med" len="med"/>
+                    </a:lnB>
+                  </a:tcPr>
+                </a:tc>
+                <a:tc>
+                  <a:txBody>
+                    <a:bodyPr/>
+                    <a:lstStyle/>
+                    <a:p>
+                      <a:pPr indent="0" marL="0">
+                        <a:buNone/>
+                      </a:pPr>
+                      <a:r>
+                        <a:rPr lang="en-US" sz="1500" b="1" dirty="0">
+                          <a:solidFill>
+                            <a:srgbClr val="2C3E50"/>
+                          </a:solidFill>
+                          <a:latin typeface="Microsoft YaHei" pitchFamily="34" charset="0"/>
+                          <a:ea typeface="Microsoft YaHei" pitchFamily="34" charset="-122"/>
+                          <a:cs typeface="Microsoft YaHei" pitchFamily="34" charset="-120"/>
+                        </a:rPr>
+                        <a:t>8</a:t>
+                      </a:r>
+                      <a:endParaRPr lang="en-US" sz="1500" dirty="0">
+                        <a:latin typeface="Microsoft YaHei" charset="0"/>
+                        <a:ea typeface="Microsoft YaHei" charset="0"/>
+                        <a:cs typeface="Microsoft YaHei" charset="0"/>
+                      </a:endParaRPr>
+                    </a:p>
+                  </a:txBody>
+                  <a:tcPr marL="91440" marR="91440" marT="45720" marB="45720">
+                    <a:lnL w="6350" cap="flat" cmpd="sng" algn="ctr">
+                      <a:solidFill>
+                        <a:srgbClr val="3498DB"/>
+                      </a:solidFill>
+                      <a:prstDash val="solid"/>
+                      <a:round/>
+                      <a:headEnd type="none" w="med" len="med"/>
+                      <a:tailEnd type="none" w="med" len="med"/>
+                    </a:lnL>
+                    <a:lnR w="6350" cap="flat" cmpd="sng" algn="ctr">
+                      <a:solidFill>
+                        <a:srgbClr val="3498DB"/>
+                      </a:solidFill>
+                      <a:prstDash val="solid"/>
+                      <a:round/>
+                      <a:headEnd type="none" w="med" len="med"/>
+                      <a:tailEnd type="none" w="med" len="med"/>
+                    </a:lnR>
+                    <a:lnT w="6350" cap="flat" cmpd="sng" algn="ctr">
+                      <a:solidFill>
+                        <a:srgbClr val="3498DB"/>
+                      </a:solidFill>
+                      <a:prstDash val="solid"/>
+                      <a:round/>
+                      <a:headEnd type="none" w="med" len="med"/>
+                      <a:tailEnd type="none" w="med" len="med"/>
+                    </a:lnT>
+                    <a:lnB w="6350" cap="flat" cmpd="sng" algn="ctr">
+                      <a:solidFill>
+                        <a:srgbClr val="3498DB"/>
+                      </a:solidFill>
+                      <a:prstDash val="solid"/>
+                      <a:round/>
+                      <a:headEnd type="none" w="med" len="med"/>
+                      <a:tailEnd type="none" w="med" len="med"/>
+                    </a:lnB>
+                  </a:tcPr>
+                </a:tc>
+                <a:tc>
+                  <a:txBody>
+                    <a:bodyPr/>
+                    <a:lstStyle/>
+                    <a:p>
+                      <a:pPr indent="0" marL="0">
+                        <a:buNone/>
+                      </a:pPr>
+                      <a:r>
+                        <a:rPr lang="en-US" sz="1500" b="1" dirty="0">
+                          <a:solidFill>
+                            <a:srgbClr val="E74C3C"/>
+                          </a:solidFill>
+                          <a:latin typeface="Microsoft YaHei" pitchFamily="34" charset="0"/>
+                          <a:ea typeface="Microsoft YaHei" pitchFamily="34" charset="-122"/>
+                          <a:cs typeface="Microsoft YaHei" pitchFamily="34" charset="-120"/>
+                        </a:rPr>
+                        <a:t>9</a:t>
+                      </a:r>
+                      <a:endParaRPr lang="en-US" sz="1500" dirty="0">
+                        <a:latin typeface="Microsoft YaHei" charset="0"/>
+                        <a:ea typeface="Microsoft YaHei" charset="0"/>
+                        <a:cs typeface="Microsoft YaHei" charset="0"/>
+                      </a:endParaRPr>
+                    </a:p>
+                  </a:txBody>
+                  <a:tcPr marL="91440" marR="91440" marT="45720" marB="45720">
+                    <a:lnL w="6350" cap="flat" cmpd="sng" algn="ctr">
+                      <a:solidFill>
+                        <a:srgbClr val="3498DB"/>
+                      </a:solidFill>
+                      <a:prstDash val="solid"/>
+                      <a:round/>
+                      <a:headEnd type="none" w="med" len="med"/>
+                      <a:tailEnd type="none" w="med" len="med"/>
+                    </a:lnL>
+                    <a:lnR w="6350" cap="flat" cmpd="sng" algn="ctr">
+                      <a:solidFill>
+                        <a:srgbClr val="3498DB"/>
+                      </a:solidFill>
+                      <a:prstDash val="solid"/>
+                      <a:round/>
+                      <a:headEnd type="none" w="med" len="med"/>
+                      <a:tailEnd type="none" w="med" len="med"/>
+                    </a:lnR>
+                    <a:lnT w="6350" cap="flat" cmpd="sng" algn="ctr">
+                      <a:solidFill>
+                        <a:srgbClr val="3498DB"/>
+                      </a:solidFill>
+                      <a:prstDash val="solid"/>
+                      <a:round/>
+                      <a:headEnd type="none" w="med" len="med"/>
+                      <a:tailEnd type="none" w="med" len="med"/>
+                    </a:lnT>
+                    <a:lnB w="6350" cap="flat" cmpd="sng" algn="ctr">
+                      <a:solidFill>
+                        <a:srgbClr val="3498DB"/>
+                      </a:solidFill>
+                      <a:prstDash val="solid"/>
+                      <a:round/>
+                      <a:headEnd type="none" w="med" len="med"/>
+                      <a:tailEnd type="none" w="med" len="med"/>
+                    </a:lnB>
+                  </a:tcPr>
+                </a:tc>
+                <a:tc>
+                  <a:txBody>
+                    <a:bodyPr/>
+                    <a:lstStyle/>
+                    <a:p>
+                      <a:pPr indent="0" marL="0">
+                        <a:buNone/>
+                      </a:pPr>
+                      <a:r>
+                        <a:rPr lang="en-US" sz="1500" b="1" dirty="0">
+                          <a:solidFill>
+                            <a:srgbClr val="E74C3C"/>
+                          </a:solidFill>
+                          <a:latin typeface="Microsoft YaHei" pitchFamily="34" charset="0"/>
+                          <a:ea typeface="Microsoft YaHei" pitchFamily="34" charset="-122"/>
+                          <a:cs typeface="Microsoft YaHei" pitchFamily="34" charset="-120"/>
+                        </a:rPr>
+                        <a:t>10</a:t>
+                      </a:r>
+                      <a:endParaRPr lang="en-US" sz="1500" dirty="0">
+                        <a:latin typeface="Microsoft YaHei" charset="0"/>
+                        <a:ea typeface="Microsoft YaHei" charset="0"/>
+                        <a:cs typeface="Microsoft YaHei" charset="0"/>
+                      </a:endParaRPr>
+                    </a:p>
+                  </a:txBody>
+                  <a:tcPr marL="91440" marR="91440" marT="45720" marB="45720">
+                    <a:lnL w="6350" cap="flat" cmpd="sng" algn="ctr">
+                      <a:solidFill>
+                        <a:srgbClr val="3498DB"/>
+                      </a:solidFill>
+                      <a:prstDash val="solid"/>
+                      <a:round/>
+                      <a:headEnd type="none" w="med" len="med"/>
+                      <a:tailEnd type="none" w="med" len="med"/>
+                    </a:lnL>
+                    <a:lnR w="6350" cap="flat" cmpd="sng" algn="ctr">
+                      <a:solidFill>
+                        <a:srgbClr val="3498DB"/>
+                      </a:solidFill>
+                      <a:prstDash val="solid"/>
+                      <a:round/>
+                      <a:headEnd type="none" w="med" len="med"/>
+                      <a:tailEnd type="none" w="med" len="med"/>
+                    </a:lnR>
+                    <a:lnT w="6350" cap="flat" cmpd="sng" algn="ctr">
+                      <a:solidFill>
+                        <a:srgbClr val="3498DB"/>
+                      </a:solidFill>
+                      <a:prstDash val="solid"/>
+                      <a:round/>
+                      <a:headEnd type="none" w="med" len="med"/>
+                      <a:tailEnd type="none" w="med" len="med"/>
+                    </a:lnT>
+                    <a:lnB w="6350" cap="flat" cmpd="sng" algn="ctr">
+                      <a:solidFill>
+                        <a:srgbClr val="3498DB"/>
+                      </a:solidFill>
+                      <a:prstDash val="solid"/>
+                      <a:round/>
+                      <a:headEnd type="none" w="med" len="med"/>
+                      <a:tailEnd type="none" w="med" len="med"/>
+                    </a:lnB>
+                  </a:tcPr>
+                </a:tc>
+              </a:tr>
+              <a:tr h="640080">
+                <a:tc>
+                  <a:txBody>
+                    <a:bodyPr/>
+                    <a:lstStyle/>
+                    <a:p>
+                      <a:pPr indent="0" marL="0">
+                        <a:buNone/>
+                      </a:pPr>
+                      <a:r>
+                        <a:rPr lang="en-US" sz="1500" b="1" dirty="0">
+                          <a:solidFill>
+                            <a:srgbClr val="FFFFFF"/>
+                          </a:solidFill>
+                          <a:latin typeface="Microsoft YaHei" pitchFamily="34" charset="0"/>
+                          <a:ea typeface="Microsoft YaHei" pitchFamily="34" charset="-122"/>
+                          <a:cs typeface="Microsoft YaHei" pitchFamily="34" charset="-120"/>
+                        </a:rPr>
+                        <a:t>干扰比例</a:t>
+                      </a:r>
+                      <a:endParaRPr lang="en-US" sz="1500" dirty="0">
+                        <a:latin typeface="Microsoft YaHei" charset="0"/>
+                        <a:ea typeface="Microsoft YaHei" charset="0"/>
+                        <a:cs typeface="Microsoft YaHei" charset="0"/>
+                      </a:endParaRPr>
+                    </a:p>
+                  </a:txBody>
+                  <a:tcPr marL="91440" marR="91440" marT="45720" marB="45720">
+                    <a:lnL w="6350" cap="flat" cmpd="sng" algn="ctr">
+                      <a:solidFill>
+                        <a:srgbClr val="3498DB"/>
+                      </a:solidFill>
+                      <a:prstDash val="solid"/>
+                      <a:round/>
+                      <a:headEnd type="none" w="med" len="med"/>
+                      <a:tailEnd type="none" w="med" len="med"/>
+                    </a:lnL>
+                    <a:lnR w="6350" cap="flat" cmpd="sng" algn="ctr">
+                      <a:solidFill>
+                        <a:srgbClr val="3498DB"/>
+                      </a:solidFill>
+                      <a:prstDash val="solid"/>
+                      <a:round/>
+                      <a:headEnd type="none" w="med" len="med"/>
+                      <a:tailEnd type="none" w="med" len="med"/>
+                    </a:lnR>
+                    <a:lnT w="6350" cap="flat" cmpd="sng" algn="ctr">
+                      <a:solidFill>
+                        <a:srgbClr val="3498DB"/>
+                      </a:solidFill>
+                      <a:prstDash val="solid"/>
+                      <a:round/>
+                      <a:headEnd type="none" w="med" len="med"/>
+                      <a:tailEnd type="none" w="med" len="med"/>
+                    </a:lnT>
+                    <a:lnB w="6350" cap="flat" cmpd="sng" algn="ctr">
+                      <a:solidFill>
+                        <a:srgbClr val="3498DB"/>
+                      </a:solidFill>
+                      <a:prstDash val="solid"/>
+                      <a:round/>
+                      <a:headEnd type="none" w="med" len="med"/>
+                      <a:tailEnd type="none" w="med" len="med"/>
+                    </a:lnB>
                     <a:solidFill>
-                      <a:srgbClr val="ECF0F1"/>
+                      <a:srgbClr val="3498DB"/>
                     </a:solidFill>
                   </a:tcPr>
                 </a:tc>
@@ -8229,7 +8672,7 @@
                         <a:buNone/>
                       </a:pPr>
                       <a:r>
-                        <a:rPr lang="en-US" sz="1400" b="1" dirty="0">
+                        <a:rPr lang="en-US" sz="1500" b="1" dirty="0">
                           <a:solidFill>
                             <a:srgbClr val="2C3E50"/>
                           </a:solidFill>
@@ -8237,9 +8680,9 @@
                           <a:ea typeface="Microsoft YaHei" pitchFamily="34" charset="-122"/>
                           <a:cs typeface="Microsoft YaHei" pitchFamily="34" charset="-120"/>
                         </a:rPr>
-                        <a:t>5</a:t>
+                        <a:t>50%</a:t>
                       </a:r>
-                      <a:endParaRPr lang="en-US" sz="1400" dirty="0">
+                      <a:endParaRPr lang="en-US" sz="1500" dirty="0">
                         <a:latin typeface="Microsoft YaHei" charset="0"/>
                         <a:ea typeface="Microsoft YaHei" charset="0"/>
                         <a:cs typeface="Microsoft YaHei" charset="0"/>
@@ -8283,8 +8726,465 @@
                       <a:headEnd type="none" w="med" len="med"/>
                       <a:tailEnd type="none" w="med" len="med"/>
                     </a:lnB>
+                  </a:tcPr>
+                </a:tc>
+                <a:tc>
+                  <a:txBody>
+                    <a:bodyPr/>
+                    <a:lstStyle/>
+                    <a:p>
+                      <a:pPr indent="0" marL="0">
+                        <a:buNone/>
+                      </a:pPr>
+                      <a:r>
+                        <a:rPr lang="en-US" sz="1500" b="1" dirty="0">
+                          <a:solidFill>
+                            <a:srgbClr val="2C3E50"/>
+                          </a:solidFill>
+                          <a:latin typeface="Microsoft YaHei" pitchFamily="34" charset="0"/>
+                          <a:ea typeface="Microsoft YaHei" pitchFamily="34" charset="-122"/>
+                          <a:cs typeface="Microsoft YaHei" pitchFamily="34" charset="-120"/>
+                        </a:rPr>
+                        <a:t>55-65%</a:t>
+                      </a:r>
+                      <a:endParaRPr lang="en-US" sz="1500" dirty="0">
+                        <a:latin typeface="Microsoft YaHei" charset="0"/>
+                        <a:ea typeface="Microsoft YaHei" charset="0"/>
+                        <a:cs typeface="Microsoft YaHei" charset="0"/>
+                      </a:endParaRPr>
+                    </a:p>
+                  </a:txBody>
+                  <a:tcPr marL="91440" marR="91440" marT="45720" marB="45720">
+                    <a:lnL w="6350" cap="flat" cmpd="sng" algn="ctr">
+                      <a:solidFill>
+                        <a:srgbClr val="3498DB"/>
+                      </a:solidFill>
+                      <a:prstDash val="solid"/>
+                      <a:round/>
+                      <a:headEnd type="none" w="med" len="med"/>
+                      <a:tailEnd type="none" w="med" len="med"/>
+                    </a:lnL>
+                    <a:lnR w="6350" cap="flat" cmpd="sng" algn="ctr">
+                      <a:solidFill>
+                        <a:srgbClr val="3498DB"/>
+                      </a:solidFill>
+                      <a:prstDash val="solid"/>
+                      <a:round/>
+                      <a:headEnd type="none" w="med" len="med"/>
+                      <a:tailEnd type="none" w="med" len="med"/>
+                    </a:lnR>
+                    <a:lnT w="6350" cap="flat" cmpd="sng" algn="ctr">
+                      <a:solidFill>
+                        <a:srgbClr val="3498DB"/>
+                      </a:solidFill>
+                      <a:prstDash val="solid"/>
+                      <a:round/>
+                      <a:headEnd type="none" w="med" len="med"/>
+                      <a:tailEnd type="none" w="med" len="med"/>
+                    </a:lnT>
+                    <a:lnB w="6350" cap="flat" cmpd="sng" algn="ctr">
+                      <a:solidFill>
+                        <a:srgbClr val="3498DB"/>
+                      </a:solidFill>
+                      <a:prstDash val="solid"/>
+                      <a:round/>
+                      <a:headEnd type="none" w="med" len="med"/>
+                      <a:tailEnd type="none" w="med" len="med"/>
+                    </a:lnB>
+                  </a:tcPr>
+                </a:tc>
+                <a:tc>
+                  <a:txBody>
+                    <a:bodyPr/>
+                    <a:lstStyle/>
+                    <a:p>
+                      <a:pPr indent="0" marL="0">
+                        <a:buNone/>
+                      </a:pPr>
+                      <a:r>
+                        <a:rPr lang="en-US" sz="1500" b="1" strike="sngStrike" dirty="0">
+                          <a:solidFill>
+                            <a:srgbClr val="7F8C8D"/>
+                          </a:solidFill>
+                          <a:latin typeface="Microsoft YaHei" pitchFamily="34" charset="0"/>
+                          <a:ea typeface="Microsoft YaHei" pitchFamily="34" charset="-122"/>
+                          <a:cs typeface="Microsoft YaHei" pitchFamily="34" charset="-120"/>
+                        </a:rPr>
+                        <a:t>50%</a:t>
+                      </a:r>
+                      <a:endParaRPr lang="en-US" sz="1500" dirty="0">
+                        <a:latin typeface="Microsoft YaHei" charset="0"/>
+                        <a:ea typeface="Microsoft YaHei" charset="0"/>
+                        <a:cs typeface="Microsoft YaHei" charset="0"/>
+                      </a:endParaRPr>
+                    </a:p>
+                  </a:txBody>
+                  <a:tcPr marL="91440" marR="91440" marT="45720" marB="45720">
+                    <a:lnL w="6350" cap="flat" cmpd="sng" algn="ctr">
+                      <a:solidFill>
+                        <a:srgbClr val="3498DB"/>
+                      </a:solidFill>
+                      <a:prstDash val="solid"/>
+                      <a:round/>
+                      <a:headEnd type="none" w="med" len="med"/>
+                      <a:tailEnd type="none" w="med" len="med"/>
+                    </a:lnL>
+                    <a:lnR w="6350" cap="flat" cmpd="sng" algn="ctr">
+                      <a:solidFill>
+                        <a:srgbClr val="3498DB"/>
+                      </a:solidFill>
+                      <a:prstDash val="solid"/>
+                      <a:round/>
+                      <a:headEnd type="none" w="med" len="med"/>
+                      <a:tailEnd type="none" w="med" len="med"/>
+                    </a:lnR>
+                    <a:lnT w="6350" cap="flat" cmpd="sng" algn="ctr">
+                      <a:solidFill>
+                        <a:srgbClr val="3498DB"/>
+                      </a:solidFill>
+                      <a:prstDash val="solid"/>
+                      <a:round/>
+                      <a:headEnd type="none" w="med" len="med"/>
+                      <a:tailEnd type="none" w="med" len="med"/>
+                    </a:lnT>
+                    <a:lnB w="6350" cap="flat" cmpd="sng" algn="ctr">
+                      <a:solidFill>
+                        <a:srgbClr val="3498DB"/>
+                      </a:solidFill>
+                      <a:prstDash val="solid"/>
+                      <a:round/>
+                      <a:headEnd type="none" w="med" len="med"/>
+                      <a:tailEnd type="none" w="med" len="med"/>
+                    </a:lnB>
+                  </a:tcPr>
+                </a:tc>
+                <a:tc>
+                  <a:txBody>
+                    <a:bodyPr/>
+                    <a:lstStyle/>
+                    <a:p>
+                      <a:pPr indent="0" marL="0">
+                        <a:buNone/>
+                      </a:pPr>
+                      <a:r>
+                        <a:rPr lang="en-US" sz="1500" b="1" dirty="0">
+                          <a:solidFill>
+                            <a:srgbClr val="2C3E50"/>
+                          </a:solidFill>
+                          <a:latin typeface="Microsoft YaHei" pitchFamily="34" charset="0"/>
+                          <a:ea typeface="Microsoft YaHei" pitchFamily="34" charset="-122"/>
+                          <a:cs typeface="Microsoft YaHei" pitchFamily="34" charset="-120"/>
+                        </a:rPr>
+                        <a:t>55-65%</a:t>
+                      </a:r>
+                      <a:endParaRPr lang="en-US" sz="1500" dirty="0">
+                        <a:latin typeface="Microsoft YaHei" charset="0"/>
+                        <a:ea typeface="Microsoft YaHei" charset="0"/>
+                        <a:cs typeface="Microsoft YaHei" charset="0"/>
+                      </a:endParaRPr>
+                    </a:p>
+                  </a:txBody>
+                  <a:tcPr marL="91440" marR="91440" marT="45720" marB="45720">
+                    <a:lnL w="6350" cap="flat" cmpd="sng" algn="ctr">
+                      <a:solidFill>
+                        <a:srgbClr val="3498DB"/>
+                      </a:solidFill>
+                      <a:prstDash val="solid"/>
+                      <a:round/>
+                      <a:headEnd type="none" w="med" len="med"/>
+                      <a:tailEnd type="none" w="med" len="med"/>
+                    </a:lnL>
+                    <a:lnR w="6350" cap="flat" cmpd="sng" algn="ctr">
+                      <a:solidFill>
+                        <a:srgbClr val="3498DB"/>
+                      </a:solidFill>
+                      <a:prstDash val="solid"/>
+                      <a:round/>
+                      <a:headEnd type="none" w="med" len="med"/>
+                      <a:tailEnd type="none" w="med" len="med"/>
+                    </a:lnR>
+                    <a:lnT w="6350" cap="flat" cmpd="sng" algn="ctr">
+                      <a:solidFill>
+                        <a:srgbClr val="3498DB"/>
+                      </a:solidFill>
+                      <a:prstDash val="solid"/>
+                      <a:round/>
+                      <a:headEnd type="none" w="med" len="med"/>
+                      <a:tailEnd type="none" w="med" len="med"/>
+                    </a:lnT>
+                    <a:lnB w="6350" cap="flat" cmpd="sng" algn="ctr">
+                      <a:solidFill>
+                        <a:srgbClr val="3498DB"/>
+                      </a:solidFill>
+                      <a:prstDash val="solid"/>
+                      <a:round/>
+                      <a:headEnd type="none" w="med" len="med"/>
+                      <a:tailEnd type="none" w="med" len="med"/>
+                    </a:lnB>
+                  </a:tcPr>
+                </a:tc>
+                <a:tc>
+                  <a:txBody>
+                    <a:bodyPr/>
+                    <a:lstStyle/>
+                    <a:p>
+                      <a:pPr indent="0" marL="0">
+                        <a:buNone/>
+                      </a:pPr>
+                      <a:r>
+                        <a:rPr lang="en-US" sz="1500" b="1" dirty="0">
+                          <a:solidFill>
+                            <a:srgbClr val="2C3E50"/>
+                          </a:solidFill>
+                          <a:latin typeface="Microsoft YaHei" pitchFamily="34" charset="0"/>
+                          <a:ea typeface="Microsoft YaHei" pitchFamily="34" charset="-122"/>
+                          <a:cs typeface="Microsoft YaHei" pitchFamily="34" charset="-120"/>
+                        </a:rPr>
+                        <a:t>70-80%</a:t>
+                      </a:r>
+                      <a:endParaRPr lang="en-US" sz="1500" dirty="0">
+                        <a:latin typeface="Microsoft YaHei" charset="0"/>
+                        <a:ea typeface="Microsoft YaHei" charset="0"/>
+                        <a:cs typeface="Microsoft YaHei" charset="0"/>
+                      </a:endParaRPr>
+                    </a:p>
+                  </a:txBody>
+                  <a:tcPr marL="91440" marR="91440" marT="45720" marB="45720">
+                    <a:lnL w="6350" cap="flat" cmpd="sng" algn="ctr">
+                      <a:solidFill>
+                        <a:srgbClr val="3498DB"/>
+                      </a:solidFill>
+                      <a:prstDash val="solid"/>
+                      <a:round/>
+                      <a:headEnd type="none" w="med" len="med"/>
+                      <a:tailEnd type="none" w="med" len="med"/>
+                    </a:lnL>
+                    <a:lnR w="6350" cap="flat" cmpd="sng" algn="ctr">
+                      <a:solidFill>
+                        <a:srgbClr val="3498DB"/>
+                      </a:solidFill>
+                      <a:prstDash val="solid"/>
+                      <a:round/>
+                      <a:headEnd type="none" w="med" len="med"/>
+                      <a:tailEnd type="none" w="med" len="med"/>
+                    </a:lnR>
+                    <a:lnT w="6350" cap="flat" cmpd="sng" algn="ctr">
+                      <a:solidFill>
+                        <a:srgbClr val="3498DB"/>
+                      </a:solidFill>
+                      <a:prstDash val="solid"/>
+                      <a:round/>
+                      <a:headEnd type="none" w="med" len="med"/>
+                      <a:tailEnd type="none" w="med" len="med"/>
+                    </a:lnT>
+                    <a:lnB w="6350" cap="flat" cmpd="sng" algn="ctr">
+                      <a:solidFill>
+                        <a:srgbClr val="3498DB"/>
+                      </a:solidFill>
+                      <a:prstDash val="solid"/>
+                      <a:round/>
+                      <a:headEnd type="none" w="med" len="med"/>
+                      <a:tailEnd type="none" w="med" len="med"/>
+                    </a:lnB>
+                  </a:tcPr>
+                </a:tc>
+                <a:tc>
+                  <a:txBody>
+                    <a:bodyPr/>
+                    <a:lstStyle/>
+                    <a:p>
+                      <a:pPr indent="0" marL="0">
+                        <a:buNone/>
+                      </a:pPr>
+                      <a:r>
+                        <a:rPr lang="en-US" sz="1500" b="1" dirty="0">
+                          <a:solidFill>
+                            <a:srgbClr val="E74C3C"/>
+                          </a:solidFill>
+                          <a:latin typeface="Microsoft YaHei" pitchFamily="34" charset="0"/>
+                          <a:ea typeface="Microsoft YaHei" pitchFamily="34" charset="-122"/>
+                          <a:cs typeface="Microsoft YaHei" pitchFamily="34" charset="-120"/>
+                        </a:rPr>
+                        <a:t>80%</a:t>
+                      </a:r>
+                      <a:endParaRPr lang="en-US" sz="1500" dirty="0">
+                        <a:latin typeface="Microsoft YaHei" charset="0"/>
+                        <a:ea typeface="Microsoft YaHei" charset="0"/>
+                        <a:cs typeface="Microsoft YaHei" charset="0"/>
+                      </a:endParaRPr>
+                    </a:p>
+                  </a:txBody>
+                  <a:tcPr marL="91440" marR="91440" marT="45720" marB="45720">
+                    <a:lnL w="6350" cap="flat" cmpd="sng" algn="ctr">
+                      <a:solidFill>
+                        <a:srgbClr val="3498DB"/>
+                      </a:solidFill>
+                      <a:prstDash val="solid"/>
+                      <a:round/>
+                      <a:headEnd type="none" w="med" len="med"/>
+                      <a:tailEnd type="none" w="med" len="med"/>
+                    </a:lnL>
+                    <a:lnR w="6350" cap="flat" cmpd="sng" algn="ctr">
+                      <a:solidFill>
+                        <a:srgbClr val="3498DB"/>
+                      </a:solidFill>
+                      <a:prstDash val="solid"/>
+                      <a:round/>
+                      <a:headEnd type="none" w="med" len="med"/>
+                      <a:tailEnd type="none" w="med" len="med"/>
+                    </a:lnR>
+                    <a:lnT w="6350" cap="flat" cmpd="sng" algn="ctr">
+                      <a:solidFill>
+                        <a:srgbClr val="3498DB"/>
+                      </a:solidFill>
+                      <a:prstDash val="solid"/>
+                      <a:round/>
+                      <a:headEnd type="none" w="med" len="med"/>
+                      <a:tailEnd type="none" w="med" len="med"/>
+                    </a:lnT>
+                    <a:lnB w="6350" cap="flat" cmpd="sng" algn="ctr">
+                      <a:solidFill>
+                        <a:srgbClr val="3498DB"/>
+                      </a:solidFill>
+                      <a:prstDash val="solid"/>
+                      <a:round/>
+                      <a:headEnd type="none" w="med" len="med"/>
+                      <a:tailEnd type="none" w="med" len="med"/>
+                    </a:lnB>
+                  </a:tcPr>
+                </a:tc>
+                <a:tc>
+                  <a:txBody>
+                    <a:bodyPr/>
+                    <a:lstStyle/>
+                    <a:p>
+                      <a:pPr indent="0" marL="0">
+                        <a:buNone/>
+                      </a:pPr>
+                      <a:r>
+                        <a:rPr lang="en-US" sz="1500" b="1" dirty="0">
+                          <a:solidFill>
+                            <a:srgbClr val="E74C3C"/>
+                          </a:solidFill>
+                          <a:latin typeface="Microsoft YaHei" pitchFamily="34" charset="0"/>
+                          <a:ea typeface="Microsoft YaHei" pitchFamily="34" charset="-122"/>
+                          <a:cs typeface="Microsoft YaHei" pitchFamily="34" charset="-120"/>
+                        </a:rPr>
+                        <a:t>80%</a:t>
+                      </a:r>
+                      <a:endParaRPr lang="en-US" sz="1500" dirty="0">
+                        <a:latin typeface="Microsoft YaHei" charset="0"/>
+                        <a:ea typeface="Microsoft YaHei" charset="0"/>
+                        <a:cs typeface="Microsoft YaHei" charset="0"/>
+                      </a:endParaRPr>
+                    </a:p>
+                  </a:txBody>
+                  <a:tcPr marL="91440" marR="91440" marT="45720" marB="45720">
+                    <a:lnL w="6350" cap="flat" cmpd="sng" algn="ctr">
+                      <a:solidFill>
+                        <a:srgbClr val="3498DB"/>
+                      </a:solidFill>
+                      <a:prstDash val="solid"/>
+                      <a:round/>
+                      <a:headEnd type="none" w="med" len="med"/>
+                      <a:tailEnd type="none" w="med" len="med"/>
+                    </a:lnL>
+                    <a:lnR w="6350" cap="flat" cmpd="sng" algn="ctr">
+                      <a:solidFill>
+                        <a:srgbClr val="3498DB"/>
+                      </a:solidFill>
+                      <a:prstDash val="solid"/>
+                      <a:round/>
+                      <a:headEnd type="none" w="med" len="med"/>
+                      <a:tailEnd type="none" w="med" len="med"/>
+                    </a:lnR>
+                    <a:lnT w="6350" cap="flat" cmpd="sng" algn="ctr">
+                      <a:solidFill>
+                        <a:srgbClr val="3498DB"/>
+                      </a:solidFill>
+                      <a:prstDash val="solid"/>
+                      <a:round/>
+                      <a:headEnd type="none" w="med" len="med"/>
+                      <a:tailEnd type="none" w="med" len="med"/>
+                    </a:lnT>
+                    <a:lnB w="6350" cap="flat" cmpd="sng" algn="ctr">
+                      <a:solidFill>
+                        <a:srgbClr val="3498DB"/>
+                      </a:solidFill>
+                      <a:prstDash val="solid"/>
+                      <a:round/>
+                      <a:headEnd type="none" w="med" len="med"/>
+                      <a:tailEnd type="none" w="med" len="med"/>
+                    </a:lnB>
+                  </a:tcPr>
+                </a:tc>
+              </a:tr>
+              <a:tr h="640080">
+                <a:tc>
+                  <a:txBody>
+                    <a:bodyPr/>
+                    <a:lstStyle/>
+                    <a:p>
+                      <a:pPr indent="0" marL="0">
+                        <a:buNone/>
+                      </a:pPr>
+                      <a:r>
+                        <a:rPr lang="en-US" sz="1500" b="1" dirty="0">
+                          <a:solidFill>
+                            <a:srgbClr val="FFFFFF"/>
+                          </a:solidFill>
+                          <a:latin typeface="Microsoft YaHei" pitchFamily="34" charset="0"/>
+                          <a:ea typeface="Microsoft YaHei" pitchFamily="34" charset="-122"/>
+                          <a:cs typeface="Microsoft YaHei" pitchFamily="34" charset="-120"/>
+                        </a:rPr>
+                        <a:t>呈现时间</a:t>
+                      </a:r>
+                      <a:endParaRPr lang="en-US" sz="1500" dirty="0">
+                        <a:latin typeface="Microsoft YaHei" charset="0"/>
+                        <a:ea typeface="Microsoft YaHei" charset="0"/>
+                        <a:cs typeface="Microsoft YaHei" charset="0"/>
+                      </a:endParaRPr>
+                    </a:p>
+                  </a:txBody>
+                  <a:tcPr marL="91440" marR="91440" marT="45720" marB="45720">
+                    <a:lnL w="6350" cap="flat" cmpd="sng" algn="ctr">
+                      <a:solidFill>
+                        <a:srgbClr val="3498DB"/>
+                      </a:solidFill>
+                      <a:prstDash val="solid"/>
+                      <a:round/>
+                      <a:headEnd type="none" w="med" len="med"/>
+                      <a:tailEnd type="none" w="med" len="med"/>
+                    </a:lnL>
+                    <a:lnR w="6350" cap="flat" cmpd="sng" algn="ctr">
+                      <a:solidFill>
+                        <a:srgbClr val="3498DB"/>
+                      </a:solidFill>
+                      <a:prstDash val="solid"/>
+                      <a:round/>
+                      <a:headEnd type="none" w="med" len="med"/>
+                      <a:tailEnd type="none" w="med" len="med"/>
+                    </a:lnR>
+                    <a:lnT w="6350" cap="flat" cmpd="sng" algn="ctr">
+                      <a:solidFill>
+                        <a:srgbClr val="3498DB"/>
+                      </a:solidFill>
+                      <a:prstDash val="solid"/>
+                      <a:round/>
+                      <a:headEnd type="none" w="med" len="med"/>
+                      <a:tailEnd type="none" w="med" len="med"/>
+                    </a:lnT>
+                    <a:lnB w="6350" cap="flat" cmpd="sng" algn="ctr">
+                      <a:solidFill>
+                        <a:srgbClr val="3498DB"/>
+                      </a:solidFill>
+                      <a:prstDash val="solid"/>
+                      <a:round/>
+                      <a:headEnd type="none" w="med" len="med"/>
+                      <a:tailEnd type="none" w="med" len="med"/>
+                    </a:lnB>
                     <a:solidFill>
-                      <a:srgbClr val="ECF0F1"/>
+                      <a:srgbClr val="3498DB"/>
                     </a:solidFill>
                   </a:tcPr>
                 </a:tc>
@@ -8297,7 +9197,7 @@
                         <a:buNone/>
                       </a:pPr>
                       <a:r>
-                        <a:rPr lang="en-US" sz="1400" b="1" dirty="0">
+                        <a:rPr lang="en-US" sz="1500" b="1" dirty="0">
                           <a:solidFill>
                             <a:srgbClr val="2C3E50"/>
                           </a:solidFill>
@@ -8305,9 +9205,9 @@
                           <a:ea typeface="Microsoft YaHei" pitchFamily="34" charset="-122"/>
                           <a:cs typeface="Microsoft YaHei" pitchFamily="34" charset="-120"/>
                         </a:rPr>
-                        <a:t>6</a:t>
+                        <a:t>1500ms</a:t>
                       </a:r>
-                      <a:endParaRPr lang="en-US" sz="1400" dirty="0">
+                      <a:endParaRPr lang="en-US" sz="1500" dirty="0">
                         <a:latin typeface="Microsoft YaHei" charset="0"/>
                         <a:ea typeface="Microsoft YaHei" charset="0"/>
                         <a:cs typeface="Microsoft YaHei" charset="0"/>
@@ -8351,9 +9251,6 @@
                       <a:headEnd type="none" w="med" len="med"/>
                       <a:tailEnd type="none" w="med" len="med"/>
                     </a:lnB>
-                    <a:solidFill>
-                      <a:srgbClr val="ECF0F1"/>
-                    </a:solidFill>
                   </a:tcPr>
                 </a:tc>
                 <a:tc>
@@ -8365,7 +9262,7 @@
                         <a:buNone/>
                       </a:pPr>
                       <a:r>
-                        <a:rPr lang="en-US" sz="1400" b="1" dirty="0">
+                        <a:rPr lang="en-US" sz="1500" b="1" dirty="0">
                           <a:solidFill>
                             <a:srgbClr val="2C3E50"/>
                           </a:solidFill>
@@ -8373,9 +9270,9 @@
                           <a:ea typeface="Microsoft YaHei" pitchFamily="34" charset="-122"/>
                           <a:cs typeface="Microsoft YaHei" pitchFamily="34" charset="-120"/>
                         </a:rPr>
-                        <a:t>7</a:t>
+                        <a:t>1400-1200ms</a:t>
                       </a:r>
-                      <a:endParaRPr lang="en-US" sz="1400" dirty="0">
+                      <a:endParaRPr lang="en-US" sz="1500" dirty="0">
                         <a:latin typeface="Microsoft YaHei" charset="0"/>
                         <a:ea typeface="Microsoft YaHei" charset="0"/>
                         <a:cs typeface="Microsoft YaHei" charset="0"/>
@@ -8419,9 +9316,6 @@
                       <a:headEnd type="none" w="med" len="med"/>
                       <a:tailEnd type="none" w="med" len="med"/>
                     </a:lnB>
-                    <a:solidFill>
-                      <a:srgbClr val="ECF0F1"/>
-                    </a:solidFill>
                   </a:tcPr>
                 </a:tc>
                 <a:tc>
@@ -8433,17 +9327,17 @@
                         <a:buNone/>
                       </a:pPr>
                       <a:r>
-                        <a:rPr lang="en-US" sz="1400" b="1" dirty="0">
+                        <a:rPr lang="en-US" sz="1500" b="1" strike="sngStrike" dirty="0">
                           <a:solidFill>
-                            <a:srgbClr val="2C3E50"/>
+                            <a:srgbClr val="7F8C8D"/>
                           </a:solidFill>
                           <a:latin typeface="Microsoft YaHei" pitchFamily="34" charset="0"/>
                           <a:ea typeface="Microsoft YaHei" pitchFamily="34" charset="-122"/>
                           <a:cs typeface="Microsoft YaHei" pitchFamily="34" charset="-120"/>
                         </a:rPr>
-                        <a:t>8</a:t>
+                        <a:t>1500ms</a:t>
                       </a:r>
-                      <a:endParaRPr lang="en-US" sz="1400" dirty="0">
+                      <a:endParaRPr lang="en-US" sz="1500" dirty="0">
                         <a:latin typeface="Microsoft YaHei" charset="0"/>
                         <a:ea typeface="Microsoft YaHei" charset="0"/>
                         <a:cs typeface="Microsoft YaHei" charset="0"/>
@@ -8487,9 +9381,6 @@
                       <a:headEnd type="none" w="med" len="med"/>
                       <a:tailEnd type="none" w="med" len="med"/>
                     </a:lnB>
-                    <a:solidFill>
-                      <a:srgbClr val="ECF0F1"/>
-                    </a:solidFill>
                   </a:tcPr>
                 </a:tc>
                 <a:tc>
@@ -8501,7 +9392,7 @@
                         <a:buNone/>
                       </a:pPr>
                       <a:r>
-                        <a:rPr lang="en-US" sz="1400" b="1" dirty="0">
+                        <a:rPr lang="en-US" sz="1500" b="1" dirty="0">
                           <a:solidFill>
                             <a:srgbClr val="2C3E50"/>
                           </a:solidFill>
@@ -8509,9 +9400,9 @@
                           <a:ea typeface="Microsoft YaHei" pitchFamily="34" charset="-122"/>
                           <a:cs typeface="Microsoft YaHei" pitchFamily="34" charset="-120"/>
                         </a:rPr>
-                        <a:t>9</a:t>
+                        <a:t>1400-1200ms</a:t>
                       </a:r>
-                      <a:endParaRPr lang="en-US" sz="1400" dirty="0">
+                      <a:endParaRPr lang="en-US" sz="1500" dirty="0">
                         <a:latin typeface="Microsoft YaHei" charset="0"/>
                         <a:ea typeface="Microsoft YaHei" charset="0"/>
                         <a:cs typeface="Microsoft YaHei" charset="0"/>
@@ -8555,9 +9446,6 @@
                       <a:headEnd type="none" w="med" len="med"/>
                       <a:tailEnd type="none" w="med" len="med"/>
                     </a:lnB>
-                    <a:solidFill>
-                      <a:srgbClr val="ECF0F1"/>
-                    </a:solidFill>
                   </a:tcPr>
                 </a:tc>
                 <a:tc>
@@ -8569,7 +9457,7 @@
                         <a:buNone/>
                       </a:pPr>
                       <a:r>
-                        <a:rPr lang="en-US" sz="1400" b="1" dirty="0">
+                        <a:rPr lang="en-US" sz="1500" b="1" dirty="0">
                           <a:solidFill>
                             <a:srgbClr val="2C3E50"/>
                           </a:solidFill>
@@ -8577,9 +9465,9 @@
                           <a:ea typeface="Microsoft YaHei" pitchFamily="34" charset="-122"/>
                           <a:cs typeface="Microsoft YaHei" pitchFamily="34" charset="-120"/>
                         </a:rPr>
-                        <a:t>10</a:t>
+                        <a:t>1100-800ms</a:t>
                       </a:r>
-                      <a:endParaRPr lang="en-US" sz="1400" dirty="0">
+                      <a:endParaRPr lang="en-US" sz="1500" dirty="0">
                         <a:latin typeface="Microsoft YaHei" charset="0"/>
                         <a:ea typeface="Microsoft YaHei" charset="0"/>
                         <a:cs typeface="Microsoft YaHei" charset="0"/>
@@ -8623,79 +9511,6 @@
                       <a:headEnd type="none" w="med" len="med"/>
                       <a:tailEnd type="none" w="med" len="med"/>
                     </a:lnB>
-                    <a:solidFill>
-                      <a:srgbClr val="ECF0F1"/>
-                    </a:solidFill>
-                  </a:tcPr>
-                </a:tc>
-              </a:tr>
-              <a:tr h="502920">
-                <a:tc>
-                  <a:txBody>
-                    <a:bodyPr/>
-                    <a:lstStyle/>
-                    <a:p>
-                      <a:pPr indent="0" marL="0">
-                        <a:buNone/>
-                      </a:pPr>
-                      <a:r>
-                        <a:rPr lang="en-US" sz="1400" b="1" dirty="0">
-                          <a:solidFill>
-                            <a:srgbClr val="2C3E50"/>
-                          </a:solidFill>
-                          <a:latin typeface="Microsoft YaHei" pitchFamily="34" charset="0"/>
-                          <a:ea typeface="Microsoft YaHei" pitchFamily="34" charset="-122"/>
-                          <a:cs typeface="Microsoft YaHei" pitchFamily="34" charset="-120"/>
-                        </a:rPr>
-                        <a:t>干扰比例</a:t>
-                      </a:r>
-                      <a:endParaRPr lang="en-US" sz="1400" dirty="0">
-                        <a:latin typeface="Microsoft YaHei" charset="0"/>
-                        <a:ea typeface="Microsoft YaHei" charset="0"/>
-                        <a:cs typeface="Microsoft YaHei" charset="0"/>
-                      </a:endParaRPr>
-                    </a:p>
-                  </a:txBody>
-                  <a:tcPr marL="91440" marR="91440" marT="45720" marB="45720">
-                    <a:lnL w="6350" cap="flat" cmpd="sng" algn="ctr">
-                      <a:solidFill>
-                        <a:srgbClr val="3498DB"/>
-                      </a:solidFill>
-                      <a:prstDash val="solid"/>
-                      <a:round/>
-                      <a:headEnd type="none" w="med" len="med"/>
-                      <a:tailEnd type="none" w="med" len="med"/>
-                    </a:lnL>
-                    <a:lnR w="6350" cap="flat" cmpd="sng" algn="ctr">
-                      <a:solidFill>
-                        <a:srgbClr val="3498DB"/>
-                      </a:solidFill>
-                      <a:prstDash val="solid"/>
-                      <a:round/>
-                      <a:headEnd type="none" w="med" len="med"/>
-                      <a:tailEnd type="none" w="med" len="med"/>
-                    </a:lnR>
-                    <a:lnT w="6350" cap="flat" cmpd="sng" algn="ctr">
-                      <a:solidFill>
-                        <a:srgbClr val="3498DB"/>
-                      </a:solidFill>
-                      <a:prstDash val="solid"/>
-                      <a:round/>
-                      <a:headEnd type="none" w="med" len="med"/>
-                      <a:tailEnd type="none" w="med" len="med"/>
-                    </a:lnT>
-                    <a:lnB w="6350" cap="flat" cmpd="sng" algn="ctr">
-                      <a:solidFill>
-                        <a:srgbClr val="3498DB"/>
-                      </a:solidFill>
-                      <a:prstDash val="solid"/>
-                      <a:round/>
-                      <a:headEnd type="none" w="med" len="med"/>
-                      <a:tailEnd type="none" w="med" len="med"/>
-                    </a:lnB>
-                    <a:solidFill>
-                      <a:srgbClr val="ECF0F1"/>
-                    </a:solidFill>
                   </a:tcPr>
                 </a:tc>
                 <a:tc>
@@ -8707,17 +9522,17 @@
                         <a:buNone/>
                       </a:pPr>
                       <a:r>
-                        <a:rPr lang="en-US" sz="1400" b="1" dirty="0">
+                        <a:rPr lang="en-US" sz="1500" b="1" dirty="0">
                           <a:solidFill>
-                            <a:srgbClr val="2C3E50"/>
+                            <a:srgbClr val="E74C3C"/>
                           </a:solidFill>
                           <a:latin typeface="Microsoft YaHei" pitchFamily="34" charset="0"/>
                           <a:ea typeface="Microsoft YaHei" pitchFamily="34" charset="-122"/>
                           <a:cs typeface="Microsoft YaHei" pitchFamily="34" charset="-120"/>
                         </a:rPr>
-                        <a:t>50%</a:t>
+                        <a:t>700ms</a:t>
                       </a:r>
-                      <a:endParaRPr lang="en-US" sz="1400" dirty="0">
+                      <a:endParaRPr lang="en-US" sz="1500" dirty="0">
                         <a:latin typeface="Microsoft YaHei" charset="0"/>
                         <a:ea typeface="Microsoft YaHei" charset="0"/>
                         <a:cs typeface="Microsoft YaHei" charset="0"/>
@@ -8761,9 +9576,6 @@
                       <a:headEnd type="none" w="med" len="med"/>
                       <a:tailEnd type="none" w="med" len="med"/>
                     </a:lnB>
-                    <a:solidFill>
-                      <a:srgbClr val="ECF0F1"/>
-                    </a:solidFill>
                   </a:tcPr>
                 </a:tc>
                 <a:tc>
@@ -8775,17 +9587,17 @@
                         <a:buNone/>
                       </a:pPr>
                       <a:r>
-                        <a:rPr lang="en-US" sz="1400" b="1" dirty="0">
+                        <a:rPr lang="en-US" sz="1500" b="1" dirty="0">
                           <a:solidFill>
-                            <a:srgbClr val="2C3E50"/>
+                            <a:srgbClr val="E74C3C"/>
                           </a:solidFill>
                           <a:latin typeface="Microsoft YaHei" pitchFamily="34" charset="0"/>
                           <a:ea typeface="Microsoft YaHei" pitchFamily="34" charset="-122"/>
                           <a:cs typeface="Microsoft YaHei" pitchFamily="34" charset="-120"/>
                         </a:rPr>
-                        <a:t>55-65%</a:t>
+                        <a:t>700-500ms</a:t>
                       </a:r>
-                      <a:endParaRPr lang="en-US" sz="1400" dirty="0">
+                      <a:endParaRPr lang="en-US" sz="1500" dirty="0">
                         <a:latin typeface="Microsoft YaHei" charset="0"/>
                         <a:ea typeface="Microsoft YaHei" charset="0"/>
                         <a:cs typeface="Microsoft YaHei" charset="0"/>
@@ -8829,895 +9641,6 @@
                       <a:headEnd type="none" w="med" len="med"/>
                       <a:tailEnd type="none" w="med" len="med"/>
                     </a:lnB>
-                    <a:solidFill>
-                      <a:srgbClr val="ECF0F1"/>
-                    </a:solidFill>
-                  </a:tcPr>
-                </a:tc>
-                <a:tc>
-                  <a:txBody>
-                    <a:bodyPr/>
-                    <a:lstStyle/>
-                    <a:p>
-                      <a:pPr indent="0" marL="0">
-                        <a:buNone/>
-                      </a:pPr>
-                      <a:r>
-                        <a:rPr lang="en-US" sz="1400" b="1" dirty="0">
-                          <a:solidFill>
-                            <a:srgbClr val="2C3E50"/>
-                          </a:solidFill>
-                          <a:latin typeface="Microsoft YaHei" pitchFamily="34" charset="0"/>
-                          <a:ea typeface="Microsoft YaHei" pitchFamily="34" charset="-122"/>
-                          <a:cs typeface="Microsoft YaHei" pitchFamily="34" charset="-120"/>
-                        </a:rPr>
-                        <a:t>50%</a:t>
-                      </a:r>
-                      <a:endParaRPr lang="en-US" sz="1400" dirty="0">
-                        <a:latin typeface="Microsoft YaHei" charset="0"/>
-                        <a:ea typeface="Microsoft YaHei" charset="0"/>
-                        <a:cs typeface="Microsoft YaHei" charset="0"/>
-                      </a:endParaRPr>
-                    </a:p>
-                  </a:txBody>
-                  <a:tcPr marL="91440" marR="91440" marT="45720" marB="45720">
-                    <a:lnL w="6350" cap="flat" cmpd="sng" algn="ctr">
-                      <a:solidFill>
-                        <a:srgbClr val="3498DB"/>
-                      </a:solidFill>
-                      <a:prstDash val="solid"/>
-                      <a:round/>
-                      <a:headEnd type="none" w="med" len="med"/>
-                      <a:tailEnd type="none" w="med" len="med"/>
-                    </a:lnL>
-                    <a:lnR w="6350" cap="flat" cmpd="sng" algn="ctr">
-                      <a:solidFill>
-                        <a:srgbClr val="3498DB"/>
-                      </a:solidFill>
-                      <a:prstDash val="solid"/>
-                      <a:round/>
-                      <a:headEnd type="none" w="med" len="med"/>
-                      <a:tailEnd type="none" w="med" len="med"/>
-                    </a:lnR>
-                    <a:lnT w="6350" cap="flat" cmpd="sng" algn="ctr">
-                      <a:solidFill>
-                        <a:srgbClr val="3498DB"/>
-                      </a:solidFill>
-                      <a:prstDash val="solid"/>
-                      <a:round/>
-                      <a:headEnd type="none" w="med" len="med"/>
-                      <a:tailEnd type="none" w="med" len="med"/>
-                    </a:lnT>
-                    <a:lnB w="6350" cap="flat" cmpd="sng" algn="ctr">
-                      <a:solidFill>
-                        <a:srgbClr val="3498DB"/>
-                      </a:solidFill>
-                      <a:prstDash val="solid"/>
-                      <a:round/>
-                      <a:headEnd type="none" w="med" len="med"/>
-                      <a:tailEnd type="none" w="med" len="med"/>
-                    </a:lnB>
-                    <a:solidFill>
-                      <a:srgbClr val="ECF0F1"/>
-                    </a:solidFill>
-                  </a:tcPr>
-                </a:tc>
-                <a:tc>
-                  <a:txBody>
-                    <a:bodyPr/>
-                    <a:lstStyle/>
-                    <a:p>
-                      <a:pPr indent="0" marL="0">
-                        <a:buNone/>
-                      </a:pPr>
-                      <a:r>
-                        <a:rPr lang="en-US" sz="1400" b="1" dirty="0">
-                          <a:solidFill>
-                            <a:srgbClr val="2C3E50"/>
-                          </a:solidFill>
-                          <a:latin typeface="Microsoft YaHei" pitchFamily="34" charset="0"/>
-                          <a:ea typeface="Microsoft YaHei" pitchFamily="34" charset="-122"/>
-                          <a:cs typeface="Microsoft YaHei" pitchFamily="34" charset="-120"/>
-                        </a:rPr>
-                        <a:t>55-65%</a:t>
-                      </a:r>
-                      <a:endParaRPr lang="en-US" sz="1400" dirty="0">
-                        <a:latin typeface="Microsoft YaHei" charset="0"/>
-                        <a:ea typeface="Microsoft YaHei" charset="0"/>
-                        <a:cs typeface="Microsoft YaHei" charset="0"/>
-                      </a:endParaRPr>
-                    </a:p>
-                  </a:txBody>
-                  <a:tcPr marL="91440" marR="91440" marT="45720" marB="45720">
-                    <a:lnL w="6350" cap="flat" cmpd="sng" algn="ctr">
-                      <a:solidFill>
-                        <a:srgbClr val="3498DB"/>
-                      </a:solidFill>
-                      <a:prstDash val="solid"/>
-                      <a:round/>
-                      <a:headEnd type="none" w="med" len="med"/>
-                      <a:tailEnd type="none" w="med" len="med"/>
-                    </a:lnL>
-                    <a:lnR w="6350" cap="flat" cmpd="sng" algn="ctr">
-                      <a:solidFill>
-                        <a:srgbClr val="3498DB"/>
-                      </a:solidFill>
-                      <a:prstDash val="solid"/>
-                      <a:round/>
-                      <a:headEnd type="none" w="med" len="med"/>
-                      <a:tailEnd type="none" w="med" len="med"/>
-                    </a:lnR>
-                    <a:lnT w="6350" cap="flat" cmpd="sng" algn="ctr">
-                      <a:solidFill>
-                        <a:srgbClr val="3498DB"/>
-                      </a:solidFill>
-                      <a:prstDash val="solid"/>
-                      <a:round/>
-                      <a:headEnd type="none" w="med" len="med"/>
-                      <a:tailEnd type="none" w="med" len="med"/>
-                    </a:lnT>
-                    <a:lnB w="6350" cap="flat" cmpd="sng" algn="ctr">
-                      <a:solidFill>
-                        <a:srgbClr val="3498DB"/>
-                      </a:solidFill>
-                      <a:prstDash val="solid"/>
-                      <a:round/>
-                      <a:headEnd type="none" w="med" len="med"/>
-                      <a:tailEnd type="none" w="med" len="med"/>
-                    </a:lnB>
-                    <a:solidFill>
-                      <a:srgbClr val="ECF0F1"/>
-                    </a:solidFill>
-                  </a:tcPr>
-                </a:tc>
-                <a:tc>
-                  <a:txBody>
-                    <a:bodyPr/>
-                    <a:lstStyle/>
-                    <a:p>
-                      <a:pPr indent="0" marL="0">
-                        <a:buNone/>
-                      </a:pPr>
-                      <a:r>
-                        <a:rPr lang="en-US" sz="1400" b="1" dirty="0">
-                          <a:solidFill>
-                            <a:srgbClr val="2C3E50"/>
-                          </a:solidFill>
-                          <a:latin typeface="Microsoft YaHei" pitchFamily="34" charset="0"/>
-                          <a:ea typeface="Microsoft YaHei" pitchFamily="34" charset="-122"/>
-                          <a:cs typeface="Microsoft YaHei" pitchFamily="34" charset="-120"/>
-                        </a:rPr>
-                        <a:t>70-80%</a:t>
-                      </a:r>
-                      <a:endParaRPr lang="en-US" sz="1400" dirty="0">
-                        <a:latin typeface="Microsoft YaHei" charset="0"/>
-                        <a:ea typeface="Microsoft YaHei" charset="0"/>
-                        <a:cs typeface="Microsoft YaHei" charset="0"/>
-                      </a:endParaRPr>
-                    </a:p>
-                  </a:txBody>
-                  <a:tcPr marL="91440" marR="91440" marT="45720" marB="45720">
-                    <a:lnL w="6350" cap="flat" cmpd="sng" algn="ctr">
-                      <a:solidFill>
-                        <a:srgbClr val="3498DB"/>
-                      </a:solidFill>
-                      <a:prstDash val="solid"/>
-                      <a:round/>
-                      <a:headEnd type="none" w="med" len="med"/>
-                      <a:tailEnd type="none" w="med" len="med"/>
-                    </a:lnL>
-                    <a:lnR w="6350" cap="flat" cmpd="sng" algn="ctr">
-                      <a:solidFill>
-                        <a:srgbClr val="3498DB"/>
-                      </a:solidFill>
-                      <a:prstDash val="solid"/>
-                      <a:round/>
-                      <a:headEnd type="none" w="med" len="med"/>
-                      <a:tailEnd type="none" w="med" len="med"/>
-                    </a:lnR>
-                    <a:lnT w="6350" cap="flat" cmpd="sng" algn="ctr">
-                      <a:solidFill>
-                        <a:srgbClr val="3498DB"/>
-                      </a:solidFill>
-                      <a:prstDash val="solid"/>
-                      <a:round/>
-                      <a:headEnd type="none" w="med" len="med"/>
-                      <a:tailEnd type="none" w="med" len="med"/>
-                    </a:lnT>
-                    <a:lnB w="6350" cap="flat" cmpd="sng" algn="ctr">
-                      <a:solidFill>
-                        <a:srgbClr val="3498DB"/>
-                      </a:solidFill>
-                      <a:prstDash val="solid"/>
-                      <a:round/>
-                      <a:headEnd type="none" w="med" len="med"/>
-                      <a:tailEnd type="none" w="med" len="med"/>
-                    </a:lnB>
-                    <a:solidFill>
-                      <a:srgbClr val="ECF0F1"/>
-                    </a:solidFill>
-                  </a:tcPr>
-                </a:tc>
-                <a:tc>
-                  <a:txBody>
-                    <a:bodyPr/>
-                    <a:lstStyle/>
-                    <a:p>
-                      <a:pPr indent="0" marL="0">
-                        <a:buNone/>
-                      </a:pPr>
-                      <a:r>
-                        <a:rPr lang="en-US" sz="1400" b="1" dirty="0">
-                          <a:solidFill>
-                            <a:srgbClr val="2C3E50"/>
-                          </a:solidFill>
-                          <a:latin typeface="Microsoft YaHei" pitchFamily="34" charset="0"/>
-                          <a:ea typeface="Microsoft YaHei" pitchFamily="34" charset="-122"/>
-                          <a:cs typeface="Microsoft YaHei" pitchFamily="34" charset="-120"/>
-                        </a:rPr>
-                        <a:t>80%</a:t>
-                      </a:r>
-                      <a:endParaRPr lang="en-US" sz="1400" dirty="0">
-                        <a:latin typeface="Microsoft YaHei" charset="0"/>
-                        <a:ea typeface="Microsoft YaHei" charset="0"/>
-                        <a:cs typeface="Microsoft YaHei" charset="0"/>
-                      </a:endParaRPr>
-                    </a:p>
-                  </a:txBody>
-                  <a:tcPr marL="91440" marR="91440" marT="45720" marB="45720">
-                    <a:lnL w="6350" cap="flat" cmpd="sng" algn="ctr">
-                      <a:solidFill>
-                        <a:srgbClr val="3498DB"/>
-                      </a:solidFill>
-                      <a:prstDash val="solid"/>
-                      <a:round/>
-                      <a:headEnd type="none" w="med" len="med"/>
-                      <a:tailEnd type="none" w="med" len="med"/>
-                    </a:lnL>
-                    <a:lnR w="6350" cap="flat" cmpd="sng" algn="ctr">
-                      <a:solidFill>
-                        <a:srgbClr val="3498DB"/>
-                      </a:solidFill>
-                      <a:prstDash val="solid"/>
-                      <a:round/>
-                      <a:headEnd type="none" w="med" len="med"/>
-                      <a:tailEnd type="none" w="med" len="med"/>
-                    </a:lnR>
-                    <a:lnT w="6350" cap="flat" cmpd="sng" algn="ctr">
-                      <a:solidFill>
-                        <a:srgbClr val="3498DB"/>
-                      </a:solidFill>
-                      <a:prstDash val="solid"/>
-                      <a:round/>
-                      <a:headEnd type="none" w="med" len="med"/>
-                      <a:tailEnd type="none" w="med" len="med"/>
-                    </a:lnT>
-                    <a:lnB w="6350" cap="flat" cmpd="sng" algn="ctr">
-                      <a:solidFill>
-                        <a:srgbClr val="3498DB"/>
-                      </a:solidFill>
-                      <a:prstDash val="solid"/>
-                      <a:round/>
-                      <a:headEnd type="none" w="med" len="med"/>
-                      <a:tailEnd type="none" w="med" len="med"/>
-                    </a:lnB>
-                    <a:solidFill>
-                      <a:srgbClr val="ECF0F1"/>
-                    </a:solidFill>
-                  </a:tcPr>
-                </a:tc>
-                <a:tc>
-                  <a:txBody>
-                    <a:bodyPr/>
-                    <a:lstStyle/>
-                    <a:p>
-                      <a:pPr indent="0" marL="0">
-                        <a:buNone/>
-                      </a:pPr>
-                      <a:r>
-                        <a:rPr lang="en-US" sz="1400" b="1" dirty="0">
-                          <a:solidFill>
-                            <a:srgbClr val="2C3E50"/>
-                          </a:solidFill>
-                          <a:latin typeface="Microsoft YaHei" pitchFamily="34" charset="0"/>
-                          <a:ea typeface="Microsoft YaHei" pitchFamily="34" charset="-122"/>
-                          <a:cs typeface="Microsoft YaHei" pitchFamily="34" charset="-120"/>
-                        </a:rPr>
-                        <a:t>80%</a:t>
-                      </a:r>
-                      <a:endParaRPr lang="en-US" sz="1400" dirty="0">
-                        <a:latin typeface="Microsoft YaHei" charset="0"/>
-                        <a:ea typeface="Microsoft YaHei" charset="0"/>
-                        <a:cs typeface="Microsoft YaHei" charset="0"/>
-                      </a:endParaRPr>
-                    </a:p>
-                  </a:txBody>
-                  <a:tcPr marL="91440" marR="91440" marT="45720" marB="45720">
-                    <a:lnL w="6350" cap="flat" cmpd="sng" algn="ctr">
-                      <a:solidFill>
-                        <a:srgbClr val="3498DB"/>
-                      </a:solidFill>
-                      <a:prstDash val="solid"/>
-                      <a:round/>
-                      <a:headEnd type="none" w="med" len="med"/>
-                      <a:tailEnd type="none" w="med" len="med"/>
-                    </a:lnL>
-                    <a:lnR w="6350" cap="flat" cmpd="sng" algn="ctr">
-                      <a:solidFill>
-                        <a:srgbClr val="3498DB"/>
-                      </a:solidFill>
-                      <a:prstDash val="solid"/>
-                      <a:round/>
-                      <a:headEnd type="none" w="med" len="med"/>
-                      <a:tailEnd type="none" w="med" len="med"/>
-                    </a:lnR>
-                    <a:lnT w="6350" cap="flat" cmpd="sng" algn="ctr">
-                      <a:solidFill>
-                        <a:srgbClr val="3498DB"/>
-                      </a:solidFill>
-                      <a:prstDash val="solid"/>
-                      <a:round/>
-                      <a:headEnd type="none" w="med" len="med"/>
-                      <a:tailEnd type="none" w="med" len="med"/>
-                    </a:lnT>
-                    <a:lnB w="6350" cap="flat" cmpd="sng" algn="ctr">
-                      <a:solidFill>
-                        <a:srgbClr val="3498DB"/>
-                      </a:solidFill>
-                      <a:prstDash val="solid"/>
-                      <a:round/>
-                      <a:headEnd type="none" w="med" len="med"/>
-                      <a:tailEnd type="none" w="med" len="med"/>
-                    </a:lnB>
-                    <a:solidFill>
-                      <a:srgbClr val="ECF0F1"/>
-                    </a:solidFill>
-                  </a:tcPr>
-                </a:tc>
-              </a:tr>
-              <a:tr h="502920">
-                <a:tc>
-                  <a:txBody>
-                    <a:bodyPr/>
-                    <a:lstStyle/>
-                    <a:p>
-                      <a:pPr indent="0" marL="0">
-                        <a:buNone/>
-                      </a:pPr>
-                      <a:r>
-                        <a:rPr lang="en-US" sz="1400" b="1" dirty="0">
-                          <a:solidFill>
-                            <a:srgbClr val="2C3E50"/>
-                          </a:solidFill>
-                          <a:latin typeface="Microsoft YaHei" pitchFamily="34" charset="0"/>
-                          <a:ea typeface="Microsoft YaHei" pitchFamily="34" charset="-122"/>
-                          <a:cs typeface="Microsoft YaHei" pitchFamily="34" charset="-120"/>
-                        </a:rPr>
-                        <a:t>呈现时间</a:t>
-                      </a:r>
-                      <a:endParaRPr lang="en-US" sz="1400" dirty="0">
-                        <a:latin typeface="Microsoft YaHei" charset="0"/>
-                        <a:ea typeface="Microsoft YaHei" charset="0"/>
-                        <a:cs typeface="Microsoft YaHei" charset="0"/>
-                      </a:endParaRPr>
-                    </a:p>
-                  </a:txBody>
-                  <a:tcPr marL="91440" marR="91440" marT="45720" marB="45720">
-                    <a:lnL w="6350" cap="flat" cmpd="sng" algn="ctr">
-                      <a:solidFill>
-                        <a:srgbClr val="3498DB"/>
-                      </a:solidFill>
-                      <a:prstDash val="solid"/>
-                      <a:round/>
-                      <a:headEnd type="none" w="med" len="med"/>
-                      <a:tailEnd type="none" w="med" len="med"/>
-                    </a:lnL>
-                    <a:lnR w="6350" cap="flat" cmpd="sng" algn="ctr">
-                      <a:solidFill>
-                        <a:srgbClr val="3498DB"/>
-                      </a:solidFill>
-                      <a:prstDash val="solid"/>
-                      <a:round/>
-                      <a:headEnd type="none" w="med" len="med"/>
-                      <a:tailEnd type="none" w="med" len="med"/>
-                    </a:lnR>
-                    <a:lnT w="6350" cap="flat" cmpd="sng" algn="ctr">
-                      <a:solidFill>
-                        <a:srgbClr val="3498DB"/>
-                      </a:solidFill>
-                      <a:prstDash val="solid"/>
-                      <a:round/>
-                      <a:headEnd type="none" w="med" len="med"/>
-                      <a:tailEnd type="none" w="med" len="med"/>
-                    </a:lnT>
-                    <a:lnB w="6350" cap="flat" cmpd="sng" algn="ctr">
-                      <a:solidFill>
-                        <a:srgbClr val="3498DB"/>
-                      </a:solidFill>
-                      <a:prstDash val="solid"/>
-                      <a:round/>
-                      <a:headEnd type="none" w="med" len="med"/>
-                      <a:tailEnd type="none" w="med" len="med"/>
-                    </a:lnB>
-                    <a:solidFill>
-                      <a:srgbClr val="ECF0F1"/>
-                    </a:solidFill>
-                  </a:tcPr>
-                </a:tc>
-                <a:tc>
-                  <a:txBody>
-                    <a:bodyPr/>
-                    <a:lstStyle/>
-                    <a:p>
-                      <a:pPr indent="0" marL="0">
-                        <a:buNone/>
-                      </a:pPr>
-                      <a:r>
-                        <a:rPr lang="en-US" sz="1400" b="1" dirty="0">
-                          <a:solidFill>
-                            <a:srgbClr val="2C3E50"/>
-                          </a:solidFill>
-                          <a:latin typeface="Microsoft YaHei" pitchFamily="34" charset="0"/>
-                          <a:ea typeface="Microsoft YaHei" pitchFamily="34" charset="-122"/>
-                          <a:cs typeface="Microsoft YaHei" pitchFamily="34" charset="-120"/>
-                        </a:rPr>
-                        <a:t>1500ms</a:t>
-                      </a:r>
-                      <a:endParaRPr lang="en-US" sz="1400" dirty="0">
-                        <a:latin typeface="Microsoft YaHei" charset="0"/>
-                        <a:ea typeface="Microsoft YaHei" charset="0"/>
-                        <a:cs typeface="Microsoft YaHei" charset="0"/>
-                      </a:endParaRPr>
-                    </a:p>
-                  </a:txBody>
-                  <a:tcPr marL="91440" marR="91440" marT="45720" marB="45720">
-                    <a:lnL w="6350" cap="flat" cmpd="sng" algn="ctr">
-                      <a:solidFill>
-                        <a:srgbClr val="3498DB"/>
-                      </a:solidFill>
-                      <a:prstDash val="solid"/>
-                      <a:round/>
-                      <a:headEnd type="none" w="med" len="med"/>
-                      <a:tailEnd type="none" w="med" len="med"/>
-                    </a:lnL>
-                    <a:lnR w="6350" cap="flat" cmpd="sng" algn="ctr">
-                      <a:solidFill>
-                        <a:srgbClr val="3498DB"/>
-                      </a:solidFill>
-                      <a:prstDash val="solid"/>
-                      <a:round/>
-                      <a:headEnd type="none" w="med" len="med"/>
-                      <a:tailEnd type="none" w="med" len="med"/>
-                    </a:lnR>
-                    <a:lnT w="6350" cap="flat" cmpd="sng" algn="ctr">
-                      <a:solidFill>
-                        <a:srgbClr val="3498DB"/>
-                      </a:solidFill>
-                      <a:prstDash val="solid"/>
-                      <a:round/>
-                      <a:headEnd type="none" w="med" len="med"/>
-                      <a:tailEnd type="none" w="med" len="med"/>
-                    </a:lnT>
-                    <a:lnB w="6350" cap="flat" cmpd="sng" algn="ctr">
-                      <a:solidFill>
-                        <a:srgbClr val="3498DB"/>
-                      </a:solidFill>
-                      <a:prstDash val="solid"/>
-                      <a:round/>
-                      <a:headEnd type="none" w="med" len="med"/>
-                      <a:tailEnd type="none" w="med" len="med"/>
-                    </a:lnB>
-                    <a:solidFill>
-                      <a:srgbClr val="ECF0F1"/>
-                    </a:solidFill>
-                  </a:tcPr>
-                </a:tc>
-                <a:tc>
-                  <a:txBody>
-                    <a:bodyPr/>
-                    <a:lstStyle/>
-                    <a:p>
-                      <a:pPr indent="0" marL="0">
-                        <a:buNone/>
-                      </a:pPr>
-                      <a:r>
-                        <a:rPr lang="en-US" sz="1400" b="1" dirty="0">
-                          <a:solidFill>
-                            <a:srgbClr val="2C3E50"/>
-                          </a:solidFill>
-                          <a:latin typeface="Microsoft YaHei" pitchFamily="34" charset="0"/>
-                          <a:ea typeface="Microsoft YaHei" pitchFamily="34" charset="-122"/>
-                          <a:cs typeface="Microsoft YaHei" pitchFamily="34" charset="-120"/>
-                        </a:rPr>
-                        <a:t>1400-1200ms</a:t>
-                      </a:r>
-                      <a:endParaRPr lang="en-US" sz="1400" dirty="0">
-                        <a:latin typeface="Microsoft YaHei" charset="0"/>
-                        <a:ea typeface="Microsoft YaHei" charset="0"/>
-                        <a:cs typeface="Microsoft YaHei" charset="0"/>
-                      </a:endParaRPr>
-                    </a:p>
-                  </a:txBody>
-                  <a:tcPr marL="91440" marR="91440" marT="45720" marB="45720">
-                    <a:lnL w="6350" cap="flat" cmpd="sng" algn="ctr">
-                      <a:solidFill>
-                        <a:srgbClr val="3498DB"/>
-                      </a:solidFill>
-                      <a:prstDash val="solid"/>
-                      <a:round/>
-                      <a:headEnd type="none" w="med" len="med"/>
-                      <a:tailEnd type="none" w="med" len="med"/>
-                    </a:lnL>
-                    <a:lnR w="6350" cap="flat" cmpd="sng" algn="ctr">
-                      <a:solidFill>
-                        <a:srgbClr val="3498DB"/>
-                      </a:solidFill>
-                      <a:prstDash val="solid"/>
-                      <a:round/>
-                      <a:headEnd type="none" w="med" len="med"/>
-                      <a:tailEnd type="none" w="med" len="med"/>
-                    </a:lnR>
-                    <a:lnT w="6350" cap="flat" cmpd="sng" algn="ctr">
-                      <a:solidFill>
-                        <a:srgbClr val="3498DB"/>
-                      </a:solidFill>
-                      <a:prstDash val="solid"/>
-                      <a:round/>
-                      <a:headEnd type="none" w="med" len="med"/>
-                      <a:tailEnd type="none" w="med" len="med"/>
-                    </a:lnT>
-                    <a:lnB w="6350" cap="flat" cmpd="sng" algn="ctr">
-                      <a:solidFill>
-                        <a:srgbClr val="3498DB"/>
-                      </a:solidFill>
-                      <a:prstDash val="solid"/>
-                      <a:round/>
-                      <a:headEnd type="none" w="med" len="med"/>
-                      <a:tailEnd type="none" w="med" len="med"/>
-                    </a:lnB>
-                    <a:solidFill>
-                      <a:srgbClr val="ECF0F1"/>
-                    </a:solidFill>
-                  </a:tcPr>
-                </a:tc>
-                <a:tc>
-                  <a:txBody>
-                    <a:bodyPr/>
-                    <a:lstStyle/>
-                    <a:p>
-                      <a:pPr indent="0" marL="0">
-                        <a:buNone/>
-                      </a:pPr>
-                      <a:r>
-                        <a:rPr lang="en-US" sz="1400" b="1" dirty="0">
-                          <a:solidFill>
-                            <a:srgbClr val="2C3E50"/>
-                          </a:solidFill>
-                          <a:latin typeface="Microsoft YaHei" pitchFamily="34" charset="0"/>
-                          <a:ea typeface="Microsoft YaHei" pitchFamily="34" charset="-122"/>
-                          <a:cs typeface="Microsoft YaHei" pitchFamily="34" charset="-120"/>
-                        </a:rPr>
-                        <a:t>1500ms</a:t>
-                      </a:r>
-                      <a:endParaRPr lang="en-US" sz="1400" dirty="0">
-                        <a:latin typeface="Microsoft YaHei" charset="0"/>
-                        <a:ea typeface="Microsoft YaHei" charset="0"/>
-                        <a:cs typeface="Microsoft YaHei" charset="0"/>
-                      </a:endParaRPr>
-                    </a:p>
-                  </a:txBody>
-                  <a:tcPr marL="91440" marR="91440" marT="45720" marB="45720">
-                    <a:lnL w="6350" cap="flat" cmpd="sng" algn="ctr">
-                      <a:solidFill>
-                        <a:srgbClr val="3498DB"/>
-                      </a:solidFill>
-                      <a:prstDash val="solid"/>
-                      <a:round/>
-                      <a:headEnd type="none" w="med" len="med"/>
-                      <a:tailEnd type="none" w="med" len="med"/>
-                    </a:lnL>
-                    <a:lnR w="6350" cap="flat" cmpd="sng" algn="ctr">
-                      <a:solidFill>
-                        <a:srgbClr val="3498DB"/>
-                      </a:solidFill>
-                      <a:prstDash val="solid"/>
-                      <a:round/>
-                      <a:headEnd type="none" w="med" len="med"/>
-                      <a:tailEnd type="none" w="med" len="med"/>
-                    </a:lnR>
-                    <a:lnT w="6350" cap="flat" cmpd="sng" algn="ctr">
-                      <a:solidFill>
-                        <a:srgbClr val="3498DB"/>
-                      </a:solidFill>
-                      <a:prstDash val="solid"/>
-                      <a:round/>
-                      <a:headEnd type="none" w="med" len="med"/>
-                      <a:tailEnd type="none" w="med" len="med"/>
-                    </a:lnT>
-                    <a:lnB w="6350" cap="flat" cmpd="sng" algn="ctr">
-                      <a:solidFill>
-                        <a:srgbClr val="3498DB"/>
-                      </a:solidFill>
-                      <a:prstDash val="solid"/>
-                      <a:round/>
-                      <a:headEnd type="none" w="med" len="med"/>
-                      <a:tailEnd type="none" w="med" len="med"/>
-                    </a:lnB>
-                    <a:solidFill>
-                      <a:srgbClr val="ECF0F1"/>
-                    </a:solidFill>
-                  </a:tcPr>
-                </a:tc>
-                <a:tc>
-                  <a:txBody>
-                    <a:bodyPr/>
-                    <a:lstStyle/>
-                    <a:p>
-                      <a:pPr indent="0" marL="0">
-                        <a:buNone/>
-                      </a:pPr>
-                      <a:r>
-                        <a:rPr lang="en-US" sz="1400" b="1" dirty="0">
-                          <a:solidFill>
-                            <a:srgbClr val="2C3E50"/>
-                          </a:solidFill>
-                          <a:latin typeface="Microsoft YaHei" pitchFamily="34" charset="0"/>
-                          <a:ea typeface="Microsoft YaHei" pitchFamily="34" charset="-122"/>
-                          <a:cs typeface="Microsoft YaHei" pitchFamily="34" charset="-120"/>
-                        </a:rPr>
-                        <a:t>1400-1200ms</a:t>
-                      </a:r>
-                      <a:endParaRPr lang="en-US" sz="1400" dirty="0">
-                        <a:latin typeface="Microsoft YaHei" charset="0"/>
-                        <a:ea typeface="Microsoft YaHei" charset="0"/>
-                        <a:cs typeface="Microsoft YaHei" charset="0"/>
-                      </a:endParaRPr>
-                    </a:p>
-                  </a:txBody>
-                  <a:tcPr marL="91440" marR="91440" marT="45720" marB="45720">
-                    <a:lnL w="6350" cap="flat" cmpd="sng" algn="ctr">
-                      <a:solidFill>
-                        <a:srgbClr val="3498DB"/>
-                      </a:solidFill>
-                      <a:prstDash val="solid"/>
-                      <a:round/>
-                      <a:headEnd type="none" w="med" len="med"/>
-                      <a:tailEnd type="none" w="med" len="med"/>
-                    </a:lnL>
-                    <a:lnR w="6350" cap="flat" cmpd="sng" algn="ctr">
-                      <a:solidFill>
-                        <a:srgbClr val="3498DB"/>
-                      </a:solidFill>
-                      <a:prstDash val="solid"/>
-                      <a:round/>
-                      <a:headEnd type="none" w="med" len="med"/>
-                      <a:tailEnd type="none" w="med" len="med"/>
-                    </a:lnR>
-                    <a:lnT w="6350" cap="flat" cmpd="sng" algn="ctr">
-                      <a:solidFill>
-                        <a:srgbClr val="3498DB"/>
-                      </a:solidFill>
-                      <a:prstDash val="solid"/>
-                      <a:round/>
-                      <a:headEnd type="none" w="med" len="med"/>
-                      <a:tailEnd type="none" w="med" len="med"/>
-                    </a:lnT>
-                    <a:lnB w="6350" cap="flat" cmpd="sng" algn="ctr">
-                      <a:solidFill>
-                        <a:srgbClr val="3498DB"/>
-                      </a:solidFill>
-                      <a:prstDash val="solid"/>
-                      <a:round/>
-                      <a:headEnd type="none" w="med" len="med"/>
-                      <a:tailEnd type="none" w="med" len="med"/>
-                    </a:lnB>
-                    <a:solidFill>
-                      <a:srgbClr val="ECF0F1"/>
-                    </a:solidFill>
-                  </a:tcPr>
-                </a:tc>
-                <a:tc>
-                  <a:txBody>
-                    <a:bodyPr/>
-                    <a:lstStyle/>
-                    <a:p>
-                      <a:pPr indent="0" marL="0">
-                        <a:buNone/>
-                      </a:pPr>
-                      <a:r>
-                        <a:rPr lang="en-US" sz="1400" b="1" dirty="0">
-                          <a:solidFill>
-                            <a:srgbClr val="2C3E50"/>
-                          </a:solidFill>
-                          <a:latin typeface="Microsoft YaHei" pitchFamily="34" charset="0"/>
-                          <a:ea typeface="Microsoft YaHei" pitchFamily="34" charset="-122"/>
-                          <a:cs typeface="Microsoft YaHei" pitchFamily="34" charset="-120"/>
-                        </a:rPr>
-                        <a:t>1100-800ms</a:t>
-                      </a:r>
-                      <a:endParaRPr lang="en-US" sz="1400" dirty="0">
-                        <a:latin typeface="Microsoft YaHei" charset="0"/>
-                        <a:ea typeface="Microsoft YaHei" charset="0"/>
-                        <a:cs typeface="Microsoft YaHei" charset="0"/>
-                      </a:endParaRPr>
-                    </a:p>
-                  </a:txBody>
-                  <a:tcPr marL="91440" marR="91440" marT="45720" marB="45720">
-                    <a:lnL w="6350" cap="flat" cmpd="sng" algn="ctr">
-                      <a:solidFill>
-                        <a:srgbClr val="3498DB"/>
-                      </a:solidFill>
-                      <a:prstDash val="solid"/>
-                      <a:round/>
-                      <a:headEnd type="none" w="med" len="med"/>
-                      <a:tailEnd type="none" w="med" len="med"/>
-                    </a:lnL>
-                    <a:lnR w="6350" cap="flat" cmpd="sng" algn="ctr">
-                      <a:solidFill>
-                        <a:srgbClr val="3498DB"/>
-                      </a:solidFill>
-                      <a:prstDash val="solid"/>
-                      <a:round/>
-                      <a:headEnd type="none" w="med" len="med"/>
-                      <a:tailEnd type="none" w="med" len="med"/>
-                    </a:lnR>
-                    <a:lnT w="6350" cap="flat" cmpd="sng" algn="ctr">
-                      <a:solidFill>
-                        <a:srgbClr val="3498DB"/>
-                      </a:solidFill>
-                      <a:prstDash val="solid"/>
-                      <a:round/>
-                      <a:headEnd type="none" w="med" len="med"/>
-                      <a:tailEnd type="none" w="med" len="med"/>
-                    </a:lnT>
-                    <a:lnB w="6350" cap="flat" cmpd="sng" algn="ctr">
-                      <a:solidFill>
-                        <a:srgbClr val="3498DB"/>
-                      </a:solidFill>
-                      <a:prstDash val="solid"/>
-                      <a:round/>
-                      <a:headEnd type="none" w="med" len="med"/>
-                      <a:tailEnd type="none" w="med" len="med"/>
-                    </a:lnB>
-                    <a:solidFill>
-                      <a:srgbClr val="ECF0F1"/>
-                    </a:solidFill>
-                  </a:tcPr>
-                </a:tc>
-                <a:tc>
-                  <a:txBody>
-                    <a:bodyPr/>
-                    <a:lstStyle/>
-                    <a:p>
-                      <a:pPr indent="0" marL="0">
-                        <a:buNone/>
-                      </a:pPr>
-                      <a:r>
-                        <a:rPr lang="en-US" sz="1400" b="1" dirty="0">
-                          <a:solidFill>
-                            <a:srgbClr val="2C3E50"/>
-                          </a:solidFill>
-                          <a:latin typeface="Microsoft YaHei" pitchFamily="34" charset="0"/>
-                          <a:ea typeface="Microsoft YaHei" pitchFamily="34" charset="-122"/>
-                          <a:cs typeface="Microsoft YaHei" pitchFamily="34" charset="-120"/>
-                        </a:rPr>
-                        <a:t>700ms</a:t>
-                      </a:r>
-                      <a:endParaRPr lang="en-US" sz="1400" dirty="0">
-                        <a:latin typeface="Microsoft YaHei" charset="0"/>
-                        <a:ea typeface="Microsoft YaHei" charset="0"/>
-                        <a:cs typeface="Microsoft YaHei" charset="0"/>
-                      </a:endParaRPr>
-                    </a:p>
-                  </a:txBody>
-                  <a:tcPr marL="91440" marR="91440" marT="45720" marB="45720">
-                    <a:lnL w="6350" cap="flat" cmpd="sng" algn="ctr">
-                      <a:solidFill>
-                        <a:srgbClr val="3498DB"/>
-                      </a:solidFill>
-                      <a:prstDash val="solid"/>
-                      <a:round/>
-                      <a:headEnd type="none" w="med" len="med"/>
-                      <a:tailEnd type="none" w="med" len="med"/>
-                    </a:lnL>
-                    <a:lnR w="6350" cap="flat" cmpd="sng" algn="ctr">
-                      <a:solidFill>
-                        <a:srgbClr val="3498DB"/>
-                      </a:solidFill>
-                      <a:prstDash val="solid"/>
-                      <a:round/>
-                      <a:headEnd type="none" w="med" len="med"/>
-                      <a:tailEnd type="none" w="med" len="med"/>
-                    </a:lnR>
-                    <a:lnT w="6350" cap="flat" cmpd="sng" algn="ctr">
-                      <a:solidFill>
-                        <a:srgbClr val="3498DB"/>
-                      </a:solidFill>
-                      <a:prstDash val="solid"/>
-                      <a:round/>
-                      <a:headEnd type="none" w="med" len="med"/>
-                      <a:tailEnd type="none" w="med" len="med"/>
-                    </a:lnT>
-                    <a:lnB w="6350" cap="flat" cmpd="sng" algn="ctr">
-                      <a:solidFill>
-                        <a:srgbClr val="3498DB"/>
-                      </a:solidFill>
-                      <a:prstDash val="solid"/>
-                      <a:round/>
-                      <a:headEnd type="none" w="med" len="med"/>
-                      <a:tailEnd type="none" w="med" len="med"/>
-                    </a:lnB>
-                    <a:solidFill>
-                      <a:srgbClr val="ECF0F1"/>
-                    </a:solidFill>
-                  </a:tcPr>
-                </a:tc>
-                <a:tc>
-                  <a:txBody>
-                    <a:bodyPr/>
-                    <a:lstStyle/>
-                    <a:p>
-                      <a:pPr indent="0" marL="0">
-                        <a:buNone/>
-                      </a:pPr>
-                      <a:r>
-                        <a:rPr lang="en-US" sz="1400" b="1" dirty="0">
-                          <a:solidFill>
-                            <a:srgbClr val="2C3E50"/>
-                          </a:solidFill>
-                          <a:latin typeface="Microsoft YaHei" pitchFamily="34" charset="0"/>
-                          <a:ea typeface="Microsoft YaHei" pitchFamily="34" charset="-122"/>
-                          <a:cs typeface="Microsoft YaHei" pitchFamily="34" charset="-120"/>
-                        </a:rPr>
-                        <a:t>700-500ms</a:t>
-                      </a:r>
-                      <a:endParaRPr lang="en-US" sz="1400" dirty="0">
-                        <a:latin typeface="Microsoft YaHei" charset="0"/>
-                        <a:ea typeface="Microsoft YaHei" charset="0"/>
-                        <a:cs typeface="Microsoft YaHei" charset="0"/>
-                      </a:endParaRPr>
-                    </a:p>
-                  </a:txBody>
-                  <a:tcPr marL="91440" marR="91440" marT="45720" marB="45720">
-                    <a:lnL w="6350" cap="flat" cmpd="sng" algn="ctr">
-                      <a:solidFill>
-                        <a:srgbClr val="3498DB"/>
-                      </a:solidFill>
-                      <a:prstDash val="solid"/>
-                      <a:round/>
-                      <a:headEnd type="none" w="med" len="med"/>
-                      <a:tailEnd type="none" w="med" len="med"/>
-                    </a:lnL>
-                    <a:lnR w="6350" cap="flat" cmpd="sng" algn="ctr">
-                      <a:solidFill>
-                        <a:srgbClr val="3498DB"/>
-                      </a:solidFill>
-                      <a:prstDash val="solid"/>
-                      <a:round/>
-                      <a:headEnd type="none" w="med" len="med"/>
-                      <a:tailEnd type="none" w="med" len="med"/>
-                    </a:lnR>
-                    <a:lnT w="6350" cap="flat" cmpd="sng" algn="ctr">
-                      <a:solidFill>
-                        <a:srgbClr val="3498DB"/>
-                      </a:solidFill>
-                      <a:prstDash val="solid"/>
-                      <a:round/>
-                      <a:headEnd type="none" w="med" len="med"/>
-                      <a:tailEnd type="none" w="med" len="med"/>
-                    </a:lnT>
-                    <a:lnB w="6350" cap="flat" cmpd="sng" algn="ctr">
-                      <a:solidFill>
-                        <a:srgbClr val="3498DB"/>
-                      </a:solidFill>
-                      <a:prstDash val="solid"/>
-                      <a:round/>
-                      <a:headEnd type="none" w="med" len="med"/>
-                      <a:tailEnd type="none" w="med" len="med"/>
-                    </a:lnB>
-                    <a:solidFill>
-                      <a:srgbClr val="ECF0F1"/>
-                    </a:solidFill>
                   </a:tcPr>
                 </a:tc>
               </a:tr>
@@ -9733,7 +9656,7 @@
         </p:nvSpPr>
         <p:spPr>
           <a:xfrm>
-            <a:off x="548640" y="4114800"/>
+            <a:off x="731520" y="3657600"/>
             <a:ext cx="10972800" cy="365760"/>
           </a:xfrm>
           <a:prstGeom prst="rect">
@@ -9750,7 +9673,7 @@
               <a:buNone/>
             </a:pPr>
             <a:r>
-              <a:rPr lang="en-US" sz="1100" dirty="0">
+              <a:rPr lang="en-US" sz="1300" dirty="0">
                 <a:solidFill>
                   <a:srgbClr val="7F8C8D"/>
                 </a:solidFill>
@@ -9758,9 +9681,9 @@
                 <a:ea typeface="Microsoft YaHei" pitchFamily="34" charset="-122"/>
                 <a:cs typeface="Microsoft YaHei" pitchFamily="34" charset="-120"/>
               </a:rPr>
-              <a:t>灰色 = 新会话从初始值重新开始    红色 = 高强度难度区间</a:t>
-            </a:r>
-            <a:endParaRPr lang="en-US" sz="1100" dirty="0"/>
+              <a:t>灰色删除线 = 新会话从初始值重新开始   红色 = 高强度难度区间</a:t>
+            </a:r>
+            <a:endParaRPr lang="en-US" sz="1300" dirty="0"/>
           </a:p>
         </p:txBody>
       </p:sp>
@@ -9772,12 +9695,12 @@
         </p:nvSpPr>
         <p:spPr>
           <a:xfrm>
-            <a:off x="548640" y="4754880"/>
-            <a:ext cx="10972800" cy="1645920"/>
+            <a:off x="731520" y="4389120"/>
+            <a:ext cx="10515600" cy="2011680"/>
           </a:xfrm>
           <a:prstGeom prst="roundRect">
             <a:avLst>
-              <a:gd name="adj" fmla="val 6667"/>
+              <a:gd name="adj" fmla="val 5455"/>
             </a:avLst>
           </a:prstGeom>
           <a:solidFill>
@@ -9794,8 +9717,8 @@
         </p:nvSpPr>
         <p:spPr>
           <a:xfrm>
-            <a:off x="822960" y="4937760"/>
-            <a:ext cx="10424160" cy="1280160"/>
+            <a:off x="1005840" y="4572000"/>
+            <a:ext cx="9966960" cy="1645920"/>
           </a:xfrm>
           <a:prstGeom prst="rect">
             <a:avLst/>
@@ -9807,11 +9730,11 @@
           <a:bodyPr wrap="square" rtlCol="0" anchor="t"/>
           <a:lstStyle/>
           <a:p>
-            <a:pPr algn="l" indent="0" marL="0">
-              <a:buNone/>
-            </a:pPr>
-            <a:r>
-              <a:rPr lang="en-US" sz="1400" b="1" dirty="0">
+            <a:pPr indent="0" marL="0">
+              <a:buNone/>
+            </a:pPr>
+            <a:r>
+              <a:rPr lang="en-US" sz="1800" b="1" dirty="0">
                 <a:solidFill>
                   <a:srgbClr val="3498DB"/>
                 </a:solidFill>
@@ -9821,14 +9744,14 @@
               </a:rPr>
               <a:t>难度攀爬节奏</a:t>
             </a:r>
-            <a:pPr algn="l" indent="0" marL="0">
-              <a:buNone/>
-            </a:pPr>
-            <a:pPr algn="l" indent="0" marL="0">
-              <a:buNone/>
-            </a:pPr>
-            <a:r>
-              <a:rPr lang="en-US" sz="1200" dirty="0">
+            <a:pPr indent="0" marL="0">
+              <a:buNone/>
+            </a:pPr>
+            <a:pPr indent="0" marL="0">
+              <a:buNone/>
+            </a:pPr>
+            <a:r>
+              <a:rPr lang="en-US" sz="1500" dirty="0">
                 <a:solidFill>
                   <a:srgbClr val="2C3E50"/>
                 </a:solidFill>
@@ -9836,13 +9759,13 @@
                 <a:ea typeface="Microsoft YaHei" pitchFamily="34" charset="-122"/>
                 <a:cs typeface="Microsoft YaHei" pitchFamily="34" charset="-120"/>
               </a:rPr>
-              <a:t>• 前4次训练：难度恒定50%/1500ms（算法bug已修复，现已支持跨会话继承）</a:t>
-            </a:r>
-            <a:pPr algn="l" indent="0" marL="0">
-              <a:buNone/>
-            </a:pPr>
-            <a:r>
-              <a:rPr lang="en-US" sz="1200" dirty="0">
+              <a:t>• 前4次：难度恒定50%/1500ms（算法bug已修复，现已支持跨会话继承）</a:t>
+            </a:r>
+            <a:pPr indent="0" marL="0">
+              <a:buNone/>
+            </a:pPr>
+            <a:r>
+              <a:rPr lang="en-US" sz="1500" dirty="0">
                 <a:solidFill>
                   <a:srgbClr val="2C3E50"/>
                 </a:solidFill>
@@ -9850,13 +9773,13 @@
                 <a:ea typeface="Microsoft YaHei" pitchFamily="34" charset="-122"/>
                 <a:cs typeface="Microsoft YaHei" pitchFamily="34" charset="-120"/>
               </a:rPr>
-              <a:t>• 第5-8次：难度逐次攀升，每次上调约5%干扰比例 + 减少100ms呈现时间</a:t>
-            </a:r>
-            <a:pPr algn="l" indent="0" marL="0">
-              <a:buNone/>
-            </a:pPr>
-            <a:r>
-              <a:rPr lang="en-US" sz="1200" dirty="0">
+              <a:t>• 第5-8次：难度逐次攀升，每次上调约5% + 减少100ms</a:t>
+            </a:r>
+            <a:pPr indent="0" marL="0">
+              <a:buNone/>
+            </a:pPr>
+            <a:r>
+              <a:rPr lang="en-US" sz="1500" dirty="0">
                 <a:solidFill>
                   <a:srgbClr val="2C3E50"/>
                 </a:solidFill>
@@ -9864,9 +9787,9 @@
                 <a:ea typeface="Microsoft YaHei" pitchFamily="34" charset="-122"/>
                 <a:cs typeface="Microsoft YaHei" pitchFamily="34" charset="-120"/>
               </a:rPr>
-              <a:t>• 第9-10次：稳定在80%干扰比例，呈现时间继续压缩至500ms极限</a:t>
-            </a:r>
-            <a:endParaRPr lang="en-US" sz="1400" dirty="0"/>
+              <a:t>• 第9-10次：稳定在80%干扰，呈现时间继续压缩至500ms极限</a:t>
+            </a:r>
+            <a:endParaRPr lang="en-US" sz="1800" dirty="0"/>
           </a:p>
         </p:txBody>
       </p:sp>
@@ -9904,7 +9827,7 @@
         <p:spPr>
           <a:xfrm>
             <a:off x="548640" y="274320"/>
-            <a:ext cx="10972800" cy="640080"/>
+            <a:ext cx="10972800" cy="731520"/>
           </a:xfrm>
           <a:prstGeom prst="rect">
             <a:avLst/>
@@ -9920,7 +9843,7 @@
               <a:buNone/>
             </a:pPr>
             <a:r>
-              <a:rPr lang="en-US" sz="2600" b="1" dirty="0">
+              <a:rPr lang="en-US" sz="3000" b="1" dirty="0">
                 <a:solidFill>
                   <a:srgbClr val="2C3E50"/>
                 </a:solidFill>
@@ -9928,9 +9851,9 @@
                 <a:ea typeface="Microsoft YaHei" pitchFamily="34" charset="-122"/>
                 <a:cs typeface="Microsoft YaHei" pitchFamily="34" charset="-120"/>
               </a:rPr>
-              <a:t>个性化验证：为什么说难度是"我的"难度？</a:t>
-            </a:r>
-            <a:endParaRPr lang="en-US" sz="2600" dirty="0"/>
+              <a:t>个性化验证：难度是我的「最近发展区」</a:t>
+            </a:r>
+            <a:endParaRPr lang="en-US" sz="3000" dirty="0"/>
           </a:p>
         </p:txBody>
       </p:sp>
@@ -9942,7 +9865,7 @@
         </p:nvSpPr>
         <p:spPr>
           <a:xfrm>
-            <a:off x="548640" y="960120"/>
+            <a:off x="548640" y="1051560"/>
             <a:ext cx="10972800" cy="0"/>
           </a:xfrm>
           <a:prstGeom prst="line">
@@ -9980,11 +9903,11 @@
             <a:tbl>
               <a:tblPr/>
               <a:tblGrid>
-                <a:gridCol w="2011680"/>
-                <a:gridCol w="4480560"/>
-                <a:gridCol w="4480560"/>
+                <a:gridCol w="1828800"/>
+                <a:gridCol w="4572000"/>
+                <a:gridCol w="4572000"/>
               </a:tblGrid>
-              <a:tr h="457200">
+              <a:tr h="502920">
                 <a:tc>
                   <a:txBody>
                     <a:bodyPr/>
@@ -9994,9 +9917,9 @@
                         <a:buNone/>
                       </a:pPr>
                       <a:r>
-                        <a:rPr lang="en-US" sz="1400" dirty="0">
+                        <a:rPr lang="en-US" sz="1600" b="1" dirty="0">
                           <a:solidFill>
-                            <a:srgbClr val="2C3E50"/>
+                            <a:srgbClr val="FFFFFF"/>
                           </a:solidFill>
                           <a:latin typeface="Microsoft YaHei" pitchFamily="34" charset="0"/>
                           <a:ea typeface="Microsoft YaHei" pitchFamily="34" charset="-122"/>
@@ -10004,7 +9927,7 @@
                         </a:rPr>
                         <a:t>对比维度</a:t>
                       </a:r>
-                      <a:endParaRPr lang="en-US" sz="1400" dirty="0">
+                      <a:endParaRPr lang="en-US" sz="1600" dirty="0">
                         <a:latin typeface="Microsoft YaHei" charset="0"/>
                         <a:ea typeface="Microsoft YaHei" charset="0"/>
                         <a:cs typeface="Microsoft YaHei" charset="0"/>
@@ -10049,7 +9972,7 @@
                       <a:tailEnd type="none" w="med" len="med"/>
                     </a:lnB>
                     <a:solidFill>
-                      <a:srgbClr val="ECF0F1"/>
+                      <a:srgbClr val="3498DB"/>
                     </a:solidFill>
                   </a:tcPr>
                 </a:tc>
@@ -10062,9 +9985,9 @@
                         <a:buNone/>
                       </a:pPr>
                       <a:r>
-                        <a:rPr lang="en-US" sz="1400" dirty="0">
+                        <a:rPr lang="en-US" sz="1600" b="1" dirty="0">
                           <a:solidFill>
-                            <a:srgbClr val="2C3E50"/>
+                            <a:srgbClr val="FFFFFF"/>
                           </a:solidFill>
                           <a:latin typeface="Microsoft YaHei" pitchFamily="34" charset="0"/>
                           <a:ea typeface="Microsoft YaHei" pitchFamily="34" charset="-122"/>
@@ -10072,7 +9995,7 @@
                         </a:rPr>
                         <a:t>开发者本人（王熙）</a:t>
                       </a:r>
-                      <a:endParaRPr lang="en-US" sz="1400" dirty="0">
+                      <a:endParaRPr lang="en-US" sz="1600" dirty="0">
                         <a:latin typeface="Microsoft YaHei" charset="0"/>
                         <a:ea typeface="Microsoft YaHei" charset="0"/>
                         <a:cs typeface="Microsoft YaHei" charset="0"/>
@@ -10117,7 +10040,7 @@
                       <a:tailEnd type="none" w="med" len="med"/>
                     </a:lnB>
                     <a:solidFill>
-                      <a:srgbClr val="ECF0F1"/>
+                      <a:srgbClr val="27AE60"/>
                     </a:solidFill>
                   </a:tcPr>
                 </a:tc>
@@ -10130,9 +10053,9 @@
                         <a:buNone/>
                       </a:pPr>
                       <a:r>
-                        <a:rPr lang="en-US" sz="1400" dirty="0">
+                        <a:rPr lang="en-US" sz="1600" b="1" dirty="0">
                           <a:solidFill>
-                            <a:srgbClr val="2C3E50"/>
+                            <a:srgbClr val="FFFFFF"/>
                           </a:solidFill>
                           <a:latin typeface="Microsoft YaHei" pitchFamily="34" charset="0"/>
                           <a:ea typeface="Microsoft YaHei" pitchFamily="34" charset="-122"/>
@@ -10140,7 +10063,7 @@
                         </a:rPr>
                         <a:t>室友（未训练者）</a:t>
                       </a:r>
-                      <a:endParaRPr lang="en-US" sz="1400" dirty="0">
+                      <a:endParaRPr lang="en-US" sz="1600" dirty="0">
                         <a:latin typeface="Microsoft YaHei" charset="0"/>
                         <a:ea typeface="Microsoft YaHei" charset="0"/>
                         <a:cs typeface="Microsoft YaHei" charset="0"/>
@@ -10185,12 +10108,12 @@
                       <a:tailEnd type="none" w="med" len="med"/>
                     </a:lnB>
                     <a:solidFill>
-                      <a:srgbClr val="ECF0F1"/>
+                      <a:srgbClr val="E74C3C"/>
                     </a:solidFill>
                   </a:tcPr>
                 </a:tc>
               </a:tr>
-              <a:tr h="548640">
+              <a:tr h="594360">
                 <a:tc>
                   <a:txBody>
                     <a:bodyPr/>
@@ -10200,7 +10123,7 @@
                         <a:buNone/>
                       </a:pPr>
                       <a:r>
-                        <a:rPr lang="en-US" sz="1400" dirty="0">
+                        <a:rPr lang="en-US" sz="1600" dirty="0">
                           <a:solidFill>
                             <a:srgbClr val="2C3E50"/>
                           </a:solidFill>
@@ -10210,7 +10133,7 @@
                         </a:rPr>
                         <a:t>训练经验</a:t>
                       </a:r>
-                      <a:endParaRPr lang="en-US" sz="1400" dirty="0">
+                      <a:endParaRPr lang="en-US" sz="1600" dirty="0">
                         <a:latin typeface="Microsoft YaHei" charset="0"/>
                         <a:ea typeface="Microsoft YaHei" charset="0"/>
                         <a:cs typeface="Microsoft YaHei" charset="0"/>
@@ -10254,9 +10177,6 @@
                       <a:headEnd type="none" w="med" len="med"/>
                       <a:tailEnd type="none" w="med" len="med"/>
                     </a:lnB>
-                    <a:solidFill>
-                      <a:srgbClr val="ECF0F1"/>
-                    </a:solidFill>
                   </a:tcPr>
                 </a:tc>
                 <a:tc>
@@ -10268,7 +10188,7 @@
                         <a:buNone/>
                       </a:pPr>
                       <a:r>
-                        <a:rPr lang="en-US" sz="1400" dirty="0">
+                        <a:rPr lang="en-US" sz="1600" dirty="0">
                           <a:solidFill>
                             <a:srgbClr val="2C3E50"/>
                           </a:solidFill>
@@ -10278,7 +10198,7 @@
                         </a:rPr>
                         <a:t>已完成9次训练（~200试次）</a:t>
                       </a:r>
-                      <a:endParaRPr lang="en-US" sz="1400" dirty="0">
+                      <a:endParaRPr lang="en-US" sz="1600" dirty="0">
                         <a:latin typeface="Microsoft YaHei" charset="0"/>
                         <a:ea typeface="Microsoft YaHei" charset="0"/>
                         <a:cs typeface="Microsoft YaHei" charset="0"/>
@@ -10322,9 +10242,6 @@
                       <a:headEnd type="none" w="med" len="med"/>
                       <a:tailEnd type="none" w="med" len="med"/>
                     </a:lnB>
-                    <a:solidFill>
-                      <a:srgbClr val="ECF0F1"/>
-                    </a:solidFill>
                   </a:tcPr>
                 </a:tc>
                 <a:tc>
@@ -10336,7 +10253,7 @@
                         <a:buNone/>
                       </a:pPr>
                       <a:r>
-                        <a:rPr lang="en-US" sz="1400" dirty="0">
+                        <a:rPr lang="en-US" sz="1600" dirty="0">
                           <a:solidFill>
                             <a:srgbClr val="2C3E50"/>
                           </a:solidFill>
@@ -10346,7 +10263,7 @@
                         </a:rPr>
                         <a:t>0次训练</a:t>
                       </a:r>
-                      <a:endParaRPr lang="en-US" sz="1400" dirty="0">
+                      <a:endParaRPr lang="en-US" sz="1600" dirty="0">
                         <a:latin typeface="Microsoft YaHei" charset="0"/>
                         <a:ea typeface="Microsoft YaHei" charset="0"/>
                         <a:cs typeface="Microsoft YaHei" charset="0"/>
@@ -10390,13 +10307,10 @@
                       <a:headEnd type="none" w="med" len="med"/>
                       <a:tailEnd type="none" w="med" len="med"/>
                     </a:lnB>
-                    <a:solidFill>
-                      <a:srgbClr val="ECF0F1"/>
-                    </a:solidFill>
                   </a:tcPr>
                 </a:tc>
               </a:tr>
-              <a:tr h="640080">
+              <a:tr h="685800">
                 <a:tc>
                   <a:txBody>
                     <a:bodyPr/>
@@ -10406,7 +10320,7 @@
                         <a:buNone/>
                       </a:pPr>
                       <a:r>
-                        <a:rPr lang="en-US" sz="1400" dirty="0">
+                        <a:rPr lang="en-US" sz="1600" dirty="0">
                           <a:solidFill>
                             <a:srgbClr val="2C3E50"/>
                           </a:solidFill>
@@ -10416,7 +10330,7 @@
                         </a:rPr>
                         <a:t>测试难度</a:t>
                       </a:r>
-                      <a:endParaRPr lang="en-US" sz="1400" dirty="0">
+                      <a:endParaRPr lang="en-US" sz="1600" dirty="0">
                         <a:latin typeface="Microsoft YaHei" charset="0"/>
                         <a:ea typeface="Microsoft YaHei" charset="0"/>
                         <a:cs typeface="Microsoft YaHei" charset="0"/>
@@ -10460,9 +10374,6 @@
                       <a:headEnd type="none" w="med" len="med"/>
                       <a:tailEnd type="none" w="med" len="med"/>
                     </a:lnB>
-                    <a:solidFill>
-                      <a:srgbClr val="ECF0F1"/>
-                    </a:solidFill>
                   </a:tcPr>
                 </a:tc>
                 <a:tc>
@@ -10474,7 +10385,7 @@
                         <a:buNone/>
                       </a:pPr>
                       <a:r>
-                        <a:rPr lang="en-US" sz="1400" dirty="0">
+                        <a:rPr lang="en-US" sz="1600" dirty="0">
                           <a:solidFill>
                             <a:srgbClr val="2C3E50"/>
                           </a:solidFill>
@@ -10484,7 +10395,7 @@
                         </a:rPr>
                         <a:t>80%干扰 / 500ms呈现</a:t>
                       </a:r>
-                      <a:endParaRPr lang="en-US" sz="1400" dirty="0">
+                      <a:endParaRPr lang="en-US" sz="1600" dirty="0">
                         <a:latin typeface="Microsoft YaHei" charset="0"/>
                         <a:ea typeface="Microsoft YaHei" charset="0"/>
                         <a:cs typeface="Microsoft YaHei" charset="0"/>
@@ -10528,9 +10439,6 @@
                       <a:headEnd type="none" w="med" len="med"/>
                       <a:tailEnd type="none" w="med" len="med"/>
                     </a:lnB>
-                    <a:solidFill>
-                      <a:srgbClr val="ECF0F1"/>
-                    </a:solidFill>
                   </a:tcPr>
                 </a:tc>
                 <a:tc>
@@ -10542,7 +10450,7 @@
                         <a:buNone/>
                       </a:pPr>
                       <a:r>
-                        <a:rPr lang="en-US" sz="1400" dirty="0">
+                        <a:rPr lang="en-US" sz="1600" dirty="0">
                           <a:solidFill>
                             <a:srgbClr val="2C3E50"/>
                           </a:solidFill>
@@ -10552,7 +10460,7 @@
                         </a:rPr>
                         <a:t>80%干扰 / 500ms呈现（同一难度）</a:t>
                       </a:r>
-                      <a:endParaRPr lang="en-US" sz="1400" dirty="0">
+                      <a:endParaRPr lang="en-US" sz="1600" dirty="0">
                         <a:latin typeface="Microsoft YaHei" charset="0"/>
                         <a:ea typeface="Microsoft YaHei" charset="0"/>
                         <a:cs typeface="Microsoft YaHei" charset="0"/>
@@ -10596,13 +10504,10 @@
                       <a:headEnd type="none" w="med" len="med"/>
                       <a:tailEnd type="none" w="med" len="med"/>
                     </a:lnB>
-                    <a:solidFill>
-                      <a:srgbClr val="ECF0F1"/>
-                    </a:solidFill>
                   </a:tcPr>
                 </a:tc>
               </a:tr>
-              <a:tr h="640080">
+              <a:tr h="685800">
                 <a:tc>
                   <a:txBody>
                     <a:bodyPr/>
@@ -10612,7 +10517,7 @@
                         <a:buNone/>
                       </a:pPr>
                       <a:r>
-                        <a:rPr lang="en-US" sz="1400" dirty="0">
+                        <a:rPr lang="en-US" sz="1600" dirty="0">
                           <a:solidFill>
                             <a:srgbClr val="2C3E50"/>
                           </a:solidFill>
@@ -10622,7 +10527,7 @@
                         </a:rPr>
                         <a:t>正确率</a:t>
                       </a:r>
-                      <a:endParaRPr lang="en-US" sz="1400" dirty="0">
+                      <a:endParaRPr lang="en-US" sz="1600" dirty="0">
                         <a:latin typeface="Microsoft YaHei" charset="0"/>
                         <a:ea typeface="Microsoft YaHei" charset="0"/>
                         <a:cs typeface="Microsoft YaHei" charset="0"/>
@@ -10666,9 +10571,6 @@
                       <a:headEnd type="none" w="med" len="med"/>
                       <a:tailEnd type="none" w="med" len="med"/>
                     </a:lnB>
-                    <a:solidFill>
-                      <a:srgbClr val="ECF0F1"/>
-                    </a:solidFill>
                   </a:tcPr>
                 </a:tc>
                 <a:tc>
@@ -10680,9 +10582,9 @@
                         <a:buNone/>
                       </a:pPr>
                       <a:r>
-                        <a:rPr lang="en-US" sz="1400" dirty="0">
+                        <a:rPr lang="en-US" sz="1600" b="1" dirty="0">
                           <a:solidFill>
-                            <a:srgbClr val="2C3E50"/>
+                            <a:srgbClr val="27AE60"/>
                           </a:solidFill>
                           <a:latin typeface="Microsoft YaHei" pitchFamily="34" charset="0"/>
                           <a:ea typeface="Microsoft YaHei" pitchFamily="34" charset="-122"/>
@@ -10690,7 +10592,7 @@
                         </a:rPr>
                         <a:t>95%+</a:t>
                       </a:r>
-                      <a:endParaRPr lang="en-US" sz="1400" dirty="0">
+                      <a:endParaRPr lang="en-US" sz="1600" dirty="0">
                         <a:latin typeface="Microsoft YaHei" charset="0"/>
                         <a:ea typeface="Microsoft YaHei" charset="0"/>
                         <a:cs typeface="Microsoft YaHei" charset="0"/>
@@ -10734,9 +10636,6 @@
                       <a:headEnd type="none" w="med" len="med"/>
                       <a:tailEnd type="none" w="med" len="med"/>
                     </a:lnB>
-                    <a:solidFill>
-                      <a:srgbClr val="ECF0F1"/>
-                    </a:solidFill>
                   </a:tcPr>
                 </a:tc>
                 <a:tc>
@@ -10748,9 +10647,9 @@
                         <a:buNone/>
                       </a:pPr>
                       <a:r>
-                        <a:rPr lang="en-US" sz="1400" dirty="0">
+                        <a:rPr lang="en-US" sz="1600" b="1" dirty="0">
                           <a:solidFill>
-                            <a:srgbClr val="2C3E50"/>
+                            <a:srgbClr val="E74C3C"/>
                           </a:solidFill>
                           <a:latin typeface="Microsoft YaHei" pitchFamily="34" charset="0"/>
                           <a:ea typeface="Microsoft YaHei" pitchFamily="34" charset="-122"/>
@@ -10758,7 +10657,7 @@
                         </a:rPr>
                         <a:t>30%</a:t>
                       </a:r>
-                      <a:endParaRPr lang="en-US" sz="1400" dirty="0">
+                      <a:endParaRPr lang="en-US" sz="1600" dirty="0">
                         <a:latin typeface="Microsoft YaHei" charset="0"/>
                         <a:ea typeface="Microsoft YaHei" charset="0"/>
                         <a:cs typeface="Microsoft YaHei" charset="0"/>
@@ -10802,13 +10701,10 @@
                       <a:headEnd type="none" w="med" len="med"/>
                       <a:tailEnd type="none" w="med" len="med"/>
                     </a:lnB>
-                    <a:solidFill>
-                      <a:srgbClr val="ECF0F1"/>
-                    </a:solidFill>
                   </a:tcPr>
                 </a:tc>
               </a:tr>
-              <a:tr h="914400">
+              <a:tr h="685800">
                 <a:tc>
                   <a:txBody>
                     <a:bodyPr/>
@@ -10818,7 +10714,7 @@
                         <a:buNone/>
                       </a:pPr>
                       <a:r>
-                        <a:rPr lang="en-US" sz="1400" dirty="0">
+                        <a:rPr lang="en-US" sz="1600" dirty="0">
                           <a:solidFill>
                             <a:srgbClr val="2C3E50"/>
                           </a:solidFill>
@@ -10828,7 +10724,7 @@
                         </a:rPr>
                         <a:t>结论</a:t>
                       </a:r>
-                      <a:endParaRPr lang="en-US" sz="1400" dirty="0">
+                      <a:endParaRPr lang="en-US" sz="1600" dirty="0">
                         <a:latin typeface="Microsoft YaHei" charset="0"/>
                         <a:ea typeface="Microsoft YaHei" charset="0"/>
                         <a:cs typeface="Microsoft YaHei" charset="0"/>
@@ -10872,9 +10768,6 @@
                       <a:headEnd type="none" w="med" len="med"/>
                       <a:tailEnd type="none" w="med" len="med"/>
                     </a:lnB>
-                    <a:solidFill>
-                      <a:srgbClr val="ECF0F1"/>
-                    </a:solidFill>
                   </a:tcPr>
                 </a:tc>
                 <a:tc>
@@ -10886,38 +10779,17 @@
                         <a:buNone/>
                       </a:pPr>
                       <a:r>
-                        <a:rPr lang="en-US" sz="1400" dirty="0">
+                        <a:rPr lang="en-US" sz="1600" dirty="0">
                           <a:solidFill>
-                            <a:srgbClr val="2C3E50"/>
+                            <a:srgbClr val="27AE60"/>
                           </a:solidFill>
                           <a:latin typeface="Microsoft YaHei" pitchFamily="34" charset="0"/>
                           <a:ea typeface="Microsoft YaHei" pitchFamily="34" charset="-122"/>
                           <a:cs typeface="Microsoft YaHei" pitchFamily="34" charset="-120"/>
                         </a:rPr>
-                        <a:t>处于最近发展区</a:t>
+                        <a:t>处于最近发展区 · 有挑战但不挫败</a:t>
                       </a:r>
-                      <a:endParaRPr lang="en-US" sz="1400" dirty="0">
-                        <a:latin typeface="Microsoft YaHei" charset="0"/>
-                        <a:ea typeface="Microsoft YaHei" charset="0"/>
-                        <a:cs typeface="Microsoft YaHei" charset="0"/>
-                      </a:endParaRPr>
-                    </a:p>
-                    <a:p>
-                      <a:pPr indent="0" marL="0">
-                        <a:buNone/>
-                      </a:pPr>
-                      <a:r>
-                        <a:rPr lang="en-US" sz="1400" dirty="0">
-                          <a:solidFill>
-                            <a:srgbClr val="2C3E50"/>
-                          </a:solidFill>
-                          <a:latin typeface="Microsoft YaHei" pitchFamily="34" charset="0"/>
-                          <a:ea typeface="Microsoft YaHei" pitchFamily="34" charset="-122"/>
-                          <a:cs typeface="Microsoft YaHei" pitchFamily="34" charset="-120"/>
-                        </a:rPr>
-                        <a:t>难度适中，有挑战但不挫败</a:t>
-                      </a:r>
-                      <a:endParaRPr lang="en-US" sz="1400" dirty="0">
+                      <a:endParaRPr lang="en-US" sz="1600" dirty="0">
                         <a:latin typeface="Microsoft YaHei" charset="0"/>
                         <a:ea typeface="Microsoft YaHei" charset="0"/>
                         <a:cs typeface="Microsoft YaHei" charset="0"/>
@@ -10961,9 +10833,6 @@
                       <a:headEnd type="none" w="med" len="med"/>
                       <a:tailEnd type="none" w="med" len="med"/>
                     </a:lnB>
-                    <a:solidFill>
-                      <a:srgbClr val="ECF0F1"/>
-                    </a:solidFill>
                   </a:tcPr>
                 </a:tc>
                 <a:tc>
@@ -10975,38 +10844,17 @@
                         <a:buNone/>
                       </a:pPr>
                       <a:r>
-                        <a:rPr lang="en-US" sz="1400" dirty="0">
+                        <a:rPr lang="en-US" sz="1600" dirty="0">
                           <a:solidFill>
-                            <a:srgbClr val="2C3E50"/>
+                            <a:srgbClr val="E74C3C"/>
                           </a:solidFill>
                           <a:latin typeface="Microsoft YaHei" pitchFamily="34" charset="0"/>
                           <a:ea typeface="Microsoft YaHei" pitchFamily="34" charset="-122"/>
                           <a:cs typeface="Microsoft YaHei" pitchFamily="34" charset="-120"/>
                         </a:rPr>
-                        <a:t>远超其当前能力</a:t>
+                        <a:t>远超当前能力 · 认知负荷过高</a:t>
                       </a:r>
-                      <a:endParaRPr lang="en-US" sz="1400" dirty="0">
-                        <a:latin typeface="Microsoft YaHei" charset="0"/>
-                        <a:ea typeface="Microsoft YaHei" charset="0"/>
-                        <a:cs typeface="Microsoft YaHei" charset="0"/>
-                      </a:endParaRPr>
-                    </a:p>
-                    <a:p>
-                      <a:pPr indent="0" marL="0">
-                        <a:buNone/>
-                      </a:pPr>
-                      <a:r>
-                        <a:rPr lang="en-US" sz="1400" dirty="0">
-                          <a:solidFill>
-                            <a:srgbClr val="2C3E50"/>
-                          </a:solidFill>
-                          <a:latin typeface="Microsoft YaHei" pitchFamily="34" charset="0"/>
-                          <a:ea typeface="Microsoft YaHei" pitchFamily="34" charset="-122"/>
-                          <a:cs typeface="Microsoft YaHei" pitchFamily="34" charset="-120"/>
-                        </a:rPr>
-                        <a:t>认知负荷过高，完全无法应对</a:t>
-                      </a:r>
-                      <a:endParaRPr lang="en-US" sz="1400" dirty="0">
+                      <a:endParaRPr lang="en-US" sz="1600" dirty="0">
                         <a:latin typeface="Microsoft YaHei" charset="0"/>
                         <a:ea typeface="Microsoft YaHei" charset="0"/>
                         <a:cs typeface="Microsoft YaHei" charset="0"/>
@@ -11050,9 +10898,6 @@
                       <a:headEnd type="none" w="med" len="med"/>
                       <a:tailEnd type="none" w="med" len="med"/>
                     </a:lnB>
-                    <a:solidFill>
-                      <a:srgbClr val="ECF0F1"/>
-                    </a:solidFill>
                   </a:tcPr>
                 </a:tc>
               </a:tr>
@@ -11068,12 +10913,12 @@
         </p:nvSpPr>
         <p:spPr>
           <a:xfrm>
-            <a:off x="548640" y="4389120"/>
-            <a:ext cx="10972800" cy="2103120"/>
+            <a:off x="548640" y="4572000"/>
+            <a:ext cx="10972800" cy="2011680"/>
           </a:xfrm>
           <a:prstGeom prst="roundRect">
             <a:avLst>
-              <a:gd name="adj" fmla="val 5217"/>
+              <a:gd name="adj" fmla="val 5455"/>
             </a:avLst>
           </a:prstGeom>
           <a:solidFill>
@@ -11090,8 +10935,8 @@
         </p:nvSpPr>
         <p:spPr>
           <a:xfrm>
-            <a:off x="822960" y="4572000"/>
-            <a:ext cx="10424160" cy="1737360"/>
+            <a:off x="822960" y="4754880"/>
+            <a:ext cx="10424160" cy="1645920"/>
           </a:xfrm>
           <a:prstGeom prst="rect">
             <a:avLst/>
@@ -11103,11 +10948,11 @@
           <a:bodyPr wrap="square" rtlCol="0" anchor="t"/>
           <a:lstStyle/>
           <a:p>
-            <a:pPr algn="l" indent="0" marL="0">
-              <a:buNone/>
-            </a:pPr>
-            <a:r>
-              <a:rPr lang="en-US" sz="1600" b="1" dirty="0">
+            <a:pPr indent="0" marL="0">
+              <a:buNone/>
+            </a:pPr>
+            <a:r>
+              <a:rPr lang="en-US" sz="2000" b="1" dirty="0">
                 <a:solidFill>
                   <a:srgbClr val="3498DB"/>
                 </a:solidFill>
@@ -11117,14 +10962,14 @@
               </a:rPr>
               <a:t>这意味着什么？</a:t>
             </a:r>
-            <a:pPr algn="l" indent="0" marL="0">
-              <a:buNone/>
-            </a:pPr>
-            <a:pPr algn="l" indent="0" marL="0">
-              <a:buNone/>
-            </a:pPr>
-            <a:r>
-              <a:rPr lang="en-US" sz="1400" b="1" dirty="0">
+            <a:pPr indent="0" marL="0">
+              <a:buNone/>
+            </a:pPr>
+            <a:pPr indent="0" marL="0">
+              <a:buNone/>
+            </a:pPr>
+            <a:r>
+              <a:rPr lang="en-US" sz="1700" b="1" dirty="0">
                 <a:solidFill>
                   <a:srgbClr val="2C3E50"/>
                 </a:solidFill>
@@ -11132,13 +10977,13 @@
                 <a:ea typeface="Microsoft YaHei" pitchFamily="34" charset="-122"/>
                 <a:cs typeface="Microsoft YaHei" pitchFamily="34" charset="-120"/>
               </a:rPr>
-              <a:t>🎯 自适应算法将难度个性化调节到了开发者专属的「最近发展区」</a:t>
-            </a:r>
-            <a:pPr algn="l" indent="0" marL="0">
-              <a:buNone/>
-            </a:pPr>
-            <a:r>
-              <a:rPr lang="en-US" sz="1400" dirty="0">
+              <a:t>🎯 自适应算法将难度个性化调节到了专属「最近发展区」</a:t>
+            </a:r>
+            <a:pPr indent="0" marL="0">
+              <a:buNone/>
+            </a:pPr>
+            <a:r>
+              <a:rPr lang="en-US" sz="1700" dirty="0">
                 <a:solidFill>
                   <a:srgbClr val="2C3E50"/>
                 </a:solidFill>
@@ -11148,11 +10993,11 @@
               </a:rPr>
               <a:t>🔬 同一难度对训练者 = 最佳挑战，对未训练者 = 不可能的任务</a:t>
             </a:r>
-            <a:pPr algn="l" indent="0" marL="0">
-              <a:buNone/>
-            </a:pPr>
-            <a:r>
-              <a:rPr lang="en-US" sz="1400" dirty="0">
+            <a:pPr indent="0" marL="0">
+              <a:buNone/>
+            </a:pPr>
+            <a:r>
+              <a:rPr lang="en-US" sz="1700" dirty="0">
                 <a:solidFill>
                   <a:srgbClr val="2C3E50"/>
                 </a:solidFill>
@@ -11160,23 +11005,9 @@
                 <a:ea typeface="Microsoft YaHei" pitchFamily="34" charset="-122"/>
                 <a:cs typeface="Microsoft YaHei" pitchFamily="34" charset="-120"/>
               </a:rPr>
-              <a:t>📊 证明系统不是"一刀切"，而是根据个人能力动态调整</a:t>
-            </a:r>
-            <a:pPr algn="l" indent="0" marL="0">
-              <a:buNone/>
-            </a:pPr>
-            <a:r>
-              <a:rPr lang="en-US" sz="1400" dirty="0">
-                <a:solidFill>
-                  <a:srgbClr val="7F8C8D"/>
-                </a:solidFill>
-                <a:latin typeface="Microsoft YaHei" pitchFamily="34" charset="0"/>
-                <a:ea typeface="Microsoft YaHei" pitchFamily="34" charset="-122"/>
-                <a:cs typeface="Microsoft YaHei" pitchFamily="34" charset="-120"/>
-              </a:rPr>
-              <a:t>💡 后续正式实验中将用更多被试量化验证这一效果</a:t>
-            </a:r>
-            <a:endParaRPr lang="en-US" sz="1600" dirty="0"/>
+              <a:t>📊 证明系统不是「一刀切」，而是根据个人能力动态调整</a:t>
+            </a:r>
+            <a:endParaRPr lang="en-US" sz="2000" dirty="0"/>
           </a:p>
         </p:txBody>
       </p:sp>

--- a/Stroop自适应训练系统-期末汇报.pptx
+++ b/Stroop自适应训练系统-期末汇报.pptx
@@ -1,28 +1,28 @@
 
 <file path=ppt/presentation.xml><?xml version="1.0" encoding="utf-8"?>
-<p:presentation xmlns:a="http://schemas.openxmlformats.org/drawingml/2006/main" xmlns:r="http://schemas.openxmlformats.org/officeDocument/2006/relationships" xmlns:p="http://schemas.openxmlformats.org/presentationml/2006/main" saveSubsetFonts="1" autoCompressPictures="0">
+<p:presentation xmlns:a="http://schemas.openxmlformats.org/drawingml/2006/main" xmlns:r="http://schemas.openxmlformats.org/officeDocument/2006/relationships" xmlns:p="http://schemas.openxmlformats.org/presentationml/2006/main" autoCompressPictures="0">
   <p:sldMasterIdLst>
     <p:sldMasterId id="2147483648" r:id="rId1"/>
   </p:sldMasterIdLst>
+  <p:notesMasterIdLst>
+    <p:notesMasterId r:id="rId4"/>
+  </p:notesMasterIdLst>
   <p:sldIdLst>
-    <p:sldId id="256" r:id="rId2"/>
-    <p:sldId id="257" r:id="rId3"/>
-    <p:sldId id="258" r:id="rId4"/>
-    <p:sldId id="259" r:id="rId5"/>
-    <p:sldId id="260" r:id="rId6"/>
-    <p:sldId id="261" r:id="rId7"/>
-    <p:sldId id="262" r:id="rId8"/>
-    <p:sldId id="263" r:id="rId9"/>
-    <p:sldId id="264" r:id="rId10"/>
-    <p:sldId id="265" r:id="rId11"/>
-    <p:sldId id="266" r:id="rId12"/>
-    <p:sldId id="267" r:id="rId13"/>
+    <p:sldId id="256" r:id="rId3"/>
+    <p:sldId id="257" r:id="rId5"/>
+    <p:sldId id="258" r:id="rId6"/>
+    <p:sldId id="259" r:id="rId7"/>
+    <p:sldId id="260" r:id="rId8"/>
+    <p:sldId id="261" r:id="rId9"/>
+    <p:sldId id="262" r:id="rId10"/>
+    <p:sldId id="263" r:id="rId11"/>
+    <p:sldId id="264" r:id="rId12"/>
+    <p:sldId id="265" r:id="rId13"/>
+    <p:sldId id="266" r:id="rId14"/>
+    <p:sldId id="267" r:id="rId15"/>
   </p:sldIdLst>
-  <p:notesMasterIdLst>
-    <p:notesMasterId r:id="rId14"/>
-  </p:notesMasterIdLst>
-  <p:sldSz cx="12188952" cy="6858000"/>
-  <p:notesSz cx="6858000" cy="12188952"/>
+  <p:sldSz cx="12188825" cy="6858000"/>
+  <p:notesSz cx="6858000" cy="12188825"/>
   <p:defaultTextStyle>
     <a:lvl1pPr marL="0" algn="l" defTabSz="914400" rtl="0" eaLnBrk="1" latinLnBrk="0" hangingPunct="1">
       <a:defRPr sz="1800" kern="1200">
@@ -200,7 +200,6 @@
           <a:p>
             <a:fld id="{5282F153-3F37-0F45-9E97-73ACFA13230C}" type="datetimeFigureOut">
               <a:rPr lang="en-US"/>
-              <a:t>7/23/19</a:t>
             </a:fld>
             <a:endParaRPr lang="en-US"/>
           </a:p>
@@ -267,6 +266,7 @@
               <a:rPr lang="en-US"/>
               <a:t>Click to edit Master text styles</a:t>
             </a:r>
+            <a:endParaRPr lang="en-US"/>
           </a:p>
           <a:p>
             <a:pPr lvl="1"/>
@@ -274,6 +274,7 @@
               <a:rPr lang="en-US"/>
               <a:t>Second level</a:t>
             </a:r>
+            <a:endParaRPr lang="en-US"/>
           </a:p>
           <a:p>
             <a:pPr lvl="2"/>
@@ -281,6 +282,7 @@
               <a:rPr lang="en-US"/>
               <a:t>Third level</a:t>
             </a:r>
+            <a:endParaRPr lang="en-US"/>
           </a:p>
           <a:p>
             <a:pPr lvl="3"/>
@@ -288,6 +290,7 @@
               <a:rPr lang="en-US"/>
               <a:t>Fourth level</a:t>
             </a:r>
+            <a:endParaRPr lang="en-US"/>
           </a:p>
           <a:p>
             <a:pPr lvl="4"/>
@@ -295,6 +298,7 @@
               <a:rPr lang="en-US"/>
               <a:t>Fifth level</a:t>
             </a:r>
+            <a:endParaRPr lang="en-US"/>
           </a:p>
         </p:txBody>
       </p:sp>
@@ -358,18 +362,12 @@
           <a:p>
             <a:fld id="{CE5E9CC1-C706-0F49-92D6-E571CC5EEA8F}" type="slidenum">
               <a:rPr lang="en-US"/>
-              <a:t>‹#›</a:t>
             </a:fld>
             <a:endParaRPr lang="en-US"/>
           </a:p>
         </p:txBody>
       </p:sp>
     </p:spTree>
-    <p:extLst>
-      <p:ext uri="{BB962C8B-B14F-4D97-AF65-F5344CB8AC3E}">
-        <p14:creationId xmlns:p14="http://schemas.microsoft.com/office/powerpoint/2010/main" val="1024086991"/>
-      </p:ext>
-    </p:extLst>
   </p:cSld>
   <p:clrMap bg1="lt1" tx1="dk1" bg2="lt2" tx2="dk2" accent1="accent1" accent2="accent2" accent3="accent3" accent4="accent4" accent5="accent5" accent6="accent6" hlink="hlink" folHlink="folHlink"/>
   <p:notesStyle>
@@ -511,10 +509,6 @@
           <a:bodyPr/>
           <a:lstStyle/>
           <a:p>
-            <a:r>
-              <a:rPr lang="en-US" dirty="0"/>
-              <a:t/>
-            </a:r>
             <a:endParaRPr lang="en-US" dirty="0"/>
           </a:p>
         </p:txBody>
@@ -536,18 +530,12 @@
           <a:p>
             <a:fld id="{F7021451-1387-4CA6-816F-3879F97B5CBC}" type="slidenum">
               <a:rPr lang="en-US"/>
-              <a:t>1</a:t>
             </a:fld>
             <a:endParaRPr lang="en-US"/>
           </a:p>
         </p:txBody>
       </p:sp>
     </p:spTree>
-    <p:extLst>
-      <p:ext uri="{BB962C8B-B14F-4D97-AF65-F5344CB8AC3E}">
-        <p14:creationId xmlns:p14="http://schemas.microsoft.com/office/powerpoint/2010/main" val="1024086991"/>
-      </p:ext>
-    </p:extLst>
   </p:cSld>
   <p:clrMapOvr>
     <a:masterClrMapping/>
@@ -599,10 +587,6 @@
           <a:bodyPr/>
           <a:lstStyle/>
           <a:p>
-            <a:r>
-              <a:rPr lang="en-US" dirty="0"/>
-              <a:t/>
-            </a:r>
             <a:endParaRPr lang="en-US" dirty="0"/>
           </a:p>
         </p:txBody>
@@ -624,18 +608,12 @@
           <a:p>
             <a:fld id="{F7021451-1387-4CA6-816F-3879F97B5CBC}" type="slidenum">
               <a:rPr lang="en-US"/>
-              <a:t>10</a:t>
             </a:fld>
             <a:endParaRPr lang="en-US"/>
           </a:p>
         </p:txBody>
       </p:sp>
     </p:spTree>
-    <p:extLst>
-      <p:ext uri="{BB962C8B-B14F-4D97-AF65-F5344CB8AC3E}">
-        <p14:creationId xmlns:p14="http://schemas.microsoft.com/office/powerpoint/2010/main" val="1024086991"/>
-      </p:ext>
-    </p:extLst>
   </p:cSld>
   <p:clrMapOvr>
     <a:masterClrMapping/>
@@ -687,10 +665,6 @@
           <a:bodyPr/>
           <a:lstStyle/>
           <a:p>
-            <a:r>
-              <a:rPr lang="en-US" dirty="0"/>
-              <a:t/>
-            </a:r>
             <a:endParaRPr lang="en-US" dirty="0"/>
           </a:p>
         </p:txBody>
@@ -712,18 +686,12 @@
           <a:p>
             <a:fld id="{F7021451-1387-4CA6-816F-3879F97B5CBC}" type="slidenum">
               <a:rPr lang="en-US"/>
-              <a:t>11</a:t>
             </a:fld>
             <a:endParaRPr lang="en-US"/>
           </a:p>
         </p:txBody>
       </p:sp>
     </p:spTree>
-    <p:extLst>
-      <p:ext uri="{BB962C8B-B14F-4D97-AF65-F5344CB8AC3E}">
-        <p14:creationId xmlns:p14="http://schemas.microsoft.com/office/powerpoint/2010/main" val="1024086991"/>
-      </p:ext>
-    </p:extLst>
   </p:cSld>
   <p:clrMapOvr>
     <a:masterClrMapping/>
@@ -775,10 +743,6 @@
           <a:bodyPr/>
           <a:lstStyle/>
           <a:p>
-            <a:r>
-              <a:rPr lang="en-US" dirty="0"/>
-              <a:t/>
-            </a:r>
             <a:endParaRPr lang="en-US" dirty="0"/>
           </a:p>
         </p:txBody>
@@ -800,18 +764,12 @@
           <a:p>
             <a:fld id="{F7021451-1387-4CA6-816F-3879F97B5CBC}" type="slidenum">
               <a:rPr lang="en-US"/>
-              <a:t>12</a:t>
             </a:fld>
             <a:endParaRPr lang="en-US"/>
           </a:p>
         </p:txBody>
       </p:sp>
     </p:spTree>
-    <p:extLst>
-      <p:ext uri="{BB962C8B-B14F-4D97-AF65-F5344CB8AC3E}">
-        <p14:creationId xmlns:p14="http://schemas.microsoft.com/office/powerpoint/2010/main" val="1024086991"/>
-      </p:ext>
-    </p:extLst>
   </p:cSld>
   <p:clrMapOvr>
     <a:masterClrMapping/>
@@ -863,10 +821,6 @@
           <a:bodyPr/>
           <a:lstStyle/>
           <a:p>
-            <a:r>
-              <a:rPr lang="en-US" dirty="0"/>
-              <a:t/>
-            </a:r>
             <a:endParaRPr lang="en-US" dirty="0"/>
           </a:p>
         </p:txBody>
@@ -888,18 +842,12 @@
           <a:p>
             <a:fld id="{F7021451-1387-4CA6-816F-3879F97B5CBC}" type="slidenum">
               <a:rPr lang="en-US"/>
-              <a:t>2</a:t>
             </a:fld>
             <a:endParaRPr lang="en-US"/>
           </a:p>
         </p:txBody>
       </p:sp>
     </p:spTree>
-    <p:extLst>
-      <p:ext uri="{BB962C8B-B14F-4D97-AF65-F5344CB8AC3E}">
-        <p14:creationId xmlns:p14="http://schemas.microsoft.com/office/powerpoint/2010/main" val="1024086991"/>
-      </p:ext>
-    </p:extLst>
   </p:cSld>
   <p:clrMapOvr>
     <a:masterClrMapping/>
@@ -951,10 +899,6 @@
           <a:bodyPr/>
           <a:lstStyle/>
           <a:p>
-            <a:r>
-              <a:rPr lang="en-US" dirty="0"/>
-              <a:t/>
-            </a:r>
             <a:endParaRPr lang="en-US" dirty="0"/>
           </a:p>
         </p:txBody>
@@ -976,18 +920,12 @@
           <a:p>
             <a:fld id="{F7021451-1387-4CA6-816F-3879F97B5CBC}" type="slidenum">
               <a:rPr lang="en-US"/>
-              <a:t>3</a:t>
             </a:fld>
             <a:endParaRPr lang="en-US"/>
           </a:p>
         </p:txBody>
       </p:sp>
     </p:spTree>
-    <p:extLst>
-      <p:ext uri="{BB962C8B-B14F-4D97-AF65-F5344CB8AC3E}">
-        <p14:creationId xmlns:p14="http://schemas.microsoft.com/office/powerpoint/2010/main" val="1024086991"/>
-      </p:ext>
-    </p:extLst>
   </p:cSld>
   <p:clrMapOvr>
     <a:masterClrMapping/>
@@ -1039,10 +977,6 @@
           <a:bodyPr/>
           <a:lstStyle/>
           <a:p>
-            <a:r>
-              <a:rPr lang="en-US" dirty="0"/>
-              <a:t/>
-            </a:r>
             <a:endParaRPr lang="en-US" dirty="0"/>
           </a:p>
         </p:txBody>
@@ -1064,18 +998,12 @@
           <a:p>
             <a:fld id="{F7021451-1387-4CA6-816F-3879F97B5CBC}" type="slidenum">
               <a:rPr lang="en-US"/>
-              <a:t>4</a:t>
             </a:fld>
             <a:endParaRPr lang="en-US"/>
           </a:p>
         </p:txBody>
       </p:sp>
     </p:spTree>
-    <p:extLst>
-      <p:ext uri="{BB962C8B-B14F-4D97-AF65-F5344CB8AC3E}">
-        <p14:creationId xmlns:p14="http://schemas.microsoft.com/office/powerpoint/2010/main" val="1024086991"/>
-      </p:ext>
-    </p:extLst>
   </p:cSld>
   <p:clrMapOvr>
     <a:masterClrMapping/>
@@ -1127,10 +1055,6 @@
           <a:bodyPr/>
           <a:lstStyle/>
           <a:p>
-            <a:r>
-              <a:rPr lang="en-US" dirty="0"/>
-              <a:t/>
-            </a:r>
             <a:endParaRPr lang="en-US" dirty="0"/>
           </a:p>
         </p:txBody>
@@ -1152,18 +1076,12 @@
           <a:p>
             <a:fld id="{F7021451-1387-4CA6-816F-3879F97B5CBC}" type="slidenum">
               <a:rPr lang="en-US"/>
-              <a:t>5</a:t>
             </a:fld>
             <a:endParaRPr lang="en-US"/>
           </a:p>
         </p:txBody>
       </p:sp>
     </p:spTree>
-    <p:extLst>
-      <p:ext uri="{BB962C8B-B14F-4D97-AF65-F5344CB8AC3E}">
-        <p14:creationId xmlns:p14="http://schemas.microsoft.com/office/powerpoint/2010/main" val="1024086991"/>
-      </p:ext>
-    </p:extLst>
   </p:cSld>
   <p:clrMapOvr>
     <a:masterClrMapping/>
@@ -1215,10 +1133,6 @@
           <a:bodyPr/>
           <a:lstStyle/>
           <a:p>
-            <a:r>
-              <a:rPr lang="en-US" dirty="0"/>
-              <a:t/>
-            </a:r>
             <a:endParaRPr lang="en-US" dirty="0"/>
           </a:p>
         </p:txBody>
@@ -1240,18 +1154,12 @@
           <a:p>
             <a:fld id="{F7021451-1387-4CA6-816F-3879F97B5CBC}" type="slidenum">
               <a:rPr lang="en-US"/>
-              <a:t>6</a:t>
             </a:fld>
             <a:endParaRPr lang="en-US"/>
           </a:p>
         </p:txBody>
       </p:sp>
     </p:spTree>
-    <p:extLst>
-      <p:ext uri="{BB962C8B-B14F-4D97-AF65-F5344CB8AC3E}">
-        <p14:creationId xmlns:p14="http://schemas.microsoft.com/office/powerpoint/2010/main" val="1024086991"/>
-      </p:ext>
-    </p:extLst>
   </p:cSld>
   <p:clrMapOvr>
     <a:masterClrMapping/>
@@ -1303,10 +1211,6 @@
           <a:bodyPr/>
           <a:lstStyle/>
           <a:p>
-            <a:r>
-              <a:rPr lang="en-US" dirty="0"/>
-              <a:t/>
-            </a:r>
             <a:endParaRPr lang="en-US" dirty="0"/>
           </a:p>
         </p:txBody>
@@ -1328,18 +1232,12 @@
           <a:p>
             <a:fld id="{F7021451-1387-4CA6-816F-3879F97B5CBC}" type="slidenum">
               <a:rPr lang="en-US"/>
-              <a:t>7</a:t>
             </a:fld>
             <a:endParaRPr lang="en-US"/>
           </a:p>
         </p:txBody>
       </p:sp>
     </p:spTree>
-    <p:extLst>
-      <p:ext uri="{BB962C8B-B14F-4D97-AF65-F5344CB8AC3E}">
-        <p14:creationId xmlns:p14="http://schemas.microsoft.com/office/powerpoint/2010/main" val="1024086991"/>
-      </p:ext>
-    </p:extLst>
   </p:cSld>
   <p:clrMapOvr>
     <a:masterClrMapping/>
@@ -1391,10 +1289,6 @@
           <a:bodyPr/>
           <a:lstStyle/>
           <a:p>
-            <a:r>
-              <a:rPr lang="en-US" dirty="0"/>
-              <a:t/>
-            </a:r>
             <a:endParaRPr lang="en-US" dirty="0"/>
           </a:p>
         </p:txBody>
@@ -1416,18 +1310,12 @@
           <a:p>
             <a:fld id="{F7021451-1387-4CA6-816F-3879F97B5CBC}" type="slidenum">
               <a:rPr lang="en-US"/>
-              <a:t>8</a:t>
             </a:fld>
             <a:endParaRPr lang="en-US"/>
           </a:p>
         </p:txBody>
       </p:sp>
     </p:spTree>
-    <p:extLst>
-      <p:ext uri="{BB962C8B-B14F-4D97-AF65-F5344CB8AC3E}">
-        <p14:creationId xmlns:p14="http://schemas.microsoft.com/office/powerpoint/2010/main" val="1024086991"/>
-      </p:ext>
-    </p:extLst>
   </p:cSld>
   <p:clrMapOvr>
     <a:masterClrMapping/>
@@ -1479,10 +1367,6 @@
           <a:bodyPr/>
           <a:lstStyle/>
           <a:p>
-            <a:r>
-              <a:rPr lang="en-US" dirty="0"/>
-              <a:t/>
-            </a:r>
             <a:endParaRPr lang="en-US" dirty="0"/>
           </a:p>
         </p:txBody>
@@ -1504,18 +1388,12 @@
           <a:p>
             <a:fld id="{F7021451-1387-4CA6-816F-3879F97B5CBC}" type="slidenum">
               <a:rPr lang="en-US"/>
-              <a:t>9</a:t>
             </a:fld>
             <a:endParaRPr lang="en-US"/>
           </a:p>
         </p:txBody>
       </p:sp>
     </p:spTree>
-    <p:extLst>
-      <p:ext uri="{BB962C8B-B14F-4D97-AF65-F5344CB8AC3E}">
-        <p14:creationId xmlns:p14="http://schemas.microsoft.com/office/powerpoint/2010/main" val="1024086991"/>
-      </p:ext>
-    </p:extLst>
   </p:cSld>
   <p:clrMapOvr>
     <a:masterClrMapping/>
@@ -1556,6 +1434,11 @@
 <file path=ppt/slideMasters/slideMaster1.xml><?xml version="1.0" encoding="utf-8"?>
 <p:sldMaster xmlns:a="http://schemas.openxmlformats.org/drawingml/2006/main" xmlns:r="http://schemas.openxmlformats.org/officeDocument/2006/relationships" xmlns:p="http://schemas.openxmlformats.org/presentationml/2006/main">
   <p:cSld>
+    <p:bg>
+      <p:bgRef idx="1001">
+        <a:schemeClr val="bg1"/>
+      </p:bgRef>
+    </p:bg>
     <p:spTree>
       <p:nvGrpSpPr>
         <p:cNvPr id="1" name=""/>
@@ -1599,7 +1482,7 @@
         <a:spcBef>
           <a:spcPct val="20000"/>
         </a:spcBef>
-        <a:buFont typeface="Arial" pitchFamily="34" charset="0"/>
+        <a:buFont typeface="Arial" panose="020B0604020202020204" pitchFamily="34" charset="0"/>
         <a:buChar char="•"/>
         <a:defRPr sz="3200" kern="1200">
           <a:solidFill>
@@ -1614,7 +1497,7 @@
         <a:spcBef>
           <a:spcPct val="20000"/>
         </a:spcBef>
-        <a:buFont typeface="Arial" pitchFamily="34" charset="0"/>
+        <a:buFont typeface="Arial" panose="020B0604020202020204" pitchFamily="34" charset="0"/>
         <a:buChar char="–"/>
         <a:defRPr sz="2800" kern="1200">
           <a:solidFill>
@@ -1629,7 +1512,7 @@
         <a:spcBef>
           <a:spcPct val="20000"/>
         </a:spcBef>
-        <a:buFont typeface="Arial" pitchFamily="34" charset="0"/>
+        <a:buFont typeface="Arial" panose="020B0604020202020204" pitchFamily="34" charset="0"/>
         <a:buChar char="•"/>
         <a:defRPr sz="2400" kern="1200">
           <a:solidFill>
@@ -1644,7 +1527,7 @@
         <a:spcBef>
           <a:spcPct val="20000"/>
         </a:spcBef>
-        <a:buFont typeface="Arial" pitchFamily="34" charset="0"/>
+        <a:buFont typeface="Arial" panose="020B0604020202020204" pitchFamily="34" charset="0"/>
         <a:buChar char="–"/>
         <a:defRPr sz="2000" kern="1200">
           <a:solidFill>
@@ -1659,7 +1542,7 @@
         <a:spcBef>
           <a:spcPct val="20000"/>
         </a:spcBef>
-        <a:buFont typeface="Arial" pitchFamily="34" charset="0"/>
+        <a:buFont typeface="Arial" panose="020B0604020202020204" pitchFamily="34" charset="0"/>
         <a:buChar char="»"/>
         <a:defRPr sz="2000" kern="1200">
           <a:solidFill>
@@ -1674,7 +1557,7 @@
         <a:spcBef>
           <a:spcPct val="20000"/>
         </a:spcBef>
-        <a:buFont typeface="Arial" pitchFamily="34" charset="0"/>
+        <a:buFont typeface="Arial" panose="020B0604020202020204" pitchFamily="34" charset="0"/>
         <a:buChar char="•"/>
         <a:defRPr sz="2000" kern="1200">
           <a:solidFill>
@@ -1689,7 +1572,7 @@
         <a:spcBef>
           <a:spcPct val="20000"/>
         </a:spcBef>
-        <a:buFont typeface="Arial" pitchFamily="34" charset="0"/>
+        <a:buFont typeface="Arial" panose="020B0604020202020204" pitchFamily="34" charset="0"/>
         <a:buChar char="•"/>
         <a:defRPr sz="2000" kern="1200">
           <a:solidFill>
@@ -1704,7 +1587,7 @@
         <a:spcBef>
           <a:spcPct val="20000"/>
         </a:spcBef>
-        <a:buFont typeface="Arial" pitchFamily="34" charset="0"/>
+        <a:buFont typeface="Arial" panose="020B0604020202020204" pitchFamily="34" charset="0"/>
         <a:buChar char="•"/>
         <a:defRPr sz="2000" kern="1200">
           <a:solidFill>
@@ -1719,7 +1602,7 @@
         <a:spcBef>
           <a:spcPct val="20000"/>
         </a:spcBef>
-        <a:buFont typeface="Arial" pitchFamily="34" charset="0"/>
+        <a:buFont typeface="Arial" panose="020B0604020202020204" pitchFamily="34" charset="0"/>
         <a:buChar char="•"/>
         <a:defRPr sz="2000" kern="1200">
           <a:solidFill>
@@ -1832,12 +1715,13 @@
 
 <file path=ppt/slides/slide1.xml><?xml version="1.0" encoding="utf-8"?>
 <p:sld xmlns:a="http://schemas.openxmlformats.org/drawingml/2006/main" xmlns:r="http://schemas.openxmlformats.org/officeDocument/2006/relationships" xmlns:p="http://schemas.openxmlformats.org/presentationml/2006/main">
-  <p:cSld name="Slide 1">
+  <p:cSld>
     <p:bg>
       <p:bgPr>
         <a:solidFill>
           <a:srgbClr val="1A252F"/>
         </a:solidFill>
+        <a:effectLst/>
       </p:bgPr>
     </p:bg>
     <p:spTree>
@@ -1869,13 +1753,12 @@
             <a:avLst/>
           </a:prstGeom>
           <a:noFill/>
-          <a:ln/>
         </p:spPr>
         <p:txBody>
           <a:bodyPr wrap="square" rtlCol="0" anchor="ctr"/>
           <a:lstStyle/>
           <a:p>
-            <a:pPr algn="ctr" indent="0" marL="0">
+            <a:pPr marL="0" indent="0" algn="ctr">
               <a:buNone/>
             </a:pPr>
             <a:r>
@@ -1883,16 +1766,16 @@
                 <a:solidFill>
                   <a:srgbClr val="FFFFFF"/>
                 </a:solidFill>
-                <a:latin typeface="Microsoft YaHei" pitchFamily="34" charset="0"/>
-                <a:ea typeface="Microsoft YaHei" pitchFamily="34" charset="-122"/>
-                <a:cs typeface="Microsoft YaHei" pitchFamily="34" charset="-120"/>
+                <a:latin typeface="微软雅黑" panose="020B0503020204020204" pitchFamily="34" charset="-122"/>
+                <a:ea typeface="微软雅黑" panose="020B0503020204020204" pitchFamily="34" charset="-122"/>
+                <a:cs typeface="微软雅黑" panose="020B0503020204020204" pitchFamily="34" charset="-120"/>
               </a:rPr>
               <a:t>基于Stroop效应的</a:t>
             </a:r>
             <a:endParaRPr lang="en-US" sz="4000" dirty="0"/>
           </a:p>
           <a:p>
-            <a:pPr algn="ctr" indent="0" marL="0">
+            <a:pPr marL="0" indent="0" algn="ctr">
               <a:buNone/>
             </a:pPr>
             <a:r>
@@ -1900,9 +1783,9 @@
                 <a:solidFill>
                   <a:srgbClr val="FFFFFF"/>
                 </a:solidFill>
-                <a:latin typeface="Microsoft YaHei" pitchFamily="34" charset="0"/>
-                <a:ea typeface="Microsoft YaHei" pitchFamily="34" charset="-122"/>
-                <a:cs typeface="Microsoft YaHei" pitchFamily="34" charset="-120"/>
+                <a:latin typeface="微软雅黑" panose="020B0503020204020204" pitchFamily="34" charset="-122"/>
+                <a:ea typeface="微软雅黑" panose="020B0503020204020204" pitchFamily="34" charset="-122"/>
+                <a:cs typeface="微软雅黑" panose="020B0503020204020204" pitchFamily="34" charset="-120"/>
               </a:rPr>
               <a:t>认知注意力自适应训练系统</a:t>
             </a:r>
@@ -1925,13 +1808,12 @@
             <a:avLst/>
           </a:prstGeom>
           <a:noFill/>
-          <a:ln/>
         </p:spPr>
         <p:txBody>
           <a:bodyPr wrap="square" rtlCol="0" anchor="ctr"/>
           <a:lstStyle/>
           <a:p>
-            <a:pPr algn="ctr" indent="0" marL="0">
+            <a:pPr marL="0" indent="0" algn="ctr">
               <a:buNone/>
             </a:pPr>
             <a:r>
@@ -1939,9 +1821,9 @@
                 <a:solidFill>
                   <a:srgbClr val="3498DB"/>
                 </a:solidFill>
-                <a:latin typeface="Microsoft YaHei" pitchFamily="34" charset="0"/>
-                <a:ea typeface="Microsoft YaHei" pitchFamily="34" charset="-122"/>
-                <a:cs typeface="Microsoft YaHei" pitchFamily="34" charset="-120"/>
+                <a:latin typeface="微软雅黑" panose="020B0503020204020204" pitchFamily="34" charset="-122"/>
+                <a:ea typeface="微软雅黑" panose="020B0503020204020204" pitchFamily="34" charset="-122"/>
+                <a:cs typeface="微软雅黑" panose="020B0503020204020204" pitchFamily="34" charset="-120"/>
               </a:rPr>
               <a:t>《脑与认知科学基础》期末项目展示</a:t>
             </a:r>
@@ -1964,13 +1846,12 @@
             <a:avLst/>
           </a:prstGeom>
           <a:noFill/>
-          <a:ln/>
         </p:spPr>
         <p:txBody>
           <a:bodyPr wrap="square" rtlCol="0" anchor="ctr"/>
           <a:lstStyle/>
           <a:p>
-            <a:pPr algn="ctr" indent="0" marL="0">
+            <a:pPr marL="0" indent="0" algn="ctr">
               <a:buNone/>
             </a:pPr>
             <a:r>
@@ -1978,9 +1859,9 @@
                 <a:solidFill>
                   <a:srgbClr val="7F8C8D"/>
                 </a:solidFill>
-                <a:latin typeface="Microsoft YaHei" pitchFamily="34" charset="0"/>
-                <a:ea typeface="Microsoft YaHei" pitchFamily="34" charset="-122"/>
-                <a:cs typeface="Microsoft YaHei" pitchFamily="34" charset="-120"/>
+                <a:latin typeface="微软雅黑" panose="020B0503020204020204" pitchFamily="34" charset="-122"/>
+                <a:ea typeface="微软雅黑" panose="020B0503020204020204" pitchFamily="34" charset="-122"/>
+                <a:cs typeface="微软雅黑" panose="020B0503020204020204" pitchFamily="34" charset="-120"/>
               </a:rPr>
               <a:t>王熙（2024211965）  李卓洲（2024212009）  陈其乐（2024212027）</a:t>
             </a:r>
@@ -2003,13 +1884,12 @@
             <a:avLst/>
           </a:prstGeom>
           <a:noFill/>
-          <a:ln/>
         </p:spPr>
         <p:txBody>
           <a:bodyPr wrap="square" rtlCol="0" anchor="ctr"/>
           <a:lstStyle/>
           <a:p>
-            <a:pPr algn="ctr" indent="0" marL="0">
+            <a:pPr marL="0" indent="0" algn="ctr">
               <a:buNone/>
             </a:pPr>
             <a:r>
@@ -2017,9 +1897,9 @@
                 <a:solidFill>
                   <a:srgbClr val="7F8C8D"/>
                 </a:solidFill>
-                <a:latin typeface="Microsoft YaHei" pitchFamily="34" charset="0"/>
-                <a:ea typeface="Microsoft YaHei" pitchFamily="34" charset="-122"/>
-                <a:cs typeface="Microsoft YaHei" pitchFamily="34" charset="-120"/>
+                <a:latin typeface="微软雅黑" panose="020B0503020204020204" pitchFamily="34" charset="-122"/>
+                <a:ea typeface="微软雅黑" panose="020B0503020204020204" pitchFamily="34" charset="-122"/>
+                <a:cs typeface="微软雅黑" panose="020B0503020204020204" pitchFamily="34" charset="-120"/>
               </a:rPr>
               <a:t>北京邮电大学 · 智能医学工程 · 大二</a:t>
             </a:r>
@@ -2037,7 +1917,7 @@
 
 <file path=ppt/slides/slide10.xml><?xml version="1.0" encoding="utf-8"?>
 <p:sld xmlns:a="http://schemas.openxmlformats.org/drawingml/2006/main" xmlns:r="http://schemas.openxmlformats.org/officeDocument/2006/relationships" xmlns:p="http://schemas.openxmlformats.org/presentationml/2006/main">
-  <p:cSld name="Slide 10">
+  <p:cSld>
     <p:spTree>
       <p:nvGrpSpPr>
         <p:cNvPr id="1" name=""/>
@@ -2067,13 +1947,12 @@
             <a:avLst/>
           </a:prstGeom>
           <a:noFill/>
-          <a:ln/>
         </p:spPr>
         <p:txBody>
           <a:bodyPr wrap="square" rtlCol="0" anchor="ctr"/>
           <a:lstStyle/>
           <a:p>
-            <a:pPr indent="0" marL="0">
+            <a:pPr marL="0" indent="0">
               <a:buNone/>
             </a:pPr>
             <a:r>
@@ -2081,9 +1960,9 @@
                 <a:solidFill>
                   <a:srgbClr val="2C3E50"/>
                 </a:solidFill>
-                <a:latin typeface="Microsoft YaHei" pitchFamily="34" charset="0"/>
-                <a:ea typeface="Microsoft YaHei" pitchFamily="34" charset="-122"/>
-                <a:cs typeface="Microsoft YaHei" pitchFamily="34" charset="-120"/>
+                <a:latin typeface="微软雅黑" panose="020B0503020204020204" pitchFamily="34" charset="-122"/>
+                <a:ea typeface="微软雅黑" panose="020B0503020204020204" pitchFamily="34" charset="-122"/>
+                <a:cs typeface="微软雅黑" panose="020B0503020204020204" pitchFamily="34" charset="-120"/>
               </a:rPr>
               <a:t>技术架构与创新点</a:t>
             </a:r>
@@ -2133,7 +2012,6 @@
           <a:solidFill>
             <a:srgbClr val="ECF0F1"/>
           </a:solidFill>
-          <a:ln/>
         </p:spPr>
       </p:sp>
       <p:sp>
@@ -2151,13 +2029,12 @@
             <a:avLst/>
           </a:prstGeom>
           <a:noFill/>
-          <a:ln/>
         </p:spPr>
         <p:txBody>
           <a:bodyPr wrap="square" rtlCol="0" anchor="t"/>
           <a:lstStyle/>
           <a:p>
-            <a:pPr indent="0" marL="0">
+            <a:pPr marL="0" indent="0">
               <a:buNone/>
             </a:pPr>
             <a:r>
@@ -2165,16 +2042,23 @@
                 <a:solidFill>
                   <a:srgbClr val="3498DB"/>
                 </a:solidFill>
-                <a:latin typeface="Microsoft YaHei" pitchFamily="34" charset="0"/>
-                <a:ea typeface="Microsoft YaHei" pitchFamily="34" charset="-122"/>
-                <a:cs typeface="Microsoft YaHei" pitchFamily="34" charset="-120"/>
+                <a:latin typeface="微软雅黑" panose="020B0503020204020204" pitchFamily="34" charset="-122"/>
+                <a:ea typeface="微软雅黑" panose="020B0503020204020204" pitchFamily="34" charset="-122"/>
+                <a:cs typeface="微软雅黑" panose="020B0503020204020204" pitchFamily="34" charset="-120"/>
               </a:rPr>
               <a:t>技术栈（零服务器架构）</a:t>
             </a:r>
-            <a:pPr indent="0" marL="0">
-              <a:buNone/>
-            </a:pPr>
-            <a:pPr indent="0" marL="0">
+            <a:endParaRPr lang="en-US" sz="2000" b="1" dirty="0">
+              <a:solidFill>
+                <a:srgbClr val="3498DB"/>
+              </a:solidFill>
+              <a:latin typeface="微软雅黑" panose="020B0503020204020204" pitchFamily="34" charset="-122"/>
+              <a:ea typeface="微软雅黑" panose="020B0503020204020204" pitchFamily="34" charset="-122"/>
+              <a:cs typeface="微软雅黑" panose="020B0503020204020204" pitchFamily="34" charset="-120"/>
+            </a:endParaRPr>
+          </a:p>
+          <a:p>
+            <a:pPr marL="0" indent="0">
               <a:buNone/>
             </a:pPr>
             <a:r>
@@ -2182,13 +2066,23 @@
                 <a:solidFill>
                   <a:srgbClr val="2C3E50"/>
                 </a:solidFill>
-                <a:latin typeface="Microsoft YaHei" pitchFamily="34" charset="0"/>
-                <a:ea typeface="Microsoft YaHei" pitchFamily="34" charset="-122"/>
-                <a:cs typeface="Microsoft YaHei" pitchFamily="34" charset="-120"/>
+                <a:latin typeface="微软雅黑" panose="020B0503020204020204" pitchFamily="34" charset="-122"/>
+                <a:ea typeface="微软雅黑" panose="020B0503020204020204" pitchFamily="34" charset="-122"/>
+                <a:cs typeface="微软雅黑" panose="020B0503020204020204" pitchFamily="34" charset="-120"/>
               </a:rPr>
               <a:t>• HTML5 + CSS3：响应式界面</a:t>
             </a:r>
-            <a:pPr indent="0" marL="0">
+            <a:endParaRPr lang="en-US" sz="1600" dirty="0">
+              <a:solidFill>
+                <a:srgbClr val="2C3E50"/>
+              </a:solidFill>
+              <a:latin typeface="微软雅黑" panose="020B0503020204020204" pitchFamily="34" charset="-122"/>
+              <a:ea typeface="微软雅黑" panose="020B0503020204020204" pitchFamily="34" charset="-122"/>
+              <a:cs typeface="微软雅黑" panose="020B0503020204020204" pitchFamily="34" charset="-120"/>
+            </a:endParaRPr>
+          </a:p>
+          <a:p>
+            <a:pPr marL="0" indent="0">
               <a:buNone/>
             </a:pPr>
             <a:r>
@@ -2196,13 +2090,23 @@
                 <a:solidFill>
                   <a:srgbClr val="2C3E50"/>
                 </a:solidFill>
-                <a:latin typeface="Microsoft YaHei" pitchFamily="34" charset="0"/>
-                <a:ea typeface="Microsoft YaHei" pitchFamily="34" charset="-122"/>
-                <a:cs typeface="Microsoft YaHei" pitchFamily="34" charset="-120"/>
+                <a:latin typeface="微软雅黑" panose="020B0503020204020204" pitchFamily="34" charset="-122"/>
+                <a:ea typeface="微软雅黑" panose="020B0503020204020204" pitchFamily="34" charset="-122"/>
+                <a:cs typeface="微软雅黑" panose="020B0503020204020204" pitchFamily="34" charset="-120"/>
               </a:rPr>
               <a:t>• 原生JavaScript：零依赖，单文件</a:t>
             </a:r>
-            <a:pPr indent="0" marL="0">
+            <a:endParaRPr lang="en-US" sz="1600" dirty="0">
+              <a:solidFill>
+                <a:srgbClr val="2C3E50"/>
+              </a:solidFill>
+              <a:latin typeface="微软雅黑" panose="020B0503020204020204" pitchFamily="34" charset="-122"/>
+              <a:ea typeface="微软雅黑" panose="020B0503020204020204" pitchFamily="34" charset="-122"/>
+              <a:cs typeface="微软雅黑" panose="020B0503020204020204" pitchFamily="34" charset="-120"/>
+            </a:endParaRPr>
+          </a:p>
+          <a:p>
+            <a:pPr marL="0" indent="0">
               <a:buNone/>
             </a:pPr>
             <a:r>
@@ -2210,13 +2114,23 @@
                 <a:solidFill>
                   <a:srgbClr val="2C3E50"/>
                 </a:solidFill>
-                <a:latin typeface="Microsoft YaHei" pitchFamily="34" charset="0"/>
-                <a:ea typeface="Microsoft YaHei" pitchFamily="34" charset="-122"/>
-                <a:cs typeface="Microsoft YaHei" pitchFamily="34" charset="-120"/>
+                <a:latin typeface="微软雅黑" panose="020B0503020204020204" pitchFamily="34" charset="-122"/>
+                <a:ea typeface="微软雅黑" panose="020B0503020204020204" pitchFamily="34" charset="-122"/>
+                <a:cs typeface="微软雅黑" panose="020B0503020204020204" pitchFamily="34" charset="-120"/>
               </a:rPr>
               <a:t>• Canvas API：三张数据图表</a:t>
             </a:r>
-            <a:pPr indent="0" marL="0">
+            <a:endParaRPr lang="en-US" sz="1600" dirty="0">
+              <a:solidFill>
+                <a:srgbClr val="2C3E50"/>
+              </a:solidFill>
+              <a:latin typeface="微软雅黑" panose="020B0503020204020204" pitchFamily="34" charset="-122"/>
+              <a:ea typeface="微软雅黑" panose="020B0503020204020204" pitchFamily="34" charset="-122"/>
+              <a:cs typeface="微软雅黑" panose="020B0503020204020204" pitchFamily="34" charset="-120"/>
+            </a:endParaRPr>
+          </a:p>
+          <a:p>
+            <a:pPr marL="0" indent="0">
               <a:buNone/>
             </a:pPr>
             <a:r>
@@ -2224,13 +2138,23 @@
                 <a:solidFill>
                   <a:srgbClr val="2C3E50"/>
                 </a:solidFill>
-                <a:latin typeface="Microsoft YaHei" pitchFamily="34" charset="0"/>
-                <a:ea typeface="Microsoft YaHei" pitchFamily="34" charset="-122"/>
-                <a:cs typeface="Microsoft YaHei" pitchFamily="34" charset="-120"/>
+                <a:latin typeface="微软雅黑" panose="020B0503020204020204" pitchFamily="34" charset="-122"/>
+                <a:ea typeface="微软雅黑" panose="020B0503020204020204" pitchFamily="34" charset="-122"/>
+                <a:cs typeface="微软雅黑" panose="020B0503020204020204" pitchFamily="34" charset="-120"/>
               </a:rPr>
               <a:t>• localStorage：数据本地存储</a:t>
             </a:r>
-            <a:pPr indent="0" marL="0">
+            <a:endParaRPr lang="en-US" sz="1600" dirty="0">
+              <a:solidFill>
+                <a:srgbClr val="2C3E50"/>
+              </a:solidFill>
+              <a:latin typeface="微软雅黑" panose="020B0503020204020204" pitchFamily="34" charset="-122"/>
+              <a:ea typeface="微软雅黑" panose="020B0503020204020204" pitchFamily="34" charset="-122"/>
+              <a:cs typeface="微软雅黑" panose="020B0503020204020204" pitchFamily="34" charset="-120"/>
+            </a:endParaRPr>
+          </a:p>
+          <a:p>
+            <a:pPr marL="0" indent="0">
               <a:buNone/>
             </a:pPr>
             <a:r>
@@ -2238,13 +2162,23 @@
                 <a:solidFill>
                   <a:srgbClr val="2C3E50"/>
                 </a:solidFill>
-                <a:latin typeface="Microsoft YaHei" pitchFamily="34" charset="0"/>
-                <a:ea typeface="Microsoft YaHei" pitchFamily="34" charset="-122"/>
-                <a:cs typeface="Microsoft YaHei" pitchFamily="34" charset="-120"/>
+                <a:latin typeface="微软雅黑" panose="020B0503020204020204" pitchFamily="34" charset="-122"/>
+                <a:ea typeface="微软雅黑" panose="020B0503020204020204" pitchFamily="34" charset="-122"/>
+                <a:cs typeface="微软雅黑" panose="020B0503020204020204" pitchFamily="34" charset="-120"/>
               </a:rPr>
               <a:t>• performance.now：高精度计时</a:t>
             </a:r>
-            <a:pPr indent="0" marL="0">
+            <a:endParaRPr lang="en-US" sz="1600" dirty="0">
+              <a:solidFill>
+                <a:srgbClr val="2C3E50"/>
+              </a:solidFill>
+              <a:latin typeface="微软雅黑" panose="020B0503020204020204" pitchFamily="34" charset="-122"/>
+              <a:ea typeface="微软雅黑" panose="020B0503020204020204" pitchFamily="34" charset="-122"/>
+              <a:cs typeface="微软雅黑" panose="020B0503020204020204" pitchFamily="34" charset="-120"/>
+            </a:endParaRPr>
+          </a:p>
+          <a:p>
+            <a:pPr marL="0" indent="0">
               <a:buNone/>
             </a:pPr>
             <a:r>
@@ -2252,40 +2186,31 @@
                 <a:solidFill>
                   <a:srgbClr val="2C3E50"/>
                 </a:solidFill>
-                <a:latin typeface="Microsoft YaHei" pitchFamily="34" charset="0"/>
-                <a:ea typeface="Microsoft YaHei" pitchFamily="34" charset="-122"/>
-                <a:cs typeface="Microsoft YaHei" pitchFamily="34" charset="-120"/>
+                <a:latin typeface="微软雅黑" panose="020B0503020204020204" pitchFamily="34" charset="-122"/>
+                <a:ea typeface="微软雅黑" panose="020B0503020204020204" pitchFamily="34" charset="-122"/>
+                <a:cs typeface="微软雅黑" panose="020B0503020204020204" pitchFamily="34" charset="-120"/>
               </a:rPr>
               <a:t>• ~800行代码，浏览器即用</a:t>
             </a:r>
-            <a:pPr indent="0" marL="0">
-              <a:buNone/>
-            </a:pPr>
-            <a:pPr indent="0" marL="0">
-              <a:buNone/>
-            </a:pPr>
             <a:r>
               <a:rPr lang="en-US" sz="1600" b="1" dirty="0">
                 <a:solidFill>
                   <a:srgbClr val="2C3E50"/>
                 </a:solidFill>
-                <a:latin typeface="Microsoft YaHei" pitchFamily="34" charset="0"/>
-                <a:ea typeface="Microsoft YaHei" pitchFamily="34" charset="-122"/>
-                <a:cs typeface="Microsoft YaHei" pitchFamily="34" charset="-120"/>
+                <a:latin typeface="微软雅黑" panose="020B0503020204020204" pitchFamily="34" charset="-122"/>
+                <a:ea typeface="微软雅黑" panose="020B0503020204020204" pitchFamily="34" charset="-122"/>
+                <a:cs typeface="微软雅黑" panose="020B0503020204020204" pitchFamily="34" charset="-120"/>
               </a:rPr>
               <a:t>GitHub</a:t>
             </a:r>
-            <a:pPr indent="0" marL="0">
-              <a:buNone/>
-            </a:pPr>
             <a:r>
               <a:rPr lang="en-US" sz="1300" dirty="0">
                 <a:solidFill>
                   <a:srgbClr val="7F8C8D"/>
                 </a:solidFill>
-                <a:latin typeface="Microsoft YaHei" pitchFamily="34" charset="0"/>
-                <a:ea typeface="Microsoft YaHei" pitchFamily="34" charset="-122"/>
-                <a:cs typeface="Microsoft YaHei" pitchFamily="34" charset="-120"/>
+                <a:latin typeface="微软雅黑" panose="020B0503020204020204" pitchFamily="34" charset="-122"/>
+                <a:ea typeface="微软雅黑" panose="020B0503020204020204" pitchFamily="34" charset="-122"/>
+                <a:cs typeface="微软雅黑" panose="020B0503020204020204" pitchFamily="34" charset="-120"/>
               </a:rPr>
               <a:t>github.com/wangxi886/stroop-attention-trainer</a:t>
             </a:r>
@@ -2312,7 +2237,6 @@
           <a:solidFill>
             <a:srgbClr val="F0F7FF"/>
           </a:solidFill>
-          <a:ln/>
         </p:spPr>
       </p:sp>
       <p:sp>
@@ -2330,13 +2254,12 @@
             <a:avLst/>
           </a:prstGeom>
           <a:noFill/>
-          <a:ln/>
         </p:spPr>
         <p:txBody>
           <a:bodyPr wrap="square" rtlCol="0" anchor="t"/>
           <a:lstStyle/>
           <a:p>
-            <a:pPr indent="0" marL="0">
+            <a:pPr marL="0" indent="0">
               <a:buNone/>
             </a:pPr>
             <a:r>
@@ -2344,16 +2267,23 @@
                 <a:solidFill>
                   <a:srgbClr val="3498DB"/>
                 </a:solidFill>
-                <a:latin typeface="Microsoft YaHei" pitchFamily="34" charset="0"/>
-                <a:ea typeface="Microsoft YaHei" pitchFamily="34" charset="-122"/>
-                <a:cs typeface="Microsoft YaHei" pitchFamily="34" charset="-120"/>
+                <a:latin typeface="微软雅黑" panose="020B0503020204020204" pitchFamily="34" charset="-122"/>
+                <a:ea typeface="微软雅黑" panose="020B0503020204020204" pitchFamily="34" charset="-122"/>
+                <a:cs typeface="微软雅黑" panose="020B0503020204020204" pitchFamily="34" charset="-120"/>
               </a:rPr>
               <a:t>四大创新点</a:t>
             </a:r>
-            <a:pPr indent="0" marL="0">
-              <a:buNone/>
-            </a:pPr>
-            <a:pPr indent="0" marL="0">
+            <a:endParaRPr lang="en-US" sz="2000" b="1" dirty="0">
+              <a:solidFill>
+                <a:srgbClr val="3498DB"/>
+              </a:solidFill>
+              <a:latin typeface="微软雅黑" panose="020B0503020204020204" pitchFamily="34" charset="-122"/>
+              <a:ea typeface="微软雅黑" panose="020B0503020204020204" pitchFamily="34" charset="-122"/>
+              <a:cs typeface="微软雅黑" panose="020B0503020204020204" pitchFamily="34" charset="-120"/>
+            </a:endParaRPr>
+          </a:p>
+          <a:p>
+            <a:pPr marL="0" indent="0">
               <a:buNone/>
             </a:pPr>
             <a:r>
@@ -2361,30 +2291,34 @@
                 <a:solidFill>
                   <a:srgbClr val="2C3E50"/>
                 </a:solidFill>
-                <a:latin typeface="Microsoft YaHei" pitchFamily="34" charset="0"/>
-                <a:ea typeface="Microsoft YaHei" pitchFamily="34" charset="-122"/>
-                <a:cs typeface="Microsoft YaHei" pitchFamily="34" charset="-120"/>
+                <a:latin typeface="微软雅黑" panose="020B0503020204020204" pitchFamily="34" charset="-122"/>
+                <a:ea typeface="微软雅黑" panose="020B0503020204020204" pitchFamily="34" charset="-122"/>
+                <a:cs typeface="微软雅黑" panose="020B0503020204020204" pitchFamily="34" charset="-120"/>
               </a:rPr>
               <a:t>❶ 范式转型</a:t>
             </a:r>
-            <a:pPr indent="0" marL="0">
-              <a:buNone/>
-            </a:pPr>
             <a:r>
               <a:rPr lang="en-US" sz="1500" dirty="0">
                 <a:solidFill>
                   <a:srgbClr val="7F8C8D"/>
                 </a:solidFill>
-                <a:latin typeface="Microsoft YaHei" pitchFamily="34" charset="0"/>
-                <a:ea typeface="Microsoft YaHei" pitchFamily="34" charset="-122"/>
-                <a:cs typeface="Microsoft YaHei" pitchFamily="34" charset="-120"/>
+                <a:latin typeface="微软雅黑" panose="020B0503020204020204" pitchFamily="34" charset="-122"/>
+                <a:ea typeface="微软雅黑" panose="020B0503020204020204" pitchFamily="34" charset="-122"/>
+                <a:cs typeface="微软雅黑" panose="020B0503020204020204" pitchFamily="34" charset="-120"/>
               </a:rPr>
               <a:t>Stroop从测量工具 → 训练系统</a:t>
             </a:r>
-            <a:pPr indent="0" marL="0">
-              <a:buNone/>
-            </a:pPr>
-            <a:pPr indent="0" marL="0">
+            <a:endParaRPr lang="en-US" sz="1500" dirty="0">
+              <a:solidFill>
+                <a:srgbClr val="7F8C8D"/>
+              </a:solidFill>
+              <a:latin typeface="微软雅黑" panose="020B0503020204020204" pitchFamily="34" charset="-122"/>
+              <a:ea typeface="微软雅黑" panose="020B0503020204020204" pitchFamily="34" charset="-122"/>
+              <a:cs typeface="微软雅黑" panose="020B0503020204020204" pitchFamily="34" charset="-120"/>
+            </a:endParaRPr>
+          </a:p>
+          <a:p>
+            <a:pPr marL="0" indent="0">
               <a:buNone/>
             </a:pPr>
             <a:r>
@@ -2392,61 +2326,56 @@
                 <a:solidFill>
                   <a:srgbClr val="2C3E50"/>
                 </a:solidFill>
-                <a:latin typeface="Microsoft YaHei" pitchFamily="34" charset="0"/>
-                <a:ea typeface="Microsoft YaHei" pitchFamily="34" charset="-122"/>
-                <a:cs typeface="Microsoft YaHei" pitchFamily="34" charset="-120"/>
+                <a:latin typeface="微软雅黑" panose="020B0503020204020204" pitchFamily="34" charset="-122"/>
+                <a:ea typeface="微软雅黑" panose="020B0503020204020204" pitchFamily="34" charset="-122"/>
+                <a:cs typeface="微软雅黑" panose="020B0503020204020204" pitchFamily="34" charset="-120"/>
               </a:rPr>
               <a:t>❷ 双维度自适应</a:t>
             </a:r>
-            <a:pPr indent="0" marL="0">
-              <a:buNone/>
-            </a:pPr>
             <a:r>
               <a:rPr lang="en-US" sz="1500" dirty="0">
                 <a:solidFill>
                   <a:srgbClr val="7F8C8D"/>
                 </a:solidFill>
-                <a:latin typeface="Microsoft YaHei" pitchFamily="34" charset="0"/>
-                <a:ea typeface="Microsoft YaHei" pitchFamily="34" charset="-122"/>
-                <a:cs typeface="Microsoft YaHei" pitchFamily="34" charset="-120"/>
+                <a:latin typeface="微软雅黑" panose="020B0503020204020204" pitchFamily="34" charset="-122"/>
+                <a:ea typeface="微软雅黑" panose="020B0503020204020204" pitchFamily="34" charset="-122"/>
+                <a:cs typeface="微软雅黑" panose="020B0503020204020204" pitchFamily="34" charset="-120"/>
               </a:rPr>
               <a:t>干扰强度（质）+ 呈现时间（量）</a:t>
             </a:r>
-            <a:pPr indent="0" marL="0">
-              <a:buNone/>
-            </a:pPr>
-            <a:pPr indent="0" marL="0">
-              <a:buNone/>
-            </a:pPr>
             <a:r>
               <a:rPr lang="en-US" sz="1800" b="1" dirty="0">
                 <a:solidFill>
                   <a:srgbClr val="2C3E50"/>
                 </a:solidFill>
-                <a:latin typeface="Microsoft YaHei" pitchFamily="34" charset="0"/>
-                <a:ea typeface="Microsoft YaHei" pitchFamily="34" charset="-122"/>
-                <a:cs typeface="Microsoft YaHei" pitchFamily="34" charset="-120"/>
+                <a:latin typeface="微软雅黑" panose="020B0503020204020204" pitchFamily="34" charset="-122"/>
+                <a:ea typeface="微软雅黑" panose="020B0503020204020204" pitchFamily="34" charset="-122"/>
+                <a:cs typeface="微软雅黑" panose="020B0503020204020204" pitchFamily="34" charset="-120"/>
               </a:rPr>
               <a:t>❸ 滞回控制机制</a:t>
             </a:r>
-            <a:pPr indent="0" marL="0">
-              <a:buNone/>
-            </a:pPr>
             <a:r>
               <a:rPr lang="en-US" sz="1500" dirty="0">
                 <a:solidFill>
                   <a:srgbClr val="7F8C8D"/>
                 </a:solidFill>
-                <a:latin typeface="Microsoft YaHei" pitchFamily="34" charset="0"/>
-                <a:ea typeface="Microsoft YaHei" pitchFamily="34" charset="-122"/>
-                <a:cs typeface="Microsoft YaHei" pitchFamily="34" charset="-120"/>
+                <a:latin typeface="微软雅黑" panose="020B0503020204020204" pitchFamily="34" charset="-122"/>
+                <a:ea typeface="微软雅黑" panose="020B0503020204020204" pitchFamily="34" charset="-122"/>
+                <a:cs typeface="微软雅黑" panose="020B0503020204020204" pitchFamily="34" charset="-120"/>
               </a:rPr>
               <a:t>连续2组确认，防止难度过山车</a:t>
             </a:r>
-            <a:pPr indent="0" marL="0">
-              <a:buNone/>
-            </a:pPr>
-            <a:pPr indent="0" marL="0">
+            <a:endParaRPr lang="en-US" sz="1500" dirty="0">
+              <a:solidFill>
+                <a:srgbClr val="7F8C8D"/>
+              </a:solidFill>
+              <a:latin typeface="微软雅黑" panose="020B0503020204020204" pitchFamily="34" charset="-122"/>
+              <a:ea typeface="微软雅黑" panose="020B0503020204020204" pitchFamily="34" charset="-122"/>
+              <a:cs typeface="微软雅黑" panose="020B0503020204020204" pitchFamily="34" charset="-120"/>
+            </a:endParaRPr>
+          </a:p>
+          <a:p>
+            <a:pPr marL="0" indent="0">
               <a:buNone/>
             </a:pPr>
             <a:r>
@@ -2454,23 +2383,20 @@
                 <a:solidFill>
                   <a:srgbClr val="2C3E50"/>
                 </a:solidFill>
-                <a:latin typeface="Microsoft YaHei" pitchFamily="34" charset="0"/>
-                <a:ea typeface="Microsoft YaHei" pitchFamily="34" charset="-122"/>
-                <a:cs typeface="Microsoft YaHei" pitchFamily="34" charset="-120"/>
+                <a:latin typeface="微软雅黑" panose="020B0503020204020204" pitchFamily="34" charset="-122"/>
+                <a:ea typeface="微软雅黑" panose="020B0503020204020204" pitchFamily="34" charset="-122"/>
+                <a:cs typeface="微软雅黑" panose="020B0503020204020204" pitchFamily="34" charset="-120"/>
               </a:rPr>
               <a:t>❹ 隐私保护设计</a:t>
             </a:r>
-            <a:pPr indent="0" marL="0">
-              <a:buNone/>
-            </a:pPr>
             <a:r>
               <a:rPr lang="en-US" sz="1500" dirty="0">
                 <a:solidFill>
                   <a:srgbClr val="7F8C8D"/>
                 </a:solidFill>
-                <a:latin typeface="Microsoft YaHei" pitchFamily="34" charset="0"/>
-                <a:ea typeface="Microsoft YaHei" pitchFamily="34" charset="-122"/>
-                <a:cs typeface="Microsoft YaHei" pitchFamily="34" charset="-120"/>
+                <a:latin typeface="微软雅黑" panose="020B0503020204020204" pitchFamily="34" charset="-122"/>
+                <a:ea typeface="微软雅黑" panose="020B0503020204020204" pitchFamily="34" charset="-122"/>
+                <a:cs typeface="微软雅黑" panose="020B0503020204020204" pitchFamily="34" charset="-120"/>
               </a:rPr>
               <a:t>纯前端，数据不上传不注册</a:t>
             </a:r>
@@ -2488,7 +2414,7 @@
 
 <file path=ppt/slides/slide11.xml><?xml version="1.0" encoding="utf-8"?>
 <p:sld xmlns:a="http://schemas.openxmlformats.org/drawingml/2006/main" xmlns:r="http://schemas.openxmlformats.org/officeDocument/2006/relationships" xmlns:p="http://schemas.openxmlformats.org/presentationml/2006/main">
-  <p:cSld name="Slide 11">
+  <p:cSld>
     <p:spTree>
       <p:nvGrpSpPr>
         <p:cNvPr id="1" name=""/>
@@ -2518,13 +2444,12 @@
             <a:avLst/>
           </a:prstGeom>
           <a:noFill/>
-          <a:ln/>
         </p:spPr>
         <p:txBody>
           <a:bodyPr wrap="square" rtlCol="0" anchor="ctr"/>
           <a:lstStyle/>
           <a:p>
-            <a:pPr indent="0" marL="0">
+            <a:pPr marL="0" indent="0">
               <a:buNone/>
             </a:pPr>
             <a:r>
@@ -2532,9 +2457,9 @@
                 <a:solidFill>
                   <a:srgbClr val="2C3E50"/>
                 </a:solidFill>
-                <a:latin typeface="Microsoft YaHei" pitchFamily="34" charset="0"/>
-                <a:ea typeface="Microsoft YaHei" pitchFamily="34" charset="-122"/>
-                <a:cs typeface="Microsoft YaHei" pitchFamily="34" charset="-120"/>
+                <a:latin typeface="微软雅黑" panose="020B0503020204020204" pitchFamily="34" charset="-122"/>
+                <a:ea typeface="微软雅黑" panose="020B0503020204020204" pitchFamily="34" charset="-122"/>
+                <a:cs typeface="微软雅黑" panose="020B0503020204020204" pitchFamily="34" charset="-120"/>
               </a:rPr>
               <a:t>总结与展望</a:t>
             </a:r>
@@ -2584,7 +2509,6 @@
           <a:solidFill>
             <a:srgbClr val="E8F5E9"/>
           </a:solidFill>
-          <a:ln/>
         </p:spPr>
       </p:sp>
       <p:sp>
@@ -2602,13 +2526,12 @@
             <a:avLst/>
           </a:prstGeom>
           <a:noFill/>
-          <a:ln/>
         </p:spPr>
         <p:txBody>
           <a:bodyPr wrap="square" rtlCol="0" anchor="t"/>
           <a:lstStyle/>
           <a:p>
-            <a:pPr indent="0" marL="0">
+            <a:pPr marL="0" indent="0">
               <a:buNone/>
             </a:pPr>
             <a:r>
@@ -2616,16 +2539,23 @@
                 <a:solidFill>
                   <a:srgbClr val="27AE60"/>
                 </a:solidFill>
-                <a:latin typeface="Microsoft YaHei" pitchFamily="34" charset="0"/>
-                <a:ea typeface="Microsoft YaHei" pitchFamily="34" charset="-122"/>
-                <a:cs typeface="Microsoft YaHei" pitchFamily="34" charset="-120"/>
+                <a:latin typeface="微软雅黑" panose="020B0503020204020204" pitchFamily="34" charset="-122"/>
+                <a:ea typeface="微软雅黑" panose="020B0503020204020204" pitchFamily="34" charset="-122"/>
+                <a:cs typeface="微软雅黑" panose="020B0503020204020204" pitchFamily="34" charset="-120"/>
               </a:rPr>
               <a:t>✅ 已完成</a:t>
             </a:r>
-            <a:pPr indent="0" marL="0">
-              <a:buNone/>
-            </a:pPr>
-            <a:pPr indent="0" marL="0">
+            <a:endParaRPr lang="en-US" sz="2200" b="1" dirty="0">
+              <a:solidFill>
+                <a:srgbClr val="27AE60"/>
+              </a:solidFill>
+              <a:latin typeface="微软雅黑" panose="020B0503020204020204" pitchFamily="34" charset="-122"/>
+              <a:ea typeface="微软雅黑" panose="020B0503020204020204" pitchFamily="34" charset="-122"/>
+              <a:cs typeface="微软雅黑" panose="020B0503020204020204" pitchFamily="34" charset="-120"/>
+            </a:endParaRPr>
+          </a:p>
+          <a:p>
+            <a:pPr marL="0" indent="0">
               <a:buNone/>
             </a:pPr>
             <a:r>
@@ -2633,27 +2563,34 @@
                 <a:solidFill>
                   <a:srgbClr val="2C3E50"/>
                 </a:solidFill>
-                <a:latin typeface="Microsoft YaHei" pitchFamily="34" charset="0"/>
-                <a:ea typeface="Microsoft YaHei" pitchFamily="34" charset="-122"/>
-                <a:cs typeface="Microsoft YaHei" pitchFamily="34" charset="-120"/>
+                <a:latin typeface="微软雅黑" panose="020B0503020204020204" pitchFamily="34" charset="-122"/>
+                <a:ea typeface="微软雅黑" panose="020B0503020204020204" pitchFamily="34" charset="-122"/>
+                <a:cs typeface="微软雅黑" panose="020B0503020204020204" pitchFamily="34" charset="-120"/>
               </a:rPr>
               <a:t>• 基于Stroop效应的自适应训练系统，开发完成并可在线使用</a:t>
             </a:r>
-            <a:pPr indent="0" marL="0">
-              <a:buNone/>
-            </a:pPr>
             <a:r>
               <a:rPr lang="en-US" sz="1600" dirty="0">
                 <a:solidFill>
                   <a:srgbClr val="2C3E50"/>
                 </a:solidFill>
-                <a:latin typeface="Microsoft YaHei" pitchFamily="34" charset="0"/>
-                <a:ea typeface="Microsoft YaHei" pitchFamily="34" charset="-122"/>
-                <a:cs typeface="Microsoft YaHei" pitchFamily="34" charset="-120"/>
+                <a:latin typeface="微软雅黑" panose="020B0503020204020204" pitchFamily="34" charset="-122"/>
+                <a:ea typeface="微软雅黑" panose="020B0503020204020204" pitchFamily="34" charset="-122"/>
+                <a:cs typeface="微软雅黑" panose="020B0503020204020204" pitchFamily="34" charset="-120"/>
               </a:rPr>
               <a:t>• 双维度自适应算法（干扰比例 + 呈现时间）+ 滞回机制</a:t>
             </a:r>
-            <a:pPr indent="0" marL="0">
+            <a:endParaRPr lang="en-US" sz="1600" dirty="0">
+              <a:solidFill>
+                <a:srgbClr val="2C3E50"/>
+              </a:solidFill>
+              <a:latin typeface="微软雅黑" panose="020B0503020204020204" pitchFamily="34" charset="-122"/>
+              <a:ea typeface="微软雅黑" panose="020B0503020204020204" pitchFamily="34" charset="-122"/>
+              <a:cs typeface="微软雅黑" panose="020B0503020204020204" pitchFamily="34" charset="-120"/>
+            </a:endParaRPr>
+          </a:p>
+          <a:p>
+            <a:pPr marL="0" indent="0">
               <a:buNone/>
             </a:pPr>
             <a:r>
@@ -2661,13 +2598,23 @@
                 <a:solidFill>
                   <a:srgbClr val="2C3E50"/>
                 </a:solidFill>
-                <a:latin typeface="Microsoft YaHei" pitchFamily="34" charset="0"/>
-                <a:ea typeface="Microsoft YaHei" pitchFamily="34" charset="-122"/>
-                <a:cs typeface="Microsoft YaHei" pitchFamily="34" charset="-120"/>
+                <a:latin typeface="微软雅黑" panose="020B0503020204020204" pitchFamily="34" charset="-122"/>
+                <a:ea typeface="微软雅黑" panose="020B0503020204020204" pitchFamily="34" charset="-122"/>
+                <a:cs typeface="微软雅黑" panose="020B0503020204020204" pitchFamily="34" charset="-120"/>
               </a:rPr>
               <a:t>• 三张Canvas数据可视化图表 + CSV数据导出 + 实验组/对照组双模式</a:t>
             </a:r>
-            <a:pPr indent="0" marL="0">
+            <a:endParaRPr lang="en-US" sz="1600" dirty="0">
+              <a:solidFill>
+                <a:srgbClr val="2C3E50"/>
+              </a:solidFill>
+              <a:latin typeface="微软雅黑" panose="020B0503020204020204" pitchFamily="34" charset="-122"/>
+              <a:ea typeface="微软雅黑" panose="020B0503020204020204" pitchFamily="34" charset="-122"/>
+              <a:cs typeface="微软雅黑" panose="020B0503020204020204" pitchFamily="34" charset="-120"/>
+            </a:endParaRPr>
+          </a:p>
+          <a:p>
+            <a:pPr marL="0" indent="0">
               <a:buNone/>
             </a:pPr>
             <a:r>
@@ -2675,9 +2622,9 @@
                 <a:solidFill>
                   <a:srgbClr val="2C3E50"/>
                 </a:solidFill>
-                <a:latin typeface="Microsoft YaHei" pitchFamily="34" charset="0"/>
-                <a:ea typeface="Microsoft YaHei" pitchFamily="34" charset="-122"/>
-                <a:cs typeface="Microsoft YaHei" pitchFamily="34" charset="-120"/>
+                <a:latin typeface="微软雅黑" panose="020B0503020204020204" pitchFamily="34" charset="-122"/>
+                <a:ea typeface="微软雅黑" panose="020B0503020204020204" pitchFamily="34" charset="-122"/>
+                <a:cs typeface="微软雅黑" panose="020B0503020204020204" pitchFamily="34" charset="-120"/>
               </a:rPr>
               <a:t>• 10次训练初步数据：反应时↓43% / 干扰效应↓83% / 难度50%→80%</a:t>
             </a:r>
@@ -2704,7 +2651,6 @@
           <a:solidFill>
             <a:srgbClr val="F0F7FF"/>
           </a:solidFill>
-          <a:ln/>
         </p:spPr>
       </p:sp>
       <p:sp>
@@ -2722,13 +2668,12 @@
             <a:avLst/>
           </a:prstGeom>
           <a:noFill/>
-          <a:ln/>
         </p:spPr>
         <p:txBody>
           <a:bodyPr wrap="square" rtlCol="0" anchor="t"/>
           <a:lstStyle/>
           <a:p>
-            <a:pPr indent="0" marL="0">
+            <a:pPr marL="0" indent="0">
               <a:buNone/>
             </a:pPr>
             <a:r>
@@ -2736,16 +2681,23 @@
                 <a:solidFill>
                   <a:srgbClr val="3498DB"/>
                 </a:solidFill>
-                <a:latin typeface="Microsoft YaHei" pitchFamily="34" charset="0"/>
-                <a:ea typeface="Microsoft YaHei" pitchFamily="34" charset="-122"/>
-                <a:cs typeface="Microsoft YaHei" pitchFamily="34" charset="-120"/>
+                <a:latin typeface="微软雅黑" panose="020B0503020204020204" pitchFamily="34" charset="-122"/>
+                <a:ea typeface="微软雅黑" panose="020B0503020204020204" pitchFamily="34" charset="-122"/>
+                <a:cs typeface="微软雅黑" panose="020B0503020204020204" pitchFamily="34" charset="-120"/>
               </a:rPr>
               <a:t>📋 待推进</a:t>
             </a:r>
-            <a:pPr indent="0" marL="0">
-              <a:buNone/>
-            </a:pPr>
-            <a:pPr indent="0" marL="0">
+            <a:endParaRPr lang="en-US" sz="2200" b="1" dirty="0">
+              <a:solidFill>
+                <a:srgbClr val="3498DB"/>
+              </a:solidFill>
+              <a:latin typeface="微软雅黑" panose="020B0503020204020204" pitchFamily="34" charset="-122"/>
+              <a:ea typeface="微软雅黑" panose="020B0503020204020204" pitchFamily="34" charset="-122"/>
+              <a:cs typeface="微软雅黑" panose="020B0503020204020204" pitchFamily="34" charset="-120"/>
+            </a:endParaRPr>
+          </a:p>
+          <a:p>
+            <a:pPr marL="0" indent="0">
               <a:buNone/>
             </a:pPr>
             <a:r>
@@ -2753,13 +2705,23 @@
                 <a:solidFill>
                   <a:srgbClr val="2C3E50"/>
                 </a:solidFill>
-                <a:latin typeface="Microsoft YaHei" pitchFamily="34" charset="0"/>
-                <a:ea typeface="Microsoft YaHei" pitchFamily="34" charset="-122"/>
-                <a:cs typeface="Microsoft YaHei" pitchFamily="34" charset="-120"/>
+                <a:latin typeface="微软雅黑" panose="020B0503020204020204" pitchFamily="34" charset="-122"/>
+                <a:ea typeface="微软雅黑" panose="020B0503020204020204" pitchFamily="34" charset="-122"/>
+                <a:cs typeface="微软雅黑" panose="020B0503020204020204" pitchFamily="34" charset="-120"/>
               </a:rPr>
               <a:t>• 招募30名被试完成正式对照实验（实验组15 + 对照组15）</a:t>
             </a:r>
-            <a:pPr indent="0" marL="0">
+            <a:endParaRPr lang="en-US" sz="1600" dirty="0">
+              <a:solidFill>
+                <a:srgbClr val="2C3E50"/>
+              </a:solidFill>
+              <a:latin typeface="微软雅黑" panose="020B0503020204020204" pitchFamily="34" charset="-122"/>
+              <a:ea typeface="微软雅黑" panose="020B0503020204020204" pitchFamily="34" charset="-122"/>
+              <a:cs typeface="微软雅黑" panose="020B0503020204020204" pitchFamily="34" charset="-120"/>
+            </a:endParaRPr>
+          </a:p>
+          <a:p>
+            <a:pPr marL="0" indent="0">
               <a:buNone/>
             </a:pPr>
             <a:r>
@@ -2767,13 +2729,23 @@
                 <a:solidFill>
                   <a:srgbClr val="2C3E50"/>
                 </a:solidFill>
-                <a:latin typeface="Microsoft YaHei" pitchFamily="34" charset="0"/>
-                <a:ea typeface="Microsoft YaHei" pitchFamily="34" charset="-122"/>
-                <a:cs typeface="Microsoft YaHei" pitchFamily="34" charset="-120"/>
+                <a:latin typeface="微软雅黑" panose="020B0503020204020204" pitchFamily="34" charset="-122"/>
+                <a:ea typeface="微软雅黑" panose="020B0503020204020204" pitchFamily="34" charset="-122"/>
+                <a:cs typeface="微软雅黑" panose="020B0503020204020204" pitchFamily="34" charset="-120"/>
               </a:rPr>
               <a:t>• 统计学检验：t检验对比两组干扰效应降低率的显著性差异</a:t>
             </a:r>
-            <a:pPr indent="0" marL="0">
+            <a:endParaRPr lang="en-US" sz="1600" dirty="0">
+              <a:solidFill>
+                <a:srgbClr val="2C3E50"/>
+              </a:solidFill>
+              <a:latin typeface="微软雅黑" panose="020B0503020204020204" pitchFamily="34" charset="-122"/>
+              <a:ea typeface="微软雅黑" panose="020B0503020204020204" pitchFamily="34" charset="-122"/>
+              <a:cs typeface="微软雅黑" panose="020B0503020204020204" pitchFamily="34" charset="-120"/>
+            </a:endParaRPr>
+          </a:p>
+          <a:p>
+            <a:pPr marL="0" indent="0">
               <a:buNone/>
             </a:pPr>
             <a:r>
@@ -2781,13 +2753,23 @@
                 <a:solidFill>
                   <a:srgbClr val="2C3E50"/>
                 </a:solidFill>
-                <a:latin typeface="Microsoft YaHei" pitchFamily="34" charset="0"/>
-                <a:ea typeface="Microsoft YaHei" pitchFamily="34" charset="-122"/>
-                <a:cs typeface="Microsoft YaHei" pitchFamily="34" charset="-120"/>
+                <a:latin typeface="微软雅黑" panose="020B0503020204020204" pitchFamily="34" charset="-122"/>
+                <a:ea typeface="微软雅黑" panose="020B0503020204020204" pitchFamily="34" charset="-122"/>
+                <a:cs typeface="微软雅黑" panose="020B0503020204020204" pitchFamily="34" charset="-120"/>
               </a:rPr>
               <a:t>• 增加中性条件和反向Stroop条件，完善实验设计</a:t>
             </a:r>
-            <a:pPr indent="0" marL="0">
+            <a:endParaRPr lang="en-US" sz="1600" dirty="0">
+              <a:solidFill>
+                <a:srgbClr val="2C3E50"/>
+              </a:solidFill>
+              <a:latin typeface="微软雅黑" panose="020B0503020204020204" pitchFamily="34" charset="-122"/>
+              <a:ea typeface="微软雅黑" panose="020B0503020204020204" pitchFamily="34" charset="-122"/>
+              <a:cs typeface="微软雅黑" panose="020B0503020204020204" pitchFamily="34" charset="-120"/>
+            </a:endParaRPr>
+          </a:p>
+          <a:p>
+            <a:pPr marL="0" indent="0">
               <a:buNone/>
             </a:pPr>
             <a:r>
@@ -2795,13 +2777,23 @@
                 <a:solidFill>
                   <a:srgbClr val="2C3E50"/>
                 </a:solidFill>
-                <a:latin typeface="Microsoft YaHei" pitchFamily="34" charset="0"/>
-                <a:ea typeface="Microsoft YaHei" pitchFamily="34" charset="-122"/>
-                <a:cs typeface="Microsoft YaHei" pitchFamily="34" charset="-120"/>
+                <a:latin typeface="微软雅黑" panose="020B0503020204020204" pitchFamily="34" charset="-122"/>
+                <a:ea typeface="微软雅黑" panose="020B0503020204020204" pitchFamily="34" charset="-122"/>
+                <a:cs typeface="微软雅黑" panose="020B0503020204020204" pitchFamily="34" charset="-120"/>
               </a:rPr>
               <a:t>• 接入大语言模型，实现训练后的AI反馈和建议</a:t>
             </a:r>
-            <a:pPr indent="0" marL="0">
+            <a:endParaRPr lang="en-US" sz="1600" dirty="0">
+              <a:solidFill>
+                <a:srgbClr val="2C3E50"/>
+              </a:solidFill>
+              <a:latin typeface="微软雅黑" panose="020B0503020204020204" pitchFamily="34" charset="-122"/>
+              <a:ea typeface="微软雅黑" panose="020B0503020204020204" pitchFamily="34" charset="-122"/>
+              <a:cs typeface="微软雅黑" panose="020B0503020204020204" pitchFamily="34" charset="-120"/>
+            </a:endParaRPr>
+          </a:p>
+          <a:p>
+            <a:pPr marL="0" indent="0">
               <a:buNone/>
             </a:pPr>
             <a:r>
@@ -2809,11 +2801,11 @@
                 <a:solidFill>
                   <a:srgbClr val="2C3E50"/>
                 </a:solidFill>
-                <a:latin typeface="Microsoft YaHei" pitchFamily="34" charset="0"/>
-                <a:ea typeface="Microsoft YaHei" pitchFamily="34" charset="-122"/>
-                <a:cs typeface="Microsoft YaHei" pitchFamily="34" charset="-120"/>
-              </a:rPr>
-              <a:t>• 发布为PWA，支持离线使用和移动端适配</a:t>
+                <a:latin typeface="微软雅黑" panose="020B0503020204020204" pitchFamily="34" charset="-122"/>
+                <a:ea typeface="微软雅黑" panose="020B0503020204020204" pitchFamily="34" charset="-122"/>
+                <a:cs typeface="微软雅黑" panose="020B0503020204020204" pitchFamily="34" charset="-120"/>
+              </a:rPr>
+              <a:t>•发布为PWA，支持离线使用和移动端适配</a:t>
             </a:r>
             <a:endParaRPr lang="en-US" sz="2200" dirty="0"/>
           </a:p>
@@ -2829,12 +2821,13 @@
 
 <file path=ppt/slides/slide12.xml><?xml version="1.0" encoding="utf-8"?>
 <p:sld xmlns:a="http://schemas.openxmlformats.org/drawingml/2006/main" xmlns:r="http://schemas.openxmlformats.org/officeDocument/2006/relationships" xmlns:p="http://schemas.openxmlformats.org/presentationml/2006/main">
-  <p:cSld name="Slide 12">
+  <p:cSld>
     <p:bg>
       <p:bgPr>
         <a:solidFill>
           <a:srgbClr val="1A252F"/>
         </a:solidFill>
+        <a:effectLst/>
       </p:bgPr>
     </p:bg>
     <p:spTree>
@@ -2866,13 +2859,12 @@
             <a:avLst/>
           </a:prstGeom>
           <a:noFill/>
-          <a:ln/>
         </p:spPr>
         <p:txBody>
           <a:bodyPr wrap="square" rtlCol="0" anchor="ctr"/>
           <a:lstStyle/>
           <a:p>
-            <a:pPr algn="ctr" indent="0" marL="0">
+            <a:pPr marL="0" indent="0" algn="ctr">
               <a:buNone/>
             </a:pPr>
             <a:r>
@@ -2880,9 +2872,9 @@
                 <a:solidFill>
                   <a:srgbClr val="FFFFFF"/>
                 </a:solidFill>
-                <a:latin typeface="Microsoft YaHei" pitchFamily="34" charset="0"/>
-                <a:ea typeface="Microsoft YaHei" pitchFamily="34" charset="-122"/>
-                <a:cs typeface="Microsoft YaHei" pitchFamily="34" charset="-120"/>
+                <a:latin typeface="微软雅黑" panose="020B0503020204020204" pitchFamily="34" charset="-122"/>
+                <a:ea typeface="微软雅黑" panose="020B0503020204020204" pitchFamily="34" charset="-122"/>
+                <a:cs typeface="微软雅黑" panose="020B0503020204020204" pitchFamily="34" charset="-120"/>
               </a:rPr>
               <a:t>谢谢！</a:t>
             </a:r>
@@ -2905,13 +2897,12 @@
             <a:avLst/>
           </a:prstGeom>
           <a:noFill/>
-          <a:ln/>
         </p:spPr>
         <p:txBody>
           <a:bodyPr wrap="square" rtlCol="0" anchor="ctr"/>
           <a:lstStyle/>
           <a:p>
-            <a:pPr algn="ctr" indent="0" marL="0">
+            <a:pPr marL="0" indent="0" algn="ctr">
               <a:buNone/>
             </a:pPr>
             <a:r>
@@ -2919,9 +2910,9 @@
                 <a:solidFill>
                   <a:srgbClr val="3498DB"/>
                 </a:solidFill>
-                <a:latin typeface="Microsoft YaHei" pitchFamily="34" charset="0"/>
-                <a:ea typeface="Microsoft YaHei" pitchFamily="34" charset="-122"/>
-                <a:cs typeface="Microsoft YaHei" pitchFamily="34" charset="-120"/>
+                <a:latin typeface="微软雅黑" panose="020B0503020204020204" pitchFamily="34" charset="-122"/>
+                <a:ea typeface="微软雅黑" panose="020B0503020204020204" pitchFamily="34" charset="-122"/>
+                <a:cs typeface="微软雅黑" panose="020B0503020204020204" pitchFamily="34" charset="-120"/>
               </a:rPr>
               <a:t>GitHub: github.com/wangxi886/stroop-attention-trainer</a:t>
             </a:r>
@@ -2944,26 +2935,14 @@
             <a:avLst/>
           </a:prstGeom>
           <a:noFill/>
-          <a:ln/>
         </p:spPr>
         <p:txBody>
           <a:bodyPr wrap="square" rtlCol="0" anchor="ctr"/>
           <a:lstStyle/>
           <a:p>
-            <a:pPr algn="ctr" indent="0" marL="0">
-              <a:buNone/>
-            </a:pPr>
-            <a:r>
-              <a:rPr lang="en-US" sz="2200" dirty="0">
-                <a:solidFill>
-                  <a:srgbClr val="7F8C8D"/>
-                </a:solidFill>
-                <a:latin typeface="Microsoft YaHei" pitchFamily="34" charset="0"/>
-                <a:ea typeface="Microsoft YaHei" pitchFamily="34" charset="-122"/>
-                <a:cs typeface="Microsoft YaHei" pitchFamily="34" charset="-120"/>
-              </a:rPr>
-              <a:t>欢迎提问 🙋</a:t>
-            </a:r>
+            <a:pPr marL="0" indent="0" algn="ctr">
+              <a:buNone/>
+            </a:pPr>
             <a:endParaRPr lang="en-US" sz="2200" dirty="0"/>
           </a:p>
         </p:txBody>
@@ -2978,7 +2957,7 @@
 
 <file path=ppt/slides/slide2.xml><?xml version="1.0" encoding="utf-8"?>
 <p:sld xmlns:a="http://schemas.openxmlformats.org/drawingml/2006/main" xmlns:r="http://schemas.openxmlformats.org/officeDocument/2006/relationships" xmlns:p="http://schemas.openxmlformats.org/presentationml/2006/main">
-  <p:cSld name="Slide 2">
+  <p:cSld>
     <p:spTree>
       <p:nvGrpSpPr>
         <p:cNvPr id="1" name=""/>
@@ -3008,13 +2987,12 @@
             <a:avLst/>
           </a:prstGeom>
           <a:noFill/>
-          <a:ln/>
         </p:spPr>
         <p:txBody>
           <a:bodyPr wrap="square" rtlCol="0" anchor="ctr"/>
           <a:lstStyle/>
           <a:p>
-            <a:pPr indent="0" marL="0">
+            <a:pPr marL="0" indent="0">
               <a:buNone/>
             </a:pPr>
             <a:r>
@@ -3022,9 +3000,9 @@
                 <a:solidFill>
                   <a:srgbClr val="2C3E50"/>
                 </a:solidFill>
-                <a:latin typeface="Microsoft YaHei" pitchFamily="34" charset="0"/>
-                <a:ea typeface="Microsoft YaHei" pitchFamily="34" charset="-122"/>
-                <a:cs typeface="Microsoft YaHei" pitchFamily="34" charset="-120"/>
+                <a:latin typeface="微软雅黑" panose="020B0503020204020204" pitchFamily="34" charset="-122"/>
+                <a:ea typeface="微软雅黑" panose="020B0503020204020204" pitchFamily="34" charset="-122"/>
+                <a:cs typeface="微软雅黑" panose="020B0503020204020204" pitchFamily="34" charset="-120"/>
               </a:rPr>
               <a:t>项目背景</a:t>
             </a:r>
@@ -3070,13 +3048,12 @@
             <a:avLst/>
           </a:prstGeom>
           <a:noFill/>
-          <a:ln/>
         </p:spPr>
         <p:txBody>
           <a:bodyPr wrap="square" rtlCol="0" anchor="ctr"/>
           <a:lstStyle/>
           <a:p>
-            <a:pPr indent="0" marL="0">
+            <a:pPr marL="0" indent="0">
               <a:buNone/>
             </a:pPr>
             <a:r>
@@ -3084,37 +3061,31 @@
                 <a:solidFill>
                   <a:srgbClr val="000000"/>
                 </a:solidFill>
-                <a:latin typeface="Microsoft YaHei" pitchFamily="34" charset="0"/>
-                <a:ea typeface="Microsoft YaHei" pitchFamily="34" charset="-122"/>
-                <a:cs typeface="Microsoft YaHei" pitchFamily="34" charset="-120"/>
+                <a:latin typeface="微软雅黑" panose="020B0503020204020204" pitchFamily="34" charset="-122"/>
+                <a:ea typeface="微软雅黑" panose="020B0503020204020204" pitchFamily="34" charset="-122"/>
+                <a:cs typeface="微软雅黑" panose="020B0503020204020204" pitchFamily="34" charset="-120"/>
               </a:rPr>
               <a:t>Stroop效应（Stroop, 1935）：当文字的墨水颜色与字义冲突时，</a:t>
             </a:r>
-            <a:pPr indent="0" marL="0">
-              <a:buNone/>
-            </a:pPr>
             <a:r>
               <a:rPr lang="en-US" sz="1800" b="1" dirty="0">
                 <a:solidFill>
                   <a:srgbClr val="E74C3C"/>
                 </a:solidFill>
-                <a:latin typeface="Microsoft YaHei" pitchFamily="34" charset="0"/>
-                <a:ea typeface="Microsoft YaHei" pitchFamily="34" charset="-122"/>
-                <a:cs typeface="Microsoft YaHei" pitchFamily="34" charset="-120"/>
+                <a:latin typeface="微软雅黑" panose="020B0503020204020204" pitchFamily="34" charset="-122"/>
+                <a:ea typeface="微软雅黑" panose="020B0503020204020204" pitchFamily="34" charset="-122"/>
+                <a:cs typeface="微软雅黑" panose="020B0503020204020204" pitchFamily="34" charset="-120"/>
               </a:rPr>
               <a:t>命名颜色</a:t>
             </a:r>
-            <a:pPr indent="0" marL="0">
-              <a:buNone/>
-            </a:pPr>
             <a:r>
               <a:rPr lang="en-US" sz="1800" dirty="0">
                 <a:solidFill>
                   <a:srgbClr val="000000"/>
                 </a:solidFill>
-                <a:latin typeface="Microsoft YaHei" pitchFamily="34" charset="0"/>
-                <a:ea typeface="Microsoft YaHei" pitchFamily="34" charset="-122"/>
-                <a:cs typeface="Microsoft YaHei" pitchFamily="34" charset="-120"/>
+                <a:latin typeface="微软雅黑" panose="020B0503020204020204" pitchFamily="34" charset="-122"/>
+                <a:ea typeface="微软雅黑" panose="020B0503020204020204" pitchFamily="34" charset="-122"/>
+                <a:cs typeface="微软雅黑" panose="020B0503020204020204" pitchFamily="34" charset="-120"/>
               </a:rPr>
               <a:t>的反应时间显著长于一致条件</a:t>
             </a:r>
@@ -3137,13 +3108,12 @@
             <a:avLst/>
           </a:prstGeom>
           <a:noFill/>
-          <a:ln/>
         </p:spPr>
         <p:txBody>
           <a:bodyPr wrap="square" rtlCol="0" anchor="ctr"/>
           <a:lstStyle/>
           <a:p>
-            <a:pPr indent="0" marL="0">
+            <a:pPr marL="0" indent="0">
               <a:buNone/>
             </a:pPr>
             <a:r>
@@ -3151,9 +3121,9 @@
                 <a:solidFill>
                   <a:srgbClr val="7F8C8D"/>
                 </a:solidFill>
-                <a:latin typeface="Microsoft YaHei" pitchFamily="34" charset="0"/>
-                <a:ea typeface="Microsoft YaHei" pitchFamily="34" charset="-122"/>
-                <a:cs typeface="Microsoft YaHei" pitchFamily="34" charset="-120"/>
+                <a:latin typeface="微软雅黑" panose="020B0503020204020204" pitchFamily="34" charset="-122"/>
+                <a:ea typeface="微软雅黑" panose="020B0503020204020204" pitchFamily="34" charset="-122"/>
+                <a:cs typeface="微软雅黑" panose="020B0503020204020204" pitchFamily="34" charset="-120"/>
               </a:rPr>
               <a:t>本质：自动加工（阅读）与控制加工（颜色命名）的竞争</a:t>
             </a:r>
@@ -3176,13 +3146,12 @@
             <a:avLst/>
           </a:prstGeom>
           <a:noFill/>
-          <a:ln/>
         </p:spPr>
         <p:txBody>
           <a:bodyPr wrap="square" rtlCol="0" anchor="ctr"/>
           <a:lstStyle/>
           <a:p>
-            <a:pPr indent="0" marL="0">
+            <a:pPr marL="0" indent="0">
               <a:buNone/>
             </a:pPr>
             <a:r>
@@ -3190,23 +3159,20 @@
                 <a:solidFill>
                   <a:srgbClr val="2C3E50"/>
                 </a:solidFill>
-                <a:latin typeface="Microsoft YaHei" pitchFamily="34" charset="0"/>
-                <a:ea typeface="Microsoft YaHei" pitchFamily="34" charset="-122"/>
-                <a:cs typeface="Microsoft YaHei" pitchFamily="34" charset="-120"/>
+                <a:latin typeface="微软雅黑" panose="020B0503020204020204" pitchFamily="34" charset="-122"/>
+                <a:ea typeface="微软雅黑" panose="020B0503020204020204" pitchFamily="34" charset="-122"/>
+                <a:cs typeface="微软雅黑" panose="020B0503020204020204" pitchFamily="34" charset="-120"/>
               </a:rPr>
               <a:t>现实需求  </a:t>
             </a:r>
-            <a:pPr indent="0" marL="0">
-              <a:buNone/>
-            </a:pPr>
             <a:r>
               <a:rPr lang="en-US" sz="1700" dirty="0">
                 <a:solidFill>
                   <a:srgbClr val="000000"/>
                 </a:solidFill>
-                <a:latin typeface="Microsoft YaHei" pitchFamily="34" charset="0"/>
-                <a:ea typeface="Microsoft YaHei" pitchFamily="34" charset="-122"/>
-                <a:cs typeface="Microsoft YaHei" pitchFamily="34" charset="-120"/>
+                <a:latin typeface="微软雅黑" panose="020B0503020204020204" pitchFamily="34" charset="-122"/>
+                <a:ea typeface="微软雅黑" panose="020B0503020204020204" pitchFamily="34" charset="-122"/>
+                <a:cs typeface="微软雅黑" panose="020B0503020204020204" pitchFamily="34" charset="-120"/>
               </a:rPr>
               <a:t>ADHD儿童注意缺陷（中国患病率6.26%）/ 信息过载 / 全球脑训练市场2027年达112亿美元</a:t>
             </a:r>
@@ -3229,13 +3195,12 @@
             <a:avLst/>
           </a:prstGeom>
           <a:noFill/>
-          <a:ln/>
         </p:spPr>
         <p:txBody>
           <a:bodyPr wrap="square" rtlCol="0" anchor="ctr"/>
           <a:lstStyle/>
           <a:p>
-            <a:pPr indent="0" marL="0">
+            <a:pPr marL="0" indent="0">
               <a:buNone/>
             </a:pPr>
             <a:r>
@@ -3243,23 +3208,20 @@
                 <a:solidFill>
                   <a:srgbClr val="2C3E50"/>
                 </a:solidFill>
-                <a:latin typeface="Microsoft YaHei" pitchFamily="34" charset="0"/>
-                <a:ea typeface="Microsoft YaHei" pitchFamily="34" charset="-122"/>
-                <a:cs typeface="Microsoft YaHei" pitchFamily="34" charset="-120"/>
+                <a:latin typeface="微软雅黑" panose="020B0503020204020204" pitchFamily="34" charset="-122"/>
+                <a:ea typeface="微软雅黑" panose="020B0503020204020204" pitchFamily="34" charset="-122"/>
+                <a:cs typeface="微软雅黑" panose="020B0503020204020204" pitchFamily="34" charset="-120"/>
               </a:rPr>
               <a:t>市场痛点  </a:t>
             </a:r>
-            <a:pPr indent="0" marL="0">
-              <a:buNone/>
-            </a:pPr>
             <a:r>
               <a:rPr lang="en-US" sz="1700" dirty="0">
                 <a:solidFill>
                   <a:srgbClr val="000000"/>
                 </a:solidFill>
-                <a:latin typeface="Microsoft YaHei" pitchFamily="34" charset="0"/>
-                <a:ea typeface="Microsoft YaHei" pitchFamily="34" charset="-122"/>
-                <a:cs typeface="Microsoft YaHei" pitchFamily="34" charset="-120"/>
+                <a:latin typeface="微软雅黑" panose="020B0503020204020204" pitchFamily="34" charset="-122"/>
+                <a:ea typeface="微软雅黑" panose="020B0503020204020204" pitchFamily="34" charset="-122"/>
+                <a:cs typeface="微软雅黑" panose="020B0503020204020204" pitchFamily="34" charset="-120"/>
               </a:rPr>
               <a:t>现有产品难度固定 + 缺乏认知科学理论支撑 + 训练效果不可量化</a:t>
             </a:r>
@@ -3286,7 +3248,6 @@
           <a:solidFill>
             <a:srgbClr val="ECF0F1"/>
           </a:solidFill>
-          <a:ln/>
         </p:spPr>
       </p:sp>
       <p:sp>
@@ -3304,13 +3265,12 @@
             <a:avLst/>
           </a:prstGeom>
           <a:noFill/>
-          <a:ln/>
         </p:spPr>
         <p:txBody>
           <a:bodyPr wrap="square" rtlCol="0" anchor="t"/>
           <a:lstStyle/>
           <a:p>
-            <a:pPr indent="0" marL="0">
+            <a:pPr marL="0" indent="0">
               <a:buNone/>
             </a:pPr>
             <a:r>
@@ -3318,16 +3278,23 @@
                 <a:solidFill>
                   <a:srgbClr val="2C3E50"/>
                 </a:solidFill>
-                <a:latin typeface="Microsoft YaHei" pitchFamily="34" charset="0"/>
-                <a:ea typeface="Microsoft YaHei" pitchFamily="34" charset="-122"/>
-                <a:cs typeface="Microsoft YaHei" pitchFamily="34" charset="-120"/>
+                <a:latin typeface="微软雅黑" panose="020B0503020204020204" pitchFamily="34" charset="-122"/>
+                <a:ea typeface="微软雅黑" panose="020B0503020204020204" pitchFamily="34" charset="-122"/>
+                <a:cs typeface="微软雅黑" panose="020B0503020204020204" pitchFamily="34" charset="-120"/>
               </a:rPr>
               <a:t>核心问题</a:t>
             </a:r>
-            <a:pPr indent="0" marL="0">
-              <a:buNone/>
-            </a:pPr>
-            <a:pPr indent="0" marL="0">
+            <a:endParaRPr lang="en-US" sz="2000" b="1" dirty="0">
+              <a:solidFill>
+                <a:srgbClr val="2C3E50"/>
+              </a:solidFill>
+              <a:latin typeface="微软雅黑" panose="020B0503020204020204" pitchFamily="34" charset="-122"/>
+              <a:ea typeface="微软雅黑" panose="020B0503020204020204" pitchFamily="34" charset="-122"/>
+              <a:cs typeface="微软雅黑" panose="020B0503020204020204" pitchFamily="34" charset="-120"/>
+            </a:endParaRPr>
+          </a:p>
+          <a:p>
+            <a:pPr marL="0" indent="0">
               <a:buNone/>
             </a:pPr>
             <a:r>
@@ -3335,110 +3302,86 @@
                 <a:solidFill>
                   <a:srgbClr val="2C3E50"/>
                 </a:solidFill>
-                <a:latin typeface="Microsoft YaHei" pitchFamily="34" charset="0"/>
-                <a:ea typeface="Microsoft YaHei" pitchFamily="34" charset="-122"/>
-                <a:cs typeface="Microsoft YaHei" pitchFamily="34" charset="-120"/>
+                <a:latin typeface="微软雅黑" panose="020B0503020204020204" pitchFamily="34" charset="-122"/>
+                <a:ea typeface="微软雅黑" panose="020B0503020204020204" pitchFamily="34" charset="-122"/>
+                <a:cs typeface="微软雅黑" panose="020B0503020204020204" pitchFamily="34" charset="-120"/>
               </a:rPr>
               <a:t>如何将Stroop范式从</a:t>
             </a:r>
-            <a:pPr indent="0" marL="0">
-              <a:buNone/>
-            </a:pPr>
             <a:r>
               <a:rPr lang="en-US" sz="1700" b="1" dirty="0">
                 <a:solidFill>
                   <a:srgbClr val="E74C3C"/>
                 </a:solidFill>
-                <a:latin typeface="Microsoft YaHei" pitchFamily="34" charset="0"/>
-                <a:ea typeface="Microsoft YaHei" pitchFamily="34" charset="-122"/>
-                <a:cs typeface="Microsoft YaHei" pitchFamily="34" charset="-120"/>
+                <a:latin typeface="微软雅黑" panose="020B0503020204020204" pitchFamily="34" charset="-122"/>
+                <a:ea typeface="微软雅黑" panose="020B0503020204020204" pitchFamily="34" charset="-122"/>
+                <a:cs typeface="微软雅黑" panose="020B0503020204020204" pitchFamily="34" charset="-120"/>
               </a:rPr>
               <a:t>一次性测量工具</a:t>
             </a:r>
-            <a:pPr indent="0" marL="0">
-              <a:buNone/>
-            </a:pPr>
             <a:r>
               <a:rPr lang="en-US" sz="1600" dirty="0">
                 <a:solidFill>
                   <a:srgbClr val="2C3E50"/>
                 </a:solidFill>
-                <a:latin typeface="Microsoft YaHei" pitchFamily="34" charset="0"/>
-                <a:ea typeface="Microsoft YaHei" pitchFamily="34" charset="-122"/>
-                <a:cs typeface="Microsoft YaHei" pitchFamily="34" charset="-120"/>
+                <a:latin typeface="微软雅黑" panose="020B0503020204020204" pitchFamily="34" charset="-122"/>
+                <a:ea typeface="微软雅黑" panose="020B0503020204020204" pitchFamily="34" charset="-122"/>
+                <a:cs typeface="微软雅黑" panose="020B0503020204020204" pitchFamily="34" charset="-120"/>
               </a:rPr>
               <a:t>转变为</a:t>
             </a:r>
-            <a:pPr indent="0" marL="0">
-              <a:buNone/>
-            </a:pPr>
             <a:r>
               <a:rPr lang="en-US" sz="1700" b="1" dirty="0">
                 <a:solidFill>
                   <a:srgbClr val="3498DB"/>
                 </a:solidFill>
-                <a:latin typeface="Microsoft YaHei" pitchFamily="34" charset="0"/>
-                <a:ea typeface="Microsoft YaHei" pitchFamily="34" charset="-122"/>
-                <a:cs typeface="Microsoft YaHei" pitchFamily="34" charset="-120"/>
+                <a:latin typeface="微软雅黑" panose="020B0503020204020204" pitchFamily="34" charset="-122"/>
+                <a:ea typeface="微软雅黑" panose="020B0503020204020204" pitchFamily="34" charset="-122"/>
+                <a:cs typeface="微软雅黑" panose="020B0503020204020204" pitchFamily="34" charset="-120"/>
               </a:rPr>
               <a:t>长期自适应训练系统</a:t>
             </a:r>
-            <a:pPr indent="0" marL="0">
-              <a:buNone/>
-            </a:pPr>
             <a:r>
               <a:rPr lang="en-US" sz="1600" dirty="0">
                 <a:solidFill>
                   <a:srgbClr val="2C3E50"/>
                 </a:solidFill>
-                <a:latin typeface="Microsoft YaHei" pitchFamily="34" charset="0"/>
-                <a:ea typeface="Microsoft YaHei" pitchFamily="34" charset="-122"/>
-                <a:cs typeface="Microsoft YaHei" pitchFamily="34" charset="-120"/>
+                <a:latin typeface="微软雅黑" panose="020B0503020204020204" pitchFamily="34" charset="-122"/>
+                <a:ea typeface="微软雅黑" panose="020B0503020204020204" pitchFamily="34" charset="-122"/>
+                <a:cs typeface="微软雅黑" panose="020B0503020204020204" pitchFamily="34" charset="-120"/>
               </a:rPr>
               <a:t>？</a:t>
             </a:r>
-            <a:pPr indent="0" marL="0">
-              <a:buNone/>
-            </a:pPr>
-            <a:pPr indent="0" marL="0">
-              <a:buNone/>
-            </a:pPr>
             <a:r>
               <a:rPr lang="en-US" sz="1500" dirty="0">
                 <a:solidFill>
                   <a:srgbClr val="7F8C8D"/>
                 </a:solidFill>
-                <a:latin typeface="Microsoft YaHei" pitchFamily="34" charset="0"/>
-                <a:ea typeface="Microsoft YaHei" pitchFamily="34" charset="-122"/>
-                <a:cs typeface="Microsoft YaHei" pitchFamily="34" charset="-120"/>
+                <a:latin typeface="微软雅黑" panose="020B0503020204020204" pitchFamily="34" charset="-122"/>
+                <a:ea typeface="微软雅黑" panose="020B0503020204020204" pitchFamily="34" charset="-122"/>
+                <a:cs typeface="微软雅黑" panose="020B0503020204020204" pitchFamily="34" charset="-120"/>
               </a:rPr>
               <a:t>→ 经典范式做训练载体</a:t>
             </a:r>
-            <a:pPr indent="0" marL="0">
-              <a:buNone/>
-            </a:pPr>
             <a:r>
               <a:rPr lang="en-US" sz="1500" dirty="0">
                 <a:solidFill>
                   <a:srgbClr val="7F8C8D"/>
                 </a:solidFill>
-                <a:latin typeface="Microsoft YaHei" pitchFamily="34" charset="0"/>
-                <a:ea typeface="Microsoft YaHei" pitchFamily="34" charset="-122"/>
-                <a:cs typeface="Microsoft YaHei" pitchFamily="34" charset="-120"/>
+                <a:latin typeface="微软雅黑" panose="020B0503020204020204" pitchFamily="34" charset="-122"/>
+                <a:ea typeface="微软雅黑" panose="020B0503020204020204" pitchFamily="34" charset="-122"/>
+                <a:cs typeface="微软雅黑" panose="020B0503020204020204" pitchFamily="34" charset="-120"/>
               </a:rPr>
               <a:t>→ 自适应算法做调节引擎</a:t>
             </a:r>
-            <a:pPr indent="0" marL="0">
-              <a:buNone/>
-            </a:pPr>
             <a:r>
               <a:rPr lang="en-US" sz="1500" dirty="0">
                 <a:solidFill>
                   <a:srgbClr val="7F8C8D"/>
                 </a:solidFill>
-                <a:latin typeface="Microsoft YaHei" pitchFamily="34" charset="0"/>
-                <a:ea typeface="Microsoft YaHei" pitchFamily="34" charset="-122"/>
-                <a:cs typeface="Microsoft YaHei" pitchFamily="34" charset="-120"/>
+                <a:latin typeface="微软雅黑" panose="020B0503020204020204" pitchFamily="34" charset="-122"/>
+                <a:ea typeface="微软雅黑" panose="020B0503020204020204" pitchFamily="34" charset="-122"/>
+                <a:cs typeface="微软雅黑" panose="020B0503020204020204" pitchFamily="34" charset="-120"/>
               </a:rPr>
               <a:t>→ 数据可视化量化效果</a:t>
             </a:r>
@@ -3456,7 +3399,7 @@
 
 <file path=ppt/slides/slide3.xml><?xml version="1.0" encoding="utf-8"?>
 <p:sld xmlns:a="http://schemas.openxmlformats.org/drawingml/2006/main" xmlns:r="http://schemas.openxmlformats.org/officeDocument/2006/relationships" xmlns:p="http://schemas.openxmlformats.org/presentationml/2006/main">
-  <p:cSld name="Slide 3">
+  <p:cSld>
     <p:spTree>
       <p:nvGrpSpPr>
         <p:cNvPr id="1" name=""/>
@@ -3486,13 +3429,12 @@
             <a:avLst/>
           </a:prstGeom>
           <a:noFill/>
-          <a:ln/>
         </p:spPr>
         <p:txBody>
           <a:bodyPr wrap="square" rtlCol="0" anchor="ctr"/>
           <a:lstStyle/>
           <a:p>
-            <a:pPr indent="0" marL="0">
+            <a:pPr marL="0" indent="0">
               <a:buNone/>
             </a:pPr>
             <a:r>
@@ -3500,9 +3442,9 @@
                 <a:solidFill>
                   <a:srgbClr val="2C3E50"/>
                 </a:solidFill>
-                <a:latin typeface="Microsoft YaHei" pitchFamily="34" charset="0"/>
-                <a:ea typeface="Microsoft YaHei" pitchFamily="34" charset="-122"/>
-                <a:cs typeface="Microsoft YaHei" pitchFamily="34" charset="-120"/>
+                <a:latin typeface="微软雅黑" panose="020B0503020204020204" pitchFamily="34" charset="-122"/>
+                <a:ea typeface="微软雅黑" panose="020B0503020204020204" pitchFamily="34" charset="-122"/>
+                <a:cs typeface="微软雅黑" panose="020B0503020204020204" pitchFamily="34" charset="-120"/>
               </a:rPr>
               <a:t>理论基础</a:t>
             </a:r>
@@ -3552,7 +3494,6 @@
           <a:solidFill>
             <a:srgbClr val="ECF0F1"/>
           </a:solidFill>
-          <a:ln/>
         </p:spPr>
       </p:sp>
       <p:sp>
@@ -3570,13 +3511,12 @@
             <a:avLst/>
           </a:prstGeom>
           <a:noFill/>
-          <a:ln/>
         </p:spPr>
         <p:txBody>
           <a:bodyPr wrap="square" rtlCol="0" anchor="ctr"/>
           <a:lstStyle/>
           <a:p>
-            <a:pPr algn="ctr" indent="0" marL="0">
+            <a:pPr marL="0" indent="0" algn="ctr">
               <a:buNone/>
             </a:pPr>
             <a:r>
@@ -3584,9 +3524,9 @@
                 <a:solidFill>
                   <a:srgbClr val="3498DB"/>
                 </a:solidFill>
-                <a:latin typeface="Microsoft YaHei" pitchFamily="34" charset="0"/>
-                <a:ea typeface="Microsoft YaHei" pitchFamily="34" charset="-122"/>
-                <a:cs typeface="Microsoft YaHei" pitchFamily="34" charset="-120"/>
+                <a:latin typeface="微软雅黑" panose="020B0503020204020204" pitchFamily="34" charset="-122"/>
+                <a:ea typeface="微软雅黑" panose="020B0503020204020204" pitchFamily="34" charset="-122"/>
+                <a:cs typeface="微软雅黑" panose="020B0503020204020204" pitchFamily="34" charset="-120"/>
               </a:rPr>
               <a:t>Stroop效应</a:t>
             </a:r>
@@ -3609,13 +3549,12 @@
             <a:avLst/>
           </a:prstGeom>
           <a:noFill/>
-          <a:ln/>
         </p:spPr>
         <p:txBody>
           <a:bodyPr wrap="square" rtlCol="0" anchor="ctr"/>
           <a:lstStyle/>
           <a:p>
-            <a:pPr algn="ctr" indent="0" marL="0">
+            <a:pPr marL="0" indent="0" algn="ctr">
               <a:buNone/>
             </a:pPr>
             <a:r>
@@ -3623,9 +3562,9 @@
                 <a:solidFill>
                   <a:srgbClr val="7F8C8D"/>
                 </a:solidFill>
-                <a:latin typeface="Microsoft YaHei" pitchFamily="34" charset="0"/>
-                <a:ea typeface="Microsoft YaHei" pitchFamily="34" charset="-122"/>
-                <a:cs typeface="Microsoft YaHei" pitchFamily="34" charset="-120"/>
+                <a:latin typeface="微软雅黑" panose="020B0503020204020204" pitchFamily="34" charset="-122"/>
+                <a:ea typeface="微软雅黑" panose="020B0503020204020204" pitchFamily="34" charset="-122"/>
+                <a:cs typeface="微软雅黑" panose="020B0503020204020204" pitchFamily="34" charset="-120"/>
               </a:rPr>
               <a:t>认知心理学</a:t>
             </a:r>
@@ -3671,13 +3610,12 @@
             <a:avLst/>
           </a:prstGeom>
           <a:noFill/>
-          <a:ln/>
         </p:spPr>
         <p:txBody>
           <a:bodyPr wrap="square" rtlCol="0" anchor="ctr"/>
           <a:lstStyle/>
           <a:p>
-            <a:pPr indent="0" marL="0">
+            <a:pPr marL="0" indent="0">
               <a:buNone/>
             </a:pPr>
             <a:r>
@@ -3685,9 +3623,9 @@
                 <a:solidFill>
                   <a:srgbClr val="2C3E50"/>
                 </a:solidFill>
-                <a:latin typeface="Microsoft YaHei" pitchFamily="34" charset="0"/>
-                <a:ea typeface="Microsoft YaHei" pitchFamily="34" charset="-122"/>
-                <a:cs typeface="Microsoft YaHei" pitchFamily="34" charset="-120"/>
+                <a:latin typeface="微软雅黑" panose="020B0503020204020204" pitchFamily="34" charset="-122"/>
+                <a:ea typeface="微软雅黑" panose="020B0503020204020204" pitchFamily="34" charset="-122"/>
+                <a:cs typeface="微软雅黑" panose="020B0503020204020204" pitchFamily="34" charset="-120"/>
               </a:rPr>
               <a:t>• 自动加工 vs 控制加工</a:t>
             </a:r>
@@ -3710,13 +3648,12 @@
             <a:avLst/>
           </a:prstGeom>
           <a:noFill/>
-          <a:ln/>
         </p:spPr>
         <p:txBody>
           <a:bodyPr wrap="square" rtlCol="0" anchor="ctr"/>
           <a:lstStyle/>
           <a:p>
-            <a:pPr indent="0" marL="0">
+            <a:pPr marL="0" indent="0">
               <a:buNone/>
             </a:pPr>
             <a:r>
@@ -3724,9 +3661,9 @@
                 <a:solidFill>
                   <a:srgbClr val="2C3E50"/>
                 </a:solidFill>
-                <a:latin typeface="Microsoft YaHei" pitchFamily="34" charset="0"/>
-                <a:ea typeface="Microsoft YaHei" pitchFamily="34" charset="-122"/>
-                <a:cs typeface="Microsoft YaHei" pitchFamily="34" charset="-120"/>
+                <a:latin typeface="微软雅黑" panose="020B0503020204020204" pitchFamily="34" charset="-122"/>
+                <a:ea typeface="微软雅黑" panose="020B0503020204020204" pitchFamily="34" charset="-122"/>
+                <a:cs typeface="微软雅黑" panose="020B0503020204020204" pitchFamily="34" charset="-120"/>
               </a:rPr>
               <a:t>• 字义干扰 &gt; 颜色命名</a:t>
             </a:r>
@@ -3749,13 +3686,12 @@
             <a:avLst/>
           </a:prstGeom>
           <a:noFill/>
-          <a:ln/>
         </p:spPr>
         <p:txBody>
           <a:bodyPr wrap="square" rtlCol="0" anchor="ctr"/>
           <a:lstStyle/>
           <a:p>
-            <a:pPr indent="0" marL="0">
+            <a:pPr marL="0" indent="0">
               <a:buNone/>
             </a:pPr>
             <a:r>
@@ -3763,9 +3699,9 @@
                 <a:solidFill>
                   <a:srgbClr val="2C3E50"/>
                 </a:solidFill>
-                <a:latin typeface="Microsoft YaHei" pitchFamily="34" charset="0"/>
-                <a:ea typeface="Microsoft YaHei" pitchFamily="34" charset="-122"/>
-                <a:cs typeface="Microsoft YaHei" pitchFamily="34" charset="-120"/>
+                <a:latin typeface="微软雅黑" panose="020B0503020204020204" pitchFamily="34" charset="-122"/>
+                <a:ea typeface="微软雅黑" panose="020B0503020204020204" pitchFamily="34" charset="-122"/>
+                <a:cs typeface="微软雅黑" panose="020B0503020204020204" pitchFamily="34" charset="-120"/>
               </a:rPr>
               <a:t>• 反应时差异 = 干扰效应量</a:t>
             </a:r>
@@ -3788,13 +3724,12 @@
             <a:avLst/>
           </a:prstGeom>
           <a:noFill/>
-          <a:ln/>
         </p:spPr>
         <p:txBody>
           <a:bodyPr wrap="square" rtlCol="0" anchor="ctr"/>
           <a:lstStyle/>
           <a:p>
-            <a:pPr indent="0" marL="0">
+            <a:pPr marL="0" indent="0">
               <a:buNone/>
             </a:pPr>
             <a:r>
@@ -3802,9 +3737,9 @@
                 <a:solidFill>
                   <a:srgbClr val="2C3E50"/>
                 </a:solidFill>
-                <a:latin typeface="Microsoft YaHei" pitchFamily="34" charset="0"/>
-                <a:ea typeface="Microsoft YaHei" pitchFamily="34" charset="-122"/>
-                <a:cs typeface="Microsoft YaHei" pitchFamily="34" charset="-120"/>
+                <a:latin typeface="微软雅黑" panose="020B0503020204020204" pitchFamily="34" charset="-122"/>
+                <a:ea typeface="微软雅黑" panose="020B0503020204020204" pitchFamily="34" charset="-122"/>
+                <a:cs typeface="微软雅黑" panose="020B0503020204020204" pitchFamily="34" charset="-120"/>
               </a:rPr>
               <a:t>• 认知控制的经典范式</a:t>
             </a:r>
@@ -3831,7 +3766,6 @@
           <a:solidFill>
             <a:srgbClr val="ECF0F1"/>
           </a:solidFill>
-          <a:ln/>
         </p:spPr>
       </p:sp>
       <p:sp>
@@ -3849,13 +3783,12 @@
             <a:avLst/>
           </a:prstGeom>
           <a:noFill/>
-          <a:ln/>
         </p:spPr>
         <p:txBody>
           <a:bodyPr wrap="square" rtlCol="0" anchor="ctr"/>
           <a:lstStyle/>
           <a:p>
-            <a:pPr algn="ctr" indent="0" marL="0">
+            <a:pPr marL="0" indent="0" algn="ctr">
               <a:buNone/>
             </a:pPr>
             <a:r>
@@ -3863,9 +3796,9 @@
                 <a:solidFill>
                   <a:srgbClr val="3498DB"/>
                 </a:solidFill>
-                <a:latin typeface="Microsoft YaHei" pitchFamily="34" charset="0"/>
-                <a:ea typeface="Microsoft YaHei" pitchFamily="34" charset="-122"/>
-                <a:cs typeface="Microsoft YaHei" pitchFamily="34" charset="-120"/>
+                <a:latin typeface="微软雅黑" panose="020B0503020204020204" pitchFamily="34" charset="-122"/>
+                <a:ea typeface="微软雅黑" panose="020B0503020204020204" pitchFamily="34" charset="-122"/>
+                <a:cs typeface="微软雅黑" panose="020B0503020204020204" pitchFamily="34" charset="-120"/>
               </a:rPr>
               <a:t>最近发展区（ZPD）</a:t>
             </a:r>
@@ -3888,13 +3821,12 @@
             <a:avLst/>
           </a:prstGeom>
           <a:noFill/>
-          <a:ln/>
         </p:spPr>
         <p:txBody>
           <a:bodyPr wrap="square" rtlCol="0" anchor="ctr"/>
           <a:lstStyle/>
           <a:p>
-            <a:pPr algn="ctr" indent="0" marL="0">
+            <a:pPr marL="0" indent="0" algn="ctr">
               <a:buNone/>
             </a:pPr>
             <a:r>
@@ -3902,9 +3834,9 @@
                 <a:solidFill>
                   <a:srgbClr val="7F8C8D"/>
                 </a:solidFill>
-                <a:latin typeface="Microsoft YaHei" pitchFamily="34" charset="0"/>
-                <a:ea typeface="Microsoft YaHei" pitchFamily="34" charset="-122"/>
-                <a:cs typeface="Microsoft YaHei" pitchFamily="34" charset="-120"/>
+                <a:latin typeface="微软雅黑" panose="020B0503020204020204" pitchFamily="34" charset="-122"/>
+                <a:ea typeface="微软雅黑" panose="020B0503020204020204" pitchFamily="34" charset="-122"/>
+                <a:cs typeface="微软雅黑" panose="020B0503020204020204" pitchFamily="34" charset="-120"/>
               </a:rPr>
               <a:t>教育心理学</a:t>
             </a:r>
@@ -3950,13 +3882,12 @@
             <a:avLst/>
           </a:prstGeom>
           <a:noFill/>
-          <a:ln/>
         </p:spPr>
         <p:txBody>
           <a:bodyPr wrap="square" rtlCol="0" anchor="ctr"/>
           <a:lstStyle/>
           <a:p>
-            <a:pPr indent="0" marL="0">
+            <a:pPr marL="0" indent="0">
               <a:buNone/>
             </a:pPr>
             <a:r>
@@ -3964,9 +3895,9 @@
                 <a:solidFill>
                   <a:srgbClr val="2C3E50"/>
                 </a:solidFill>
-                <a:latin typeface="Microsoft YaHei" pitchFamily="34" charset="0"/>
-                <a:ea typeface="Microsoft YaHei" pitchFamily="34" charset="-122"/>
-                <a:cs typeface="Microsoft YaHei" pitchFamily="34" charset="-120"/>
+                <a:latin typeface="微软雅黑" panose="020B0503020204020204" pitchFamily="34" charset="-122"/>
+                <a:ea typeface="微软雅黑" panose="020B0503020204020204" pitchFamily="34" charset="-122"/>
+                <a:cs typeface="微软雅黑" panose="020B0503020204020204" pitchFamily="34" charset="-120"/>
               </a:rPr>
               <a:t>• Vygotsky, 1978</a:t>
             </a:r>
@@ -3989,13 +3920,12 @@
             <a:avLst/>
           </a:prstGeom>
           <a:noFill/>
-          <a:ln/>
         </p:spPr>
         <p:txBody>
           <a:bodyPr wrap="square" rtlCol="0" anchor="ctr"/>
           <a:lstStyle/>
           <a:p>
-            <a:pPr indent="0" marL="0">
+            <a:pPr marL="0" indent="0">
               <a:buNone/>
             </a:pPr>
             <a:r>
@@ -4003,9 +3933,9 @@
                 <a:solidFill>
                   <a:srgbClr val="2C3E50"/>
                 </a:solidFill>
-                <a:latin typeface="Microsoft YaHei" pitchFamily="34" charset="0"/>
-                <a:ea typeface="Microsoft YaHei" pitchFamily="34" charset="-122"/>
-                <a:cs typeface="Microsoft YaHei" pitchFamily="34" charset="-120"/>
+                <a:latin typeface="微软雅黑" panose="020B0503020204020204" pitchFamily="34" charset="-122"/>
+                <a:ea typeface="微软雅黑" panose="020B0503020204020204" pitchFamily="34" charset="-122"/>
+                <a:cs typeface="微软雅黑" panose="020B0503020204020204" pitchFamily="34" charset="-120"/>
               </a:rPr>
               <a:t>• 当前能力 vs 潜在发展</a:t>
             </a:r>
@@ -4028,13 +3958,12 @@
             <a:avLst/>
           </a:prstGeom>
           <a:noFill/>
-          <a:ln/>
         </p:spPr>
         <p:txBody>
           <a:bodyPr wrap="square" rtlCol="0" anchor="ctr"/>
           <a:lstStyle/>
           <a:p>
-            <a:pPr indent="0" marL="0">
+            <a:pPr marL="0" indent="0">
               <a:buNone/>
             </a:pPr>
             <a:r>
@@ -4042,9 +3971,9 @@
                 <a:solidFill>
                   <a:srgbClr val="2C3E50"/>
                 </a:solidFill>
-                <a:latin typeface="Microsoft YaHei" pitchFamily="34" charset="0"/>
-                <a:ea typeface="Microsoft YaHei" pitchFamily="34" charset="-122"/>
-                <a:cs typeface="Microsoft YaHei" pitchFamily="34" charset="-120"/>
+                <a:latin typeface="微软雅黑" panose="020B0503020204020204" pitchFamily="34" charset="-122"/>
+                <a:ea typeface="微软雅黑" panose="020B0503020204020204" pitchFamily="34" charset="-122"/>
+                <a:cs typeface="微软雅黑" panose="020B0503020204020204" pitchFamily="34" charset="-120"/>
               </a:rPr>
               <a:t>• 最佳挑战区间：60-85%</a:t>
             </a:r>
@@ -4067,13 +3996,12 @@
             <a:avLst/>
           </a:prstGeom>
           <a:noFill/>
-          <a:ln/>
         </p:spPr>
         <p:txBody>
           <a:bodyPr wrap="square" rtlCol="0" anchor="ctr"/>
           <a:lstStyle/>
           <a:p>
-            <a:pPr indent="0" marL="0">
+            <a:pPr marL="0" indent="0">
               <a:buNone/>
             </a:pPr>
             <a:r>
@@ -4081,9 +4009,9 @@
                 <a:solidFill>
                   <a:srgbClr val="2C3E50"/>
                 </a:solidFill>
-                <a:latin typeface="Microsoft YaHei" pitchFamily="34" charset="0"/>
-                <a:ea typeface="Microsoft YaHei" pitchFamily="34" charset="-122"/>
-                <a:cs typeface="Microsoft YaHei" pitchFamily="34" charset="-120"/>
+                <a:latin typeface="微软雅黑" panose="020B0503020204020204" pitchFamily="34" charset="-122"/>
+                <a:ea typeface="微软雅黑" panose="020B0503020204020204" pitchFamily="34" charset="-122"/>
+                <a:cs typeface="微软雅黑" panose="020B0503020204020204" pitchFamily="34" charset="-120"/>
               </a:rPr>
               <a:t>• 太难→挫败 / 太简单→无聊</a:t>
             </a:r>
@@ -4110,7 +4038,6 @@
           <a:solidFill>
             <a:srgbClr val="ECF0F1"/>
           </a:solidFill>
-          <a:ln/>
         </p:spPr>
       </p:sp>
       <p:sp>
@@ -4128,13 +4055,12 @@
             <a:avLst/>
           </a:prstGeom>
           <a:noFill/>
-          <a:ln/>
         </p:spPr>
         <p:txBody>
           <a:bodyPr wrap="square" rtlCol="0" anchor="ctr"/>
           <a:lstStyle/>
           <a:p>
-            <a:pPr algn="ctr" indent="0" marL="0">
+            <a:pPr marL="0" indent="0" algn="ctr">
               <a:buNone/>
             </a:pPr>
             <a:r>
@@ -4142,9 +4068,9 @@
                 <a:solidFill>
                   <a:srgbClr val="3498DB"/>
                 </a:solidFill>
-                <a:latin typeface="Microsoft YaHei" pitchFamily="34" charset="0"/>
-                <a:ea typeface="Microsoft YaHei" pitchFamily="34" charset="-122"/>
-                <a:cs typeface="Microsoft YaHei" pitchFamily="34" charset="-120"/>
+                <a:latin typeface="微软雅黑" panose="020B0503020204020204" pitchFamily="34" charset="-122"/>
+                <a:ea typeface="微软雅黑" panose="020B0503020204020204" pitchFamily="34" charset="-122"/>
+                <a:cs typeface="微软雅黑" panose="020B0503020204020204" pitchFamily="34" charset="-120"/>
               </a:rPr>
               <a:t>神经机制</a:t>
             </a:r>
@@ -4167,13 +4093,12 @@
             <a:avLst/>
           </a:prstGeom>
           <a:noFill/>
-          <a:ln/>
         </p:spPr>
         <p:txBody>
           <a:bodyPr wrap="square" rtlCol="0" anchor="ctr"/>
           <a:lstStyle/>
           <a:p>
-            <a:pPr algn="ctr" indent="0" marL="0">
+            <a:pPr marL="0" indent="0" algn="ctr">
               <a:buNone/>
             </a:pPr>
             <a:r>
@@ -4181,9 +4106,9 @@
                 <a:solidFill>
                   <a:srgbClr val="7F8C8D"/>
                 </a:solidFill>
-                <a:latin typeface="Microsoft YaHei" pitchFamily="34" charset="0"/>
-                <a:ea typeface="Microsoft YaHei" pitchFamily="34" charset="-122"/>
-                <a:cs typeface="Microsoft YaHei" pitchFamily="34" charset="-120"/>
+                <a:latin typeface="微软雅黑" panose="020B0503020204020204" pitchFamily="34" charset="-122"/>
+                <a:ea typeface="微软雅黑" panose="020B0503020204020204" pitchFamily="34" charset="-122"/>
+                <a:cs typeface="微软雅黑" panose="020B0503020204020204" pitchFamily="34" charset="-120"/>
               </a:rPr>
               <a:t>认知神经科学</a:t>
             </a:r>
@@ -4229,13 +4154,12 @@
             <a:avLst/>
           </a:prstGeom>
           <a:noFill/>
-          <a:ln/>
         </p:spPr>
         <p:txBody>
           <a:bodyPr wrap="square" rtlCol="0" anchor="ctr"/>
           <a:lstStyle/>
           <a:p>
-            <a:pPr indent="0" marL="0">
+            <a:pPr marL="0" indent="0">
               <a:buNone/>
             </a:pPr>
             <a:r>
@@ -4243,9 +4167,9 @@
                 <a:solidFill>
                   <a:srgbClr val="2C3E50"/>
                 </a:solidFill>
-                <a:latin typeface="Microsoft YaHei" pitchFamily="34" charset="0"/>
-                <a:ea typeface="Microsoft YaHei" pitchFamily="34" charset="-122"/>
-                <a:cs typeface="Microsoft YaHei" pitchFamily="34" charset="-120"/>
+                <a:latin typeface="微软雅黑" panose="020B0503020204020204" pitchFamily="34" charset="-122"/>
+                <a:ea typeface="微软雅黑" panose="020B0503020204020204" pitchFamily="34" charset="-122"/>
+                <a:cs typeface="微软雅黑" panose="020B0503020204020204" pitchFamily="34" charset="-120"/>
               </a:rPr>
               <a:t>• ACC：冲突检测</a:t>
             </a:r>
@@ -4268,13 +4192,12 @@
             <a:avLst/>
           </a:prstGeom>
           <a:noFill/>
-          <a:ln/>
         </p:spPr>
         <p:txBody>
           <a:bodyPr wrap="square" rtlCol="0" anchor="ctr"/>
           <a:lstStyle/>
           <a:p>
-            <a:pPr indent="0" marL="0">
+            <a:pPr marL="0" indent="0">
               <a:buNone/>
             </a:pPr>
             <a:r>
@@ -4282,9 +4205,9 @@
                 <a:solidFill>
                   <a:srgbClr val="2C3E50"/>
                 </a:solidFill>
-                <a:latin typeface="Microsoft YaHei" pitchFamily="34" charset="0"/>
-                <a:ea typeface="Microsoft YaHei" pitchFamily="34" charset="-122"/>
-                <a:cs typeface="Microsoft YaHei" pitchFamily="34" charset="-120"/>
+                <a:latin typeface="微软雅黑" panose="020B0503020204020204" pitchFamily="34" charset="-122"/>
+                <a:ea typeface="微软雅黑" panose="020B0503020204020204" pitchFamily="34" charset="-122"/>
+                <a:cs typeface="微软雅黑" panose="020B0503020204020204" pitchFamily="34" charset="-120"/>
               </a:rPr>
               <a:t>• dlPFC：认知控制</a:t>
             </a:r>
@@ -4307,13 +4230,12 @@
             <a:avLst/>
           </a:prstGeom>
           <a:noFill/>
-          <a:ln/>
         </p:spPr>
         <p:txBody>
           <a:bodyPr wrap="square" rtlCol="0" anchor="ctr"/>
           <a:lstStyle/>
           <a:p>
-            <a:pPr indent="0" marL="0">
+            <a:pPr marL="0" indent="0">
               <a:buNone/>
             </a:pPr>
             <a:r>
@@ -4321,9 +4243,9 @@
                 <a:solidFill>
                   <a:srgbClr val="2C3E50"/>
                 </a:solidFill>
-                <a:latin typeface="Microsoft YaHei" pitchFamily="34" charset="0"/>
-                <a:ea typeface="Microsoft YaHei" pitchFamily="34" charset="-122"/>
-                <a:cs typeface="Microsoft YaHei" pitchFamily="34" charset="-120"/>
+                <a:latin typeface="微软雅黑" panose="020B0503020204020204" pitchFamily="34" charset="-122"/>
+                <a:ea typeface="微软雅黑" panose="020B0503020204020204" pitchFamily="34" charset="-122"/>
+                <a:cs typeface="微软雅黑" panose="020B0503020204020204" pitchFamily="34" charset="-120"/>
               </a:rPr>
               <a:t>• ACC→dlPFC 回路</a:t>
             </a:r>
@@ -4346,13 +4268,12 @@
             <a:avLst/>
           </a:prstGeom>
           <a:noFill/>
-          <a:ln/>
         </p:spPr>
         <p:txBody>
           <a:bodyPr wrap="square" rtlCol="0" anchor="ctr"/>
           <a:lstStyle/>
           <a:p>
-            <a:pPr indent="0" marL="0">
+            <a:pPr marL="0" indent="0">
               <a:buNone/>
             </a:pPr>
             <a:r>
@@ -4360,9 +4281,9 @@
                 <a:solidFill>
                   <a:srgbClr val="2C3E50"/>
                 </a:solidFill>
-                <a:latin typeface="Microsoft YaHei" pitchFamily="34" charset="0"/>
-                <a:ea typeface="Microsoft YaHei" pitchFamily="34" charset="-122"/>
-                <a:cs typeface="Microsoft YaHei" pitchFamily="34" charset="-120"/>
+                <a:latin typeface="微软雅黑" panose="020B0503020204020204" pitchFamily="34" charset="-122"/>
+                <a:ea typeface="微软雅黑" panose="020B0503020204020204" pitchFamily="34" charset="-122"/>
+                <a:cs typeface="微软雅黑" panose="020B0503020204020204" pitchFamily="34" charset="-120"/>
               </a:rPr>
               <a:t>• 训练 → 功能可塑性</a:t>
             </a:r>
@@ -4380,7 +4301,7 @@
 
 <file path=ppt/slides/slide4.xml><?xml version="1.0" encoding="utf-8"?>
 <p:sld xmlns:a="http://schemas.openxmlformats.org/drawingml/2006/main" xmlns:r="http://schemas.openxmlformats.org/officeDocument/2006/relationships" xmlns:p="http://schemas.openxmlformats.org/presentationml/2006/main">
-  <p:cSld name="Slide 4">
+  <p:cSld>
     <p:spTree>
       <p:nvGrpSpPr>
         <p:cNvPr id="1" name=""/>
@@ -4410,13 +4331,12 @@
             <a:avLst/>
           </a:prstGeom>
           <a:noFill/>
-          <a:ln/>
         </p:spPr>
         <p:txBody>
           <a:bodyPr wrap="square" rtlCol="0" anchor="ctr"/>
           <a:lstStyle/>
           <a:p>
-            <a:pPr indent="0" marL="0">
+            <a:pPr marL="0" indent="0">
               <a:buNone/>
             </a:pPr>
             <a:r>
@@ -4424,9 +4344,9 @@
                 <a:solidFill>
                   <a:srgbClr val="2C3E50"/>
                 </a:solidFill>
-                <a:latin typeface="Microsoft YaHei" pitchFamily="34" charset="0"/>
-                <a:ea typeface="Microsoft YaHei" pitchFamily="34" charset="-122"/>
-                <a:cs typeface="Microsoft YaHei" pitchFamily="34" charset="-120"/>
+                <a:latin typeface="微软雅黑" panose="020B0503020204020204" pitchFamily="34" charset="-122"/>
+                <a:ea typeface="微软雅黑" panose="020B0503020204020204" pitchFamily="34" charset="-122"/>
+                <a:cs typeface="微软雅黑" panose="020B0503020204020204" pitchFamily="34" charset="-120"/>
               </a:rPr>
               <a:t>系统设计：双维度自适应算法</a:t>
             </a:r>
@@ -4472,13 +4392,12 @@
             <a:avLst/>
           </a:prstGeom>
           <a:noFill/>
-          <a:ln/>
         </p:spPr>
         <p:txBody>
           <a:bodyPr wrap="square" rtlCol="0" anchor="ctr"/>
           <a:lstStyle/>
           <a:p>
-            <a:pPr indent="0" marL="0">
+            <a:pPr marL="0" indent="0">
               <a:buNone/>
             </a:pPr>
             <a:r>
@@ -4486,9 +4405,9 @@
                 <a:solidFill>
                   <a:srgbClr val="3498DB"/>
                 </a:solidFill>
-                <a:latin typeface="Microsoft YaHei" pitchFamily="34" charset="0"/>
-                <a:ea typeface="Microsoft YaHei" pitchFamily="34" charset="-122"/>
-                <a:cs typeface="Microsoft YaHei" pitchFamily="34" charset="-120"/>
+                <a:latin typeface="微软雅黑" panose="020B0503020204020204" pitchFamily="34" charset="-122"/>
+                <a:ea typeface="微软雅黑" panose="020B0503020204020204" pitchFamily="34" charset="-122"/>
+                <a:cs typeface="微软雅黑" panose="020B0503020204020204" pitchFamily="34" charset="-120"/>
               </a:rPr>
               <a:t>算法规则</a:t>
             </a:r>
@@ -4511,13 +4430,12 @@
             <a:avLst/>
           </a:prstGeom>
           <a:noFill/>
-          <a:ln/>
         </p:spPr>
         <p:txBody>
           <a:bodyPr wrap="square" rtlCol="0" anchor="ctr"/>
           <a:lstStyle/>
           <a:p>
-            <a:pPr indent="0" marL="0">
+            <a:pPr marL="0" indent="0">
               <a:buNone/>
             </a:pPr>
             <a:r>
@@ -4525,9 +4443,9 @@
                 <a:solidFill>
                   <a:srgbClr val="2C3E50"/>
                 </a:solidFill>
-                <a:latin typeface="Microsoft YaHei" pitchFamily="34" charset="0"/>
-                <a:ea typeface="Microsoft YaHei" pitchFamily="34" charset="-122"/>
-                <a:cs typeface="Microsoft YaHei" pitchFamily="34" charset="-120"/>
+                <a:latin typeface="微软雅黑" panose="020B0503020204020204" pitchFamily="34" charset="-122"/>
+                <a:ea typeface="微软雅黑" panose="020B0503020204020204" pitchFamily="34" charset="-122"/>
+                <a:cs typeface="微软雅黑" panose="020B0503020204020204" pitchFamily="34" charset="-120"/>
               </a:rPr>
               <a:t>① 每组20试次，含一致/不一致两种条件</a:t>
             </a:r>
@@ -4550,13 +4468,12 @@
             <a:avLst/>
           </a:prstGeom>
           <a:noFill/>
-          <a:ln/>
         </p:spPr>
         <p:txBody>
           <a:bodyPr wrap="square" rtlCol="0" anchor="ctr"/>
           <a:lstStyle/>
           <a:p>
-            <a:pPr indent="0" marL="0">
+            <a:pPr marL="0" indent="0">
               <a:buNone/>
             </a:pPr>
             <a:r>
@@ -4564,9 +4481,9 @@
                 <a:solidFill>
                   <a:srgbClr val="2C3E50"/>
                 </a:solidFill>
-                <a:latin typeface="Microsoft YaHei" pitchFamily="34" charset="0"/>
-                <a:ea typeface="Microsoft YaHei" pitchFamily="34" charset="-122"/>
-                <a:cs typeface="Microsoft YaHei" pitchFamily="34" charset="-120"/>
+                <a:latin typeface="微软雅黑" panose="020B0503020204020204" pitchFamily="34" charset="-122"/>
+                <a:ea typeface="微软雅黑" panose="020B0503020204020204" pitchFamily="34" charset="-122"/>
+                <a:cs typeface="微软雅黑" panose="020B0503020204020204" pitchFamily="34" charset="-120"/>
               </a:rPr>
               <a:t>② 计算本组正确率 &amp; 干扰效应量</a:t>
             </a:r>
@@ -4589,13 +4506,12 @@
             <a:avLst/>
           </a:prstGeom>
           <a:noFill/>
-          <a:ln/>
         </p:spPr>
         <p:txBody>
           <a:bodyPr wrap="square" rtlCol="0" anchor="ctr"/>
           <a:lstStyle/>
           <a:p>
-            <a:pPr indent="0" marL="0">
+            <a:pPr marL="0" indent="0">
               <a:buNone/>
             </a:pPr>
             <a:r>
@@ -4603,9 +4519,9 @@
                 <a:solidFill>
                   <a:srgbClr val="2C3E50"/>
                 </a:solidFill>
-                <a:latin typeface="Microsoft YaHei" pitchFamily="34" charset="0"/>
-                <a:ea typeface="Microsoft YaHei" pitchFamily="34" charset="-122"/>
-                <a:cs typeface="Microsoft YaHei" pitchFamily="34" charset="-120"/>
+                <a:latin typeface="微软雅黑" panose="020B0503020204020204" pitchFamily="34" charset="-122"/>
+                <a:ea typeface="微软雅黑" panose="020B0503020204020204" pitchFamily="34" charset="-122"/>
+                <a:cs typeface="微软雅黑" panose="020B0503020204020204" pitchFamily="34" charset="-120"/>
               </a:rPr>
               <a:t>③ 连续2组正确率 &gt; 85% → 难度上调</a:t>
             </a:r>
@@ -4628,13 +4544,12 @@
             <a:avLst/>
           </a:prstGeom>
           <a:noFill/>
-          <a:ln/>
         </p:spPr>
         <p:txBody>
           <a:bodyPr wrap="square" rtlCol="0" anchor="ctr"/>
           <a:lstStyle/>
           <a:p>
-            <a:pPr indent="0" marL="0">
+            <a:pPr marL="0" indent="0">
               <a:buNone/>
             </a:pPr>
             <a:r>
@@ -4642,9 +4557,9 @@
                 <a:solidFill>
                   <a:srgbClr val="2C3E50"/>
                 </a:solidFill>
-                <a:latin typeface="Microsoft YaHei" pitchFamily="34" charset="0"/>
-                <a:ea typeface="Microsoft YaHei" pitchFamily="34" charset="-122"/>
-                <a:cs typeface="Microsoft YaHei" pitchFamily="34" charset="-120"/>
+                <a:latin typeface="微软雅黑" panose="020B0503020204020204" pitchFamily="34" charset="-122"/>
+                <a:ea typeface="微软雅黑" panose="020B0503020204020204" pitchFamily="34" charset="-122"/>
+                <a:cs typeface="微软雅黑" panose="020B0503020204020204" pitchFamily="34" charset="-120"/>
               </a:rPr>
               <a:t>   干扰比例 +5%（上限80%）</a:t>
             </a:r>
@@ -4667,13 +4582,12 @@
             <a:avLst/>
           </a:prstGeom>
           <a:noFill/>
-          <a:ln/>
         </p:spPr>
         <p:txBody>
           <a:bodyPr wrap="square" rtlCol="0" anchor="ctr"/>
           <a:lstStyle/>
           <a:p>
-            <a:pPr indent="0" marL="0">
+            <a:pPr marL="0" indent="0">
               <a:buNone/>
             </a:pPr>
             <a:r>
@@ -4681,9 +4595,9 @@
                 <a:solidFill>
                   <a:srgbClr val="2C3E50"/>
                 </a:solidFill>
-                <a:latin typeface="Microsoft YaHei" pitchFamily="34" charset="0"/>
-                <a:ea typeface="Microsoft YaHei" pitchFamily="34" charset="-122"/>
-                <a:cs typeface="Microsoft YaHei" pitchFamily="34" charset="-120"/>
+                <a:latin typeface="微软雅黑" panose="020B0503020204020204" pitchFamily="34" charset="-122"/>
+                <a:ea typeface="微软雅黑" panose="020B0503020204020204" pitchFamily="34" charset="-122"/>
+                <a:cs typeface="微软雅黑" panose="020B0503020204020204" pitchFamily="34" charset="-120"/>
               </a:rPr>
               <a:t>   呈现时间 -100ms（下限500ms）</a:t>
             </a:r>
@@ -4706,13 +4620,12 @@
             <a:avLst/>
           </a:prstGeom>
           <a:noFill/>
-          <a:ln/>
         </p:spPr>
         <p:txBody>
           <a:bodyPr wrap="square" rtlCol="0" anchor="ctr"/>
           <a:lstStyle/>
           <a:p>
-            <a:pPr indent="0" marL="0">
+            <a:pPr marL="0" indent="0">
               <a:buNone/>
             </a:pPr>
             <a:r>
@@ -4720,9 +4633,9 @@
                 <a:solidFill>
                   <a:srgbClr val="2C3E50"/>
                 </a:solidFill>
-                <a:latin typeface="Microsoft YaHei" pitchFamily="34" charset="0"/>
-                <a:ea typeface="Microsoft YaHei" pitchFamily="34" charset="-122"/>
-                <a:cs typeface="Microsoft YaHei" pitchFamily="34" charset="-120"/>
+                <a:latin typeface="微软雅黑" panose="020B0503020204020204" pitchFamily="34" charset="-122"/>
+                <a:ea typeface="微软雅黑" panose="020B0503020204020204" pitchFamily="34" charset="-122"/>
+                <a:cs typeface="微软雅黑" panose="020B0503020204020204" pitchFamily="34" charset="-120"/>
               </a:rPr>
               <a:t>④ 连续2组正确率 &lt; 60% → 难度下调</a:t>
             </a:r>
@@ -4745,13 +4658,12 @@
             <a:avLst/>
           </a:prstGeom>
           <a:noFill/>
-          <a:ln/>
         </p:spPr>
         <p:txBody>
           <a:bodyPr wrap="square" rtlCol="0" anchor="ctr"/>
           <a:lstStyle/>
           <a:p>
-            <a:pPr indent="0" marL="0">
+            <a:pPr marL="0" indent="0">
               <a:buNone/>
             </a:pPr>
             <a:r>
@@ -4759,9 +4671,9 @@
                 <a:solidFill>
                   <a:srgbClr val="2C3E50"/>
                 </a:solidFill>
-                <a:latin typeface="Microsoft YaHei" pitchFamily="34" charset="0"/>
-                <a:ea typeface="Microsoft YaHei" pitchFamily="34" charset="-122"/>
-                <a:cs typeface="Microsoft YaHei" pitchFamily="34" charset="-120"/>
+                <a:latin typeface="微软雅黑" panose="020B0503020204020204" pitchFamily="34" charset="-122"/>
+                <a:ea typeface="微软雅黑" panose="020B0503020204020204" pitchFamily="34" charset="-122"/>
+                <a:cs typeface="微软雅黑" panose="020B0503020204020204" pitchFamily="34" charset="-120"/>
               </a:rPr>
               <a:t>⑤ 滞回机制：防止随机波动误调</a:t>
             </a:r>
@@ -4788,7 +4700,6 @@
           <a:solidFill>
             <a:srgbClr val="ECF0F1"/>
           </a:solidFill>
-          <a:ln/>
         </p:spPr>
       </p:sp>
       <p:sp>
@@ -4806,13 +4717,12 @@
             <a:avLst/>
           </a:prstGeom>
           <a:noFill/>
-          <a:ln/>
         </p:spPr>
         <p:txBody>
           <a:bodyPr wrap="square" rtlCol="0" anchor="t"/>
           <a:lstStyle/>
           <a:p>
-            <a:pPr indent="0" marL="0">
+            <a:pPr marL="0" indent="0">
               <a:buNone/>
             </a:pPr>
             <a:r>
@@ -4820,16 +4730,23 @@
                 <a:solidFill>
                   <a:srgbClr val="3498DB"/>
                 </a:solidFill>
-                <a:latin typeface="Microsoft YaHei" pitchFamily="34" charset="0"/>
-                <a:ea typeface="Microsoft YaHei" pitchFamily="34" charset="-122"/>
-                <a:cs typeface="Microsoft YaHei" pitchFamily="34" charset="-120"/>
+                <a:latin typeface="微软雅黑" panose="020B0503020204020204" pitchFamily="34" charset="-122"/>
+                <a:ea typeface="微软雅黑" panose="020B0503020204020204" pitchFamily="34" charset="-122"/>
+                <a:cs typeface="微软雅黑" panose="020B0503020204020204" pitchFamily="34" charset="-120"/>
               </a:rPr>
               <a:t>双维度调节</a:t>
             </a:r>
-            <a:pPr indent="0" marL="0">
-              <a:buNone/>
-            </a:pPr>
-            <a:pPr indent="0" marL="0">
+            <a:endParaRPr lang="en-US" sz="2000" b="1" dirty="0">
+              <a:solidFill>
+                <a:srgbClr val="3498DB"/>
+              </a:solidFill>
+              <a:latin typeface="微软雅黑" panose="020B0503020204020204" pitchFamily="34" charset="-122"/>
+              <a:ea typeface="微软雅黑" panose="020B0503020204020204" pitchFamily="34" charset="-122"/>
+              <a:cs typeface="微软雅黑" panose="020B0503020204020204" pitchFamily="34" charset="-120"/>
+            </a:endParaRPr>
+          </a:p>
+          <a:p>
+            <a:pPr marL="0" indent="0">
               <a:buNone/>
             </a:pPr>
             <a:r>
@@ -4837,13 +4754,23 @@
                 <a:solidFill>
                   <a:srgbClr val="2C3E50"/>
                 </a:solidFill>
-                <a:latin typeface="Microsoft YaHei" pitchFamily="34" charset="0"/>
-                <a:ea typeface="Microsoft YaHei" pitchFamily="34" charset="-122"/>
-                <a:cs typeface="Microsoft YaHei" pitchFamily="34" charset="-120"/>
+                <a:latin typeface="微软雅黑" panose="020B0503020204020204" pitchFamily="34" charset="-122"/>
+                <a:ea typeface="微软雅黑" panose="020B0503020204020204" pitchFamily="34" charset="-122"/>
+                <a:cs typeface="微软雅黑" panose="020B0503020204020204" pitchFamily="34" charset="-120"/>
               </a:rPr>
               <a:t>维度一：干扰强度（质）</a:t>
             </a:r>
-            <a:pPr indent="0" marL="0">
+            <a:endParaRPr lang="en-US" sz="1700" b="1" dirty="0">
+              <a:solidFill>
+                <a:srgbClr val="2C3E50"/>
+              </a:solidFill>
+              <a:latin typeface="微软雅黑" panose="020B0503020204020204" pitchFamily="34" charset="-122"/>
+              <a:ea typeface="微软雅黑" panose="020B0503020204020204" pitchFamily="34" charset="-122"/>
+              <a:cs typeface="微软雅黑" panose="020B0503020204020204" pitchFamily="34" charset="-120"/>
+            </a:endParaRPr>
+          </a:p>
+          <a:p>
+            <a:pPr marL="0" indent="0">
               <a:buNone/>
             </a:pPr>
             <a:r>
@@ -4851,30 +4778,34 @@
                 <a:solidFill>
                   <a:srgbClr val="7F8C8D"/>
                 </a:solidFill>
-                <a:latin typeface="Microsoft YaHei" pitchFamily="34" charset="0"/>
-                <a:ea typeface="Microsoft YaHei" pitchFamily="34" charset="-122"/>
-                <a:cs typeface="Microsoft YaHei" pitchFamily="34" charset="-120"/>
+                <a:latin typeface="微软雅黑" panose="020B0503020204020204" pitchFamily="34" charset="-122"/>
+                <a:ea typeface="微软雅黑" panose="020B0503020204020204" pitchFamily="34" charset="-122"/>
+                <a:cs typeface="微软雅黑" panose="020B0503020204020204" pitchFamily="34" charset="-120"/>
               </a:rPr>
               <a:t>不一致试次比例：40% ↔ 80%</a:t>
             </a:r>
-            <a:pPr indent="0" marL="0">
-              <a:buNone/>
-            </a:pPr>
             <a:r>
               <a:rPr lang="en-US" sz="1500" dirty="0">
                 <a:solidFill>
                   <a:srgbClr val="7F8C8D"/>
                 </a:solidFill>
-                <a:latin typeface="Microsoft YaHei" pitchFamily="34" charset="0"/>
-                <a:ea typeface="Microsoft YaHei" pitchFamily="34" charset="-122"/>
-                <a:cs typeface="Microsoft YaHei" pitchFamily="34" charset="-120"/>
+                <a:latin typeface="微软雅黑" panose="020B0503020204020204" pitchFamily="34" charset="-122"/>
+                <a:ea typeface="微软雅黑" panose="020B0503020204020204" pitchFamily="34" charset="-122"/>
+                <a:cs typeface="微软雅黑" panose="020B0503020204020204" pitchFamily="34" charset="-120"/>
               </a:rPr>
               <a:t>训练冲突处理能力</a:t>
             </a:r>
-            <a:pPr indent="0" marL="0">
-              <a:buNone/>
-            </a:pPr>
-            <a:pPr indent="0" marL="0">
+            <a:endParaRPr lang="en-US" sz="1500" dirty="0">
+              <a:solidFill>
+                <a:srgbClr val="7F8C8D"/>
+              </a:solidFill>
+              <a:latin typeface="微软雅黑" panose="020B0503020204020204" pitchFamily="34" charset="-122"/>
+              <a:ea typeface="微软雅黑" panose="020B0503020204020204" pitchFamily="34" charset="-122"/>
+              <a:cs typeface="微软雅黑" panose="020B0503020204020204" pitchFamily="34" charset="-120"/>
+            </a:endParaRPr>
+          </a:p>
+          <a:p>
+            <a:pPr marL="0" indent="0">
               <a:buNone/>
             </a:pPr>
             <a:r>
@@ -4882,13 +4813,23 @@
                 <a:solidFill>
                   <a:srgbClr val="2C3E50"/>
                 </a:solidFill>
-                <a:latin typeface="Microsoft YaHei" pitchFamily="34" charset="0"/>
-                <a:ea typeface="Microsoft YaHei" pitchFamily="34" charset="-122"/>
-                <a:cs typeface="Microsoft YaHei" pitchFamily="34" charset="-120"/>
+                <a:latin typeface="微软雅黑" panose="020B0503020204020204" pitchFamily="34" charset="-122"/>
+                <a:ea typeface="微软雅黑" panose="020B0503020204020204" pitchFamily="34" charset="-122"/>
+                <a:cs typeface="微软雅黑" panose="020B0503020204020204" pitchFamily="34" charset="-120"/>
               </a:rPr>
               <a:t>维度二：呈现时间（量）</a:t>
             </a:r>
-            <a:pPr indent="0" marL="0">
+            <a:endParaRPr lang="en-US" sz="1700" b="1" dirty="0">
+              <a:solidFill>
+                <a:srgbClr val="2C3E50"/>
+              </a:solidFill>
+              <a:latin typeface="微软雅黑" panose="020B0503020204020204" pitchFamily="34" charset="-122"/>
+              <a:ea typeface="微软雅黑" panose="020B0503020204020204" pitchFamily="34" charset="-122"/>
+              <a:cs typeface="微软雅黑" panose="020B0503020204020204" pitchFamily="34" charset="-120"/>
+            </a:endParaRPr>
+          </a:p>
+          <a:p>
+            <a:pPr marL="0" indent="0">
               <a:buNone/>
             </a:pPr>
             <a:r>
@@ -4896,54 +4837,42 @@
                 <a:solidFill>
                   <a:srgbClr val="7F8C8D"/>
                 </a:solidFill>
-                <a:latin typeface="Microsoft YaHei" pitchFamily="34" charset="0"/>
-                <a:ea typeface="Microsoft YaHei" pitchFamily="34" charset="-122"/>
-                <a:cs typeface="Microsoft YaHei" pitchFamily="34" charset="-120"/>
+                <a:latin typeface="微软雅黑" panose="020B0503020204020204" pitchFamily="34" charset="-122"/>
+                <a:ea typeface="微软雅黑" panose="020B0503020204020204" pitchFamily="34" charset="-122"/>
+                <a:cs typeface="微软雅黑" panose="020B0503020204020204" pitchFamily="34" charset="-120"/>
               </a:rPr>
               <a:t>刺激呈现时间：500ms ↔ 2000ms</a:t>
             </a:r>
-            <a:pPr indent="0" marL="0">
-              <a:buNone/>
-            </a:pPr>
             <a:r>
               <a:rPr lang="en-US" sz="1500" dirty="0">
                 <a:solidFill>
                   <a:srgbClr val="7F8C8D"/>
                 </a:solidFill>
-                <a:latin typeface="Microsoft YaHei" pitchFamily="34" charset="0"/>
-                <a:ea typeface="Microsoft YaHei" pitchFamily="34" charset="-122"/>
-                <a:cs typeface="Microsoft YaHei" pitchFamily="34" charset="-120"/>
+                <a:latin typeface="微软雅黑" panose="020B0503020204020204" pitchFamily="34" charset="-122"/>
+                <a:ea typeface="微软雅黑" panose="020B0503020204020204" pitchFamily="34" charset="-122"/>
+                <a:cs typeface="微软雅黑" panose="020B0503020204020204" pitchFamily="34" charset="-120"/>
               </a:rPr>
               <a:t>训练加工速度</a:t>
             </a:r>
-            <a:pPr indent="0" marL="0">
-              <a:buNone/>
-            </a:pPr>
-            <a:pPr indent="0" marL="0">
-              <a:buNone/>
-            </a:pPr>
             <a:r>
               <a:rPr lang="en-US" sz="1600" b="1" dirty="0">
                 <a:solidFill>
                   <a:srgbClr val="E74C3C"/>
                 </a:solidFill>
-                <a:latin typeface="Microsoft YaHei" pitchFamily="34" charset="0"/>
-                <a:ea typeface="Microsoft YaHei" pitchFamily="34" charset="-122"/>
-                <a:cs typeface="Microsoft YaHei" pitchFamily="34" charset="-120"/>
+                <a:latin typeface="微软雅黑" panose="020B0503020204020204" pitchFamily="34" charset="-122"/>
+                <a:ea typeface="微软雅黑" panose="020B0503020204020204" pitchFamily="34" charset="-122"/>
+                <a:cs typeface="微软雅黑" panose="020B0503020204020204" pitchFamily="34" charset="-120"/>
               </a:rPr>
               <a:t>两个维度同时调节</a:t>
             </a:r>
-            <a:pPr indent="0" marL="0">
-              <a:buNone/>
-            </a:pPr>
             <a:r>
               <a:rPr lang="en-US" sz="1600" dirty="0">
                 <a:solidFill>
                   <a:srgbClr val="2C3E50"/>
                 </a:solidFill>
-                <a:latin typeface="Microsoft YaHei" pitchFamily="34" charset="0"/>
-                <a:ea typeface="Microsoft YaHei" pitchFamily="34" charset="-122"/>
-                <a:cs typeface="Microsoft YaHei" pitchFamily="34" charset="-120"/>
+                <a:latin typeface="微软雅黑" panose="020B0503020204020204" pitchFamily="34" charset="-122"/>
+                <a:ea typeface="微软雅黑" panose="020B0503020204020204" pitchFamily="34" charset="-122"/>
+                <a:cs typeface="微软雅黑" panose="020B0503020204020204" pitchFamily="34" charset="-120"/>
               </a:rPr>
               <a:t>难度随能力增长自动攀爬</a:t>
             </a:r>
@@ -4961,7 +4890,7 @@
 
 <file path=ppt/slides/slide5.xml><?xml version="1.0" encoding="utf-8"?>
 <p:sld xmlns:a="http://schemas.openxmlformats.org/drawingml/2006/main" xmlns:r="http://schemas.openxmlformats.org/officeDocument/2006/relationships" xmlns:p="http://schemas.openxmlformats.org/presentationml/2006/main">
-  <p:cSld name="Slide 5">
+  <p:cSld>
     <p:spTree>
       <p:nvGrpSpPr>
         <p:cNvPr id="1" name=""/>
@@ -4991,13 +4920,12 @@
             <a:avLst/>
           </a:prstGeom>
           <a:noFill/>
-          <a:ln/>
         </p:spPr>
         <p:txBody>
           <a:bodyPr wrap="square" rtlCol="0" anchor="ctr"/>
           <a:lstStyle/>
           <a:p>
-            <a:pPr indent="0" marL="0">
+            <a:pPr marL="0" indent="0">
               <a:buNone/>
             </a:pPr>
             <a:r>
@@ -5005,9 +4933,9 @@
                 <a:solidFill>
                   <a:srgbClr val="2C3E50"/>
                 </a:solidFill>
-                <a:latin typeface="Microsoft YaHei" pitchFamily="34" charset="0"/>
-                <a:ea typeface="Microsoft YaHei" pitchFamily="34" charset="-122"/>
-                <a:cs typeface="Microsoft YaHei" pitchFamily="34" charset="-120"/>
+                <a:latin typeface="微软雅黑" panose="020B0503020204020204" pitchFamily="34" charset="-122"/>
+                <a:ea typeface="微软雅黑" panose="020B0503020204020204" pitchFamily="34" charset="-122"/>
+                <a:cs typeface="微软雅黑" panose="020B0503020204020204" pitchFamily="34" charset="-120"/>
               </a:rPr>
               <a:t>系统功能展示</a:t>
             </a:r>
@@ -5057,7 +4985,6 @@
           <a:solidFill>
             <a:srgbClr val="ECF0F1"/>
           </a:solidFill>
-          <a:ln/>
         </p:spPr>
       </p:sp>
       <p:sp>
@@ -5075,13 +5002,12 @@
             <a:avLst/>
           </a:prstGeom>
           <a:noFill/>
-          <a:ln/>
         </p:spPr>
         <p:txBody>
           <a:bodyPr wrap="square" rtlCol="0" anchor="ctr"/>
           <a:lstStyle/>
           <a:p>
-            <a:pPr algn="ctr" indent="0" marL="0">
+            <a:pPr marL="0" indent="0" algn="ctr">
               <a:buNone/>
             </a:pPr>
             <a:r>
@@ -5111,13 +5037,12 @@
             <a:avLst/>
           </a:prstGeom>
           <a:noFill/>
-          <a:ln/>
         </p:spPr>
         <p:txBody>
           <a:bodyPr wrap="square" rtlCol="0" anchor="ctr"/>
           <a:lstStyle/>
           <a:p>
-            <a:pPr algn="ctr" indent="0" marL="0">
+            <a:pPr marL="0" indent="0" algn="ctr">
               <a:buNone/>
             </a:pPr>
             <a:r>
@@ -5125,9 +5050,9 @@
                 <a:solidFill>
                   <a:srgbClr val="3498DB"/>
                 </a:solidFill>
-                <a:latin typeface="Microsoft YaHei" pitchFamily="34" charset="0"/>
-                <a:ea typeface="Microsoft YaHei" pitchFamily="34" charset="-122"/>
-                <a:cs typeface="Microsoft YaHei" pitchFamily="34" charset="-120"/>
+                <a:latin typeface="微软雅黑" panose="020B0503020204020204" pitchFamily="34" charset="-122"/>
+                <a:ea typeface="微软雅黑" panose="020B0503020204020204" pitchFamily="34" charset="-122"/>
+                <a:cs typeface="微软雅黑" panose="020B0503020204020204" pitchFamily="34" charset="-120"/>
               </a:rPr>
               <a:t>Stroop训练</a:t>
             </a:r>
@@ -5150,13 +5075,12 @@
             <a:avLst/>
           </a:prstGeom>
           <a:noFill/>
-          <a:ln/>
         </p:spPr>
         <p:txBody>
           <a:bodyPr wrap="square" rtlCol="0" anchor="ctr"/>
           <a:lstStyle/>
           <a:p>
-            <a:pPr algn="ctr" indent="0" marL="0">
+            <a:pPr marL="0" indent="0" algn="ctr">
               <a:buNone/>
             </a:pPr>
             <a:r>
@@ -5164,16 +5088,16 @@
                 <a:solidFill>
                   <a:srgbClr val="7F8C8D"/>
                 </a:solidFill>
-                <a:latin typeface="Microsoft YaHei" pitchFamily="34" charset="0"/>
-                <a:ea typeface="Microsoft YaHei" pitchFamily="34" charset="-122"/>
-                <a:cs typeface="Microsoft YaHei" pitchFamily="34" charset="-120"/>
+                <a:latin typeface="微软雅黑" panose="020B0503020204020204" pitchFamily="34" charset="-122"/>
+                <a:ea typeface="微软雅黑" panose="020B0503020204020204" pitchFamily="34" charset="-122"/>
+                <a:cs typeface="微软雅黑" panose="020B0503020204020204" pitchFamily="34" charset="-120"/>
               </a:rPr>
               <a:t>四色中文字符，按键1/2/3/4作答</a:t>
             </a:r>
             <a:endParaRPr lang="en-US" sz="1400" dirty="0"/>
           </a:p>
           <a:p>
-            <a:pPr algn="ctr" indent="0" marL="0">
+            <a:pPr marL="0" indent="0" algn="ctr">
               <a:buNone/>
             </a:pPr>
             <a:r>
@@ -5181,9 +5105,9 @@
                 <a:solidFill>
                   <a:srgbClr val="7F8C8D"/>
                 </a:solidFill>
-                <a:latin typeface="Microsoft YaHei" pitchFamily="34" charset="0"/>
-                <a:ea typeface="Microsoft YaHei" pitchFamily="34" charset="-122"/>
-                <a:cs typeface="Microsoft YaHei" pitchFamily="34" charset="-120"/>
+                <a:latin typeface="微软雅黑" panose="020B0503020204020204" pitchFamily="34" charset="-122"/>
+                <a:ea typeface="微软雅黑" panose="020B0503020204020204" pitchFamily="34" charset="-122"/>
+                <a:cs typeface="微软雅黑" panose="020B0503020204020204" pitchFamily="34" charset="-120"/>
               </a:rPr>
               <a:t>高精度计时</a:t>
             </a:r>
@@ -5210,7 +5134,6 @@
           <a:solidFill>
             <a:srgbClr val="ECF0F1"/>
           </a:solidFill>
-          <a:ln/>
         </p:spPr>
       </p:sp>
       <p:sp>
@@ -5228,13 +5151,12 @@
             <a:avLst/>
           </a:prstGeom>
           <a:noFill/>
-          <a:ln/>
         </p:spPr>
         <p:txBody>
           <a:bodyPr wrap="square" rtlCol="0" anchor="ctr"/>
           <a:lstStyle/>
           <a:p>
-            <a:pPr algn="ctr" indent="0" marL="0">
+            <a:pPr marL="0" indent="0" algn="ctr">
               <a:buNone/>
             </a:pPr>
             <a:r>
@@ -5264,13 +5186,12 @@
             <a:avLst/>
           </a:prstGeom>
           <a:noFill/>
-          <a:ln/>
         </p:spPr>
         <p:txBody>
           <a:bodyPr wrap="square" rtlCol="0" anchor="ctr"/>
           <a:lstStyle/>
           <a:p>
-            <a:pPr algn="ctr" indent="0" marL="0">
+            <a:pPr marL="0" indent="0" algn="ctr">
               <a:buNone/>
             </a:pPr>
             <a:r>
@@ -5278,9 +5199,9 @@
                 <a:solidFill>
                   <a:srgbClr val="3498DB"/>
                 </a:solidFill>
-                <a:latin typeface="Microsoft YaHei" pitchFamily="34" charset="0"/>
-                <a:ea typeface="Microsoft YaHei" pitchFamily="34" charset="-122"/>
-                <a:cs typeface="Microsoft YaHei" pitchFamily="34" charset="-120"/>
+                <a:latin typeface="微软雅黑" panose="020B0503020204020204" pitchFamily="34" charset="-122"/>
+                <a:ea typeface="微软雅黑" panose="020B0503020204020204" pitchFamily="34" charset="-122"/>
+                <a:cs typeface="微软雅黑" panose="020B0503020204020204" pitchFamily="34" charset="-120"/>
               </a:rPr>
               <a:t>自适应调节</a:t>
             </a:r>
@@ -5303,13 +5224,12 @@
             <a:avLst/>
           </a:prstGeom>
           <a:noFill/>
-          <a:ln/>
         </p:spPr>
         <p:txBody>
           <a:bodyPr wrap="square" rtlCol="0" anchor="ctr"/>
           <a:lstStyle/>
           <a:p>
-            <a:pPr algn="ctr" indent="0" marL="0">
+            <a:pPr marL="0" indent="0" algn="ctr">
               <a:buNone/>
             </a:pPr>
             <a:r>
@@ -5317,16 +5237,16 @@
                 <a:solidFill>
                   <a:srgbClr val="7F8C8D"/>
                 </a:solidFill>
-                <a:latin typeface="Microsoft YaHei" pitchFamily="34" charset="0"/>
-                <a:ea typeface="Microsoft YaHei" pitchFamily="34" charset="-122"/>
-                <a:cs typeface="Microsoft YaHei" pitchFamily="34" charset="-120"/>
+                <a:latin typeface="微软雅黑" panose="020B0503020204020204" pitchFamily="34" charset="-122"/>
+                <a:ea typeface="微软雅黑" panose="020B0503020204020204" pitchFamily="34" charset="-122"/>
+                <a:cs typeface="微软雅黑" panose="020B0503020204020204" pitchFamily="34" charset="-120"/>
               </a:rPr>
               <a:t>双维度实时调整</a:t>
             </a:r>
             <a:endParaRPr lang="en-US" sz="1400" dirty="0"/>
           </a:p>
           <a:p>
-            <a:pPr algn="ctr" indent="0" marL="0">
+            <a:pPr marL="0" indent="0" algn="ctr">
               <a:buNone/>
             </a:pPr>
             <a:r>
@@ -5334,9 +5254,9 @@
                 <a:solidFill>
                   <a:srgbClr val="7F8C8D"/>
                 </a:solidFill>
-                <a:latin typeface="Microsoft YaHei" pitchFamily="34" charset="0"/>
-                <a:ea typeface="Microsoft YaHei" pitchFamily="34" charset="-122"/>
-                <a:cs typeface="Microsoft YaHei" pitchFamily="34" charset="-120"/>
+                <a:latin typeface="微软雅黑" panose="020B0503020204020204" pitchFamily="34" charset="-122"/>
+                <a:ea typeface="微软雅黑" panose="020B0503020204020204" pitchFamily="34" charset="-122"/>
+                <a:cs typeface="微软雅黑" panose="020B0503020204020204" pitchFamily="34" charset="-120"/>
               </a:rPr>
               <a:t>滞回机制防抖动</a:t>
             </a:r>
@@ -5363,7 +5283,6 @@
           <a:solidFill>
             <a:srgbClr val="ECF0F1"/>
           </a:solidFill>
-          <a:ln/>
         </p:spPr>
       </p:sp>
       <p:sp>
@@ -5381,13 +5300,12 @@
             <a:avLst/>
           </a:prstGeom>
           <a:noFill/>
-          <a:ln/>
         </p:spPr>
         <p:txBody>
           <a:bodyPr wrap="square" rtlCol="0" anchor="ctr"/>
           <a:lstStyle/>
           <a:p>
-            <a:pPr algn="ctr" indent="0" marL="0">
+            <a:pPr marL="0" indent="0" algn="ctr">
               <a:buNone/>
             </a:pPr>
             <a:r>
@@ -5417,13 +5335,12 @@
             <a:avLst/>
           </a:prstGeom>
           <a:noFill/>
-          <a:ln/>
         </p:spPr>
         <p:txBody>
           <a:bodyPr wrap="square" rtlCol="0" anchor="ctr"/>
           <a:lstStyle/>
           <a:p>
-            <a:pPr algn="ctr" indent="0" marL="0">
+            <a:pPr marL="0" indent="0" algn="ctr">
               <a:buNone/>
             </a:pPr>
             <a:r>
@@ -5431,9 +5348,9 @@
                 <a:solidFill>
                   <a:srgbClr val="3498DB"/>
                 </a:solidFill>
-                <a:latin typeface="Microsoft YaHei" pitchFamily="34" charset="0"/>
-                <a:ea typeface="Microsoft YaHei" pitchFamily="34" charset="-122"/>
-                <a:cs typeface="Microsoft YaHei" pitchFamily="34" charset="-120"/>
+                <a:latin typeface="微软雅黑" panose="020B0503020204020204" pitchFamily="34" charset="-122"/>
+                <a:ea typeface="微软雅黑" panose="020B0503020204020204" pitchFamily="34" charset="-122"/>
+                <a:cs typeface="微软雅黑" panose="020B0503020204020204" pitchFamily="34" charset="-120"/>
               </a:rPr>
               <a:t>数据可视化</a:t>
             </a:r>
@@ -5456,13 +5373,12 @@
             <a:avLst/>
           </a:prstGeom>
           <a:noFill/>
-          <a:ln/>
         </p:spPr>
         <p:txBody>
           <a:bodyPr wrap="square" rtlCol="0" anchor="ctr"/>
           <a:lstStyle/>
           <a:p>
-            <a:pPr algn="ctr" indent="0" marL="0">
+            <a:pPr marL="0" indent="0" algn="ctr">
               <a:buNone/>
             </a:pPr>
             <a:r>
@@ -5470,16 +5386,16 @@
                 <a:solidFill>
                   <a:srgbClr val="7F8C8D"/>
                 </a:solidFill>
-                <a:latin typeface="Microsoft YaHei" pitchFamily="34" charset="0"/>
-                <a:ea typeface="Microsoft YaHei" pitchFamily="34" charset="-122"/>
-                <a:cs typeface="Microsoft YaHei" pitchFamily="34" charset="-120"/>
+                <a:latin typeface="微软雅黑" panose="020B0503020204020204" pitchFamily="34" charset="-122"/>
+                <a:ea typeface="微软雅黑" panose="020B0503020204020204" pitchFamily="34" charset="-122"/>
+                <a:cs typeface="微软雅黑" panose="020B0503020204020204" pitchFamily="34" charset="-120"/>
               </a:rPr>
               <a:t>干扰效应趋势图 + 箱线图</a:t>
             </a:r>
             <a:endParaRPr lang="en-US" sz="1400" dirty="0"/>
           </a:p>
           <a:p>
-            <a:pPr algn="ctr" indent="0" marL="0">
+            <a:pPr marL="0" indent="0" algn="ctr">
               <a:buNone/>
             </a:pPr>
             <a:r>
@@ -5487,9 +5403,9 @@
                 <a:solidFill>
                   <a:srgbClr val="7F8C8D"/>
                 </a:solidFill>
-                <a:latin typeface="Microsoft YaHei" pitchFamily="34" charset="0"/>
-                <a:ea typeface="Microsoft YaHei" pitchFamily="34" charset="-122"/>
-                <a:cs typeface="Microsoft YaHei" pitchFamily="34" charset="-120"/>
+                <a:latin typeface="微软雅黑" panose="020B0503020204020204" pitchFamily="34" charset="-122"/>
+                <a:ea typeface="微软雅黑" panose="020B0503020204020204" pitchFamily="34" charset="-122"/>
+                <a:cs typeface="微软雅黑" panose="020B0503020204020204" pitchFamily="34" charset="-120"/>
               </a:rPr>
               <a:t>难度轨迹图 + 统计面板</a:t>
             </a:r>
@@ -5516,7 +5432,6 @@
           <a:solidFill>
             <a:srgbClr val="ECF0F1"/>
           </a:solidFill>
-          <a:ln/>
         </p:spPr>
       </p:sp>
       <p:sp>
@@ -5534,13 +5449,12 @@
             <a:avLst/>
           </a:prstGeom>
           <a:noFill/>
-          <a:ln/>
         </p:spPr>
         <p:txBody>
           <a:bodyPr wrap="square" rtlCol="0" anchor="ctr"/>
           <a:lstStyle/>
           <a:p>
-            <a:pPr algn="ctr" indent="0" marL="0">
+            <a:pPr marL="0" indent="0" algn="ctr">
               <a:buNone/>
             </a:pPr>
             <a:r>
@@ -5570,13 +5484,12 @@
             <a:avLst/>
           </a:prstGeom>
           <a:noFill/>
-          <a:ln/>
         </p:spPr>
         <p:txBody>
           <a:bodyPr wrap="square" rtlCol="0" anchor="ctr"/>
           <a:lstStyle/>
           <a:p>
-            <a:pPr algn="ctr" indent="0" marL="0">
+            <a:pPr marL="0" indent="0" algn="ctr">
               <a:buNone/>
             </a:pPr>
             <a:r>
@@ -5584,9 +5497,9 @@
                 <a:solidFill>
                   <a:srgbClr val="3498DB"/>
                 </a:solidFill>
-                <a:latin typeface="Microsoft YaHei" pitchFamily="34" charset="0"/>
-                <a:ea typeface="Microsoft YaHei" pitchFamily="34" charset="-122"/>
-                <a:cs typeface="Microsoft YaHei" pitchFamily="34" charset="-120"/>
+                <a:latin typeface="微软雅黑" panose="020B0503020204020204" pitchFamily="34" charset="-122"/>
+                <a:ea typeface="微软雅黑" panose="020B0503020204020204" pitchFamily="34" charset="-122"/>
+                <a:cs typeface="微软雅黑" panose="020B0503020204020204" pitchFamily="34" charset="-120"/>
               </a:rPr>
               <a:t>满意度问卷</a:t>
             </a:r>
@@ -5609,13 +5522,12 @@
             <a:avLst/>
           </a:prstGeom>
           <a:noFill/>
-          <a:ln/>
         </p:spPr>
         <p:txBody>
           <a:bodyPr wrap="square" rtlCol="0" anchor="ctr"/>
           <a:lstStyle/>
           <a:p>
-            <a:pPr algn="ctr" indent="0" marL="0">
+            <a:pPr marL="0" indent="0" algn="ctr">
               <a:buNone/>
             </a:pPr>
             <a:r>
@@ -5623,16 +5535,16 @@
                 <a:solidFill>
                   <a:srgbClr val="7F8C8D"/>
                 </a:solidFill>
-                <a:latin typeface="Microsoft YaHei" pitchFamily="34" charset="0"/>
-                <a:ea typeface="Microsoft YaHei" pitchFamily="34" charset="-122"/>
-                <a:cs typeface="Microsoft YaHei" pitchFamily="34" charset="-120"/>
+                <a:latin typeface="微软雅黑" panose="020B0503020204020204" pitchFamily="34" charset="-122"/>
+                <a:ea typeface="微软雅黑" panose="020B0503020204020204" pitchFamily="34" charset="-122"/>
+                <a:cs typeface="微软雅黑" panose="020B0503020204020204" pitchFamily="34" charset="-120"/>
               </a:rPr>
               <a:t>5题Likert量表</a:t>
             </a:r>
             <a:endParaRPr lang="en-US" sz="1400" dirty="0"/>
           </a:p>
           <a:p>
-            <a:pPr algn="ctr" indent="0" marL="0">
+            <a:pPr marL="0" indent="0" algn="ctr">
               <a:buNone/>
             </a:pPr>
             <a:r>
@@ -5640,9 +5552,9 @@
                 <a:solidFill>
                   <a:srgbClr val="7F8C8D"/>
                 </a:solidFill>
-                <a:latin typeface="Microsoft YaHei" pitchFamily="34" charset="0"/>
-                <a:ea typeface="Microsoft YaHei" pitchFamily="34" charset="-122"/>
-                <a:cs typeface="Microsoft YaHei" pitchFamily="34" charset="-120"/>
+                <a:latin typeface="微软雅黑" panose="020B0503020204020204" pitchFamily="34" charset="-122"/>
+                <a:ea typeface="微软雅黑" panose="020B0503020204020204" pitchFamily="34" charset="-122"/>
+                <a:cs typeface="微软雅黑" panose="020B0503020204020204" pitchFamily="34" charset="-120"/>
               </a:rPr>
               <a:t>训练后自动弹出</a:t>
             </a:r>
@@ -5669,7 +5581,6 @@
           <a:solidFill>
             <a:srgbClr val="ECF0F1"/>
           </a:solidFill>
-          <a:ln/>
         </p:spPr>
       </p:sp>
       <p:sp>
@@ -5687,13 +5598,12 @@
             <a:avLst/>
           </a:prstGeom>
           <a:noFill/>
-          <a:ln/>
         </p:spPr>
         <p:txBody>
           <a:bodyPr wrap="square" rtlCol="0" anchor="ctr"/>
           <a:lstStyle/>
           <a:p>
-            <a:pPr algn="ctr" indent="0" marL="0">
+            <a:pPr marL="0" indent="0" algn="ctr">
               <a:buNone/>
             </a:pPr>
             <a:r>
@@ -5723,13 +5633,12 @@
             <a:avLst/>
           </a:prstGeom>
           <a:noFill/>
-          <a:ln/>
         </p:spPr>
         <p:txBody>
           <a:bodyPr wrap="square" rtlCol="0" anchor="ctr"/>
           <a:lstStyle/>
           <a:p>
-            <a:pPr algn="ctr" indent="0" marL="0">
+            <a:pPr marL="0" indent="0" algn="ctr">
               <a:buNone/>
             </a:pPr>
             <a:r>
@@ -5737,9 +5646,9 @@
                 <a:solidFill>
                   <a:srgbClr val="3498DB"/>
                 </a:solidFill>
-                <a:latin typeface="Microsoft YaHei" pitchFamily="34" charset="0"/>
-                <a:ea typeface="Microsoft YaHei" pitchFamily="34" charset="-122"/>
-                <a:cs typeface="Microsoft YaHei" pitchFamily="34" charset="-120"/>
+                <a:latin typeface="微软雅黑" panose="020B0503020204020204" pitchFamily="34" charset="-122"/>
+                <a:ea typeface="微软雅黑" panose="020B0503020204020204" pitchFamily="34" charset="-122"/>
+                <a:cs typeface="微软雅黑" panose="020B0503020204020204" pitchFamily="34" charset="-120"/>
               </a:rPr>
               <a:t>本地存储</a:t>
             </a:r>
@@ -5762,13 +5671,12 @@
             <a:avLst/>
           </a:prstGeom>
           <a:noFill/>
-          <a:ln/>
         </p:spPr>
         <p:txBody>
           <a:bodyPr wrap="square" rtlCol="0" anchor="ctr"/>
           <a:lstStyle/>
           <a:p>
-            <a:pPr algn="ctr" indent="0" marL="0">
+            <a:pPr marL="0" indent="0" algn="ctr">
               <a:buNone/>
             </a:pPr>
             <a:r>
@@ -5776,16 +5684,16 @@
                 <a:solidFill>
                   <a:srgbClr val="7F8C8D"/>
                 </a:solidFill>
-                <a:latin typeface="Microsoft YaHei" pitchFamily="34" charset="0"/>
-                <a:ea typeface="Microsoft YaHei" pitchFamily="34" charset="-122"/>
-                <a:cs typeface="Microsoft YaHei" pitchFamily="34" charset="-120"/>
+                <a:latin typeface="微软雅黑" panose="020B0503020204020204" pitchFamily="34" charset="-122"/>
+                <a:ea typeface="微软雅黑" panose="020B0503020204020204" pitchFamily="34" charset="-122"/>
+                <a:cs typeface="微软雅黑" panose="020B0503020204020204" pitchFamily="34" charset="-120"/>
               </a:rPr>
               <a:t>localStorage纯前端</a:t>
             </a:r>
             <a:endParaRPr lang="en-US" sz="1400" dirty="0"/>
           </a:p>
           <a:p>
-            <a:pPr algn="ctr" indent="0" marL="0">
+            <a:pPr marL="0" indent="0" algn="ctr">
               <a:buNone/>
             </a:pPr>
             <a:r>
@@ -5793,9 +5701,9 @@
                 <a:solidFill>
                   <a:srgbClr val="7F8C8D"/>
                 </a:solidFill>
-                <a:latin typeface="Microsoft YaHei" pitchFamily="34" charset="0"/>
-                <a:ea typeface="Microsoft YaHei" pitchFamily="34" charset="-122"/>
-                <a:cs typeface="Microsoft YaHei" pitchFamily="34" charset="-120"/>
+                <a:latin typeface="微软雅黑" panose="020B0503020204020204" pitchFamily="34" charset="-122"/>
+                <a:ea typeface="微软雅黑" panose="020B0503020204020204" pitchFamily="34" charset="-122"/>
+                <a:cs typeface="微软雅黑" panose="020B0503020204020204" pitchFamily="34" charset="-120"/>
               </a:rPr>
               <a:t>不上传服务器，保护隐私</a:t>
             </a:r>
@@ -5822,7 +5730,6 @@
           <a:solidFill>
             <a:srgbClr val="ECF0F1"/>
           </a:solidFill>
-          <a:ln/>
         </p:spPr>
       </p:sp>
       <p:sp>
@@ -5840,13 +5747,12 @@
             <a:avLst/>
           </a:prstGeom>
           <a:noFill/>
-          <a:ln/>
         </p:spPr>
         <p:txBody>
           <a:bodyPr wrap="square" rtlCol="0" anchor="ctr"/>
           <a:lstStyle/>
           <a:p>
-            <a:pPr algn="ctr" indent="0" marL="0">
+            <a:pPr marL="0" indent="0" algn="ctr">
               <a:buNone/>
             </a:pPr>
             <a:r>
@@ -5876,13 +5782,12 @@
             <a:avLst/>
           </a:prstGeom>
           <a:noFill/>
-          <a:ln/>
         </p:spPr>
         <p:txBody>
           <a:bodyPr wrap="square" rtlCol="0" anchor="ctr"/>
           <a:lstStyle/>
           <a:p>
-            <a:pPr algn="ctr" indent="0" marL="0">
+            <a:pPr marL="0" indent="0" algn="ctr">
               <a:buNone/>
             </a:pPr>
             <a:r>
@@ -5890,9 +5795,9 @@
                 <a:solidFill>
                   <a:srgbClr val="3498DB"/>
                 </a:solidFill>
-                <a:latin typeface="Microsoft YaHei" pitchFamily="34" charset="0"/>
-                <a:ea typeface="Microsoft YaHei" pitchFamily="34" charset="-122"/>
-                <a:cs typeface="Microsoft YaHei" pitchFamily="34" charset="-120"/>
+                <a:latin typeface="微软雅黑" panose="020B0503020204020204" pitchFamily="34" charset="-122"/>
+                <a:ea typeface="微软雅黑" panose="020B0503020204020204" pitchFamily="34" charset="-122"/>
+                <a:cs typeface="微软雅黑" panose="020B0503020204020204" pitchFamily="34" charset="-120"/>
               </a:rPr>
               <a:t>数据导出</a:t>
             </a:r>
@@ -5915,13 +5820,12 @@
             <a:avLst/>
           </a:prstGeom>
           <a:noFill/>
-          <a:ln/>
         </p:spPr>
         <p:txBody>
           <a:bodyPr wrap="square" rtlCol="0" anchor="ctr"/>
           <a:lstStyle/>
           <a:p>
-            <a:pPr algn="ctr" indent="0" marL="0">
+            <a:pPr marL="0" indent="0" algn="ctr">
               <a:buNone/>
             </a:pPr>
             <a:r>
@@ -5929,16 +5833,16 @@
                 <a:solidFill>
                   <a:srgbClr val="7F8C8D"/>
                 </a:solidFill>
-                <a:latin typeface="Microsoft YaHei" pitchFamily="34" charset="0"/>
-                <a:ea typeface="Microsoft YaHei" pitchFamily="34" charset="-122"/>
-                <a:cs typeface="Microsoft YaHei" pitchFamily="34" charset="-120"/>
+                <a:latin typeface="微软雅黑" panose="020B0503020204020204" pitchFamily="34" charset="-122"/>
+                <a:ea typeface="微软雅黑" panose="020B0503020204020204" pitchFamily="34" charset="-122"/>
+                <a:cs typeface="微软雅黑" panose="020B0503020204020204" pitchFamily="34" charset="-120"/>
               </a:rPr>
               <a:t>CSV格式含mode列</a:t>
             </a:r>
             <a:endParaRPr lang="en-US" sz="1400" dirty="0"/>
           </a:p>
           <a:p>
-            <a:pPr algn="ctr" indent="0" marL="0">
+            <a:pPr marL="0" indent="0" algn="ctr">
               <a:buNone/>
             </a:pPr>
             <a:r>
@@ -5946,9 +5850,9 @@
                 <a:solidFill>
                   <a:srgbClr val="7F8C8D"/>
                 </a:solidFill>
-                <a:latin typeface="Microsoft YaHei" pitchFamily="34" charset="0"/>
-                <a:ea typeface="Microsoft YaHei" pitchFamily="34" charset="-122"/>
-                <a:cs typeface="Microsoft YaHei" pitchFamily="34" charset="-120"/>
+                <a:latin typeface="微软雅黑" panose="020B0503020204020204" pitchFamily="34" charset="-122"/>
+                <a:ea typeface="微软雅黑" panose="020B0503020204020204" pitchFamily="34" charset="-122"/>
+                <a:cs typeface="微软雅黑" panose="020B0503020204020204" pitchFamily="34" charset="-120"/>
               </a:rPr>
               <a:t>区分实验组/对照组</a:t>
             </a:r>
@@ -5966,7 +5870,7 @@
 
 <file path=ppt/slides/slide6.xml><?xml version="1.0" encoding="utf-8"?>
 <p:sld xmlns:a="http://schemas.openxmlformats.org/drawingml/2006/main" xmlns:r="http://schemas.openxmlformats.org/officeDocument/2006/relationships" xmlns:p="http://schemas.openxmlformats.org/presentationml/2006/main">
-  <p:cSld name="Slide 6">
+  <p:cSld>
     <p:spTree>
       <p:nvGrpSpPr>
         <p:cNvPr id="1" name=""/>
@@ -5996,13 +5900,12 @@
             <a:avLst/>
           </a:prstGeom>
           <a:noFill/>
-          <a:ln/>
         </p:spPr>
         <p:txBody>
           <a:bodyPr wrap="square" rtlCol="0" anchor="ctr"/>
           <a:lstStyle/>
           <a:p>
-            <a:pPr indent="0" marL="0">
+            <a:pPr marL="0" indent="0">
               <a:buNone/>
             </a:pPr>
             <a:r>
@@ -6010,9 +5913,9 @@
                 <a:solidFill>
                   <a:srgbClr val="2C3E50"/>
                 </a:solidFill>
-                <a:latin typeface="Microsoft YaHei" pitchFamily="34" charset="0"/>
-                <a:ea typeface="Microsoft YaHei" pitchFamily="34" charset="-122"/>
-                <a:cs typeface="Microsoft YaHei" pitchFamily="34" charset="-120"/>
+                <a:latin typeface="微软雅黑" panose="020B0503020204020204" pitchFamily="34" charset="-122"/>
+                <a:ea typeface="微软雅黑" panose="020B0503020204020204" pitchFamily="34" charset="-122"/>
+                <a:cs typeface="微软雅黑" panose="020B0503020204020204" pitchFamily="34" charset="-120"/>
               </a:rPr>
               <a:t>实验设计</a:t>
             </a:r>
@@ -6062,7 +5965,6 @@
           <a:solidFill>
             <a:srgbClr val="E8F5E9"/>
           </a:solidFill>
-          <a:ln/>
         </p:spPr>
       </p:sp>
       <p:sp>
@@ -6080,13 +5982,12 @@
             <a:avLst/>
           </a:prstGeom>
           <a:noFill/>
-          <a:ln/>
         </p:spPr>
         <p:txBody>
           <a:bodyPr wrap="square" rtlCol="0" anchor="t"/>
           <a:lstStyle/>
           <a:p>
-            <a:pPr indent="0" marL="0">
+            <a:pPr marL="0" indent="0">
               <a:buNone/>
             </a:pPr>
             <a:r>
@@ -6094,16 +5995,23 @@
                 <a:solidFill>
                   <a:srgbClr val="27AE60"/>
                 </a:solidFill>
-                <a:latin typeface="Microsoft YaHei" pitchFamily="34" charset="0"/>
-                <a:ea typeface="Microsoft YaHei" pitchFamily="34" charset="-122"/>
-                <a:cs typeface="Microsoft YaHei" pitchFamily="34" charset="-120"/>
+                <a:latin typeface="微软雅黑" panose="020B0503020204020204" pitchFamily="34" charset="-122"/>
+                <a:ea typeface="微软雅黑" panose="020B0503020204020204" pitchFamily="34" charset="-122"/>
+                <a:cs typeface="微软雅黑" panose="020B0503020204020204" pitchFamily="34" charset="-120"/>
               </a:rPr>
               <a:t>🧠 实验组（自适应）</a:t>
             </a:r>
-            <a:pPr indent="0" marL="0">
-              <a:buNone/>
-            </a:pPr>
-            <a:pPr indent="0" marL="0">
+            <a:endParaRPr lang="en-US" sz="2200" b="1" dirty="0">
+              <a:solidFill>
+                <a:srgbClr val="27AE60"/>
+              </a:solidFill>
+              <a:latin typeface="微软雅黑" panose="020B0503020204020204" pitchFamily="34" charset="-122"/>
+              <a:ea typeface="微软雅黑" panose="020B0503020204020204" pitchFamily="34" charset="-122"/>
+              <a:cs typeface="微软雅黑" panose="020B0503020204020204" pitchFamily="34" charset="-120"/>
+            </a:endParaRPr>
+          </a:p>
+          <a:p>
+            <a:pPr marL="0" indent="0">
               <a:buNone/>
             </a:pPr>
             <a:r>
@@ -6111,13 +6019,23 @@
                 <a:solidFill>
                   <a:srgbClr val="2C3E50"/>
                 </a:solidFill>
-                <a:latin typeface="Microsoft YaHei" pitchFamily="34" charset="0"/>
-                <a:ea typeface="Microsoft YaHei" pitchFamily="34" charset="-122"/>
-                <a:cs typeface="Microsoft YaHei" pitchFamily="34" charset="-120"/>
+                <a:latin typeface="微软雅黑" panose="020B0503020204020204" pitchFamily="34" charset="-122"/>
+                <a:ea typeface="微软雅黑" panose="020B0503020204020204" pitchFamily="34" charset="-122"/>
+                <a:cs typeface="微软雅黑" panose="020B0503020204020204" pitchFamily="34" charset="-120"/>
               </a:rPr>
               <a:t>• n ≈ 15</a:t>
             </a:r>
-            <a:pPr indent="0" marL="0">
+            <a:endParaRPr lang="en-US" sz="1700" dirty="0">
+              <a:solidFill>
+                <a:srgbClr val="2C3E50"/>
+              </a:solidFill>
+              <a:latin typeface="微软雅黑" panose="020B0503020204020204" pitchFamily="34" charset="-122"/>
+              <a:ea typeface="微软雅黑" panose="020B0503020204020204" pitchFamily="34" charset="-122"/>
+              <a:cs typeface="微软雅黑" panose="020B0503020204020204" pitchFamily="34" charset="-120"/>
+            </a:endParaRPr>
+          </a:p>
+          <a:p>
+            <a:pPr marL="0" indent="0">
               <a:buNone/>
             </a:pPr>
             <a:r>
@@ -6125,13 +6043,23 @@
                 <a:solidFill>
                   <a:srgbClr val="2C3E50"/>
                 </a:solidFill>
-                <a:latin typeface="Microsoft YaHei" pitchFamily="34" charset="0"/>
-                <a:ea typeface="Microsoft YaHei" pitchFamily="34" charset="-122"/>
-                <a:cs typeface="Microsoft YaHei" pitchFamily="34" charset="-120"/>
+                <a:latin typeface="微软雅黑" panose="020B0503020204020204" pitchFamily="34" charset="-122"/>
+                <a:ea typeface="微软雅黑" panose="020B0503020204020204" pitchFamily="34" charset="-122"/>
+                <a:cs typeface="微软雅黑" panose="020B0503020204020204" pitchFamily="34" charset="-120"/>
               </a:rPr>
               <a:t>• 自适应难度训练</a:t>
             </a:r>
-            <a:pPr indent="0" marL="0">
+            <a:endParaRPr lang="en-US" sz="1700" dirty="0">
+              <a:solidFill>
+                <a:srgbClr val="2C3E50"/>
+              </a:solidFill>
+              <a:latin typeface="微软雅黑" panose="020B0503020204020204" pitchFamily="34" charset="-122"/>
+              <a:ea typeface="微软雅黑" panose="020B0503020204020204" pitchFamily="34" charset="-122"/>
+              <a:cs typeface="微软雅黑" panose="020B0503020204020204" pitchFamily="34" charset="-120"/>
+            </a:endParaRPr>
+          </a:p>
+          <a:p>
+            <a:pPr marL="0" indent="0">
               <a:buNone/>
             </a:pPr>
             <a:r>
@@ -6139,13 +6067,23 @@
                 <a:solidFill>
                   <a:srgbClr val="2C3E50"/>
                 </a:solidFill>
-                <a:latin typeface="Microsoft YaHei" pitchFamily="34" charset="0"/>
-                <a:ea typeface="Microsoft YaHei" pitchFamily="34" charset="-122"/>
-                <a:cs typeface="Microsoft YaHei" pitchFamily="34" charset="-120"/>
+                <a:latin typeface="微软雅黑" panose="020B0503020204020204" pitchFamily="34" charset="-122"/>
+                <a:ea typeface="微软雅黑" panose="020B0503020204020204" pitchFamily="34" charset="-122"/>
+                <a:cs typeface="微软雅黑" panose="020B0503020204020204" pitchFamily="34" charset="-120"/>
               </a:rPr>
               <a:t>• 干扰比例 50%→80% 动态爬升</a:t>
             </a:r>
-            <a:pPr indent="0" marL="0">
+            <a:endParaRPr lang="en-US" sz="1700" dirty="0">
+              <a:solidFill>
+                <a:srgbClr val="2C3E50"/>
+              </a:solidFill>
+              <a:latin typeface="微软雅黑" panose="020B0503020204020204" pitchFamily="34" charset="-122"/>
+              <a:ea typeface="微软雅黑" panose="020B0503020204020204" pitchFamily="34" charset="-122"/>
+              <a:cs typeface="微软雅黑" panose="020B0503020204020204" pitchFamily="34" charset="-120"/>
+            </a:endParaRPr>
+          </a:p>
+          <a:p>
+            <a:pPr marL="0" indent="0">
               <a:buNone/>
             </a:pPr>
             <a:r>
@@ -6153,13 +6091,23 @@
                 <a:solidFill>
                   <a:srgbClr val="2C3E50"/>
                 </a:solidFill>
-                <a:latin typeface="Microsoft YaHei" pitchFamily="34" charset="0"/>
-                <a:ea typeface="Microsoft YaHei" pitchFamily="34" charset="-122"/>
-                <a:cs typeface="Microsoft YaHei" pitchFamily="34" charset="-120"/>
+                <a:latin typeface="微软雅黑" panose="020B0503020204020204" pitchFamily="34" charset="-122"/>
+                <a:ea typeface="微软雅黑" panose="020B0503020204020204" pitchFamily="34" charset="-122"/>
+                <a:cs typeface="微软雅黑" panose="020B0503020204020204" pitchFamily="34" charset="-120"/>
               </a:rPr>
               <a:t>• 呈现时间 1500ms→500ms</a:t>
             </a:r>
-            <a:pPr indent="0" marL="0">
+            <a:endParaRPr lang="en-US" sz="1700" dirty="0">
+              <a:solidFill>
+                <a:srgbClr val="2C3E50"/>
+              </a:solidFill>
+              <a:latin typeface="微软雅黑" panose="020B0503020204020204" pitchFamily="34" charset="-122"/>
+              <a:ea typeface="微软雅黑" panose="020B0503020204020204" pitchFamily="34" charset="-122"/>
+              <a:cs typeface="微软雅黑" panose="020B0503020204020204" pitchFamily="34" charset="-120"/>
+            </a:endParaRPr>
+          </a:p>
+          <a:p>
+            <a:pPr marL="0" indent="0">
               <a:buNone/>
             </a:pPr>
             <a:r>
@@ -6167,9 +6115,9 @@
                 <a:solidFill>
                   <a:srgbClr val="2C3E50"/>
                 </a:solidFill>
-                <a:latin typeface="Microsoft YaHei" pitchFamily="34" charset="0"/>
-                <a:ea typeface="Microsoft YaHei" pitchFamily="34" charset="-122"/>
-                <a:cs typeface="Microsoft YaHei" pitchFamily="34" charset="-120"/>
+                <a:latin typeface="微软雅黑" panose="020B0503020204020204" pitchFamily="34" charset="-122"/>
+                <a:ea typeface="微软雅黑" panose="020B0503020204020204" pitchFamily="34" charset="-122"/>
+                <a:cs typeface="微软雅黑" panose="020B0503020204020204" pitchFamily="34" charset="-120"/>
               </a:rPr>
               <a:t>• 每天1次 × 5组 × 7天</a:t>
             </a:r>
@@ -6196,7 +6144,6 @@
           <a:solidFill>
             <a:srgbClr val="FDECEA"/>
           </a:solidFill>
-          <a:ln/>
         </p:spPr>
       </p:sp>
       <p:sp>
@@ -6214,13 +6161,12 @@
             <a:avLst/>
           </a:prstGeom>
           <a:noFill/>
-          <a:ln/>
         </p:spPr>
         <p:txBody>
           <a:bodyPr wrap="square" rtlCol="0" anchor="t"/>
           <a:lstStyle/>
           <a:p>
-            <a:pPr indent="0" marL="0">
+            <a:pPr marL="0" indent="0">
               <a:buNone/>
             </a:pPr>
             <a:r>
@@ -6228,16 +6174,23 @@
                 <a:solidFill>
                   <a:srgbClr val="E74C3C"/>
                 </a:solidFill>
-                <a:latin typeface="Microsoft YaHei" pitchFamily="34" charset="0"/>
-                <a:ea typeface="Microsoft YaHei" pitchFamily="34" charset="-122"/>
-                <a:cs typeface="Microsoft YaHei" pitchFamily="34" charset="-120"/>
+                <a:latin typeface="微软雅黑" panose="020B0503020204020204" pitchFamily="34" charset="-122"/>
+                <a:ea typeface="微软雅黑" panose="020B0503020204020204" pitchFamily="34" charset="-122"/>
+                <a:cs typeface="微软雅黑" panose="020B0503020204020204" pitchFamily="34" charset="-120"/>
               </a:rPr>
               <a:t>📌 对照组（固定难度）</a:t>
             </a:r>
-            <a:pPr indent="0" marL="0">
-              <a:buNone/>
-            </a:pPr>
-            <a:pPr indent="0" marL="0">
+            <a:endParaRPr lang="en-US" sz="2200" b="1" dirty="0">
+              <a:solidFill>
+                <a:srgbClr val="E74C3C"/>
+              </a:solidFill>
+              <a:latin typeface="微软雅黑" panose="020B0503020204020204" pitchFamily="34" charset="-122"/>
+              <a:ea typeface="微软雅黑" panose="020B0503020204020204" pitchFamily="34" charset="-122"/>
+              <a:cs typeface="微软雅黑" panose="020B0503020204020204" pitchFamily="34" charset="-120"/>
+            </a:endParaRPr>
+          </a:p>
+          <a:p>
+            <a:pPr marL="0" indent="0">
               <a:buNone/>
             </a:pPr>
             <a:r>
@@ -6245,13 +6198,23 @@
                 <a:solidFill>
                   <a:srgbClr val="2C3E50"/>
                 </a:solidFill>
-                <a:latin typeface="Microsoft YaHei" pitchFamily="34" charset="0"/>
-                <a:ea typeface="Microsoft YaHei" pitchFamily="34" charset="-122"/>
-                <a:cs typeface="Microsoft YaHei" pitchFamily="34" charset="-120"/>
+                <a:latin typeface="微软雅黑" panose="020B0503020204020204" pitchFamily="34" charset="-122"/>
+                <a:ea typeface="微软雅黑" panose="020B0503020204020204" pitchFamily="34" charset="-122"/>
+                <a:cs typeface="微软雅黑" panose="020B0503020204020204" pitchFamily="34" charset="-120"/>
               </a:rPr>
               <a:t>• n ≈ 15</a:t>
             </a:r>
-            <a:pPr indent="0" marL="0">
+            <a:endParaRPr lang="en-US" sz="1700" dirty="0">
+              <a:solidFill>
+                <a:srgbClr val="2C3E50"/>
+              </a:solidFill>
+              <a:latin typeface="微软雅黑" panose="020B0503020204020204" pitchFamily="34" charset="-122"/>
+              <a:ea typeface="微软雅黑" panose="020B0503020204020204" pitchFamily="34" charset="-122"/>
+              <a:cs typeface="微软雅黑" panose="020B0503020204020204" pitchFamily="34" charset="-120"/>
+            </a:endParaRPr>
+          </a:p>
+          <a:p>
+            <a:pPr marL="0" indent="0">
               <a:buNone/>
             </a:pPr>
             <a:r>
@@ -6259,13 +6222,23 @@
                 <a:solidFill>
                   <a:srgbClr val="2C3E50"/>
                 </a:solidFill>
-                <a:latin typeface="Microsoft YaHei" pitchFamily="34" charset="0"/>
-                <a:ea typeface="Microsoft YaHei" pitchFamily="34" charset="-122"/>
-                <a:cs typeface="Microsoft YaHei" pitchFamily="34" charset="-120"/>
+                <a:latin typeface="微软雅黑" panose="020B0503020204020204" pitchFamily="34" charset="-122"/>
+                <a:ea typeface="微软雅黑" panose="020B0503020204020204" pitchFamily="34" charset="-122"/>
+                <a:cs typeface="微软雅黑" panose="020B0503020204020204" pitchFamily="34" charset="-120"/>
               </a:rPr>
               <a:t>• 固定中等难度训练</a:t>
             </a:r>
-            <a:pPr indent="0" marL="0">
+            <a:endParaRPr lang="en-US" sz="1700" dirty="0">
+              <a:solidFill>
+                <a:srgbClr val="2C3E50"/>
+              </a:solidFill>
+              <a:latin typeface="微软雅黑" panose="020B0503020204020204" pitchFamily="34" charset="-122"/>
+              <a:ea typeface="微软雅黑" panose="020B0503020204020204" pitchFamily="34" charset="-122"/>
+              <a:cs typeface="微软雅黑" panose="020B0503020204020204" pitchFamily="34" charset="-120"/>
+            </a:endParaRPr>
+          </a:p>
+          <a:p>
+            <a:pPr marL="0" indent="0">
               <a:buNone/>
             </a:pPr>
             <a:r>
@@ -6273,13 +6246,23 @@
                 <a:solidFill>
                   <a:srgbClr val="2C3E50"/>
                 </a:solidFill>
-                <a:latin typeface="Microsoft YaHei" pitchFamily="34" charset="0"/>
-                <a:ea typeface="Microsoft YaHei" pitchFamily="34" charset="-122"/>
-                <a:cs typeface="Microsoft YaHei" pitchFamily="34" charset="-120"/>
+                <a:latin typeface="微软雅黑" panose="020B0503020204020204" pitchFamily="34" charset="-122"/>
+                <a:ea typeface="微软雅黑" panose="020B0503020204020204" pitchFamily="34" charset="-122"/>
+                <a:cs typeface="微软雅黑" panose="020B0503020204020204" pitchFamily="34" charset="-120"/>
               </a:rPr>
               <a:t>• 干扰比例始终 50%</a:t>
             </a:r>
-            <a:pPr indent="0" marL="0">
+            <a:endParaRPr lang="en-US" sz="1700" dirty="0">
+              <a:solidFill>
+                <a:srgbClr val="2C3E50"/>
+              </a:solidFill>
+              <a:latin typeface="微软雅黑" panose="020B0503020204020204" pitchFamily="34" charset="-122"/>
+              <a:ea typeface="微软雅黑" panose="020B0503020204020204" pitchFamily="34" charset="-122"/>
+              <a:cs typeface="微软雅黑" panose="020B0503020204020204" pitchFamily="34" charset="-120"/>
+            </a:endParaRPr>
+          </a:p>
+          <a:p>
+            <a:pPr marL="0" indent="0">
               <a:buNone/>
             </a:pPr>
             <a:r>
@@ -6287,13 +6270,23 @@
                 <a:solidFill>
                   <a:srgbClr val="2C3E50"/>
                 </a:solidFill>
-                <a:latin typeface="Microsoft YaHei" pitchFamily="34" charset="0"/>
-                <a:ea typeface="Microsoft YaHei" pitchFamily="34" charset="-122"/>
-                <a:cs typeface="Microsoft YaHei" pitchFamily="34" charset="-120"/>
+                <a:latin typeface="微软雅黑" panose="020B0503020204020204" pitchFamily="34" charset="-122"/>
+                <a:ea typeface="微软雅黑" panose="020B0503020204020204" pitchFamily="34" charset="-122"/>
+                <a:cs typeface="微软雅黑" panose="020B0503020204020204" pitchFamily="34" charset="-120"/>
               </a:rPr>
               <a:t>• 呈现时间始终 1500ms</a:t>
             </a:r>
-            <a:pPr indent="0" marL="0">
+            <a:endParaRPr lang="en-US" sz="1700" dirty="0">
+              <a:solidFill>
+                <a:srgbClr val="2C3E50"/>
+              </a:solidFill>
+              <a:latin typeface="微软雅黑" panose="020B0503020204020204" pitchFamily="34" charset="-122"/>
+              <a:ea typeface="微软雅黑" panose="020B0503020204020204" pitchFamily="34" charset="-122"/>
+              <a:cs typeface="微软雅黑" panose="020B0503020204020204" pitchFamily="34" charset="-120"/>
+            </a:endParaRPr>
+          </a:p>
+          <a:p>
+            <a:pPr marL="0" indent="0">
               <a:buNone/>
             </a:pPr>
             <a:r>
@@ -6301,9 +6294,9 @@
                 <a:solidFill>
                   <a:srgbClr val="2C3E50"/>
                 </a:solidFill>
-                <a:latin typeface="Microsoft YaHei" pitchFamily="34" charset="0"/>
-                <a:ea typeface="Microsoft YaHei" pitchFamily="34" charset="-122"/>
-                <a:cs typeface="Microsoft YaHei" pitchFamily="34" charset="-120"/>
+                <a:latin typeface="微软雅黑" panose="020B0503020204020204" pitchFamily="34" charset="-122"/>
+                <a:ea typeface="微软雅黑" panose="020B0503020204020204" pitchFamily="34" charset="-122"/>
+                <a:cs typeface="微软雅黑" panose="020B0503020204020204" pitchFamily="34" charset="-120"/>
               </a:rPr>
               <a:t>• 每天1次 × 5组 × 7天</a:t>
             </a:r>
@@ -6326,13 +6319,12 @@
             <a:avLst/>
           </a:prstGeom>
           <a:noFill/>
-          <a:ln/>
         </p:spPr>
         <p:txBody>
           <a:bodyPr wrap="square" rtlCol="0" anchor="ctr"/>
           <a:lstStyle/>
           <a:p>
-            <a:pPr indent="0" marL="0">
+            <a:pPr marL="0" indent="0">
               <a:buNone/>
             </a:pPr>
             <a:r>
@@ -6340,9 +6332,9 @@
                 <a:solidFill>
                   <a:srgbClr val="3498DB"/>
                 </a:solidFill>
-                <a:latin typeface="Microsoft YaHei" pitchFamily="34" charset="0"/>
-                <a:ea typeface="Microsoft YaHei" pitchFamily="34" charset="-122"/>
-                <a:cs typeface="Microsoft YaHei" pitchFamily="34" charset="-120"/>
+                <a:latin typeface="微软雅黑" panose="020B0503020204020204" pitchFamily="34" charset="-122"/>
+                <a:ea typeface="微软雅黑" panose="020B0503020204020204" pitchFamily="34" charset="-122"/>
+                <a:cs typeface="微软雅黑" panose="020B0503020204020204" pitchFamily="34" charset="-120"/>
               </a:rPr>
               <a:t>评估指标</a:t>
             </a:r>
@@ -6365,13 +6357,12 @@
             <a:avLst/>
           </a:prstGeom>
           <a:noFill/>
-          <a:ln/>
         </p:spPr>
         <p:txBody>
           <a:bodyPr wrap="square" rtlCol="0" anchor="ctr"/>
           <a:lstStyle/>
           <a:p>
-            <a:pPr indent="0" marL="0">
+            <a:pPr marL="0" indent="0">
               <a:buNone/>
             </a:pPr>
             <a:r>
@@ -6379,9 +6370,9 @@
                 <a:solidFill>
                   <a:srgbClr val="2C3E50"/>
                 </a:solidFill>
-                <a:latin typeface="Microsoft YaHei" pitchFamily="34" charset="0"/>
-                <a:ea typeface="Microsoft YaHei" pitchFamily="34" charset="-122"/>
-                <a:cs typeface="Microsoft YaHei" pitchFamily="34" charset="-120"/>
+                <a:latin typeface="微软雅黑" panose="020B0503020204020204" pitchFamily="34" charset="-122"/>
+                <a:ea typeface="微软雅黑" panose="020B0503020204020204" pitchFamily="34" charset="-122"/>
+                <a:cs typeface="微软雅黑" panose="020B0503020204020204" pitchFamily="34" charset="-120"/>
               </a:rPr>
               <a:t>① 干扰效应降低率    ② 反应时变化趋势    ③ 训练坚持率    ④ 主观满意度</a:t>
             </a:r>
@@ -6399,7 +6390,7 @@
 
 <file path=ppt/slides/slide7.xml><?xml version="1.0" encoding="utf-8"?>
 <p:sld xmlns:a="http://schemas.openxmlformats.org/drawingml/2006/main" xmlns:r="http://schemas.openxmlformats.org/officeDocument/2006/relationships" xmlns:p="http://schemas.openxmlformats.org/presentationml/2006/main">
-  <p:cSld name="Slide 7">
+  <p:cSld>
     <p:spTree>
       <p:nvGrpSpPr>
         <p:cNvPr id="1" name=""/>
@@ -6429,13 +6420,12 @@
             <a:avLst/>
           </a:prstGeom>
           <a:noFill/>
-          <a:ln/>
         </p:spPr>
         <p:txBody>
           <a:bodyPr wrap="square" rtlCol="0" anchor="ctr"/>
           <a:lstStyle/>
           <a:p>
-            <a:pPr indent="0" marL="0">
+            <a:pPr marL="0" indent="0">
               <a:buNone/>
             </a:pPr>
             <a:r>
@@ -6443,9 +6433,9 @@
                 <a:solidFill>
                   <a:srgbClr val="2C3E50"/>
                 </a:solidFill>
-                <a:latin typeface="Microsoft YaHei" pitchFamily="34" charset="0"/>
-                <a:ea typeface="Microsoft YaHei" pitchFamily="34" charset="-122"/>
-                <a:cs typeface="Microsoft YaHei" pitchFamily="34" charset="-120"/>
+                <a:latin typeface="微软雅黑" panose="020B0503020204020204" pitchFamily="34" charset="-122"/>
+                <a:ea typeface="微软雅黑" panose="020B0503020204020204" pitchFamily="34" charset="-122"/>
+                <a:cs typeface="微软雅黑" panose="020B0503020204020204" pitchFamily="34" charset="-120"/>
               </a:rPr>
               <a:t>★ 初步实验结果（10次训练 · 真实数据）</a:t>
             </a:r>
@@ -6482,17 +6472,11 @@
           <p:cNvGraphicFramePr>
             <a:graphicFrameLocks noGrp="1"/>
           </p:cNvGraphicFramePr>
-          <p:nvPr>
-            <p:extLst>
-              <p:ext uri="{D42A27DB-BD31-4B8C-83A1-F6EECF244321}">
-                <p14:modId xmlns:p14="http://schemas.microsoft.com/office/powerpoint/2010/main" val="1579011935"/>
-              </p:ext>
-            </p:extLst>
-          </p:nvPr>
+          <p:nvPr/>
         </p:nvGraphicFramePr>
         <p:xfrm>
           <a:off x="731520" y="1280160"/>
-          <a:ext cx="10515600" cy="914400"/>
+          <a:ext cx="10515600" cy="2514600"/>
         </p:xfrm>
         <a:graphic>
           <a:graphicData uri="http://schemas.openxmlformats.org/drawingml/2006/table">
@@ -6510,7 +6494,7 @@
                     <a:bodyPr/>
                     <a:lstStyle/>
                     <a:p>
-                      <a:pPr indent="0" marL="0">
+                      <a:pPr marL="0" indent="0">
                         <a:buNone/>
                       </a:pPr>
                       <a:r>
@@ -6518,20 +6502,20 @@
                           <a:solidFill>
                             <a:srgbClr val="FFFFFF"/>
                           </a:solidFill>
-                          <a:latin typeface="Microsoft YaHei" pitchFamily="34" charset="0"/>
-                          <a:ea typeface="Microsoft YaHei" pitchFamily="34" charset="-122"/>
-                          <a:cs typeface="Microsoft YaHei" pitchFamily="34" charset="-120"/>
+                          <a:latin typeface="微软雅黑" panose="020B0503020204020204" pitchFamily="34" charset="-122"/>
+                          <a:ea typeface="微软雅黑" panose="020B0503020204020204" pitchFamily="34" charset="-122"/>
+                          <a:cs typeface="微软雅黑" panose="020B0503020204020204" pitchFamily="34" charset="-120"/>
                         </a:rPr>
                         <a:t>指标</a:t>
                       </a:r>
                       <a:endParaRPr lang="en-US" sz="1600" dirty="0">
-                        <a:latin typeface="Microsoft YaHei" charset="0"/>
-                        <a:ea typeface="Microsoft YaHei" charset="0"/>
-                        <a:cs typeface="Microsoft YaHei" charset="0"/>
+                        <a:latin typeface="微软雅黑" panose="020B0503020204020204" pitchFamily="34" charset="-122"/>
+                        <a:ea typeface="微软雅黑" panose="020B0503020204020204" pitchFamily="34" charset="-122"/>
+                        <a:cs typeface="微软雅黑" panose="020B0503020204020204" pitchFamily="34" charset="-122"/>
                       </a:endParaRPr>
                     </a:p>
                   </a:txBody>
-                  <a:tcPr marL="91440" marR="91440" marT="45720" marB="45720">
+                  <a:tcPr>
                     <a:lnL w="6350" cap="flat" cmpd="sng" algn="ctr">
                       <a:solidFill>
                         <a:srgbClr val="3498DB"/>
@@ -6578,7 +6562,7 @@
                     <a:bodyPr/>
                     <a:lstStyle/>
                     <a:p>
-                      <a:pPr indent="0" marL="0">
+                      <a:pPr marL="0" indent="0">
                         <a:buNone/>
                       </a:pPr>
                       <a:r>
@@ -6586,20 +6570,20 @@
                           <a:solidFill>
                             <a:srgbClr val="FFFFFF"/>
                           </a:solidFill>
-                          <a:latin typeface="Microsoft YaHei" pitchFamily="34" charset="0"/>
-                          <a:ea typeface="Microsoft YaHei" pitchFamily="34" charset="-122"/>
-                          <a:cs typeface="Microsoft YaHei" pitchFamily="34" charset="-120"/>
+                          <a:latin typeface="微软雅黑" panose="020B0503020204020204" pitchFamily="34" charset="-122"/>
+                          <a:ea typeface="微软雅黑" panose="020B0503020204020204" pitchFamily="34" charset="-122"/>
+                          <a:cs typeface="微软雅黑" panose="020B0503020204020204" pitchFamily="34" charset="-120"/>
                         </a:rPr>
                         <a:t>首次训练</a:t>
                       </a:r>
                       <a:endParaRPr lang="en-US" sz="1600" dirty="0">
-                        <a:latin typeface="Microsoft YaHei" charset="0"/>
-                        <a:ea typeface="Microsoft YaHei" charset="0"/>
-                        <a:cs typeface="Microsoft YaHei" charset="0"/>
+                        <a:latin typeface="微软雅黑" panose="020B0503020204020204" pitchFamily="34" charset="-122"/>
+                        <a:ea typeface="微软雅黑" panose="020B0503020204020204" pitchFamily="34" charset="-122"/>
+                        <a:cs typeface="微软雅黑" panose="020B0503020204020204" pitchFamily="34" charset="-122"/>
                       </a:endParaRPr>
                     </a:p>
                   </a:txBody>
-                  <a:tcPr marL="91440" marR="91440" marT="45720" marB="45720">
+                  <a:tcPr>
                     <a:lnL w="6350" cap="flat" cmpd="sng" algn="ctr">
                       <a:solidFill>
                         <a:srgbClr val="3498DB"/>
@@ -6646,7 +6630,7 @@
                     <a:bodyPr/>
                     <a:lstStyle/>
                     <a:p>
-                      <a:pPr indent="0" marL="0">
+                      <a:pPr marL="0" indent="0">
                         <a:buNone/>
                       </a:pPr>
                       <a:r>
@@ -6654,20 +6638,20 @@
                           <a:solidFill>
                             <a:srgbClr val="FFFFFF"/>
                           </a:solidFill>
-                          <a:latin typeface="Microsoft YaHei" pitchFamily="34" charset="0"/>
-                          <a:ea typeface="Microsoft YaHei" pitchFamily="34" charset="-122"/>
-                          <a:cs typeface="Microsoft YaHei" pitchFamily="34" charset="-120"/>
+                          <a:latin typeface="微软雅黑" panose="020B0503020204020204" pitchFamily="34" charset="-122"/>
+                          <a:ea typeface="微软雅黑" panose="020B0503020204020204" pitchFamily="34" charset="-122"/>
+                          <a:cs typeface="微软雅黑" panose="020B0503020204020204" pitchFamily="34" charset="-120"/>
                         </a:rPr>
                         <a:t>末次训练</a:t>
                       </a:r>
                       <a:endParaRPr lang="en-US" sz="1600" dirty="0">
-                        <a:latin typeface="Microsoft YaHei" charset="0"/>
-                        <a:ea typeface="Microsoft YaHei" charset="0"/>
-                        <a:cs typeface="Microsoft YaHei" charset="0"/>
+                        <a:latin typeface="微软雅黑" panose="020B0503020204020204" pitchFamily="34" charset="-122"/>
+                        <a:ea typeface="微软雅黑" panose="020B0503020204020204" pitchFamily="34" charset="-122"/>
+                        <a:cs typeface="微软雅黑" panose="020B0503020204020204" pitchFamily="34" charset="-122"/>
                       </a:endParaRPr>
                     </a:p>
                   </a:txBody>
-                  <a:tcPr marL="91440" marR="91440" marT="45720" marB="45720">
+                  <a:tcPr>
                     <a:lnL w="6350" cap="flat" cmpd="sng" algn="ctr">
                       <a:solidFill>
                         <a:srgbClr val="3498DB"/>
@@ -6714,7 +6698,7 @@
                     <a:bodyPr/>
                     <a:lstStyle/>
                     <a:p>
-                      <a:pPr indent="0" marL="0">
+                      <a:pPr marL="0" indent="0">
                         <a:buNone/>
                       </a:pPr>
                       <a:r>
@@ -6722,20 +6706,20 @@
                           <a:solidFill>
                             <a:srgbClr val="FFFFFF"/>
                           </a:solidFill>
-                          <a:latin typeface="Microsoft YaHei" pitchFamily="34" charset="0"/>
-                          <a:ea typeface="Microsoft YaHei" pitchFamily="34" charset="-122"/>
-                          <a:cs typeface="Microsoft YaHei" pitchFamily="34" charset="-120"/>
+                          <a:latin typeface="微软雅黑" panose="020B0503020204020204" pitchFamily="34" charset="-122"/>
+                          <a:ea typeface="微软雅黑" panose="020B0503020204020204" pitchFamily="34" charset="-122"/>
+                          <a:cs typeface="微软雅黑" panose="020B0503020204020204" pitchFamily="34" charset="-120"/>
                         </a:rPr>
                         <a:t>变化</a:t>
                       </a:r>
                       <a:endParaRPr lang="en-US" sz="1600" dirty="0">
-                        <a:latin typeface="Microsoft YaHei" charset="0"/>
-                        <a:ea typeface="Microsoft YaHei" charset="0"/>
-                        <a:cs typeface="Microsoft YaHei" charset="0"/>
+                        <a:latin typeface="微软雅黑" panose="020B0503020204020204" pitchFamily="34" charset="-122"/>
+                        <a:ea typeface="微软雅黑" panose="020B0503020204020204" pitchFamily="34" charset="-122"/>
+                        <a:cs typeface="微软雅黑" panose="020B0503020204020204" pitchFamily="34" charset="-122"/>
                       </a:endParaRPr>
                     </a:p>
                   </a:txBody>
-                  <a:tcPr marL="91440" marR="91440" marT="45720" marB="45720">
+                  <a:tcPr>
                     <a:lnL w="6350" cap="flat" cmpd="sng" algn="ctr">
                       <a:solidFill>
                         <a:srgbClr val="3498DB"/>
@@ -6784,7 +6768,7 @@
                     <a:bodyPr/>
                     <a:lstStyle/>
                     <a:p>
-                      <a:pPr indent="0" marL="0">
+                      <a:pPr marL="0" indent="0">
                         <a:buNone/>
                       </a:pPr>
                       <a:r>
@@ -6792,20 +6776,20 @@
                           <a:solidFill>
                             <a:srgbClr val="2C3E50"/>
                           </a:solidFill>
-                          <a:latin typeface="Microsoft YaHei" pitchFamily="34" charset="0"/>
-                          <a:ea typeface="Microsoft YaHei" pitchFamily="34" charset="-122"/>
-                          <a:cs typeface="Microsoft YaHei" pitchFamily="34" charset="-120"/>
+                          <a:latin typeface="微软雅黑" panose="020B0503020204020204" pitchFamily="34" charset="-122"/>
+                          <a:ea typeface="微软雅黑" panose="020B0503020204020204" pitchFamily="34" charset="-122"/>
+                          <a:cs typeface="微软雅黑" panose="020B0503020204020204" pitchFamily="34" charset="-120"/>
                         </a:rPr>
                         <a:t>平均反应时</a:t>
                       </a:r>
                       <a:endParaRPr lang="en-US" sz="1600" dirty="0">
-                        <a:latin typeface="Microsoft YaHei" charset="0"/>
-                        <a:ea typeface="Microsoft YaHei" charset="0"/>
-                        <a:cs typeface="Microsoft YaHei" charset="0"/>
+                        <a:latin typeface="微软雅黑" panose="020B0503020204020204" pitchFamily="34" charset="-122"/>
+                        <a:ea typeface="微软雅黑" panose="020B0503020204020204" pitchFamily="34" charset="-122"/>
+                        <a:cs typeface="微软雅黑" panose="020B0503020204020204" pitchFamily="34" charset="-122"/>
                       </a:endParaRPr>
                     </a:p>
                   </a:txBody>
-                  <a:tcPr marL="91440" marR="91440" marT="45720" marB="45720">
+                  <a:tcPr>
                     <a:lnL w="6350" cap="flat" cmpd="sng" algn="ctr">
                       <a:solidFill>
                         <a:srgbClr val="3498DB"/>
@@ -6849,7 +6833,7 @@
                     <a:bodyPr/>
                     <a:lstStyle/>
                     <a:p>
-                      <a:pPr indent="0" marL="0">
+                      <a:pPr marL="0" indent="0">
                         <a:buNone/>
                       </a:pPr>
                       <a:r>
@@ -6857,20 +6841,20 @@
                           <a:solidFill>
                             <a:srgbClr val="2C3E50"/>
                           </a:solidFill>
-                          <a:latin typeface="Microsoft YaHei" pitchFamily="34" charset="0"/>
-                          <a:ea typeface="Microsoft YaHei" pitchFamily="34" charset="-122"/>
-                          <a:cs typeface="Microsoft YaHei" pitchFamily="34" charset="-120"/>
+                          <a:latin typeface="微软雅黑" panose="020B0503020204020204" pitchFamily="34" charset="-122"/>
+                          <a:ea typeface="微软雅黑" panose="020B0503020204020204" pitchFamily="34" charset="-122"/>
+                          <a:cs typeface="微软雅黑" panose="020B0503020204020204" pitchFamily="34" charset="-120"/>
                         </a:rPr>
                         <a:t>744 ms</a:t>
                       </a:r>
                       <a:endParaRPr lang="en-US" sz="1600" dirty="0">
-                        <a:latin typeface="Microsoft YaHei" charset="0"/>
-                        <a:ea typeface="Microsoft YaHei" charset="0"/>
-                        <a:cs typeface="Microsoft YaHei" charset="0"/>
+                        <a:latin typeface="微软雅黑" panose="020B0503020204020204" pitchFamily="34" charset="-122"/>
+                        <a:ea typeface="微软雅黑" panose="020B0503020204020204" pitchFamily="34" charset="-122"/>
+                        <a:cs typeface="微软雅黑" panose="020B0503020204020204" pitchFamily="34" charset="-122"/>
                       </a:endParaRPr>
                     </a:p>
                   </a:txBody>
-                  <a:tcPr marL="91440" marR="91440" marT="45720" marB="45720">
+                  <a:tcPr>
                     <a:lnL w="6350" cap="flat" cmpd="sng" algn="ctr">
                       <a:solidFill>
                         <a:srgbClr val="3498DB"/>
@@ -6914,7 +6898,7 @@
                     <a:bodyPr/>
                     <a:lstStyle/>
                     <a:p>
-                      <a:pPr indent="0" marL="0">
+                      <a:pPr marL="0" indent="0">
                         <a:buNone/>
                       </a:pPr>
                       <a:r>
@@ -6922,20 +6906,20 @@
                           <a:solidFill>
                             <a:srgbClr val="2C3E50"/>
                           </a:solidFill>
-                          <a:latin typeface="Microsoft YaHei" pitchFamily="34" charset="0"/>
-                          <a:ea typeface="Microsoft YaHei" pitchFamily="34" charset="-122"/>
-                          <a:cs typeface="Microsoft YaHei" pitchFamily="34" charset="-120"/>
+                          <a:latin typeface="微软雅黑" panose="020B0503020204020204" pitchFamily="34" charset="-122"/>
+                          <a:ea typeface="微软雅黑" panose="020B0503020204020204" pitchFamily="34" charset="-122"/>
+                          <a:cs typeface="微软雅黑" panose="020B0503020204020204" pitchFamily="34" charset="-120"/>
                         </a:rPr>
                         <a:t>427 ms</a:t>
                       </a:r>
                       <a:endParaRPr lang="en-US" sz="1600" dirty="0">
-                        <a:latin typeface="Microsoft YaHei" charset="0"/>
-                        <a:ea typeface="Microsoft YaHei" charset="0"/>
-                        <a:cs typeface="Microsoft YaHei" charset="0"/>
+                        <a:latin typeface="微软雅黑" panose="020B0503020204020204" pitchFamily="34" charset="-122"/>
+                        <a:ea typeface="微软雅黑" panose="020B0503020204020204" pitchFamily="34" charset="-122"/>
+                        <a:cs typeface="微软雅黑" panose="020B0503020204020204" pitchFamily="34" charset="-122"/>
                       </a:endParaRPr>
                     </a:p>
                   </a:txBody>
-                  <a:tcPr marL="91440" marR="91440" marT="45720" marB="45720">
+                  <a:tcPr>
                     <a:lnL w="6350" cap="flat" cmpd="sng" algn="ctr">
                       <a:solidFill>
                         <a:srgbClr val="3498DB"/>
@@ -6979,7 +6963,7 @@
                     <a:bodyPr/>
                     <a:lstStyle/>
                     <a:p>
-                      <a:pPr indent="0" marL="0">
+                      <a:pPr marL="0" indent="0">
                         <a:buNone/>
                       </a:pPr>
                       <a:r>
@@ -6987,20 +6971,20 @@
                           <a:solidFill>
                             <a:srgbClr val="27AE60"/>
                           </a:solidFill>
-                          <a:latin typeface="Microsoft YaHei" pitchFamily="34" charset="0"/>
-                          <a:ea typeface="Microsoft YaHei" pitchFamily="34" charset="-122"/>
-                          <a:cs typeface="Microsoft YaHei" pitchFamily="34" charset="-120"/>
+                          <a:latin typeface="微软雅黑" panose="020B0503020204020204" pitchFamily="34" charset="-122"/>
+                          <a:ea typeface="微软雅黑" panose="020B0503020204020204" pitchFamily="34" charset="-122"/>
+                          <a:cs typeface="微软雅黑" panose="020B0503020204020204" pitchFamily="34" charset="-120"/>
                         </a:rPr>
                         <a:t>↓ 42.6%</a:t>
                       </a:r>
                       <a:endParaRPr lang="en-US" sz="1600" dirty="0">
-                        <a:latin typeface="Microsoft YaHei" charset="0"/>
-                        <a:ea typeface="Microsoft YaHei" charset="0"/>
-                        <a:cs typeface="Microsoft YaHei" charset="0"/>
+                        <a:latin typeface="微软雅黑" panose="020B0503020204020204" pitchFamily="34" charset="-122"/>
+                        <a:ea typeface="微软雅黑" panose="020B0503020204020204" pitchFamily="34" charset="-122"/>
+                        <a:cs typeface="微软雅黑" panose="020B0503020204020204" pitchFamily="34" charset="-122"/>
                       </a:endParaRPr>
                     </a:p>
                   </a:txBody>
-                  <a:tcPr marL="91440" marR="91440" marT="45720" marB="45720">
+                  <a:tcPr>
                     <a:lnL w="6350" cap="flat" cmpd="sng" algn="ctr">
                       <a:solidFill>
                         <a:srgbClr val="3498DB"/>
@@ -7046,7 +7030,7 @@
                     <a:bodyPr/>
                     <a:lstStyle/>
                     <a:p>
-                      <a:pPr indent="0" marL="0">
+                      <a:pPr marL="0" indent="0">
                         <a:buNone/>
                       </a:pPr>
                       <a:r>
@@ -7054,20 +7038,20 @@
                           <a:solidFill>
                             <a:srgbClr val="2C3E50"/>
                           </a:solidFill>
-                          <a:latin typeface="Microsoft YaHei" pitchFamily="34" charset="0"/>
-                          <a:ea typeface="Microsoft YaHei" pitchFamily="34" charset="-122"/>
-                          <a:cs typeface="Microsoft YaHei" pitchFamily="34" charset="-120"/>
+                          <a:latin typeface="微软雅黑" panose="020B0503020204020204" pitchFamily="34" charset="-122"/>
+                          <a:ea typeface="微软雅黑" panose="020B0503020204020204" pitchFamily="34" charset="-122"/>
+                          <a:cs typeface="微软雅黑" panose="020B0503020204020204" pitchFamily="34" charset="-120"/>
                         </a:rPr>
                         <a:t>干扰效应量</a:t>
                       </a:r>
                       <a:endParaRPr lang="en-US" sz="1600" dirty="0">
-                        <a:latin typeface="Microsoft YaHei" charset="0"/>
-                        <a:ea typeface="Microsoft YaHei" charset="0"/>
-                        <a:cs typeface="Microsoft YaHei" charset="0"/>
+                        <a:latin typeface="微软雅黑" panose="020B0503020204020204" pitchFamily="34" charset="-122"/>
+                        <a:ea typeface="微软雅黑" panose="020B0503020204020204" pitchFamily="34" charset="-122"/>
+                        <a:cs typeface="微软雅黑" panose="020B0503020204020204" pitchFamily="34" charset="-122"/>
                       </a:endParaRPr>
                     </a:p>
                   </a:txBody>
-                  <a:tcPr marL="91440" marR="91440" marT="45720" marB="45720">
+                  <a:tcPr>
                     <a:lnL w="6350" cap="flat" cmpd="sng" algn="ctr">
                       <a:solidFill>
                         <a:srgbClr val="3498DB"/>
@@ -7111,7 +7095,7 @@
                     <a:bodyPr/>
                     <a:lstStyle/>
                     <a:p>
-                      <a:pPr indent="0" marL="0">
+                      <a:pPr marL="0" indent="0">
                         <a:buNone/>
                       </a:pPr>
                       <a:r>
@@ -7119,20 +7103,20 @@
                           <a:solidFill>
                             <a:srgbClr val="2C3E50"/>
                           </a:solidFill>
-                          <a:latin typeface="Microsoft YaHei" pitchFamily="34" charset="0"/>
-                          <a:ea typeface="Microsoft YaHei" pitchFamily="34" charset="-122"/>
-                          <a:cs typeface="Microsoft YaHei" pitchFamily="34" charset="-120"/>
+                          <a:latin typeface="微软雅黑" panose="020B0503020204020204" pitchFamily="34" charset="-122"/>
+                          <a:ea typeface="微软雅黑" panose="020B0503020204020204" pitchFamily="34" charset="-122"/>
+                          <a:cs typeface="微软雅黑" panose="020B0503020204020204" pitchFamily="34" charset="-120"/>
                         </a:rPr>
                         <a:t>~138 ms</a:t>
                       </a:r>
                       <a:endParaRPr lang="en-US" sz="1600" dirty="0">
-                        <a:latin typeface="Microsoft YaHei" charset="0"/>
-                        <a:ea typeface="Microsoft YaHei" charset="0"/>
-                        <a:cs typeface="Microsoft YaHei" charset="0"/>
+                        <a:latin typeface="微软雅黑" panose="020B0503020204020204" pitchFamily="34" charset="-122"/>
+                        <a:ea typeface="微软雅黑" panose="020B0503020204020204" pitchFamily="34" charset="-122"/>
+                        <a:cs typeface="微软雅黑" panose="020B0503020204020204" pitchFamily="34" charset="-122"/>
                       </a:endParaRPr>
                     </a:p>
                   </a:txBody>
-                  <a:tcPr marL="91440" marR="91440" marT="45720" marB="45720">
+                  <a:tcPr>
                     <a:lnL w="6350" cap="flat" cmpd="sng" algn="ctr">
                       <a:solidFill>
                         <a:srgbClr val="3498DB"/>
@@ -7176,7 +7160,7 @@
                     <a:bodyPr/>
                     <a:lstStyle/>
                     <a:p>
-                      <a:pPr indent="0" marL="0">
+                      <a:pPr marL="0" indent="0">
                         <a:buNone/>
                       </a:pPr>
                       <a:r>
@@ -7184,20 +7168,20 @@
                           <a:solidFill>
                             <a:srgbClr val="2C3E50"/>
                           </a:solidFill>
-                          <a:latin typeface="Microsoft YaHei" pitchFamily="34" charset="0"/>
-                          <a:ea typeface="Microsoft YaHei" pitchFamily="34" charset="-122"/>
-                          <a:cs typeface="Microsoft YaHei" pitchFamily="34" charset="-120"/>
+                          <a:latin typeface="微软雅黑" panose="020B0503020204020204" pitchFamily="34" charset="-122"/>
+                          <a:ea typeface="微软雅黑" panose="020B0503020204020204" pitchFamily="34" charset="-122"/>
+                          <a:cs typeface="微软雅黑" panose="020B0503020204020204" pitchFamily="34" charset="-120"/>
                         </a:rPr>
                         <a:t>~23 ms</a:t>
                       </a:r>
                       <a:endParaRPr lang="en-US" sz="1600" dirty="0">
-                        <a:latin typeface="Microsoft YaHei" charset="0"/>
-                        <a:ea typeface="Microsoft YaHei" charset="0"/>
-                        <a:cs typeface="Microsoft YaHei" charset="0"/>
+                        <a:latin typeface="微软雅黑" panose="020B0503020204020204" pitchFamily="34" charset="-122"/>
+                        <a:ea typeface="微软雅黑" panose="020B0503020204020204" pitchFamily="34" charset="-122"/>
+                        <a:cs typeface="微软雅黑" panose="020B0503020204020204" pitchFamily="34" charset="-122"/>
                       </a:endParaRPr>
                     </a:p>
                   </a:txBody>
-                  <a:tcPr marL="91440" marR="91440" marT="45720" marB="45720">
+                  <a:tcPr>
                     <a:lnL w="6350" cap="flat" cmpd="sng" algn="ctr">
                       <a:solidFill>
                         <a:srgbClr val="3498DB"/>
@@ -7241,7 +7225,7 @@
                     <a:bodyPr/>
                     <a:lstStyle/>
                     <a:p>
-                      <a:pPr indent="0" marL="0">
+                      <a:pPr marL="0" indent="0">
                         <a:buNone/>
                       </a:pPr>
                       <a:r>
@@ -7249,20 +7233,20 @@
                           <a:solidFill>
                             <a:srgbClr val="27AE60"/>
                           </a:solidFill>
-                          <a:latin typeface="Microsoft YaHei" pitchFamily="34" charset="0"/>
-                          <a:ea typeface="Microsoft YaHei" pitchFamily="34" charset="-122"/>
-                          <a:cs typeface="Microsoft YaHei" pitchFamily="34" charset="-120"/>
+                          <a:latin typeface="微软雅黑" panose="020B0503020204020204" pitchFamily="34" charset="-122"/>
+                          <a:ea typeface="微软雅黑" panose="020B0503020204020204" pitchFamily="34" charset="-122"/>
+                          <a:cs typeface="微软雅黑" panose="020B0503020204020204" pitchFamily="34" charset="-120"/>
                         </a:rPr>
                         <a:t>↓ 83%</a:t>
                       </a:r>
                       <a:endParaRPr lang="en-US" sz="1600" dirty="0">
-                        <a:latin typeface="Microsoft YaHei" charset="0"/>
-                        <a:ea typeface="Microsoft YaHei" charset="0"/>
-                        <a:cs typeface="Microsoft YaHei" charset="0"/>
+                        <a:latin typeface="微软雅黑" panose="020B0503020204020204" pitchFamily="34" charset="-122"/>
+                        <a:ea typeface="微软雅黑" panose="020B0503020204020204" pitchFamily="34" charset="-122"/>
+                        <a:cs typeface="微软雅黑" panose="020B0503020204020204" pitchFamily="34" charset="-122"/>
                       </a:endParaRPr>
                     </a:p>
                   </a:txBody>
-                  <a:tcPr marL="91440" marR="91440" marT="45720" marB="45720">
+                  <a:tcPr>
                     <a:lnL w="6350" cap="flat" cmpd="sng" algn="ctr">
                       <a:solidFill>
                         <a:srgbClr val="3498DB"/>
@@ -7308,7 +7292,7 @@
                     <a:bodyPr/>
                     <a:lstStyle/>
                     <a:p>
-                      <a:pPr indent="0" marL="0">
+                      <a:pPr marL="0" indent="0">
                         <a:buNone/>
                       </a:pPr>
                       <a:r>
@@ -7316,20 +7300,20 @@
                           <a:solidFill>
                             <a:srgbClr val="2C3E50"/>
                           </a:solidFill>
-                          <a:latin typeface="Microsoft YaHei" pitchFamily="34" charset="0"/>
-                          <a:ea typeface="Microsoft YaHei" pitchFamily="34" charset="-122"/>
-                          <a:cs typeface="Microsoft YaHei" pitchFamily="34" charset="-120"/>
+                          <a:latin typeface="微软雅黑" panose="020B0503020204020204" pitchFamily="34" charset="-122"/>
+                          <a:ea typeface="微软雅黑" panose="020B0503020204020204" pitchFamily="34" charset="-122"/>
+                          <a:cs typeface="微软雅黑" panose="020B0503020204020204" pitchFamily="34" charset="-120"/>
                         </a:rPr>
                         <a:t>干扰比例</a:t>
                       </a:r>
                       <a:endParaRPr lang="en-US" sz="1600" dirty="0">
-                        <a:latin typeface="Microsoft YaHei" charset="0"/>
-                        <a:ea typeface="Microsoft YaHei" charset="0"/>
-                        <a:cs typeface="Microsoft YaHei" charset="0"/>
+                        <a:latin typeface="微软雅黑" panose="020B0503020204020204" pitchFamily="34" charset="-122"/>
+                        <a:ea typeface="微软雅黑" panose="020B0503020204020204" pitchFamily="34" charset="-122"/>
+                        <a:cs typeface="微软雅黑" panose="020B0503020204020204" pitchFamily="34" charset="-122"/>
                       </a:endParaRPr>
                     </a:p>
                   </a:txBody>
-                  <a:tcPr marL="91440" marR="91440" marT="45720" marB="45720">
+                  <a:tcPr>
                     <a:lnL w="6350" cap="flat" cmpd="sng" algn="ctr">
                       <a:solidFill>
                         <a:srgbClr val="3498DB"/>
@@ -7373,7 +7357,7 @@
                     <a:bodyPr/>
                     <a:lstStyle/>
                     <a:p>
-                      <a:pPr indent="0" marL="0">
+                      <a:pPr marL="0" indent="0">
                         <a:buNone/>
                       </a:pPr>
                       <a:r>
@@ -7381,20 +7365,20 @@
                           <a:solidFill>
                             <a:srgbClr val="2C3E50"/>
                           </a:solidFill>
-                          <a:latin typeface="Microsoft YaHei" pitchFamily="34" charset="0"/>
-                          <a:ea typeface="Microsoft YaHei" pitchFamily="34" charset="-122"/>
-                          <a:cs typeface="Microsoft YaHei" pitchFamily="34" charset="-120"/>
+                          <a:latin typeface="微软雅黑" panose="020B0503020204020204" pitchFamily="34" charset="-122"/>
+                          <a:ea typeface="微软雅黑" panose="020B0503020204020204" pitchFamily="34" charset="-122"/>
+                          <a:cs typeface="微软雅黑" panose="020B0503020204020204" pitchFamily="34" charset="-120"/>
                         </a:rPr>
                         <a:t>50%</a:t>
                       </a:r>
                       <a:endParaRPr lang="en-US" sz="1600" dirty="0">
-                        <a:latin typeface="Microsoft YaHei" charset="0"/>
-                        <a:ea typeface="Microsoft YaHei" charset="0"/>
-                        <a:cs typeface="Microsoft YaHei" charset="0"/>
+                        <a:latin typeface="微软雅黑" panose="020B0503020204020204" pitchFamily="34" charset="-122"/>
+                        <a:ea typeface="微软雅黑" panose="020B0503020204020204" pitchFamily="34" charset="-122"/>
+                        <a:cs typeface="微软雅黑" panose="020B0503020204020204" pitchFamily="34" charset="-122"/>
                       </a:endParaRPr>
                     </a:p>
                   </a:txBody>
-                  <a:tcPr marL="91440" marR="91440" marT="45720" marB="45720">
+                  <a:tcPr>
                     <a:lnL w="6350" cap="flat" cmpd="sng" algn="ctr">
                       <a:solidFill>
                         <a:srgbClr val="3498DB"/>
@@ -7438,7 +7422,7 @@
                     <a:bodyPr/>
                     <a:lstStyle/>
                     <a:p>
-                      <a:pPr indent="0" marL="0">
+                      <a:pPr marL="0" indent="0">
                         <a:buNone/>
                       </a:pPr>
                       <a:r>
@@ -7446,20 +7430,20 @@
                           <a:solidFill>
                             <a:srgbClr val="2C3E50"/>
                           </a:solidFill>
-                          <a:latin typeface="Microsoft YaHei" pitchFamily="34" charset="0"/>
-                          <a:ea typeface="Microsoft YaHei" pitchFamily="34" charset="-122"/>
-                          <a:cs typeface="Microsoft YaHei" pitchFamily="34" charset="-120"/>
+                          <a:latin typeface="微软雅黑" panose="020B0503020204020204" pitchFamily="34" charset="-122"/>
+                          <a:ea typeface="微软雅黑" panose="020B0503020204020204" pitchFamily="34" charset="-122"/>
+                          <a:cs typeface="微软雅黑" panose="020B0503020204020204" pitchFamily="34" charset="-120"/>
                         </a:rPr>
                         <a:t>80%</a:t>
                       </a:r>
                       <a:endParaRPr lang="en-US" sz="1600" dirty="0">
-                        <a:latin typeface="Microsoft YaHei" charset="0"/>
-                        <a:ea typeface="Microsoft YaHei" charset="0"/>
-                        <a:cs typeface="Microsoft YaHei" charset="0"/>
+                        <a:latin typeface="微软雅黑" panose="020B0503020204020204" pitchFamily="34" charset="-122"/>
+                        <a:ea typeface="微软雅黑" panose="020B0503020204020204" pitchFamily="34" charset="-122"/>
+                        <a:cs typeface="微软雅黑" panose="020B0503020204020204" pitchFamily="34" charset="-122"/>
                       </a:endParaRPr>
                     </a:p>
                   </a:txBody>
-                  <a:tcPr marL="91440" marR="91440" marT="45720" marB="45720">
+                  <a:tcPr>
                     <a:lnL w="6350" cap="flat" cmpd="sng" algn="ctr">
                       <a:solidFill>
                         <a:srgbClr val="3498DB"/>
@@ -7503,7 +7487,7 @@
                     <a:bodyPr/>
                     <a:lstStyle/>
                     <a:p>
-                      <a:pPr indent="0" marL="0">
+                      <a:pPr marL="0" indent="0">
                         <a:buNone/>
                       </a:pPr>
                       <a:r>
@@ -7511,20 +7495,20 @@
                           <a:solidFill>
                             <a:srgbClr val="E67E22"/>
                           </a:solidFill>
-                          <a:latin typeface="Microsoft YaHei" pitchFamily="34" charset="0"/>
-                          <a:ea typeface="Microsoft YaHei" pitchFamily="34" charset="-122"/>
-                          <a:cs typeface="Microsoft YaHei" pitchFamily="34" charset="-120"/>
+                          <a:latin typeface="微软雅黑" panose="020B0503020204020204" pitchFamily="34" charset="-122"/>
+                          <a:ea typeface="微软雅黑" panose="020B0503020204020204" pitchFamily="34" charset="-122"/>
+                          <a:cs typeface="微软雅黑" panose="020B0503020204020204" pitchFamily="34" charset="-120"/>
                         </a:rPr>
                         <a:t>↑ 30pp</a:t>
                       </a:r>
                       <a:endParaRPr lang="en-US" sz="1600" dirty="0">
-                        <a:latin typeface="Microsoft YaHei" charset="0"/>
-                        <a:ea typeface="Microsoft YaHei" charset="0"/>
-                        <a:cs typeface="Microsoft YaHei" charset="0"/>
+                        <a:latin typeface="微软雅黑" panose="020B0503020204020204" pitchFamily="34" charset="-122"/>
+                        <a:ea typeface="微软雅黑" panose="020B0503020204020204" pitchFamily="34" charset="-122"/>
+                        <a:cs typeface="微软雅黑" panose="020B0503020204020204" pitchFamily="34" charset="-122"/>
                       </a:endParaRPr>
                     </a:p>
                   </a:txBody>
-                  <a:tcPr marL="91440" marR="91440" marT="45720" marB="45720">
+                  <a:tcPr>
                     <a:lnL w="6350" cap="flat" cmpd="sng" algn="ctr">
                       <a:solidFill>
                         <a:srgbClr val="3498DB"/>
@@ -7570,7 +7554,7 @@
                     <a:bodyPr/>
                     <a:lstStyle/>
                     <a:p>
-                      <a:pPr indent="0" marL="0">
+                      <a:pPr marL="0" indent="0">
                         <a:buNone/>
                       </a:pPr>
                       <a:r>
@@ -7578,20 +7562,20 @@
                           <a:solidFill>
                             <a:srgbClr val="2C3E50"/>
                           </a:solidFill>
-                          <a:latin typeface="Microsoft YaHei" pitchFamily="34" charset="0"/>
-                          <a:ea typeface="Microsoft YaHei" pitchFamily="34" charset="-122"/>
-                          <a:cs typeface="Microsoft YaHei" pitchFamily="34" charset="-120"/>
+                          <a:latin typeface="微软雅黑" panose="020B0503020204020204" pitchFamily="34" charset="-122"/>
+                          <a:ea typeface="微软雅黑" panose="020B0503020204020204" pitchFamily="34" charset="-122"/>
+                          <a:cs typeface="微软雅黑" panose="020B0503020204020204" pitchFamily="34" charset="-120"/>
                         </a:rPr>
                         <a:t>呈现时间</a:t>
                       </a:r>
                       <a:endParaRPr lang="en-US" sz="1600" dirty="0">
-                        <a:latin typeface="Microsoft YaHei" charset="0"/>
-                        <a:ea typeface="Microsoft YaHei" charset="0"/>
-                        <a:cs typeface="Microsoft YaHei" charset="0"/>
+                        <a:latin typeface="微软雅黑" panose="020B0503020204020204" pitchFamily="34" charset="-122"/>
+                        <a:ea typeface="微软雅黑" panose="020B0503020204020204" pitchFamily="34" charset="-122"/>
+                        <a:cs typeface="微软雅黑" panose="020B0503020204020204" pitchFamily="34" charset="-122"/>
                       </a:endParaRPr>
                     </a:p>
                   </a:txBody>
-                  <a:tcPr marL="91440" marR="91440" marT="45720" marB="45720">
+                  <a:tcPr>
                     <a:lnL w="6350" cap="flat" cmpd="sng" algn="ctr">
                       <a:solidFill>
                         <a:srgbClr val="3498DB"/>
@@ -7635,7 +7619,7 @@
                     <a:bodyPr/>
                     <a:lstStyle/>
                     <a:p>
-                      <a:pPr indent="0" marL="0">
+                      <a:pPr marL="0" indent="0">
                         <a:buNone/>
                       </a:pPr>
                       <a:r>
@@ -7643,20 +7627,20 @@
                           <a:solidFill>
                             <a:srgbClr val="2C3E50"/>
                           </a:solidFill>
-                          <a:latin typeface="Microsoft YaHei" pitchFamily="34" charset="0"/>
-                          <a:ea typeface="Microsoft YaHei" pitchFamily="34" charset="-122"/>
-                          <a:cs typeface="Microsoft YaHei" pitchFamily="34" charset="-120"/>
+                          <a:latin typeface="微软雅黑" panose="020B0503020204020204" pitchFamily="34" charset="-122"/>
+                          <a:ea typeface="微软雅黑" panose="020B0503020204020204" pitchFamily="34" charset="-122"/>
+                          <a:cs typeface="微软雅黑" panose="020B0503020204020204" pitchFamily="34" charset="-120"/>
                         </a:rPr>
                         <a:t>1500 ms</a:t>
                       </a:r>
                       <a:endParaRPr lang="en-US" sz="1600" dirty="0">
-                        <a:latin typeface="Microsoft YaHei" charset="0"/>
-                        <a:ea typeface="Microsoft YaHei" charset="0"/>
-                        <a:cs typeface="Microsoft YaHei" charset="0"/>
+                        <a:latin typeface="微软雅黑" panose="020B0503020204020204" pitchFamily="34" charset="-122"/>
+                        <a:ea typeface="微软雅黑" panose="020B0503020204020204" pitchFamily="34" charset="-122"/>
+                        <a:cs typeface="微软雅黑" panose="020B0503020204020204" pitchFamily="34" charset="-122"/>
                       </a:endParaRPr>
                     </a:p>
                   </a:txBody>
-                  <a:tcPr marL="91440" marR="91440" marT="45720" marB="45720">
+                  <a:tcPr>
                     <a:lnL w="6350" cap="flat" cmpd="sng" algn="ctr">
                       <a:solidFill>
                         <a:srgbClr val="3498DB"/>
@@ -7700,7 +7684,7 @@
                     <a:bodyPr/>
                     <a:lstStyle/>
                     <a:p>
-                      <a:pPr indent="0" marL="0">
+                      <a:pPr marL="0" indent="0">
                         <a:buNone/>
                       </a:pPr>
                       <a:r>
@@ -7708,20 +7692,20 @@
                           <a:solidFill>
                             <a:srgbClr val="2C3E50"/>
                           </a:solidFill>
-                          <a:latin typeface="Microsoft YaHei" pitchFamily="34" charset="0"/>
-                          <a:ea typeface="Microsoft YaHei" pitchFamily="34" charset="-122"/>
-                          <a:cs typeface="Microsoft YaHei" pitchFamily="34" charset="-120"/>
+                          <a:latin typeface="微软雅黑" panose="020B0503020204020204" pitchFamily="34" charset="-122"/>
+                          <a:ea typeface="微软雅黑" panose="020B0503020204020204" pitchFamily="34" charset="-122"/>
+                          <a:cs typeface="微软雅黑" panose="020B0503020204020204" pitchFamily="34" charset="-120"/>
                         </a:rPr>
                         <a:t>500 ms</a:t>
                       </a:r>
                       <a:endParaRPr lang="en-US" sz="1600" dirty="0">
-                        <a:latin typeface="Microsoft YaHei" charset="0"/>
-                        <a:ea typeface="Microsoft YaHei" charset="0"/>
-                        <a:cs typeface="Microsoft YaHei" charset="0"/>
+                        <a:latin typeface="微软雅黑" panose="020B0503020204020204" pitchFamily="34" charset="-122"/>
+                        <a:ea typeface="微软雅黑" panose="020B0503020204020204" pitchFamily="34" charset="-122"/>
+                        <a:cs typeface="微软雅黑" panose="020B0503020204020204" pitchFamily="34" charset="-122"/>
                       </a:endParaRPr>
                     </a:p>
                   </a:txBody>
-                  <a:tcPr marL="91440" marR="91440" marT="45720" marB="45720">
+                  <a:tcPr>
                     <a:lnL w="6350" cap="flat" cmpd="sng" algn="ctr">
                       <a:solidFill>
                         <a:srgbClr val="3498DB"/>
@@ -7765,7 +7749,7 @@
                     <a:bodyPr/>
                     <a:lstStyle/>
                     <a:p>
-                      <a:pPr indent="0" marL="0">
+                      <a:pPr marL="0" indent="0">
                         <a:buNone/>
                       </a:pPr>
                       <a:r>
@@ -7773,20 +7757,20 @@
                           <a:solidFill>
                             <a:srgbClr val="E67E22"/>
                           </a:solidFill>
-                          <a:latin typeface="Microsoft YaHei" pitchFamily="34" charset="0"/>
-                          <a:ea typeface="Microsoft YaHei" pitchFamily="34" charset="-122"/>
-                          <a:cs typeface="Microsoft YaHei" pitchFamily="34" charset="-120"/>
+                          <a:latin typeface="微软雅黑" panose="020B0503020204020204" pitchFamily="34" charset="-122"/>
+                          <a:ea typeface="微软雅黑" panose="020B0503020204020204" pitchFamily="34" charset="-122"/>
+                          <a:cs typeface="微软雅黑" panose="020B0503020204020204" pitchFamily="34" charset="-120"/>
                         </a:rPr>
                         <a:t>↓ 67%</a:t>
                       </a:r>
                       <a:endParaRPr lang="en-US" sz="1600" dirty="0">
-                        <a:latin typeface="Microsoft YaHei" charset="0"/>
-                        <a:ea typeface="Microsoft YaHei" charset="0"/>
-                        <a:cs typeface="Microsoft YaHei" charset="0"/>
+                        <a:latin typeface="微软雅黑" panose="020B0503020204020204" pitchFamily="34" charset="-122"/>
+                        <a:ea typeface="微软雅黑" panose="020B0503020204020204" pitchFamily="34" charset="-122"/>
+                        <a:cs typeface="微软雅黑" panose="020B0503020204020204" pitchFamily="34" charset="-122"/>
                       </a:endParaRPr>
                     </a:p>
                   </a:txBody>
-                  <a:tcPr marL="91440" marR="91440" marT="45720" marB="45720">
+                  <a:tcPr>
                     <a:lnL w="6350" cap="flat" cmpd="sng" algn="ctr">
                       <a:solidFill>
                         <a:srgbClr val="3498DB"/>
@@ -7849,7 +7833,6 @@
           <a:solidFill>
             <a:srgbClr val="ECF0F1"/>
           </a:solidFill>
-          <a:ln/>
         </p:spPr>
       </p:sp>
       <p:sp>
@@ -7867,13 +7850,12 @@
             <a:avLst/>
           </a:prstGeom>
           <a:noFill/>
-          <a:ln/>
         </p:spPr>
         <p:txBody>
           <a:bodyPr wrap="square" rtlCol="0" anchor="t"/>
           <a:lstStyle/>
           <a:p>
-            <a:pPr indent="0" marL="0">
+            <a:pPr marL="0" indent="0">
               <a:buNone/>
             </a:pPr>
             <a:r>
@@ -7881,16 +7863,23 @@
                 <a:solidFill>
                   <a:srgbClr val="3498DB"/>
                 </a:solidFill>
-                <a:latin typeface="Microsoft YaHei" pitchFamily="34" charset="0"/>
-                <a:ea typeface="Microsoft YaHei" pitchFamily="34" charset="-122"/>
-                <a:cs typeface="Microsoft YaHei" pitchFamily="34" charset="-120"/>
+                <a:latin typeface="微软雅黑" panose="020B0503020204020204" pitchFamily="34" charset="-122"/>
+                <a:ea typeface="微软雅黑" panose="020B0503020204020204" pitchFamily="34" charset="-122"/>
+                <a:cs typeface="微软雅黑" panose="020B0503020204020204" pitchFamily="34" charset="-120"/>
               </a:rPr>
               <a:t>关键发现</a:t>
             </a:r>
-            <a:pPr indent="0" marL="0">
-              <a:buNone/>
-            </a:pPr>
-            <a:pPr indent="0" marL="0">
+            <a:endParaRPr lang="en-US" sz="2000" b="1" dirty="0">
+              <a:solidFill>
+                <a:srgbClr val="3498DB"/>
+              </a:solidFill>
+              <a:latin typeface="微软雅黑" panose="020B0503020204020204" pitchFamily="34" charset="-122"/>
+              <a:ea typeface="微软雅黑" panose="020B0503020204020204" pitchFamily="34" charset="-122"/>
+              <a:cs typeface="微软雅黑" panose="020B0503020204020204" pitchFamily="34" charset="-120"/>
+            </a:endParaRPr>
+          </a:p>
+          <a:p>
+            <a:pPr marL="0" indent="0">
               <a:buNone/>
             </a:pPr>
             <a:r>
@@ -7898,13 +7887,23 @@
                 <a:solidFill>
                   <a:srgbClr val="2C3E50"/>
                 </a:solidFill>
-                <a:latin typeface="Microsoft YaHei" pitchFamily="34" charset="0"/>
-                <a:ea typeface="Microsoft YaHei" pitchFamily="34" charset="-122"/>
-                <a:cs typeface="Microsoft YaHei" pitchFamily="34" charset="-120"/>
+                <a:latin typeface="微软雅黑" panose="020B0503020204020204" pitchFamily="34" charset="-122"/>
+                <a:ea typeface="微软雅黑" panose="020B0503020204020204" pitchFamily="34" charset="-122"/>
+                <a:cs typeface="微软雅黑" panose="020B0503020204020204" pitchFamily="34" charset="-120"/>
               </a:rPr>
               <a:t>✅ 反应时下降43% 且正确率维持95%+ —— 速度提升不以牺牲准确性为代价</a:t>
             </a:r>
-            <a:pPr indent="0" marL="0">
+            <a:endParaRPr lang="en-US" sz="1600" dirty="0">
+              <a:solidFill>
+                <a:srgbClr val="2C3E50"/>
+              </a:solidFill>
+              <a:latin typeface="微软雅黑" panose="020B0503020204020204" pitchFamily="34" charset="-122"/>
+              <a:ea typeface="微软雅黑" panose="020B0503020204020204" pitchFamily="34" charset="-122"/>
+              <a:cs typeface="微软雅黑" panose="020B0503020204020204" pitchFamily="34" charset="-120"/>
+            </a:endParaRPr>
+          </a:p>
+          <a:p>
+            <a:pPr marL="0" indent="0">
               <a:buNone/>
             </a:pPr>
             <a:r>
@@ -7912,13 +7911,23 @@
                 <a:solidFill>
                   <a:srgbClr val="2C3E50"/>
                 </a:solidFill>
-                <a:latin typeface="Microsoft YaHei" pitchFamily="34" charset="0"/>
-                <a:ea typeface="Microsoft YaHei" pitchFamily="34" charset="-122"/>
-                <a:cs typeface="Microsoft YaHei" pitchFamily="34" charset="-120"/>
+                <a:latin typeface="微软雅黑" panose="020B0503020204020204" pitchFamily="34" charset="-122"/>
+                <a:ea typeface="微软雅黑" panose="020B0503020204020204" pitchFamily="34" charset="-122"/>
+                <a:cs typeface="微软雅黑" panose="020B0503020204020204" pitchFamily="34" charset="-120"/>
               </a:rPr>
               <a:t>✅ 干扰效应下降83% —— Stroop抑制能力在训练中得到增强</a:t>
             </a:r>
-            <a:pPr indent="0" marL="0">
+            <a:endParaRPr lang="en-US" sz="1600" dirty="0">
+              <a:solidFill>
+                <a:srgbClr val="2C3E50"/>
+              </a:solidFill>
+              <a:latin typeface="微软雅黑" panose="020B0503020204020204" pitchFamily="34" charset="-122"/>
+              <a:ea typeface="微软雅黑" panose="020B0503020204020204" pitchFamily="34" charset="-122"/>
+              <a:cs typeface="微软雅黑" panose="020B0503020204020204" pitchFamily="34" charset="-120"/>
+            </a:endParaRPr>
+          </a:p>
+          <a:p>
+            <a:pPr marL="0" indent="0">
               <a:buNone/>
             </a:pPr>
             <a:r>
@@ -7926,13 +7935,23 @@
                 <a:solidFill>
                   <a:srgbClr val="2C3E50"/>
                 </a:solidFill>
-                <a:latin typeface="Microsoft YaHei" pitchFamily="34" charset="0"/>
-                <a:ea typeface="Microsoft YaHei" pitchFamily="34" charset="-122"/>
-                <a:cs typeface="Microsoft YaHei" pitchFamily="34" charset="-120"/>
+                <a:latin typeface="微软雅黑" panose="020B0503020204020204" pitchFamily="34" charset="-122"/>
+                <a:ea typeface="微软雅黑" panose="020B0503020204020204" pitchFamily="34" charset="-122"/>
+                <a:cs typeface="微软雅黑" panose="020B0503020204020204" pitchFamily="34" charset="-120"/>
               </a:rPr>
               <a:t>✅ 难度从50%/1500ms 自动攀爬至80%/500ms —— 自适应算法运行良好</a:t>
             </a:r>
-            <a:pPr indent="0" marL="0">
+            <a:endParaRPr lang="en-US" sz="1600" dirty="0">
+              <a:solidFill>
+                <a:srgbClr val="2C3E50"/>
+              </a:solidFill>
+              <a:latin typeface="微软雅黑" panose="020B0503020204020204" pitchFamily="34" charset="-122"/>
+              <a:ea typeface="微软雅黑" panose="020B0503020204020204" pitchFamily="34" charset="-122"/>
+              <a:cs typeface="微软雅黑" panose="020B0503020204020204" pitchFamily="34" charset="-120"/>
+            </a:endParaRPr>
+          </a:p>
+          <a:p>
+            <a:pPr marL="0" indent="0">
               <a:buNone/>
             </a:pPr>
             <a:r>
@@ -7940,9 +7959,9 @@
                 <a:solidFill>
                   <a:srgbClr val="2C3E50"/>
                 </a:solidFill>
-                <a:latin typeface="Microsoft YaHei" pitchFamily="34" charset="0"/>
-                <a:ea typeface="Microsoft YaHei" pitchFamily="34" charset="-122"/>
-                <a:cs typeface="Microsoft YaHei" pitchFamily="34" charset="-120"/>
+                <a:latin typeface="微软雅黑" panose="020B0503020204020204" pitchFamily="34" charset="-122"/>
+                <a:ea typeface="微软雅黑" panose="020B0503020204020204" pitchFamily="34" charset="-122"/>
+                <a:cs typeface="微软雅黑" panose="020B0503020204020204" pitchFamily="34" charset="-120"/>
               </a:rPr>
               <a:t>✅ 累计230+试次，10次训练，数据完整可复现</a:t>
             </a:r>
@@ -7960,7 +7979,7 @@
 
 <file path=ppt/slides/slide8.xml><?xml version="1.0" encoding="utf-8"?>
 <p:sld xmlns:a="http://schemas.openxmlformats.org/drawingml/2006/main" xmlns:r="http://schemas.openxmlformats.org/officeDocument/2006/relationships" xmlns:p="http://schemas.openxmlformats.org/presentationml/2006/main">
-  <p:cSld name="Slide 8">
+  <p:cSld>
     <p:spTree>
       <p:nvGrpSpPr>
         <p:cNvPr id="1" name=""/>
@@ -7990,13 +8009,12 @@
             <a:avLst/>
           </a:prstGeom>
           <a:noFill/>
-          <a:ln/>
         </p:spPr>
         <p:txBody>
           <a:bodyPr wrap="square" rtlCol="0" anchor="ctr"/>
           <a:lstStyle/>
           <a:p>
-            <a:pPr indent="0" marL="0">
+            <a:pPr marL="0" indent="0">
               <a:buNone/>
             </a:pPr>
             <a:r>
@@ -8004,9 +8022,9 @@
                 <a:solidFill>
                   <a:srgbClr val="2C3E50"/>
                 </a:solidFill>
-                <a:latin typeface="Microsoft YaHei" pitchFamily="34" charset="0"/>
-                <a:ea typeface="Microsoft YaHei" pitchFamily="34" charset="-122"/>
-                <a:cs typeface="Microsoft YaHei" pitchFamily="34" charset="-120"/>
+                <a:latin typeface="微软雅黑" panose="020B0503020204020204" pitchFamily="34" charset="-122"/>
+                <a:ea typeface="微软雅黑" panose="020B0503020204020204" pitchFamily="34" charset="-122"/>
+                <a:cs typeface="微软雅黑" panose="020B0503020204020204" pitchFamily="34" charset="-120"/>
               </a:rPr>
               <a:t>难度调节轨迹</a:t>
             </a:r>
@@ -8043,17 +8061,11 @@
           <p:cNvGraphicFramePr>
             <a:graphicFrameLocks noGrp="1"/>
           </p:cNvGraphicFramePr>
-          <p:nvPr>
-            <p:extLst>
-              <p:ext uri="{D42A27DB-BD31-4B8C-83A1-F6EECF244321}">
-                <p14:modId xmlns:p14="http://schemas.microsoft.com/office/powerpoint/2010/main" val="1579011935"/>
-              </p:ext>
-            </p:extLst>
-          </p:nvPr>
+          <p:nvPr/>
         </p:nvGraphicFramePr>
         <p:xfrm>
           <a:off x="731520" y="1463040"/>
-          <a:ext cx="10515600" cy="914400"/>
+          <a:ext cx="12344400" cy="1828800"/>
         </p:xfrm>
         <a:graphic>
           <a:graphicData uri="http://schemas.openxmlformats.org/drawingml/2006/table">
@@ -8075,7 +8087,7 @@
                     <a:bodyPr/>
                     <a:lstStyle/>
                     <a:p>
-                      <a:pPr indent="0" marL="0">
+                      <a:pPr marL="0" indent="0">
                         <a:buNone/>
                       </a:pPr>
                       <a:r>
@@ -8083,20 +8095,20 @@
                           <a:solidFill>
                             <a:srgbClr val="FFFFFF"/>
                           </a:solidFill>
-                          <a:latin typeface="Microsoft YaHei" pitchFamily="34" charset="0"/>
-                          <a:ea typeface="Microsoft YaHei" pitchFamily="34" charset="-122"/>
-                          <a:cs typeface="Microsoft YaHei" pitchFamily="34" charset="-120"/>
+                          <a:latin typeface="微软雅黑" panose="020B0503020204020204" pitchFamily="34" charset="-122"/>
+                          <a:ea typeface="微软雅黑" panose="020B0503020204020204" pitchFamily="34" charset="-122"/>
+                          <a:cs typeface="微软雅黑" panose="020B0503020204020204" pitchFamily="34" charset="-120"/>
                         </a:rPr>
                         <a:t>训练次数</a:t>
                       </a:r>
                       <a:endParaRPr lang="en-US" sz="1500" dirty="0">
-                        <a:latin typeface="Microsoft YaHei" charset="0"/>
-                        <a:ea typeface="Microsoft YaHei" charset="0"/>
-                        <a:cs typeface="Microsoft YaHei" charset="0"/>
+                        <a:latin typeface="微软雅黑" panose="020B0503020204020204" pitchFamily="34" charset="-122"/>
+                        <a:ea typeface="微软雅黑" panose="020B0503020204020204" pitchFamily="34" charset="-122"/>
+                        <a:cs typeface="微软雅黑" panose="020B0503020204020204" pitchFamily="34" charset="-122"/>
                       </a:endParaRPr>
                     </a:p>
                   </a:txBody>
-                  <a:tcPr marL="91440" marR="91440" marT="45720" marB="45720">
+                  <a:tcPr>
                     <a:lnL w="6350" cap="flat" cmpd="sng" algn="ctr">
                       <a:solidFill>
                         <a:srgbClr val="3498DB"/>
@@ -8143,7 +8155,7 @@
                     <a:bodyPr/>
                     <a:lstStyle/>
                     <a:p>
-                      <a:pPr indent="0" marL="0">
+                      <a:pPr marL="0" indent="0">
                         <a:buNone/>
                       </a:pPr>
                       <a:r>
@@ -8151,20 +8163,20 @@
                           <a:solidFill>
                             <a:srgbClr val="2C3E50"/>
                           </a:solidFill>
-                          <a:latin typeface="Microsoft YaHei" pitchFamily="34" charset="0"/>
-                          <a:ea typeface="Microsoft YaHei" pitchFamily="34" charset="-122"/>
-                          <a:cs typeface="Microsoft YaHei" pitchFamily="34" charset="-120"/>
+                          <a:latin typeface="微软雅黑" panose="020B0503020204020204" pitchFamily="34" charset="-122"/>
+                          <a:ea typeface="微软雅黑" panose="020B0503020204020204" pitchFamily="34" charset="-122"/>
+                          <a:cs typeface="微软雅黑" panose="020B0503020204020204" pitchFamily="34" charset="-120"/>
                         </a:rPr>
                         <a:t>1-4</a:t>
                       </a:r>
                       <a:endParaRPr lang="en-US" sz="1500" dirty="0">
-                        <a:latin typeface="Microsoft YaHei" charset="0"/>
-                        <a:ea typeface="Microsoft YaHei" charset="0"/>
-                        <a:cs typeface="Microsoft YaHei" charset="0"/>
+                        <a:latin typeface="微软雅黑" panose="020B0503020204020204" pitchFamily="34" charset="-122"/>
+                        <a:ea typeface="微软雅黑" panose="020B0503020204020204" pitchFamily="34" charset="-122"/>
+                        <a:cs typeface="微软雅黑" panose="020B0503020204020204" pitchFamily="34" charset="-122"/>
                       </a:endParaRPr>
                     </a:p>
                   </a:txBody>
-                  <a:tcPr marL="91440" marR="91440" marT="45720" marB="45720">
+                  <a:tcPr>
                     <a:lnL w="6350" cap="flat" cmpd="sng" algn="ctr">
                       <a:solidFill>
                         <a:srgbClr val="3498DB"/>
@@ -8208,7 +8220,7 @@
                     <a:bodyPr/>
                     <a:lstStyle/>
                     <a:p>
-                      <a:pPr indent="0" marL="0">
+                      <a:pPr marL="0" indent="0">
                         <a:buNone/>
                       </a:pPr>
                       <a:r>
@@ -8216,20 +8228,20 @@
                           <a:solidFill>
                             <a:srgbClr val="2C3E50"/>
                           </a:solidFill>
-                          <a:latin typeface="Microsoft YaHei" pitchFamily="34" charset="0"/>
-                          <a:ea typeface="Microsoft YaHei" pitchFamily="34" charset="-122"/>
-                          <a:cs typeface="Microsoft YaHei" pitchFamily="34" charset="-120"/>
+                          <a:latin typeface="微软雅黑" panose="020B0503020204020204" pitchFamily="34" charset="-122"/>
+                          <a:ea typeface="微软雅黑" panose="020B0503020204020204" pitchFamily="34" charset="-122"/>
+                          <a:cs typeface="微软雅黑" panose="020B0503020204020204" pitchFamily="34" charset="-120"/>
                         </a:rPr>
                         <a:t>5</a:t>
                       </a:r>
                       <a:endParaRPr lang="en-US" sz="1500" dirty="0">
-                        <a:latin typeface="Microsoft YaHei" charset="0"/>
-                        <a:ea typeface="Microsoft YaHei" charset="0"/>
-                        <a:cs typeface="Microsoft YaHei" charset="0"/>
+                        <a:latin typeface="微软雅黑" panose="020B0503020204020204" pitchFamily="34" charset="-122"/>
+                        <a:ea typeface="微软雅黑" panose="020B0503020204020204" pitchFamily="34" charset="-122"/>
+                        <a:cs typeface="微软雅黑" panose="020B0503020204020204" pitchFamily="34" charset="-122"/>
                       </a:endParaRPr>
                     </a:p>
                   </a:txBody>
-                  <a:tcPr marL="91440" marR="91440" marT="45720" marB="45720">
+                  <a:tcPr>
                     <a:lnL w="6350" cap="flat" cmpd="sng" algn="ctr">
                       <a:solidFill>
                         <a:srgbClr val="3498DB"/>
@@ -8273,7 +8285,7 @@
                     <a:bodyPr/>
                     <a:lstStyle/>
                     <a:p>
-                      <a:pPr indent="0" marL="0">
+                      <a:pPr marL="0" indent="0">
                         <a:buNone/>
                       </a:pPr>
                       <a:r>
@@ -8281,20 +8293,20 @@
                           <a:solidFill>
                             <a:srgbClr val="7F8C8D"/>
                           </a:solidFill>
-                          <a:latin typeface="Microsoft YaHei" pitchFamily="34" charset="0"/>
-                          <a:ea typeface="Microsoft YaHei" pitchFamily="34" charset="-122"/>
-                          <a:cs typeface="Microsoft YaHei" pitchFamily="34" charset="-120"/>
+                          <a:latin typeface="微软雅黑" panose="020B0503020204020204" pitchFamily="34" charset="-122"/>
+                          <a:ea typeface="微软雅黑" panose="020B0503020204020204" pitchFamily="34" charset="-122"/>
+                          <a:cs typeface="微软雅黑" panose="020B0503020204020204" pitchFamily="34" charset="-120"/>
                         </a:rPr>
                         <a:t>6</a:t>
                       </a:r>
                       <a:endParaRPr lang="en-US" sz="1500" dirty="0">
-                        <a:latin typeface="Microsoft YaHei" charset="0"/>
-                        <a:ea typeface="Microsoft YaHei" charset="0"/>
-                        <a:cs typeface="Microsoft YaHei" charset="0"/>
+                        <a:latin typeface="微软雅黑" panose="020B0503020204020204" pitchFamily="34" charset="-122"/>
+                        <a:ea typeface="微软雅黑" panose="020B0503020204020204" pitchFamily="34" charset="-122"/>
+                        <a:cs typeface="微软雅黑" panose="020B0503020204020204" pitchFamily="34" charset="-122"/>
                       </a:endParaRPr>
                     </a:p>
                   </a:txBody>
-                  <a:tcPr marL="91440" marR="91440" marT="45720" marB="45720">
+                  <a:tcPr>
                     <a:lnL w="6350" cap="flat" cmpd="sng" algn="ctr">
                       <a:solidFill>
                         <a:srgbClr val="3498DB"/>
@@ -8338,7 +8350,7 @@
                     <a:bodyPr/>
                     <a:lstStyle/>
                     <a:p>
-                      <a:pPr indent="0" marL="0">
+                      <a:pPr marL="0" indent="0">
                         <a:buNone/>
                       </a:pPr>
                       <a:r>
@@ -8346,20 +8358,20 @@
                           <a:solidFill>
                             <a:srgbClr val="2C3E50"/>
                           </a:solidFill>
-                          <a:latin typeface="Microsoft YaHei" pitchFamily="34" charset="0"/>
-                          <a:ea typeface="Microsoft YaHei" pitchFamily="34" charset="-122"/>
-                          <a:cs typeface="Microsoft YaHei" pitchFamily="34" charset="-120"/>
+                          <a:latin typeface="微软雅黑" panose="020B0503020204020204" pitchFamily="34" charset="-122"/>
+                          <a:ea typeface="微软雅黑" panose="020B0503020204020204" pitchFamily="34" charset="-122"/>
+                          <a:cs typeface="微软雅黑" panose="020B0503020204020204" pitchFamily="34" charset="-120"/>
                         </a:rPr>
                         <a:t>7</a:t>
                       </a:r>
                       <a:endParaRPr lang="en-US" sz="1500" dirty="0">
-                        <a:latin typeface="Microsoft YaHei" charset="0"/>
-                        <a:ea typeface="Microsoft YaHei" charset="0"/>
-                        <a:cs typeface="Microsoft YaHei" charset="0"/>
+                        <a:latin typeface="微软雅黑" panose="020B0503020204020204" pitchFamily="34" charset="-122"/>
+                        <a:ea typeface="微软雅黑" panose="020B0503020204020204" pitchFamily="34" charset="-122"/>
+                        <a:cs typeface="微软雅黑" panose="020B0503020204020204" pitchFamily="34" charset="-122"/>
                       </a:endParaRPr>
                     </a:p>
                   </a:txBody>
-                  <a:tcPr marL="91440" marR="91440" marT="45720" marB="45720">
+                  <a:tcPr>
                     <a:lnL w="6350" cap="flat" cmpd="sng" algn="ctr">
                       <a:solidFill>
                         <a:srgbClr val="3498DB"/>
@@ -8403,7 +8415,7 @@
                     <a:bodyPr/>
                     <a:lstStyle/>
                     <a:p>
-                      <a:pPr indent="0" marL="0">
+                      <a:pPr marL="0" indent="0">
                         <a:buNone/>
                       </a:pPr>
                       <a:r>
@@ -8411,20 +8423,20 @@
                           <a:solidFill>
                             <a:srgbClr val="2C3E50"/>
                           </a:solidFill>
-                          <a:latin typeface="Microsoft YaHei" pitchFamily="34" charset="0"/>
-                          <a:ea typeface="Microsoft YaHei" pitchFamily="34" charset="-122"/>
-                          <a:cs typeface="Microsoft YaHei" pitchFamily="34" charset="-120"/>
+                          <a:latin typeface="微软雅黑" panose="020B0503020204020204" pitchFamily="34" charset="-122"/>
+                          <a:ea typeface="微软雅黑" panose="020B0503020204020204" pitchFamily="34" charset="-122"/>
+                          <a:cs typeface="微软雅黑" panose="020B0503020204020204" pitchFamily="34" charset="-120"/>
                         </a:rPr>
                         <a:t>8</a:t>
                       </a:r>
                       <a:endParaRPr lang="en-US" sz="1500" dirty="0">
-                        <a:latin typeface="Microsoft YaHei" charset="0"/>
-                        <a:ea typeface="Microsoft YaHei" charset="0"/>
-                        <a:cs typeface="Microsoft YaHei" charset="0"/>
+                        <a:latin typeface="微软雅黑" panose="020B0503020204020204" pitchFamily="34" charset="-122"/>
+                        <a:ea typeface="微软雅黑" panose="020B0503020204020204" pitchFamily="34" charset="-122"/>
+                        <a:cs typeface="微软雅黑" panose="020B0503020204020204" pitchFamily="34" charset="-122"/>
                       </a:endParaRPr>
                     </a:p>
                   </a:txBody>
-                  <a:tcPr marL="91440" marR="91440" marT="45720" marB="45720">
+                  <a:tcPr>
                     <a:lnL w="6350" cap="flat" cmpd="sng" algn="ctr">
                       <a:solidFill>
                         <a:srgbClr val="3498DB"/>
@@ -8468,7 +8480,7 @@
                     <a:bodyPr/>
                     <a:lstStyle/>
                     <a:p>
-                      <a:pPr indent="0" marL="0">
+                      <a:pPr marL="0" indent="0">
                         <a:buNone/>
                       </a:pPr>
                       <a:r>
@@ -8476,20 +8488,20 @@
                           <a:solidFill>
                             <a:srgbClr val="E74C3C"/>
                           </a:solidFill>
-                          <a:latin typeface="Microsoft YaHei" pitchFamily="34" charset="0"/>
-                          <a:ea typeface="Microsoft YaHei" pitchFamily="34" charset="-122"/>
-                          <a:cs typeface="Microsoft YaHei" pitchFamily="34" charset="-120"/>
+                          <a:latin typeface="微软雅黑" panose="020B0503020204020204" pitchFamily="34" charset="-122"/>
+                          <a:ea typeface="微软雅黑" panose="020B0503020204020204" pitchFamily="34" charset="-122"/>
+                          <a:cs typeface="微软雅黑" panose="020B0503020204020204" pitchFamily="34" charset="-120"/>
                         </a:rPr>
                         <a:t>9</a:t>
                       </a:r>
                       <a:endParaRPr lang="en-US" sz="1500" dirty="0">
-                        <a:latin typeface="Microsoft YaHei" charset="0"/>
-                        <a:ea typeface="Microsoft YaHei" charset="0"/>
-                        <a:cs typeface="Microsoft YaHei" charset="0"/>
+                        <a:latin typeface="微软雅黑" panose="020B0503020204020204" pitchFamily="34" charset="-122"/>
+                        <a:ea typeface="微软雅黑" panose="020B0503020204020204" pitchFamily="34" charset="-122"/>
+                        <a:cs typeface="微软雅黑" panose="020B0503020204020204" pitchFamily="34" charset="-122"/>
                       </a:endParaRPr>
                     </a:p>
                   </a:txBody>
-                  <a:tcPr marL="91440" marR="91440" marT="45720" marB="45720">
+                  <a:tcPr>
                     <a:lnL w="6350" cap="flat" cmpd="sng" algn="ctr">
                       <a:solidFill>
                         <a:srgbClr val="3498DB"/>
@@ -8533,7 +8545,7 @@
                     <a:bodyPr/>
                     <a:lstStyle/>
                     <a:p>
-                      <a:pPr indent="0" marL="0">
+                      <a:pPr marL="0" indent="0">
                         <a:buNone/>
                       </a:pPr>
                       <a:r>
@@ -8541,20 +8553,20 @@
                           <a:solidFill>
                             <a:srgbClr val="E74C3C"/>
                           </a:solidFill>
-                          <a:latin typeface="Microsoft YaHei" pitchFamily="34" charset="0"/>
-                          <a:ea typeface="Microsoft YaHei" pitchFamily="34" charset="-122"/>
-                          <a:cs typeface="Microsoft YaHei" pitchFamily="34" charset="-120"/>
+                          <a:latin typeface="微软雅黑" panose="020B0503020204020204" pitchFamily="34" charset="-122"/>
+                          <a:ea typeface="微软雅黑" panose="020B0503020204020204" pitchFamily="34" charset="-122"/>
+                          <a:cs typeface="微软雅黑" panose="020B0503020204020204" pitchFamily="34" charset="-120"/>
                         </a:rPr>
                         <a:t>10</a:t>
                       </a:r>
                       <a:endParaRPr lang="en-US" sz="1500" dirty="0">
-                        <a:latin typeface="Microsoft YaHei" charset="0"/>
-                        <a:ea typeface="Microsoft YaHei" charset="0"/>
-                        <a:cs typeface="Microsoft YaHei" charset="0"/>
+                        <a:latin typeface="微软雅黑" panose="020B0503020204020204" pitchFamily="34" charset="-122"/>
+                        <a:ea typeface="微软雅黑" panose="020B0503020204020204" pitchFamily="34" charset="-122"/>
+                        <a:cs typeface="微软雅黑" panose="020B0503020204020204" pitchFamily="34" charset="-122"/>
                       </a:endParaRPr>
                     </a:p>
                   </a:txBody>
-                  <a:tcPr marL="91440" marR="91440" marT="45720" marB="45720">
+                  <a:tcPr>
                     <a:lnL w="6350" cap="flat" cmpd="sng" algn="ctr">
                       <a:solidFill>
                         <a:srgbClr val="3498DB"/>
@@ -8600,7 +8612,7 @@
                     <a:bodyPr/>
                     <a:lstStyle/>
                     <a:p>
-                      <a:pPr indent="0" marL="0">
+                      <a:pPr marL="0" indent="0">
                         <a:buNone/>
                       </a:pPr>
                       <a:r>
@@ -8608,20 +8620,20 @@
                           <a:solidFill>
                             <a:srgbClr val="FFFFFF"/>
                           </a:solidFill>
-                          <a:latin typeface="Microsoft YaHei" pitchFamily="34" charset="0"/>
-                          <a:ea typeface="Microsoft YaHei" pitchFamily="34" charset="-122"/>
-                          <a:cs typeface="Microsoft YaHei" pitchFamily="34" charset="-120"/>
+                          <a:latin typeface="微软雅黑" panose="020B0503020204020204" pitchFamily="34" charset="-122"/>
+                          <a:ea typeface="微软雅黑" panose="020B0503020204020204" pitchFamily="34" charset="-122"/>
+                          <a:cs typeface="微软雅黑" panose="020B0503020204020204" pitchFamily="34" charset="-120"/>
                         </a:rPr>
                         <a:t>干扰比例</a:t>
                       </a:r>
                       <a:endParaRPr lang="en-US" sz="1500" dirty="0">
-                        <a:latin typeface="Microsoft YaHei" charset="0"/>
-                        <a:ea typeface="Microsoft YaHei" charset="0"/>
-                        <a:cs typeface="Microsoft YaHei" charset="0"/>
+                        <a:latin typeface="微软雅黑" panose="020B0503020204020204" pitchFamily="34" charset="-122"/>
+                        <a:ea typeface="微软雅黑" panose="020B0503020204020204" pitchFamily="34" charset="-122"/>
+                        <a:cs typeface="微软雅黑" panose="020B0503020204020204" pitchFamily="34" charset="-122"/>
                       </a:endParaRPr>
                     </a:p>
                   </a:txBody>
-                  <a:tcPr marL="91440" marR="91440" marT="45720" marB="45720">
+                  <a:tcPr>
                     <a:lnL w="6350" cap="flat" cmpd="sng" algn="ctr">
                       <a:solidFill>
                         <a:srgbClr val="3498DB"/>
@@ -8668,7 +8680,7 @@
                     <a:bodyPr/>
                     <a:lstStyle/>
                     <a:p>
-                      <a:pPr indent="0" marL="0">
+                      <a:pPr marL="0" indent="0">
                         <a:buNone/>
                       </a:pPr>
                       <a:r>
@@ -8676,20 +8688,20 @@
                           <a:solidFill>
                             <a:srgbClr val="2C3E50"/>
                           </a:solidFill>
-                          <a:latin typeface="Microsoft YaHei" pitchFamily="34" charset="0"/>
-                          <a:ea typeface="Microsoft YaHei" pitchFamily="34" charset="-122"/>
-                          <a:cs typeface="Microsoft YaHei" pitchFamily="34" charset="-120"/>
+                          <a:latin typeface="微软雅黑" panose="020B0503020204020204" pitchFamily="34" charset="-122"/>
+                          <a:ea typeface="微软雅黑" panose="020B0503020204020204" pitchFamily="34" charset="-122"/>
+                          <a:cs typeface="微软雅黑" panose="020B0503020204020204" pitchFamily="34" charset="-120"/>
                         </a:rPr>
                         <a:t>50%</a:t>
                       </a:r>
                       <a:endParaRPr lang="en-US" sz="1500" dirty="0">
-                        <a:latin typeface="Microsoft YaHei" charset="0"/>
-                        <a:ea typeface="Microsoft YaHei" charset="0"/>
-                        <a:cs typeface="Microsoft YaHei" charset="0"/>
+                        <a:latin typeface="微软雅黑" panose="020B0503020204020204" pitchFamily="34" charset="-122"/>
+                        <a:ea typeface="微软雅黑" panose="020B0503020204020204" pitchFamily="34" charset="-122"/>
+                        <a:cs typeface="微软雅黑" panose="020B0503020204020204" pitchFamily="34" charset="-122"/>
                       </a:endParaRPr>
                     </a:p>
                   </a:txBody>
-                  <a:tcPr marL="91440" marR="91440" marT="45720" marB="45720">
+                  <a:tcPr>
                     <a:lnL w="6350" cap="flat" cmpd="sng" algn="ctr">
                       <a:solidFill>
                         <a:srgbClr val="3498DB"/>
@@ -8733,7 +8745,7 @@
                     <a:bodyPr/>
                     <a:lstStyle/>
                     <a:p>
-                      <a:pPr indent="0" marL="0">
+                      <a:pPr marL="0" indent="0">
                         <a:buNone/>
                       </a:pPr>
                       <a:r>
@@ -8741,20 +8753,20 @@
                           <a:solidFill>
                             <a:srgbClr val="2C3E50"/>
                           </a:solidFill>
-                          <a:latin typeface="Microsoft YaHei" pitchFamily="34" charset="0"/>
-                          <a:ea typeface="Microsoft YaHei" pitchFamily="34" charset="-122"/>
-                          <a:cs typeface="Microsoft YaHei" pitchFamily="34" charset="-120"/>
+                          <a:latin typeface="微软雅黑" panose="020B0503020204020204" pitchFamily="34" charset="-122"/>
+                          <a:ea typeface="微软雅黑" panose="020B0503020204020204" pitchFamily="34" charset="-122"/>
+                          <a:cs typeface="微软雅黑" panose="020B0503020204020204" pitchFamily="34" charset="-120"/>
                         </a:rPr>
                         <a:t>55-65%</a:t>
                       </a:r>
                       <a:endParaRPr lang="en-US" sz="1500" dirty="0">
-                        <a:latin typeface="Microsoft YaHei" charset="0"/>
-                        <a:ea typeface="Microsoft YaHei" charset="0"/>
-                        <a:cs typeface="Microsoft YaHei" charset="0"/>
+                        <a:latin typeface="微软雅黑" panose="020B0503020204020204" pitchFamily="34" charset="-122"/>
+                        <a:ea typeface="微软雅黑" panose="020B0503020204020204" pitchFamily="34" charset="-122"/>
+                        <a:cs typeface="微软雅黑" panose="020B0503020204020204" pitchFamily="34" charset="-122"/>
                       </a:endParaRPr>
                     </a:p>
                   </a:txBody>
-                  <a:tcPr marL="91440" marR="91440" marT="45720" marB="45720">
+                  <a:tcPr>
                     <a:lnL w="6350" cap="flat" cmpd="sng" algn="ctr">
                       <a:solidFill>
                         <a:srgbClr val="3498DB"/>
@@ -8798,7 +8810,7 @@
                     <a:bodyPr/>
                     <a:lstStyle/>
                     <a:p>
-                      <a:pPr indent="0" marL="0">
+                      <a:pPr marL="0" indent="0">
                         <a:buNone/>
                       </a:pPr>
                       <a:r>
@@ -8806,20 +8818,20 @@
                           <a:solidFill>
                             <a:srgbClr val="7F8C8D"/>
                           </a:solidFill>
-                          <a:latin typeface="Microsoft YaHei" pitchFamily="34" charset="0"/>
-                          <a:ea typeface="Microsoft YaHei" pitchFamily="34" charset="-122"/>
-                          <a:cs typeface="Microsoft YaHei" pitchFamily="34" charset="-120"/>
+                          <a:latin typeface="微软雅黑" panose="020B0503020204020204" pitchFamily="34" charset="-122"/>
+                          <a:ea typeface="微软雅黑" panose="020B0503020204020204" pitchFamily="34" charset="-122"/>
+                          <a:cs typeface="微软雅黑" panose="020B0503020204020204" pitchFamily="34" charset="-120"/>
                         </a:rPr>
                         <a:t>50%</a:t>
                       </a:r>
                       <a:endParaRPr lang="en-US" sz="1500" dirty="0">
-                        <a:latin typeface="Microsoft YaHei" charset="0"/>
-                        <a:ea typeface="Microsoft YaHei" charset="0"/>
-                        <a:cs typeface="Microsoft YaHei" charset="0"/>
+                        <a:latin typeface="微软雅黑" panose="020B0503020204020204" pitchFamily="34" charset="-122"/>
+                        <a:ea typeface="微软雅黑" panose="020B0503020204020204" pitchFamily="34" charset="-122"/>
+                        <a:cs typeface="微软雅黑" panose="020B0503020204020204" pitchFamily="34" charset="-122"/>
                       </a:endParaRPr>
                     </a:p>
                   </a:txBody>
-                  <a:tcPr marL="91440" marR="91440" marT="45720" marB="45720">
+                  <a:tcPr>
                     <a:lnL w="6350" cap="flat" cmpd="sng" algn="ctr">
                       <a:solidFill>
                         <a:srgbClr val="3498DB"/>
@@ -8863,7 +8875,7 @@
                     <a:bodyPr/>
                     <a:lstStyle/>
                     <a:p>
-                      <a:pPr indent="0" marL="0">
+                      <a:pPr marL="0" indent="0">
                         <a:buNone/>
                       </a:pPr>
                       <a:r>
@@ -8871,20 +8883,20 @@
                           <a:solidFill>
                             <a:srgbClr val="2C3E50"/>
                           </a:solidFill>
-                          <a:latin typeface="Microsoft YaHei" pitchFamily="34" charset="0"/>
-                          <a:ea typeface="Microsoft YaHei" pitchFamily="34" charset="-122"/>
-                          <a:cs typeface="Microsoft YaHei" pitchFamily="34" charset="-120"/>
+                          <a:latin typeface="微软雅黑" panose="020B0503020204020204" pitchFamily="34" charset="-122"/>
+                          <a:ea typeface="微软雅黑" panose="020B0503020204020204" pitchFamily="34" charset="-122"/>
+                          <a:cs typeface="微软雅黑" panose="020B0503020204020204" pitchFamily="34" charset="-120"/>
                         </a:rPr>
                         <a:t>55-65%</a:t>
                       </a:r>
                       <a:endParaRPr lang="en-US" sz="1500" dirty="0">
-                        <a:latin typeface="Microsoft YaHei" charset="0"/>
-                        <a:ea typeface="Microsoft YaHei" charset="0"/>
-                        <a:cs typeface="Microsoft YaHei" charset="0"/>
+                        <a:latin typeface="微软雅黑" panose="020B0503020204020204" pitchFamily="34" charset="-122"/>
+                        <a:ea typeface="微软雅黑" panose="020B0503020204020204" pitchFamily="34" charset="-122"/>
+                        <a:cs typeface="微软雅黑" panose="020B0503020204020204" pitchFamily="34" charset="-122"/>
                       </a:endParaRPr>
                     </a:p>
                   </a:txBody>
-                  <a:tcPr marL="91440" marR="91440" marT="45720" marB="45720">
+                  <a:tcPr>
                     <a:lnL w="6350" cap="flat" cmpd="sng" algn="ctr">
                       <a:solidFill>
                         <a:srgbClr val="3498DB"/>
@@ -8928,7 +8940,7 @@
                     <a:bodyPr/>
                     <a:lstStyle/>
                     <a:p>
-                      <a:pPr indent="0" marL="0">
+                      <a:pPr marL="0" indent="0">
                         <a:buNone/>
                       </a:pPr>
                       <a:r>
@@ -8936,20 +8948,20 @@
                           <a:solidFill>
                             <a:srgbClr val="2C3E50"/>
                           </a:solidFill>
-                          <a:latin typeface="Microsoft YaHei" pitchFamily="34" charset="0"/>
-                          <a:ea typeface="Microsoft YaHei" pitchFamily="34" charset="-122"/>
-                          <a:cs typeface="Microsoft YaHei" pitchFamily="34" charset="-120"/>
+                          <a:latin typeface="微软雅黑" panose="020B0503020204020204" pitchFamily="34" charset="-122"/>
+                          <a:ea typeface="微软雅黑" panose="020B0503020204020204" pitchFamily="34" charset="-122"/>
+                          <a:cs typeface="微软雅黑" panose="020B0503020204020204" pitchFamily="34" charset="-120"/>
                         </a:rPr>
                         <a:t>70-80%</a:t>
                       </a:r>
                       <a:endParaRPr lang="en-US" sz="1500" dirty="0">
-                        <a:latin typeface="Microsoft YaHei" charset="0"/>
-                        <a:ea typeface="Microsoft YaHei" charset="0"/>
-                        <a:cs typeface="Microsoft YaHei" charset="0"/>
+                        <a:latin typeface="微软雅黑" panose="020B0503020204020204" pitchFamily="34" charset="-122"/>
+                        <a:ea typeface="微软雅黑" panose="020B0503020204020204" pitchFamily="34" charset="-122"/>
+                        <a:cs typeface="微软雅黑" panose="020B0503020204020204" pitchFamily="34" charset="-122"/>
                       </a:endParaRPr>
                     </a:p>
                   </a:txBody>
-                  <a:tcPr marL="91440" marR="91440" marT="45720" marB="45720">
+                  <a:tcPr>
                     <a:lnL w="6350" cap="flat" cmpd="sng" algn="ctr">
                       <a:solidFill>
                         <a:srgbClr val="3498DB"/>
@@ -8993,7 +9005,7 @@
                     <a:bodyPr/>
                     <a:lstStyle/>
                     <a:p>
-                      <a:pPr indent="0" marL="0">
+                      <a:pPr marL="0" indent="0">
                         <a:buNone/>
                       </a:pPr>
                       <a:r>
@@ -9001,20 +9013,20 @@
                           <a:solidFill>
                             <a:srgbClr val="E74C3C"/>
                           </a:solidFill>
-                          <a:latin typeface="Microsoft YaHei" pitchFamily="34" charset="0"/>
-                          <a:ea typeface="Microsoft YaHei" pitchFamily="34" charset="-122"/>
-                          <a:cs typeface="Microsoft YaHei" pitchFamily="34" charset="-120"/>
+                          <a:latin typeface="微软雅黑" panose="020B0503020204020204" pitchFamily="34" charset="-122"/>
+                          <a:ea typeface="微软雅黑" panose="020B0503020204020204" pitchFamily="34" charset="-122"/>
+                          <a:cs typeface="微软雅黑" panose="020B0503020204020204" pitchFamily="34" charset="-120"/>
                         </a:rPr>
                         <a:t>80%</a:t>
                       </a:r>
                       <a:endParaRPr lang="en-US" sz="1500" dirty="0">
-                        <a:latin typeface="Microsoft YaHei" charset="0"/>
-                        <a:ea typeface="Microsoft YaHei" charset="0"/>
-                        <a:cs typeface="Microsoft YaHei" charset="0"/>
+                        <a:latin typeface="微软雅黑" panose="020B0503020204020204" pitchFamily="34" charset="-122"/>
+                        <a:ea typeface="微软雅黑" panose="020B0503020204020204" pitchFamily="34" charset="-122"/>
+                        <a:cs typeface="微软雅黑" panose="020B0503020204020204" pitchFamily="34" charset="-122"/>
                       </a:endParaRPr>
                     </a:p>
                   </a:txBody>
-                  <a:tcPr marL="91440" marR="91440" marT="45720" marB="45720">
+                  <a:tcPr>
                     <a:lnL w="6350" cap="flat" cmpd="sng" algn="ctr">
                       <a:solidFill>
                         <a:srgbClr val="3498DB"/>
@@ -9058,7 +9070,7 @@
                     <a:bodyPr/>
                     <a:lstStyle/>
                     <a:p>
-                      <a:pPr indent="0" marL="0">
+                      <a:pPr marL="0" indent="0">
                         <a:buNone/>
                       </a:pPr>
                       <a:r>
@@ -9066,20 +9078,20 @@
                           <a:solidFill>
                             <a:srgbClr val="E74C3C"/>
                           </a:solidFill>
-                          <a:latin typeface="Microsoft YaHei" pitchFamily="34" charset="0"/>
-                          <a:ea typeface="Microsoft YaHei" pitchFamily="34" charset="-122"/>
-                          <a:cs typeface="Microsoft YaHei" pitchFamily="34" charset="-120"/>
+                          <a:latin typeface="微软雅黑" panose="020B0503020204020204" pitchFamily="34" charset="-122"/>
+                          <a:ea typeface="微软雅黑" panose="020B0503020204020204" pitchFamily="34" charset="-122"/>
+                          <a:cs typeface="微软雅黑" panose="020B0503020204020204" pitchFamily="34" charset="-120"/>
                         </a:rPr>
                         <a:t>80%</a:t>
                       </a:r>
                       <a:endParaRPr lang="en-US" sz="1500" dirty="0">
-                        <a:latin typeface="Microsoft YaHei" charset="0"/>
-                        <a:ea typeface="Microsoft YaHei" charset="0"/>
-                        <a:cs typeface="Microsoft YaHei" charset="0"/>
+                        <a:latin typeface="微软雅黑" panose="020B0503020204020204" pitchFamily="34" charset="-122"/>
+                        <a:ea typeface="微软雅黑" panose="020B0503020204020204" pitchFamily="34" charset="-122"/>
+                        <a:cs typeface="微软雅黑" panose="020B0503020204020204" pitchFamily="34" charset="-122"/>
                       </a:endParaRPr>
                     </a:p>
                   </a:txBody>
-                  <a:tcPr marL="91440" marR="91440" marT="45720" marB="45720">
+                  <a:tcPr>
                     <a:lnL w="6350" cap="flat" cmpd="sng" algn="ctr">
                       <a:solidFill>
                         <a:srgbClr val="3498DB"/>
@@ -9125,7 +9137,7 @@
                     <a:bodyPr/>
                     <a:lstStyle/>
                     <a:p>
-                      <a:pPr indent="0" marL="0">
+                      <a:pPr marL="0" indent="0">
                         <a:buNone/>
                       </a:pPr>
                       <a:r>
@@ -9133,20 +9145,20 @@
                           <a:solidFill>
                             <a:srgbClr val="FFFFFF"/>
                           </a:solidFill>
-                          <a:latin typeface="Microsoft YaHei" pitchFamily="34" charset="0"/>
-                          <a:ea typeface="Microsoft YaHei" pitchFamily="34" charset="-122"/>
-                          <a:cs typeface="Microsoft YaHei" pitchFamily="34" charset="-120"/>
+                          <a:latin typeface="微软雅黑" panose="020B0503020204020204" pitchFamily="34" charset="-122"/>
+                          <a:ea typeface="微软雅黑" panose="020B0503020204020204" pitchFamily="34" charset="-122"/>
+                          <a:cs typeface="微软雅黑" panose="020B0503020204020204" pitchFamily="34" charset="-120"/>
                         </a:rPr>
                         <a:t>呈现时间</a:t>
                       </a:r>
                       <a:endParaRPr lang="en-US" sz="1500" dirty="0">
-                        <a:latin typeface="Microsoft YaHei" charset="0"/>
-                        <a:ea typeface="Microsoft YaHei" charset="0"/>
-                        <a:cs typeface="Microsoft YaHei" charset="0"/>
+                        <a:latin typeface="微软雅黑" panose="020B0503020204020204" pitchFamily="34" charset="-122"/>
+                        <a:ea typeface="微软雅黑" panose="020B0503020204020204" pitchFamily="34" charset="-122"/>
+                        <a:cs typeface="微软雅黑" panose="020B0503020204020204" pitchFamily="34" charset="-122"/>
                       </a:endParaRPr>
                     </a:p>
                   </a:txBody>
-                  <a:tcPr marL="91440" marR="91440" marT="45720" marB="45720">
+                  <a:tcPr>
                     <a:lnL w="6350" cap="flat" cmpd="sng" algn="ctr">
                       <a:solidFill>
                         <a:srgbClr val="3498DB"/>
@@ -9193,7 +9205,7 @@
                     <a:bodyPr/>
                     <a:lstStyle/>
                     <a:p>
-                      <a:pPr indent="0" marL="0">
+                      <a:pPr marL="0" indent="0">
                         <a:buNone/>
                       </a:pPr>
                       <a:r>
@@ -9201,20 +9213,20 @@
                           <a:solidFill>
                             <a:srgbClr val="2C3E50"/>
                           </a:solidFill>
-                          <a:latin typeface="Microsoft YaHei" pitchFamily="34" charset="0"/>
-                          <a:ea typeface="Microsoft YaHei" pitchFamily="34" charset="-122"/>
-                          <a:cs typeface="Microsoft YaHei" pitchFamily="34" charset="-120"/>
+                          <a:latin typeface="微软雅黑" panose="020B0503020204020204" pitchFamily="34" charset="-122"/>
+                          <a:ea typeface="微软雅黑" panose="020B0503020204020204" pitchFamily="34" charset="-122"/>
+                          <a:cs typeface="微软雅黑" panose="020B0503020204020204" pitchFamily="34" charset="-120"/>
                         </a:rPr>
                         <a:t>1500ms</a:t>
                       </a:r>
                       <a:endParaRPr lang="en-US" sz="1500" dirty="0">
-                        <a:latin typeface="Microsoft YaHei" charset="0"/>
-                        <a:ea typeface="Microsoft YaHei" charset="0"/>
-                        <a:cs typeface="Microsoft YaHei" charset="0"/>
+                        <a:latin typeface="微软雅黑" panose="020B0503020204020204" pitchFamily="34" charset="-122"/>
+                        <a:ea typeface="微软雅黑" panose="020B0503020204020204" pitchFamily="34" charset="-122"/>
+                        <a:cs typeface="微软雅黑" panose="020B0503020204020204" pitchFamily="34" charset="-122"/>
                       </a:endParaRPr>
                     </a:p>
                   </a:txBody>
-                  <a:tcPr marL="91440" marR="91440" marT="45720" marB="45720">
+                  <a:tcPr>
                     <a:lnL w="6350" cap="flat" cmpd="sng" algn="ctr">
                       <a:solidFill>
                         <a:srgbClr val="3498DB"/>
@@ -9258,7 +9270,7 @@
                     <a:bodyPr/>
                     <a:lstStyle/>
                     <a:p>
-                      <a:pPr indent="0" marL="0">
+                      <a:pPr marL="0" indent="0">
                         <a:buNone/>
                       </a:pPr>
                       <a:r>
@@ -9266,20 +9278,20 @@
                           <a:solidFill>
                             <a:srgbClr val="2C3E50"/>
                           </a:solidFill>
-                          <a:latin typeface="Microsoft YaHei" pitchFamily="34" charset="0"/>
-                          <a:ea typeface="Microsoft YaHei" pitchFamily="34" charset="-122"/>
-                          <a:cs typeface="Microsoft YaHei" pitchFamily="34" charset="-120"/>
+                          <a:latin typeface="微软雅黑" panose="020B0503020204020204" pitchFamily="34" charset="-122"/>
+                          <a:ea typeface="微软雅黑" panose="020B0503020204020204" pitchFamily="34" charset="-122"/>
+                          <a:cs typeface="微软雅黑" panose="020B0503020204020204" pitchFamily="34" charset="-120"/>
                         </a:rPr>
                         <a:t>1400-1200ms</a:t>
                       </a:r>
                       <a:endParaRPr lang="en-US" sz="1500" dirty="0">
-                        <a:latin typeface="Microsoft YaHei" charset="0"/>
-                        <a:ea typeface="Microsoft YaHei" charset="0"/>
-                        <a:cs typeface="Microsoft YaHei" charset="0"/>
+                        <a:latin typeface="微软雅黑" panose="020B0503020204020204" pitchFamily="34" charset="-122"/>
+                        <a:ea typeface="微软雅黑" panose="020B0503020204020204" pitchFamily="34" charset="-122"/>
+                        <a:cs typeface="微软雅黑" panose="020B0503020204020204" pitchFamily="34" charset="-122"/>
                       </a:endParaRPr>
                     </a:p>
                   </a:txBody>
-                  <a:tcPr marL="91440" marR="91440" marT="45720" marB="45720">
+                  <a:tcPr>
                     <a:lnL w="6350" cap="flat" cmpd="sng" algn="ctr">
                       <a:solidFill>
                         <a:srgbClr val="3498DB"/>
@@ -9323,7 +9335,7 @@
                     <a:bodyPr/>
                     <a:lstStyle/>
                     <a:p>
-                      <a:pPr indent="0" marL="0">
+                      <a:pPr marL="0" indent="0">
                         <a:buNone/>
                       </a:pPr>
                       <a:r>
@@ -9331,20 +9343,20 @@
                           <a:solidFill>
                             <a:srgbClr val="7F8C8D"/>
                           </a:solidFill>
-                          <a:latin typeface="Microsoft YaHei" pitchFamily="34" charset="0"/>
-                          <a:ea typeface="Microsoft YaHei" pitchFamily="34" charset="-122"/>
-                          <a:cs typeface="Microsoft YaHei" pitchFamily="34" charset="-120"/>
+                          <a:latin typeface="微软雅黑" panose="020B0503020204020204" pitchFamily="34" charset="-122"/>
+                          <a:ea typeface="微软雅黑" panose="020B0503020204020204" pitchFamily="34" charset="-122"/>
+                          <a:cs typeface="微软雅黑" panose="020B0503020204020204" pitchFamily="34" charset="-120"/>
                         </a:rPr>
                         <a:t>1500ms</a:t>
                       </a:r>
                       <a:endParaRPr lang="en-US" sz="1500" dirty="0">
-                        <a:latin typeface="Microsoft YaHei" charset="0"/>
-                        <a:ea typeface="Microsoft YaHei" charset="0"/>
-                        <a:cs typeface="Microsoft YaHei" charset="0"/>
+                        <a:latin typeface="微软雅黑" panose="020B0503020204020204" pitchFamily="34" charset="-122"/>
+                        <a:ea typeface="微软雅黑" panose="020B0503020204020204" pitchFamily="34" charset="-122"/>
+                        <a:cs typeface="微软雅黑" panose="020B0503020204020204" pitchFamily="34" charset="-122"/>
                       </a:endParaRPr>
                     </a:p>
                   </a:txBody>
-                  <a:tcPr marL="91440" marR="91440" marT="45720" marB="45720">
+                  <a:tcPr>
                     <a:lnL w="6350" cap="flat" cmpd="sng" algn="ctr">
                       <a:solidFill>
                         <a:srgbClr val="3498DB"/>
@@ -9388,7 +9400,7 @@
                     <a:bodyPr/>
                     <a:lstStyle/>
                     <a:p>
-                      <a:pPr indent="0" marL="0">
+                      <a:pPr marL="0" indent="0">
                         <a:buNone/>
                       </a:pPr>
                       <a:r>
@@ -9396,20 +9408,20 @@
                           <a:solidFill>
                             <a:srgbClr val="2C3E50"/>
                           </a:solidFill>
-                          <a:latin typeface="Microsoft YaHei" pitchFamily="34" charset="0"/>
-                          <a:ea typeface="Microsoft YaHei" pitchFamily="34" charset="-122"/>
-                          <a:cs typeface="Microsoft YaHei" pitchFamily="34" charset="-120"/>
+                          <a:latin typeface="微软雅黑" panose="020B0503020204020204" pitchFamily="34" charset="-122"/>
+                          <a:ea typeface="微软雅黑" panose="020B0503020204020204" pitchFamily="34" charset="-122"/>
+                          <a:cs typeface="微软雅黑" panose="020B0503020204020204" pitchFamily="34" charset="-120"/>
                         </a:rPr>
                         <a:t>1400-1200ms</a:t>
                       </a:r>
                       <a:endParaRPr lang="en-US" sz="1500" dirty="0">
-                        <a:latin typeface="Microsoft YaHei" charset="0"/>
-                        <a:ea typeface="Microsoft YaHei" charset="0"/>
-                        <a:cs typeface="Microsoft YaHei" charset="0"/>
+                        <a:latin typeface="微软雅黑" panose="020B0503020204020204" pitchFamily="34" charset="-122"/>
+                        <a:ea typeface="微软雅黑" panose="020B0503020204020204" pitchFamily="34" charset="-122"/>
+                        <a:cs typeface="微软雅黑" panose="020B0503020204020204" pitchFamily="34" charset="-122"/>
                       </a:endParaRPr>
                     </a:p>
                   </a:txBody>
-                  <a:tcPr marL="91440" marR="91440" marT="45720" marB="45720">
+                  <a:tcPr>
                     <a:lnL w="6350" cap="flat" cmpd="sng" algn="ctr">
                       <a:solidFill>
                         <a:srgbClr val="3498DB"/>
@@ -9453,7 +9465,7 @@
                     <a:bodyPr/>
                     <a:lstStyle/>
                     <a:p>
-                      <a:pPr indent="0" marL="0">
+                      <a:pPr marL="0" indent="0">
                         <a:buNone/>
                       </a:pPr>
                       <a:r>
@@ -9461,20 +9473,20 @@
                           <a:solidFill>
                             <a:srgbClr val="2C3E50"/>
                           </a:solidFill>
-                          <a:latin typeface="Microsoft YaHei" pitchFamily="34" charset="0"/>
-                          <a:ea typeface="Microsoft YaHei" pitchFamily="34" charset="-122"/>
-                          <a:cs typeface="Microsoft YaHei" pitchFamily="34" charset="-120"/>
+                          <a:latin typeface="微软雅黑" panose="020B0503020204020204" pitchFamily="34" charset="-122"/>
+                          <a:ea typeface="微软雅黑" panose="020B0503020204020204" pitchFamily="34" charset="-122"/>
+                          <a:cs typeface="微软雅黑" panose="020B0503020204020204" pitchFamily="34" charset="-120"/>
                         </a:rPr>
                         <a:t>1100-800ms</a:t>
                       </a:r>
                       <a:endParaRPr lang="en-US" sz="1500" dirty="0">
-                        <a:latin typeface="Microsoft YaHei" charset="0"/>
-                        <a:ea typeface="Microsoft YaHei" charset="0"/>
-                        <a:cs typeface="Microsoft YaHei" charset="0"/>
+                        <a:latin typeface="微软雅黑" panose="020B0503020204020204" pitchFamily="34" charset="-122"/>
+                        <a:ea typeface="微软雅黑" panose="020B0503020204020204" pitchFamily="34" charset="-122"/>
+                        <a:cs typeface="微软雅黑" panose="020B0503020204020204" pitchFamily="34" charset="-122"/>
                       </a:endParaRPr>
                     </a:p>
                   </a:txBody>
-                  <a:tcPr marL="91440" marR="91440" marT="45720" marB="45720">
+                  <a:tcPr>
                     <a:lnL w="6350" cap="flat" cmpd="sng" algn="ctr">
                       <a:solidFill>
                         <a:srgbClr val="3498DB"/>
@@ -9518,7 +9530,7 @@
                     <a:bodyPr/>
                     <a:lstStyle/>
                     <a:p>
-                      <a:pPr indent="0" marL="0">
+                      <a:pPr marL="0" indent="0">
                         <a:buNone/>
                       </a:pPr>
                       <a:r>
@@ -9526,20 +9538,20 @@
                           <a:solidFill>
                             <a:srgbClr val="E74C3C"/>
                           </a:solidFill>
-                          <a:latin typeface="Microsoft YaHei" pitchFamily="34" charset="0"/>
-                          <a:ea typeface="Microsoft YaHei" pitchFamily="34" charset="-122"/>
-                          <a:cs typeface="Microsoft YaHei" pitchFamily="34" charset="-120"/>
+                          <a:latin typeface="微软雅黑" panose="020B0503020204020204" pitchFamily="34" charset="-122"/>
+                          <a:ea typeface="微软雅黑" panose="020B0503020204020204" pitchFamily="34" charset="-122"/>
+                          <a:cs typeface="微软雅黑" panose="020B0503020204020204" pitchFamily="34" charset="-120"/>
                         </a:rPr>
                         <a:t>700ms</a:t>
                       </a:r>
                       <a:endParaRPr lang="en-US" sz="1500" dirty="0">
-                        <a:latin typeface="Microsoft YaHei" charset="0"/>
-                        <a:ea typeface="Microsoft YaHei" charset="0"/>
-                        <a:cs typeface="Microsoft YaHei" charset="0"/>
+                        <a:latin typeface="微软雅黑" panose="020B0503020204020204" pitchFamily="34" charset="-122"/>
+                        <a:ea typeface="微软雅黑" panose="020B0503020204020204" pitchFamily="34" charset="-122"/>
+                        <a:cs typeface="微软雅黑" panose="020B0503020204020204" pitchFamily="34" charset="-122"/>
                       </a:endParaRPr>
                     </a:p>
                   </a:txBody>
-                  <a:tcPr marL="91440" marR="91440" marT="45720" marB="45720">
+                  <a:tcPr>
                     <a:lnL w="6350" cap="flat" cmpd="sng" algn="ctr">
                       <a:solidFill>
                         <a:srgbClr val="3498DB"/>
@@ -9583,7 +9595,7 @@
                     <a:bodyPr/>
                     <a:lstStyle/>
                     <a:p>
-                      <a:pPr indent="0" marL="0">
+                      <a:pPr marL="0" indent="0">
                         <a:buNone/>
                       </a:pPr>
                       <a:r>
@@ -9591,20 +9603,20 @@
                           <a:solidFill>
                             <a:srgbClr val="E74C3C"/>
                           </a:solidFill>
-                          <a:latin typeface="Microsoft YaHei" pitchFamily="34" charset="0"/>
-                          <a:ea typeface="Microsoft YaHei" pitchFamily="34" charset="-122"/>
-                          <a:cs typeface="Microsoft YaHei" pitchFamily="34" charset="-120"/>
+                          <a:latin typeface="微软雅黑" panose="020B0503020204020204" pitchFamily="34" charset="-122"/>
+                          <a:ea typeface="微软雅黑" panose="020B0503020204020204" pitchFamily="34" charset="-122"/>
+                          <a:cs typeface="微软雅黑" panose="020B0503020204020204" pitchFamily="34" charset="-120"/>
                         </a:rPr>
                         <a:t>700-500ms</a:t>
                       </a:r>
                       <a:endParaRPr lang="en-US" sz="1500" dirty="0">
-                        <a:latin typeface="Microsoft YaHei" charset="0"/>
-                        <a:ea typeface="Microsoft YaHei" charset="0"/>
-                        <a:cs typeface="Microsoft YaHei" charset="0"/>
+                        <a:latin typeface="微软雅黑" panose="020B0503020204020204" pitchFamily="34" charset="-122"/>
+                        <a:ea typeface="微软雅黑" panose="020B0503020204020204" pitchFamily="34" charset="-122"/>
+                        <a:cs typeface="微软雅黑" panose="020B0503020204020204" pitchFamily="34" charset="-122"/>
                       </a:endParaRPr>
                     </a:p>
                   </a:txBody>
-                  <a:tcPr marL="91440" marR="91440" marT="45720" marB="45720">
+                  <a:tcPr>
                     <a:lnL w="6350" cap="flat" cmpd="sng" algn="ctr">
                       <a:solidFill>
                         <a:srgbClr val="3498DB"/>
@@ -9663,13 +9675,12 @@
             <a:avLst/>
           </a:prstGeom>
           <a:noFill/>
-          <a:ln/>
         </p:spPr>
         <p:txBody>
           <a:bodyPr wrap="square" rtlCol="0" anchor="ctr"/>
           <a:lstStyle/>
           <a:p>
-            <a:pPr indent="0" marL="0">
+            <a:pPr marL="0" indent="0">
               <a:buNone/>
             </a:pPr>
             <a:r>
@@ -9677,9 +9688,9 @@
                 <a:solidFill>
                   <a:srgbClr val="7F8C8D"/>
                 </a:solidFill>
-                <a:latin typeface="Microsoft YaHei" pitchFamily="34" charset="0"/>
-                <a:ea typeface="Microsoft YaHei" pitchFamily="34" charset="-122"/>
-                <a:cs typeface="Microsoft YaHei" pitchFamily="34" charset="-120"/>
+                <a:latin typeface="微软雅黑" panose="020B0503020204020204" pitchFamily="34" charset="-122"/>
+                <a:ea typeface="微软雅黑" panose="020B0503020204020204" pitchFamily="34" charset="-122"/>
+                <a:cs typeface="微软雅黑" panose="020B0503020204020204" pitchFamily="34" charset="-120"/>
               </a:rPr>
               <a:t>灰色删除线 = 新会话从初始值重新开始   红色 = 高强度难度区间</a:t>
             </a:r>
@@ -9706,7 +9717,6 @@
           <a:solidFill>
             <a:srgbClr val="ECF0F1"/>
           </a:solidFill>
-          <a:ln/>
         </p:spPr>
       </p:sp>
       <p:sp>
@@ -9724,13 +9734,12 @@
             <a:avLst/>
           </a:prstGeom>
           <a:noFill/>
-          <a:ln/>
         </p:spPr>
         <p:txBody>
           <a:bodyPr wrap="square" rtlCol="0" anchor="t"/>
           <a:lstStyle/>
           <a:p>
-            <a:pPr indent="0" marL="0">
+            <a:pPr marL="0" indent="0">
               <a:buNone/>
             </a:pPr>
             <a:r>
@@ -9738,16 +9747,23 @@
                 <a:solidFill>
                   <a:srgbClr val="3498DB"/>
                 </a:solidFill>
-                <a:latin typeface="Microsoft YaHei" pitchFamily="34" charset="0"/>
-                <a:ea typeface="Microsoft YaHei" pitchFamily="34" charset="-122"/>
-                <a:cs typeface="Microsoft YaHei" pitchFamily="34" charset="-120"/>
+                <a:latin typeface="微软雅黑" panose="020B0503020204020204" pitchFamily="34" charset="-122"/>
+                <a:ea typeface="微软雅黑" panose="020B0503020204020204" pitchFamily="34" charset="-122"/>
+                <a:cs typeface="微软雅黑" panose="020B0503020204020204" pitchFamily="34" charset="-120"/>
               </a:rPr>
               <a:t>难度攀爬节奏</a:t>
             </a:r>
-            <a:pPr indent="0" marL="0">
-              <a:buNone/>
-            </a:pPr>
-            <a:pPr indent="0" marL="0">
+            <a:endParaRPr lang="en-US" sz="1800" b="1" dirty="0">
+              <a:solidFill>
+                <a:srgbClr val="3498DB"/>
+              </a:solidFill>
+              <a:latin typeface="微软雅黑" panose="020B0503020204020204" pitchFamily="34" charset="-122"/>
+              <a:ea typeface="微软雅黑" panose="020B0503020204020204" pitchFamily="34" charset="-122"/>
+              <a:cs typeface="微软雅黑" panose="020B0503020204020204" pitchFamily="34" charset="-120"/>
+            </a:endParaRPr>
+          </a:p>
+          <a:p>
+            <a:pPr marL="0" indent="0">
               <a:buNone/>
             </a:pPr>
             <a:r>
@@ -9755,13 +9771,23 @@
                 <a:solidFill>
                   <a:srgbClr val="2C3E50"/>
                 </a:solidFill>
-                <a:latin typeface="Microsoft YaHei" pitchFamily="34" charset="0"/>
-                <a:ea typeface="Microsoft YaHei" pitchFamily="34" charset="-122"/>
-                <a:cs typeface="Microsoft YaHei" pitchFamily="34" charset="-120"/>
+                <a:latin typeface="微软雅黑" panose="020B0503020204020204" pitchFamily="34" charset="-122"/>
+                <a:ea typeface="微软雅黑" panose="020B0503020204020204" pitchFamily="34" charset="-122"/>
+                <a:cs typeface="微软雅黑" panose="020B0503020204020204" pitchFamily="34" charset="-120"/>
               </a:rPr>
               <a:t>• 前4次：难度恒定50%/1500ms（算法bug已修复，现已支持跨会话继承）</a:t>
             </a:r>
-            <a:pPr indent="0" marL="0">
+            <a:endParaRPr lang="en-US" sz="1500" dirty="0">
+              <a:solidFill>
+                <a:srgbClr val="2C3E50"/>
+              </a:solidFill>
+              <a:latin typeface="微软雅黑" panose="020B0503020204020204" pitchFamily="34" charset="-122"/>
+              <a:ea typeface="微软雅黑" panose="020B0503020204020204" pitchFamily="34" charset="-122"/>
+              <a:cs typeface="微软雅黑" panose="020B0503020204020204" pitchFamily="34" charset="-120"/>
+            </a:endParaRPr>
+          </a:p>
+          <a:p>
+            <a:pPr marL="0" indent="0">
               <a:buNone/>
             </a:pPr>
             <a:r>
@@ -9769,13 +9795,23 @@
                 <a:solidFill>
                   <a:srgbClr val="2C3E50"/>
                 </a:solidFill>
-                <a:latin typeface="Microsoft YaHei" pitchFamily="34" charset="0"/>
-                <a:ea typeface="Microsoft YaHei" pitchFamily="34" charset="-122"/>
-                <a:cs typeface="Microsoft YaHei" pitchFamily="34" charset="-120"/>
+                <a:latin typeface="微软雅黑" panose="020B0503020204020204" pitchFamily="34" charset="-122"/>
+                <a:ea typeface="微软雅黑" panose="020B0503020204020204" pitchFamily="34" charset="-122"/>
+                <a:cs typeface="微软雅黑" panose="020B0503020204020204" pitchFamily="34" charset="-120"/>
               </a:rPr>
               <a:t>• 第5-8次：难度逐次攀升，每次上调约5% + 减少100ms</a:t>
             </a:r>
-            <a:pPr indent="0" marL="0">
+            <a:endParaRPr lang="en-US" sz="1500" dirty="0">
+              <a:solidFill>
+                <a:srgbClr val="2C3E50"/>
+              </a:solidFill>
+              <a:latin typeface="微软雅黑" panose="020B0503020204020204" pitchFamily="34" charset="-122"/>
+              <a:ea typeface="微软雅黑" panose="020B0503020204020204" pitchFamily="34" charset="-122"/>
+              <a:cs typeface="微软雅黑" panose="020B0503020204020204" pitchFamily="34" charset="-120"/>
+            </a:endParaRPr>
+          </a:p>
+          <a:p>
+            <a:pPr marL="0" indent="0">
               <a:buNone/>
             </a:pPr>
             <a:r>
@@ -9783,9 +9819,9 @@
                 <a:solidFill>
                   <a:srgbClr val="2C3E50"/>
                 </a:solidFill>
-                <a:latin typeface="Microsoft YaHei" pitchFamily="34" charset="0"/>
-                <a:ea typeface="Microsoft YaHei" pitchFamily="34" charset="-122"/>
-                <a:cs typeface="Microsoft YaHei" pitchFamily="34" charset="-120"/>
+                <a:latin typeface="微软雅黑" panose="020B0503020204020204" pitchFamily="34" charset="-122"/>
+                <a:ea typeface="微软雅黑" panose="020B0503020204020204" pitchFamily="34" charset="-122"/>
+                <a:cs typeface="微软雅黑" panose="020B0503020204020204" pitchFamily="34" charset="-120"/>
               </a:rPr>
               <a:t>• 第9-10次：稳定在80%干扰，呈现时间继续压缩至500ms极限</a:t>
             </a:r>
@@ -9803,7 +9839,7 @@
 
 <file path=ppt/slides/slide9.xml><?xml version="1.0" encoding="utf-8"?>
 <p:sld xmlns:a="http://schemas.openxmlformats.org/drawingml/2006/main" xmlns:r="http://schemas.openxmlformats.org/officeDocument/2006/relationships" xmlns:p="http://schemas.openxmlformats.org/presentationml/2006/main">
-  <p:cSld name="Slide 9">
+  <p:cSld>
     <p:spTree>
       <p:nvGrpSpPr>
         <p:cNvPr id="1" name=""/>
@@ -9833,13 +9869,12 @@
             <a:avLst/>
           </a:prstGeom>
           <a:noFill/>
-          <a:ln/>
         </p:spPr>
         <p:txBody>
           <a:bodyPr wrap="square" rtlCol="0" anchor="ctr"/>
           <a:lstStyle/>
           <a:p>
-            <a:pPr indent="0" marL="0">
+            <a:pPr marL="0" indent="0">
               <a:buNone/>
             </a:pPr>
             <a:r>
@@ -9847,9 +9882,9 @@
                 <a:solidFill>
                   <a:srgbClr val="2C3E50"/>
                 </a:solidFill>
-                <a:latin typeface="Microsoft YaHei" pitchFamily="34" charset="0"/>
-                <a:ea typeface="Microsoft YaHei" pitchFamily="34" charset="-122"/>
-                <a:cs typeface="Microsoft YaHei" pitchFamily="34" charset="-120"/>
+                <a:latin typeface="微软雅黑" panose="020B0503020204020204" pitchFamily="34" charset="-122"/>
+                <a:ea typeface="微软雅黑" panose="020B0503020204020204" pitchFamily="34" charset="-122"/>
+                <a:cs typeface="微软雅黑" panose="020B0503020204020204" pitchFamily="34" charset="-120"/>
               </a:rPr>
               <a:t>个性化验证：难度是我的「最近发展区」</a:t>
             </a:r>
@@ -9886,17 +9921,11 @@
           <p:cNvGraphicFramePr>
             <a:graphicFrameLocks noGrp="1"/>
           </p:cNvGraphicFramePr>
-          <p:nvPr>
-            <p:extLst>
-              <p:ext uri="{D42A27DB-BD31-4B8C-83A1-F6EECF244321}">
-                <p14:modId xmlns:p14="http://schemas.microsoft.com/office/powerpoint/2010/main" val="1579011935"/>
-              </p:ext>
-            </p:extLst>
-          </p:nvPr>
+          <p:nvPr/>
         </p:nvGraphicFramePr>
         <p:xfrm>
           <a:off x="548640" y="1371600"/>
-          <a:ext cx="10972800" cy="914400"/>
+          <a:ext cx="10972800" cy="3154680"/>
         </p:xfrm>
         <a:graphic>
           <a:graphicData uri="http://schemas.openxmlformats.org/drawingml/2006/table">
@@ -9913,7 +9942,7 @@
                     <a:bodyPr/>
                     <a:lstStyle/>
                     <a:p>
-                      <a:pPr indent="0" marL="0">
+                      <a:pPr marL="0" indent="0">
                         <a:buNone/>
                       </a:pPr>
                       <a:r>
@@ -9921,20 +9950,20 @@
                           <a:solidFill>
                             <a:srgbClr val="FFFFFF"/>
                           </a:solidFill>
-                          <a:latin typeface="Microsoft YaHei" pitchFamily="34" charset="0"/>
-                          <a:ea typeface="Microsoft YaHei" pitchFamily="34" charset="-122"/>
-                          <a:cs typeface="Microsoft YaHei" pitchFamily="34" charset="-120"/>
+                          <a:latin typeface="微软雅黑" panose="020B0503020204020204" pitchFamily="34" charset="-122"/>
+                          <a:ea typeface="微软雅黑" panose="020B0503020204020204" pitchFamily="34" charset="-122"/>
+                          <a:cs typeface="微软雅黑" panose="020B0503020204020204" pitchFamily="34" charset="-120"/>
                         </a:rPr>
                         <a:t>对比维度</a:t>
                       </a:r>
                       <a:endParaRPr lang="en-US" sz="1600" dirty="0">
-                        <a:latin typeface="Microsoft YaHei" charset="0"/>
-                        <a:ea typeface="Microsoft YaHei" charset="0"/>
-                        <a:cs typeface="Microsoft YaHei" charset="0"/>
+                        <a:latin typeface="微软雅黑" panose="020B0503020204020204" pitchFamily="34" charset="-122"/>
+                        <a:ea typeface="微软雅黑" panose="020B0503020204020204" pitchFamily="34" charset="-122"/>
+                        <a:cs typeface="微软雅黑" panose="020B0503020204020204" pitchFamily="34" charset="-122"/>
                       </a:endParaRPr>
                     </a:p>
                   </a:txBody>
-                  <a:tcPr marL="91440" marR="91440" marT="45720" marB="45720">
+                  <a:tcPr>
                     <a:lnL w="6350" cap="flat" cmpd="sng" algn="ctr">
                       <a:solidFill>
                         <a:srgbClr val="3498DB"/>
@@ -9981,7 +10010,7 @@
                     <a:bodyPr/>
                     <a:lstStyle/>
                     <a:p>
-                      <a:pPr indent="0" marL="0">
+                      <a:pPr marL="0" indent="0">
                         <a:buNone/>
                       </a:pPr>
                       <a:r>
@@ -9989,20 +10018,20 @@
                           <a:solidFill>
                             <a:srgbClr val="FFFFFF"/>
                           </a:solidFill>
-                          <a:latin typeface="Microsoft YaHei" pitchFamily="34" charset="0"/>
-                          <a:ea typeface="Microsoft YaHei" pitchFamily="34" charset="-122"/>
-                          <a:cs typeface="Microsoft YaHei" pitchFamily="34" charset="-120"/>
+                          <a:latin typeface="微软雅黑" panose="020B0503020204020204" pitchFamily="34" charset="-122"/>
+                          <a:ea typeface="微软雅黑" panose="020B0503020204020204" pitchFamily="34" charset="-122"/>
+                          <a:cs typeface="微软雅黑" panose="020B0503020204020204" pitchFamily="34" charset="-120"/>
                         </a:rPr>
                         <a:t>开发者本人（王熙）</a:t>
                       </a:r>
                       <a:endParaRPr lang="en-US" sz="1600" dirty="0">
-                        <a:latin typeface="Microsoft YaHei" charset="0"/>
-                        <a:ea typeface="Microsoft YaHei" charset="0"/>
-                        <a:cs typeface="Microsoft YaHei" charset="0"/>
+                        <a:latin typeface="微软雅黑" panose="020B0503020204020204" pitchFamily="34" charset="-122"/>
+                        <a:ea typeface="微软雅黑" panose="020B0503020204020204" pitchFamily="34" charset="-122"/>
+                        <a:cs typeface="微软雅黑" panose="020B0503020204020204" pitchFamily="34" charset="-122"/>
                       </a:endParaRPr>
                     </a:p>
                   </a:txBody>
-                  <a:tcPr marL="91440" marR="91440" marT="45720" marB="45720">
+                  <a:tcPr>
                     <a:lnL w="6350" cap="flat" cmpd="sng" algn="ctr">
                       <a:solidFill>
                         <a:srgbClr val="3498DB"/>
@@ -10049,7 +10078,7 @@
                     <a:bodyPr/>
                     <a:lstStyle/>
                     <a:p>
-                      <a:pPr indent="0" marL="0">
+                      <a:pPr marL="0" indent="0">
                         <a:buNone/>
                       </a:pPr>
                       <a:r>
@@ -10057,20 +10086,20 @@
                           <a:solidFill>
                             <a:srgbClr val="FFFFFF"/>
                           </a:solidFill>
-                          <a:latin typeface="Microsoft YaHei" pitchFamily="34" charset="0"/>
-                          <a:ea typeface="Microsoft YaHei" pitchFamily="34" charset="-122"/>
-                          <a:cs typeface="Microsoft YaHei" pitchFamily="34" charset="-120"/>
+                          <a:latin typeface="微软雅黑" panose="020B0503020204020204" pitchFamily="34" charset="-122"/>
+                          <a:ea typeface="微软雅黑" panose="020B0503020204020204" pitchFamily="34" charset="-122"/>
+                          <a:cs typeface="微软雅黑" panose="020B0503020204020204" pitchFamily="34" charset="-120"/>
                         </a:rPr>
                         <a:t>室友（未训练者）</a:t>
                       </a:r>
                       <a:endParaRPr lang="en-US" sz="1600" dirty="0">
-                        <a:latin typeface="Microsoft YaHei" charset="0"/>
-                        <a:ea typeface="Microsoft YaHei" charset="0"/>
-                        <a:cs typeface="Microsoft YaHei" charset="0"/>
+                        <a:latin typeface="微软雅黑" panose="020B0503020204020204" pitchFamily="34" charset="-122"/>
+                        <a:ea typeface="微软雅黑" panose="020B0503020204020204" pitchFamily="34" charset="-122"/>
+                        <a:cs typeface="微软雅黑" panose="020B0503020204020204" pitchFamily="34" charset="-122"/>
                       </a:endParaRPr>
                     </a:p>
                   </a:txBody>
-                  <a:tcPr marL="91440" marR="91440" marT="45720" marB="45720">
+                  <a:tcPr>
                     <a:lnL w="6350" cap="flat" cmpd="sng" algn="ctr">
                       <a:solidFill>
                         <a:srgbClr val="3498DB"/>
@@ -10119,7 +10148,7 @@
                     <a:bodyPr/>
                     <a:lstStyle/>
                     <a:p>
-                      <a:pPr indent="0" marL="0">
+                      <a:pPr marL="0" indent="0">
                         <a:buNone/>
                       </a:pPr>
                       <a:r>
@@ -10127,20 +10156,20 @@
                           <a:solidFill>
                             <a:srgbClr val="2C3E50"/>
                           </a:solidFill>
-                          <a:latin typeface="Microsoft YaHei" pitchFamily="34" charset="0"/>
-                          <a:ea typeface="Microsoft YaHei" pitchFamily="34" charset="-122"/>
-                          <a:cs typeface="Microsoft YaHei" pitchFamily="34" charset="-120"/>
+                          <a:latin typeface="微软雅黑" panose="020B0503020204020204" pitchFamily="34" charset="-122"/>
+                          <a:ea typeface="微软雅黑" panose="020B0503020204020204" pitchFamily="34" charset="-122"/>
+                          <a:cs typeface="微软雅黑" panose="020B0503020204020204" pitchFamily="34" charset="-120"/>
                         </a:rPr>
                         <a:t>训练经验</a:t>
                       </a:r>
                       <a:endParaRPr lang="en-US" sz="1600" dirty="0">
-                        <a:latin typeface="Microsoft YaHei" charset="0"/>
-                        <a:ea typeface="Microsoft YaHei" charset="0"/>
-                        <a:cs typeface="Microsoft YaHei" charset="0"/>
+                        <a:latin typeface="微软雅黑" panose="020B0503020204020204" pitchFamily="34" charset="-122"/>
+                        <a:ea typeface="微软雅黑" panose="020B0503020204020204" pitchFamily="34" charset="-122"/>
+                        <a:cs typeface="微软雅黑" panose="020B0503020204020204" pitchFamily="34" charset="-122"/>
                       </a:endParaRPr>
                     </a:p>
                   </a:txBody>
-                  <a:tcPr marL="91440" marR="91440" marT="45720" marB="45720">
+                  <a:tcPr>
                     <a:lnL w="6350" cap="flat" cmpd="sng" algn="ctr">
                       <a:solidFill>
                         <a:srgbClr val="3498DB"/>
@@ -10184,7 +10213,7 @@
                     <a:bodyPr/>
                     <a:lstStyle/>
                     <a:p>
-                      <a:pPr indent="0" marL="0">
+                      <a:pPr marL="0" indent="0">
                         <a:buNone/>
                       </a:pPr>
                       <a:r>
@@ -10192,20 +10221,20 @@
                           <a:solidFill>
                             <a:srgbClr val="2C3E50"/>
                           </a:solidFill>
-                          <a:latin typeface="Microsoft YaHei" pitchFamily="34" charset="0"/>
-                          <a:ea typeface="Microsoft YaHei" pitchFamily="34" charset="-122"/>
-                          <a:cs typeface="Microsoft YaHei" pitchFamily="34" charset="-120"/>
+                          <a:latin typeface="微软雅黑" panose="020B0503020204020204" pitchFamily="34" charset="-122"/>
+                          <a:ea typeface="微软雅黑" panose="020B0503020204020204" pitchFamily="34" charset="-122"/>
+                          <a:cs typeface="微软雅黑" panose="020B0503020204020204" pitchFamily="34" charset="-120"/>
                         </a:rPr>
                         <a:t>已完成9次训练（~200试次）</a:t>
                       </a:r>
                       <a:endParaRPr lang="en-US" sz="1600" dirty="0">
-                        <a:latin typeface="Microsoft YaHei" charset="0"/>
-                        <a:ea typeface="Microsoft YaHei" charset="0"/>
-                        <a:cs typeface="Microsoft YaHei" charset="0"/>
+                        <a:latin typeface="微软雅黑" panose="020B0503020204020204" pitchFamily="34" charset="-122"/>
+                        <a:ea typeface="微软雅黑" panose="020B0503020204020204" pitchFamily="34" charset="-122"/>
+                        <a:cs typeface="微软雅黑" panose="020B0503020204020204" pitchFamily="34" charset="-122"/>
                       </a:endParaRPr>
                     </a:p>
                   </a:txBody>
-                  <a:tcPr marL="91440" marR="91440" marT="45720" marB="45720">
+                  <a:tcPr>
                     <a:lnL w="6350" cap="flat" cmpd="sng" algn="ctr">
                       <a:solidFill>
                         <a:srgbClr val="3498DB"/>
@@ -10249,7 +10278,7 @@
                     <a:bodyPr/>
                     <a:lstStyle/>
                     <a:p>
-                      <a:pPr indent="0" marL="0">
+                      <a:pPr marL="0" indent="0">
                         <a:buNone/>
                       </a:pPr>
                       <a:r>
@@ -10257,20 +10286,20 @@
                           <a:solidFill>
                             <a:srgbClr val="2C3E50"/>
                           </a:solidFill>
-                          <a:latin typeface="Microsoft YaHei" pitchFamily="34" charset="0"/>
-                          <a:ea typeface="Microsoft YaHei" pitchFamily="34" charset="-122"/>
-                          <a:cs typeface="Microsoft YaHei" pitchFamily="34" charset="-120"/>
+                          <a:latin typeface="微软雅黑" panose="020B0503020204020204" pitchFamily="34" charset="-122"/>
+                          <a:ea typeface="微软雅黑" panose="020B0503020204020204" pitchFamily="34" charset="-122"/>
+                          <a:cs typeface="微软雅黑" panose="020B0503020204020204" pitchFamily="34" charset="-120"/>
                         </a:rPr>
                         <a:t>0次训练</a:t>
                       </a:r>
                       <a:endParaRPr lang="en-US" sz="1600" dirty="0">
-                        <a:latin typeface="Microsoft YaHei" charset="0"/>
-                        <a:ea typeface="Microsoft YaHei" charset="0"/>
-                        <a:cs typeface="Microsoft YaHei" charset="0"/>
+                        <a:latin typeface="微软雅黑" panose="020B0503020204020204" pitchFamily="34" charset="-122"/>
+                        <a:ea typeface="微软雅黑" panose="020B0503020204020204" pitchFamily="34" charset="-122"/>
+                        <a:cs typeface="微软雅黑" panose="020B0503020204020204" pitchFamily="34" charset="-122"/>
                       </a:endParaRPr>
                     </a:p>
                   </a:txBody>
-                  <a:tcPr marL="91440" marR="91440" marT="45720" marB="45720">
+                  <a:tcPr>
                     <a:lnL w="6350" cap="flat" cmpd="sng" algn="ctr">
                       <a:solidFill>
                         <a:srgbClr val="3498DB"/>
@@ -10316,7 +10345,7 @@
                     <a:bodyPr/>
                     <a:lstStyle/>
                     <a:p>
-                      <a:pPr indent="0" marL="0">
+                      <a:pPr marL="0" indent="0">
                         <a:buNone/>
                       </a:pPr>
                       <a:r>
@@ -10324,20 +10353,20 @@
                           <a:solidFill>
                             <a:srgbClr val="2C3E50"/>
                           </a:solidFill>
-                          <a:latin typeface="Microsoft YaHei" pitchFamily="34" charset="0"/>
-                          <a:ea typeface="Microsoft YaHei" pitchFamily="34" charset="-122"/>
-                          <a:cs typeface="Microsoft YaHei" pitchFamily="34" charset="-120"/>
+                          <a:latin typeface="微软雅黑" panose="020B0503020204020204" pitchFamily="34" charset="-122"/>
+                          <a:ea typeface="微软雅黑" panose="020B0503020204020204" pitchFamily="34" charset="-122"/>
+                          <a:cs typeface="微软雅黑" panose="020B0503020204020204" pitchFamily="34" charset="-120"/>
                         </a:rPr>
                         <a:t>测试难度</a:t>
                       </a:r>
                       <a:endParaRPr lang="en-US" sz="1600" dirty="0">
-                        <a:latin typeface="Microsoft YaHei" charset="0"/>
-                        <a:ea typeface="Microsoft YaHei" charset="0"/>
-                        <a:cs typeface="Microsoft YaHei" charset="0"/>
+                        <a:latin typeface="微软雅黑" panose="020B0503020204020204" pitchFamily="34" charset="-122"/>
+                        <a:ea typeface="微软雅黑" panose="020B0503020204020204" pitchFamily="34" charset="-122"/>
+                        <a:cs typeface="微软雅黑" panose="020B0503020204020204" pitchFamily="34" charset="-122"/>
                       </a:endParaRPr>
                     </a:p>
                   </a:txBody>
-                  <a:tcPr marL="91440" marR="91440" marT="45720" marB="45720">
+                  <a:tcPr>
                     <a:lnL w="6350" cap="flat" cmpd="sng" algn="ctr">
                       <a:solidFill>
                         <a:srgbClr val="3498DB"/>
@@ -10381,7 +10410,7 @@
                     <a:bodyPr/>
                     <a:lstStyle/>
                     <a:p>
-                      <a:pPr indent="0" marL="0">
+                      <a:pPr marL="0" indent="0">
                         <a:buNone/>
                       </a:pPr>
                       <a:r>
@@ -10389,20 +10418,20 @@
                           <a:solidFill>
                             <a:srgbClr val="2C3E50"/>
                           </a:solidFill>
-                          <a:latin typeface="Microsoft YaHei" pitchFamily="34" charset="0"/>
-                          <a:ea typeface="Microsoft YaHei" pitchFamily="34" charset="-122"/>
-                          <a:cs typeface="Microsoft YaHei" pitchFamily="34" charset="-120"/>
+                          <a:latin typeface="微软雅黑" panose="020B0503020204020204" pitchFamily="34" charset="-122"/>
+                          <a:ea typeface="微软雅黑" panose="020B0503020204020204" pitchFamily="34" charset="-122"/>
+                          <a:cs typeface="微软雅黑" panose="020B0503020204020204" pitchFamily="34" charset="-120"/>
                         </a:rPr>
                         <a:t>80%干扰 / 500ms呈现</a:t>
                       </a:r>
                       <a:endParaRPr lang="en-US" sz="1600" dirty="0">
-                        <a:latin typeface="Microsoft YaHei" charset="0"/>
-                        <a:ea typeface="Microsoft YaHei" charset="0"/>
-                        <a:cs typeface="Microsoft YaHei" charset="0"/>
+                        <a:latin typeface="微软雅黑" panose="020B0503020204020204" pitchFamily="34" charset="-122"/>
+                        <a:ea typeface="微软雅黑" panose="020B0503020204020204" pitchFamily="34" charset="-122"/>
+                        <a:cs typeface="微软雅黑" panose="020B0503020204020204" pitchFamily="34" charset="-122"/>
                       </a:endParaRPr>
                     </a:p>
                   </a:txBody>
-                  <a:tcPr marL="91440" marR="91440" marT="45720" marB="45720">
+                  <a:tcPr>
                     <a:lnL w="6350" cap="flat" cmpd="sng" algn="ctr">
                       <a:solidFill>
                         <a:srgbClr val="3498DB"/>
@@ -10446,7 +10475,7 @@
                     <a:bodyPr/>
                     <a:lstStyle/>
                     <a:p>
-                      <a:pPr indent="0" marL="0">
+                      <a:pPr marL="0" indent="0">
                         <a:buNone/>
                       </a:pPr>
                       <a:r>
@@ -10454,20 +10483,20 @@
                           <a:solidFill>
                             <a:srgbClr val="2C3E50"/>
                           </a:solidFill>
-                          <a:latin typeface="Microsoft YaHei" pitchFamily="34" charset="0"/>
-                          <a:ea typeface="Microsoft YaHei" pitchFamily="34" charset="-122"/>
-                          <a:cs typeface="Microsoft YaHei" pitchFamily="34" charset="-120"/>
+                          <a:latin typeface="微软雅黑" panose="020B0503020204020204" pitchFamily="34" charset="-122"/>
+                          <a:ea typeface="微软雅黑" panose="020B0503020204020204" pitchFamily="34" charset="-122"/>
+                          <a:cs typeface="微软雅黑" panose="020B0503020204020204" pitchFamily="34" charset="-120"/>
                         </a:rPr>
                         <a:t>80%干扰 / 500ms呈现（同一难度）</a:t>
                       </a:r>
                       <a:endParaRPr lang="en-US" sz="1600" dirty="0">
-                        <a:latin typeface="Microsoft YaHei" charset="0"/>
-                        <a:ea typeface="Microsoft YaHei" charset="0"/>
-                        <a:cs typeface="Microsoft YaHei" charset="0"/>
+                        <a:latin typeface="微软雅黑" panose="020B0503020204020204" pitchFamily="34" charset="-122"/>
+                        <a:ea typeface="微软雅黑" panose="020B0503020204020204" pitchFamily="34" charset="-122"/>
+                        <a:cs typeface="微软雅黑" panose="020B0503020204020204" pitchFamily="34" charset="-122"/>
                       </a:endParaRPr>
                     </a:p>
                   </a:txBody>
-                  <a:tcPr marL="91440" marR="91440" marT="45720" marB="45720">
+                  <a:tcPr>
                     <a:lnL w="6350" cap="flat" cmpd="sng" algn="ctr">
                       <a:solidFill>
                         <a:srgbClr val="3498DB"/>
@@ -10513,7 +10542,7 @@
                     <a:bodyPr/>
                     <a:lstStyle/>
                     <a:p>
-                      <a:pPr indent="0" marL="0">
+                      <a:pPr marL="0" indent="0">
                         <a:buNone/>
                       </a:pPr>
                       <a:r>
@@ -10521,20 +10550,20 @@
                           <a:solidFill>
                             <a:srgbClr val="2C3E50"/>
                           </a:solidFill>
-                          <a:latin typeface="Microsoft YaHei" pitchFamily="34" charset="0"/>
-                          <a:ea typeface="Microsoft YaHei" pitchFamily="34" charset="-122"/>
-                          <a:cs typeface="Microsoft YaHei" pitchFamily="34" charset="-120"/>
+                          <a:latin typeface="微软雅黑" panose="020B0503020204020204" pitchFamily="34" charset="-122"/>
+                          <a:ea typeface="微软雅黑" panose="020B0503020204020204" pitchFamily="34" charset="-122"/>
+                          <a:cs typeface="微软雅黑" panose="020B0503020204020204" pitchFamily="34" charset="-120"/>
                         </a:rPr>
                         <a:t>正确率</a:t>
                       </a:r>
                       <a:endParaRPr lang="en-US" sz="1600" dirty="0">
-                        <a:latin typeface="Microsoft YaHei" charset="0"/>
-                        <a:ea typeface="Microsoft YaHei" charset="0"/>
-                        <a:cs typeface="Microsoft YaHei" charset="0"/>
+                        <a:latin typeface="微软雅黑" panose="020B0503020204020204" pitchFamily="34" charset="-122"/>
+                        <a:ea typeface="微软雅黑" panose="020B0503020204020204" pitchFamily="34" charset="-122"/>
+                        <a:cs typeface="微软雅黑" panose="020B0503020204020204" pitchFamily="34" charset="-122"/>
                       </a:endParaRPr>
                     </a:p>
                   </a:txBody>
-                  <a:tcPr marL="91440" marR="91440" marT="45720" marB="45720">
+                  <a:tcPr>
                     <a:lnL w="6350" cap="flat" cmpd="sng" algn="ctr">
                       <a:solidFill>
                         <a:srgbClr val="3498DB"/>
@@ -10578,7 +10607,7 @@
                     <a:bodyPr/>
                     <a:lstStyle/>
                     <a:p>
-                      <a:pPr indent="0" marL="0">
+                      <a:pPr marL="0" indent="0">
                         <a:buNone/>
                       </a:pPr>
                       <a:r>
@@ -10586,20 +10615,20 @@
                           <a:solidFill>
                             <a:srgbClr val="27AE60"/>
                           </a:solidFill>
-                          <a:latin typeface="Microsoft YaHei" pitchFamily="34" charset="0"/>
-                          <a:ea typeface="Microsoft YaHei" pitchFamily="34" charset="-122"/>
-                          <a:cs typeface="Microsoft YaHei" pitchFamily="34" charset="-120"/>
+                          <a:latin typeface="微软雅黑" panose="020B0503020204020204" pitchFamily="34" charset="-122"/>
+                          <a:ea typeface="微软雅黑" panose="020B0503020204020204" pitchFamily="34" charset="-122"/>
+                          <a:cs typeface="微软雅黑" panose="020B0503020204020204" pitchFamily="34" charset="-120"/>
                         </a:rPr>
                         <a:t>95%+</a:t>
                       </a:r>
                       <a:endParaRPr lang="en-US" sz="1600" dirty="0">
-                        <a:latin typeface="Microsoft YaHei" charset="0"/>
-                        <a:ea typeface="Microsoft YaHei" charset="0"/>
-                        <a:cs typeface="Microsoft YaHei" charset="0"/>
+                        <a:latin typeface="微软雅黑" panose="020B0503020204020204" pitchFamily="34" charset="-122"/>
+                        <a:ea typeface="微软雅黑" panose="020B0503020204020204" pitchFamily="34" charset="-122"/>
+                        <a:cs typeface="微软雅黑" panose="020B0503020204020204" pitchFamily="34" charset="-122"/>
                       </a:endParaRPr>
                     </a:p>
                   </a:txBody>
-                  <a:tcPr marL="91440" marR="91440" marT="45720" marB="45720">
+                  <a:tcPr>
                     <a:lnL w="6350" cap="flat" cmpd="sng" algn="ctr">
                       <a:solidFill>
                         <a:srgbClr val="3498DB"/>
@@ -10643,7 +10672,7 @@
                     <a:bodyPr/>
                     <a:lstStyle/>
                     <a:p>
-                      <a:pPr indent="0" marL="0">
+                      <a:pPr marL="0" indent="0">
                         <a:buNone/>
                       </a:pPr>
                       <a:r>
@@ -10651,20 +10680,20 @@
                           <a:solidFill>
                             <a:srgbClr val="E74C3C"/>
                           </a:solidFill>
-                          <a:latin typeface="Microsoft YaHei" pitchFamily="34" charset="0"/>
-                          <a:ea typeface="Microsoft YaHei" pitchFamily="34" charset="-122"/>
-                          <a:cs typeface="Microsoft YaHei" pitchFamily="34" charset="-120"/>
+                          <a:latin typeface="微软雅黑" panose="020B0503020204020204" pitchFamily="34" charset="-122"/>
+                          <a:ea typeface="微软雅黑" panose="020B0503020204020204" pitchFamily="34" charset="-122"/>
+                          <a:cs typeface="微软雅黑" panose="020B0503020204020204" pitchFamily="34" charset="-120"/>
                         </a:rPr>
                         <a:t>30%</a:t>
                       </a:r>
                       <a:endParaRPr lang="en-US" sz="1600" dirty="0">
-                        <a:latin typeface="Microsoft YaHei" charset="0"/>
-                        <a:ea typeface="Microsoft YaHei" charset="0"/>
-                        <a:cs typeface="Microsoft YaHei" charset="0"/>
+                        <a:latin typeface="微软雅黑" panose="020B0503020204020204" pitchFamily="34" charset="-122"/>
+                        <a:ea typeface="微软雅黑" panose="020B0503020204020204" pitchFamily="34" charset="-122"/>
+                        <a:cs typeface="微软雅黑" panose="020B0503020204020204" pitchFamily="34" charset="-122"/>
                       </a:endParaRPr>
                     </a:p>
                   </a:txBody>
-                  <a:tcPr marL="91440" marR="91440" marT="45720" marB="45720">
+                  <a:tcPr>
                     <a:lnL w="6350" cap="flat" cmpd="sng" algn="ctr">
                       <a:solidFill>
                         <a:srgbClr val="3498DB"/>
@@ -10710,7 +10739,7 @@
                     <a:bodyPr/>
                     <a:lstStyle/>
                     <a:p>
-                      <a:pPr indent="0" marL="0">
+                      <a:pPr marL="0" indent="0">
                         <a:buNone/>
                       </a:pPr>
                       <a:r>
@@ -10718,20 +10747,20 @@
                           <a:solidFill>
                             <a:srgbClr val="2C3E50"/>
                           </a:solidFill>
-                          <a:latin typeface="Microsoft YaHei" pitchFamily="34" charset="0"/>
-                          <a:ea typeface="Microsoft YaHei" pitchFamily="34" charset="-122"/>
-                          <a:cs typeface="Microsoft YaHei" pitchFamily="34" charset="-120"/>
+                          <a:latin typeface="微软雅黑" panose="020B0503020204020204" pitchFamily="34" charset="-122"/>
+                          <a:ea typeface="微软雅黑" panose="020B0503020204020204" pitchFamily="34" charset="-122"/>
+                          <a:cs typeface="微软雅黑" panose="020B0503020204020204" pitchFamily="34" charset="-120"/>
                         </a:rPr>
                         <a:t>结论</a:t>
                       </a:r>
                       <a:endParaRPr lang="en-US" sz="1600" dirty="0">
-                        <a:latin typeface="Microsoft YaHei" charset="0"/>
-                        <a:ea typeface="Microsoft YaHei" charset="0"/>
-                        <a:cs typeface="Microsoft YaHei" charset="0"/>
+                        <a:latin typeface="微软雅黑" panose="020B0503020204020204" pitchFamily="34" charset="-122"/>
+                        <a:ea typeface="微软雅黑" panose="020B0503020204020204" pitchFamily="34" charset="-122"/>
+                        <a:cs typeface="微软雅黑" panose="020B0503020204020204" pitchFamily="34" charset="-122"/>
                       </a:endParaRPr>
                     </a:p>
                   </a:txBody>
-                  <a:tcPr marL="91440" marR="91440" marT="45720" marB="45720">
+                  <a:tcPr>
                     <a:lnL w="6350" cap="flat" cmpd="sng" algn="ctr">
                       <a:solidFill>
                         <a:srgbClr val="3498DB"/>
@@ -10775,7 +10804,7 @@
                     <a:bodyPr/>
                     <a:lstStyle/>
                     <a:p>
-                      <a:pPr indent="0" marL="0">
+                      <a:pPr marL="0" indent="0">
                         <a:buNone/>
                       </a:pPr>
                       <a:r>
@@ -10783,20 +10812,20 @@
                           <a:solidFill>
                             <a:srgbClr val="27AE60"/>
                           </a:solidFill>
-                          <a:latin typeface="Microsoft YaHei" pitchFamily="34" charset="0"/>
-                          <a:ea typeface="Microsoft YaHei" pitchFamily="34" charset="-122"/>
-                          <a:cs typeface="Microsoft YaHei" pitchFamily="34" charset="-120"/>
+                          <a:latin typeface="微软雅黑" panose="020B0503020204020204" pitchFamily="34" charset="-122"/>
+                          <a:ea typeface="微软雅黑" panose="020B0503020204020204" pitchFamily="34" charset="-122"/>
+                          <a:cs typeface="微软雅黑" panose="020B0503020204020204" pitchFamily="34" charset="-120"/>
                         </a:rPr>
                         <a:t>处于最近发展区 · 有挑战但不挫败</a:t>
                       </a:r>
                       <a:endParaRPr lang="en-US" sz="1600" dirty="0">
-                        <a:latin typeface="Microsoft YaHei" charset="0"/>
-                        <a:ea typeface="Microsoft YaHei" charset="0"/>
-                        <a:cs typeface="Microsoft YaHei" charset="0"/>
+                        <a:latin typeface="微软雅黑" panose="020B0503020204020204" pitchFamily="34" charset="-122"/>
+                        <a:ea typeface="微软雅黑" panose="020B0503020204020204" pitchFamily="34" charset="-122"/>
+                        <a:cs typeface="微软雅黑" panose="020B0503020204020204" pitchFamily="34" charset="-122"/>
                       </a:endParaRPr>
                     </a:p>
                   </a:txBody>
-                  <a:tcPr marL="91440" marR="91440" marT="45720" marB="45720">
+                  <a:tcPr>
                     <a:lnL w="6350" cap="flat" cmpd="sng" algn="ctr">
                       <a:solidFill>
                         <a:srgbClr val="3498DB"/>
@@ -10840,7 +10869,7 @@
                     <a:bodyPr/>
                     <a:lstStyle/>
                     <a:p>
-                      <a:pPr indent="0" marL="0">
+                      <a:pPr marL="0" indent="0">
                         <a:buNone/>
                       </a:pPr>
                       <a:r>
@@ -10848,20 +10877,20 @@
                           <a:solidFill>
                             <a:srgbClr val="E74C3C"/>
                           </a:solidFill>
-                          <a:latin typeface="Microsoft YaHei" pitchFamily="34" charset="0"/>
-                          <a:ea typeface="Microsoft YaHei" pitchFamily="34" charset="-122"/>
-                          <a:cs typeface="Microsoft YaHei" pitchFamily="34" charset="-120"/>
+                          <a:latin typeface="微软雅黑" panose="020B0503020204020204" pitchFamily="34" charset="-122"/>
+                          <a:ea typeface="微软雅黑" panose="020B0503020204020204" pitchFamily="34" charset="-122"/>
+                          <a:cs typeface="微软雅黑" panose="020B0503020204020204" pitchFamily="34" charset="-120"/>
                         </a:rPr>
                         <a:t>远超当前能力 · 认知负荷过高</a:t>
                       </a:r>
                       <a:endParaRPr lang="en-US" sz="1600" dirty="0">
-                        <a:latin typeface="Microsoft YaHei" charset="0"/>
-                        <a:ea typeface="Microsoft YaHei" charset="0"/>
-                        <a:cs typeface="Microsoft YaHei" charset="0"/>
+                        <a:latin typeface="微软雅黑" panose="020B0503020204020204" pitchFamily="34" charset="-122"/>
+                        <a:ea typeface="微软雅黑" panose="020B0503020204020204" pitchFamily="34" charset="-122"/>
+                        <a:cs typeface="微软雅黑" panose="020B0503020204020204" pitchFamily="34" charset="-122"/>
                       </a:endParaRPr>
                     </a:p>
                   </a:txBody>
-                  <a:tcPr marL="91440" marR="91440" marT="45720" marB="45720">
+                  <a:tcPr>
                     <a:lnL w="6350" cap="flat" cmpd="sng" algn="ctr">
                       <a:solidFill>
                         <a:srgbClr val="3498DB"/>
@@ -10924,7 +10953,6 @@
           <a:solidFill>
             <a:srgbClr val="ECF0F1"/>
           </a:solidFill>
-          <a:ln/>
         </p:spPr>
       </p:sp>
       <p:sp>
@@ -10942,13 +10970,12 @@
             <a:avLst/>
           </a:prstGeom>
           <a:noFill/>
-          <a:ln/>
         </p:spPr>
         <p:txBody>
           <a:bodyPr wrap="square" rtlCol="0" anchor="t"/>
           <a:lstStyle/>
           <a:p>
-            <a:pPr indent="0" marL="0">
+            <a:pPr marL="0" indent="0">
               <a:buNone/>
             </a:pPr>
             <a:r>
@@ -10956,16 +10983,23 @@
                 <a:solidFill>
                   <a:srgbClr val="3498DB"/>
                 </a:solidFill>
-                <a:latin typeface="Microsoft YaHei" pitchFamily="34" charset="0"/>
-                <a:ea typeface="Microsoft YaHei" pitchFamily="34" charset="-122"/>
-                <a:cs typeface="Microsoft YaHei" pitchFamily="34" charset="-120"/>
+                <a:latin typeface="微软雅黑" panose="020B0503020204020204" pitchFamily="34" charset="-122"/>
+                <a:ea typeface="微软雅黑" panose="020B0503020204020204" pitchFamily="34" charset="-122"/>
+                <a:cs typeface="微软雅黑" panose="020B0503020204020204" pitchFamily="34" charset="-120"/>
               </a:rPr>
               <a:t>这意味着什么？</a:t>
             </a:r>
-            <a:pPr indent="0" marL="0">
-              <a:buNone/>
-            </a:pPr>
-            <a:pPr indent="0" marL="0">
+            <a:endParaRPr lang="en-US" sz="2000" b="1" dirty="0">
+              <a:solidFill>
+                <a:srgbClr val="3498DB"/>
+              </a:solidFill>
+              <a:latin typeface="微软雅黑" panose="020B0503020204020204" pitchFamily="34" charset="-122"/>
+              <a:ea typeface="微软雅黑" panose="020B0503020204020204" pitchFamily="34" charset="-122"/>
+              <a:cs typeface="微软雅黑" panose="020B0503020204020204" pitchFamily="34" charset="-120"/>
+            </a:endParaRPr>
+          </a:p>
+          <a:p>
+            <a:pPr marL="0" indent="0">
               <a:buNone/>
             </a:pPr>
             <a:r>
@@ -10973,13 +11007,23 @@
                 <a:solidFill>
                   <a:srgbClr val="2C3E50"/>
                 </a:solidFill>
-                <a:latin typeface="Microsoft YaHei" pitchFamily="34" charset="0"/>
-                <a:ea typeface="Microsoft YaHei" pitchFamily="34" charset="-122"/>
-                <a:cs typeface="Microsoft YaHei" pitchFamily="34" charset="-120"/>
+                <a:latin typeface="微软雅黑" panose="020B0503020204020204" pitchFamily="34" charset="-122"/>
+                <a:ea typeface="微软雅黑" panose="020B0503020204020204" pitchFamily="34" charset="-122"/>
+                <a:cs typeface="微软雅黑" panose="020B0503020204020204" pitchFamily="34" charset="-120"/>
               </a:rPr>
               <a:t>🎯 自适应算法将难度个性化调节到了专属「最近发展区」</a:t>
             </a:r>
-            <a:pPr indent="0" marL="0">
+            <a:endParaRPr lang="en-US" sz="1700" b="1" dirty="0">
+              <a:solidFill>
+                <a:srgbClr val="2C3E50"/>
+              </a:solidFill>
+              <a:latin typeface="微软雅黑" panose="020B0503020204020204" pitchFamily="34" charset="-122"/>
+              <a:ea typeface="微软雅黑" panose="020B0503020204020204" pitchFamily="34" charset="-122"/>
+              <a:cs typeface="微软雅黑" panose="020B0503020204020204" pitchFamily="34" charset="-120"/>
+            </a:endParaRPr>
+          </a:p>
+          <a:p>
+            <a:pPr marL="0" indent="0">
               <a:buNone/>
             </a:pPr>
             <a:r>
@@ -10987,13 +11031,23 @@
                 <a:solidFill>
                   <a:srgbClr val="2C3E50"/>
                 </a:solidFill>
-                <a:latin typeface="Microsoft YaHei" pitchFamily="34" charset="0"/>
-                <a:ea typeface="Microsoft YaHei" pitchFamily="34" charset="-122"/>
-                <a:cs typeface="Microsoft YaHei" pitchFamily="34" charset="-120"/>
+                <a:latin typeface="微软雅黑" panose="020B0503020204020204" pitchFamily="34" charset="-122"/>
+                <a:ea typeface="微软雅黑" panose="020B0503020204020204" pitchFamily="34" charset="-122"/>
+                <a:cs typeface="微软雅黑" panose="020B0503020204020204" pitchFamily="34" charset="-120"/>
               </a:rPr>
               <a:t>🔬 同一难度对训练者 = 最佳挑战，对未训练者 = 不可能的任务</a:t>
             </a:r>
-            <a:pPr indent="0" marL="0">
+            <a:endParaRPr lang="en-US" sz="1700" dirty="0">
+              <a:solidFill>
+                <a:srgbClr val="2C3E50"/>
+              </a:solidFill>
+              <a:latin typeface="微软雅黑" panose="020B0503020204020204" pitchFamily="34" charset="-122"/>
+              <a:ea typeface="微软雅黑" panose="020B0503020204020204" pitchFamily="34" charset="-122"/>
+              <a:cs typeface="微软雅黑" panose="020B0503020204020204" pitchFamily="34" charset="-120"/>
+            </a:endParaRPr>
+          </a:p>
+          <a:p>
+            <a:pPr marL="0" indent="0">
               <a:buNone/>
             </a:pPr>
             <a:r>
@@ -11001,9 +11055,9 @@
                 <a:solidFill>
                   <a:srgbClr val="2C3E50"/>
                 </a:solidFill>
-                <a:latin typeface="Microsoft YaHei" pitchFamily="34" charset="0"/>
-                <a:ea typeface="Microsoft YaHei" pitchFamily="34" charset="-122"/>
-                <a:cs typeface="Microsoft YaHei" pitchFamily="34" charset="-120"/>
+                <a:latin typeface="微软雅黑" panose="020B0503020204020204" pitchFamily="34" charset="-122"/>
+                <a:ea typeface="微软雅黑" panose="020B0503020204020204" pitchFamily="34" charset="-122"/>
+                <a:cs typeface="微软雅黑" panose="020B0503020204020204" pitchFamily="34" charset="-120"/>
               </a:rPr>
               <a:t>📊 证明系统不是「一刀切」，而是根据个人能力动态调整</a:t>
             </a:r>
@@ -11062,7 +11116,7 @@
     </a:clrScheme>
     <a:fontScheme name="Office">
       <a:majorFont>
-        <a:latin typeface="Calibri Light" panose="020F0302020204030204"/>
+        <a:latin typeface="Calibri Light"/>
         <a:ea typeface=""/>
         <a:cs typeface=""/>
         <a:font script="Jpan" typeface="游ゴシック Light"/>
@@ -11095,26 +11149,9 @@
         <a:font script="Viet" typeface="Times New Roman"/>
         <a:font script="Uigh" typeface="Microsoft Uighur"/>
         <a:font script="Geor" typeface="Sylfaen"/>
-        <a:font script="Armn" typeface="Arial"/>
-        <a:font script="Bugi" typeface="Leelawadee UI"/>
-        <a:font script="Bopo" typeface="Microsoft JhengHei"/>
-        <a:font script="Java" typeface="Javanese Text"/>
-        <a:font script="Lisu" typeface="Segoe UI"/>
-        <a:font script="Mymr" typeface="Myanmar Text"/>
-        <a:font script="Nkoo" typeface="Ebrima"/>
-        <a:font script="Olck" typeface="Nirmala UI"/>
-        <a:font script="Osma" typeface="Ebrima"/>
-        <a:font script="Phag" typeface="Phagspa"/>
-        <a:font script="Syrn" typeface="Estrangelo Edessa"/>
-        <a:font script="Syrj" typeface="Estrangelo Edessa"/>
-        <a:font script="Syre" typeface="Estrangelo Edessa"/>
-        <a:font script="Sora" typeface="Nirmala UI"/>
-        <a:font script="Tale" typeface="Microsoft Tai Le"/>
-        <a:font script="Talu" typeface="Microsoft New Tai Lue"/>
-        <a:font script="Tfng" typeface="Ebrima"/>
       </a:majorFont>
       <a:minorFont>
-        <a:latin typeface="Calibri" panose="020F0502020204030204"/>
+        <a:latin typeface="Calibri"/>
         <a:ea typeface=""/>
         <a:cs typeface=""/>
         <a:font script="Jpan" typeface="游ゴシック"/>
@@ -11147,23 +11184,6 @@
         <a:font script="Viet" typeface="Arial"/>
         <a:font script="Uigh" typeface="Microsoft Uighur"/>
         <a:font script="Geor" typeface="Sylfaen"/>
-        <a:font script="Armn" typeface="Arial"/>
-        <a:font script="Bugi" typeface="Leelawadee UI"/>
-        <a:font script="Bopo" typeface="Microsoft JhengHei"/>
-        <a:font script="Java" typeface="Javanese Text"/>
-        <a:font script="Lisu" typeface="Segoe UI"/>
-        <a:font script="Mymr" typeface="Myanmar Text"/>
-        <a:font script="Nkoo" typeface="Ebrima"/>
-        <a:font script="Olck" typeface="Nirmala UI"/>
-        <a:font script="Osma" typeface="Ebrima"/>
-        <a:font script="Phag" typeface="Phagspa"/>
-        <a:font script="Syrn" typeface="Estrangelo Edessa"/>
-        <a:font script="Syrj" typeface="Estrangelo Edessa"/>
-        <a:font script="Syre" typeface="Estrangelo Edessa"/>
-        <a:font script="Sora" typeface="Nirmala UI"/>
-        <a:font script="Tale" typeface="Microsoft Tai Le"/>
-        <a:font script="Talu" typeface="Microsoft New Tai Lue"/>
-        <a:font script="Tfng" typeface="Ebrima"/>
       </a:minorFont>
     </a:fontScheme>
     <a:fmtScheme name="Office">
@@ -11304,8 +11324,265 @@
       </a:bgFillStyleLst>
     </a:fmtScheme>
   </a:themeElements>
-  <a:objectDefaults/>
-  <a:extraClrSchemeLst/>
+  <a:extLst>
+    <a:ext uri="{05A4C25C-085E-4340-85A3-A5531E510DB2}">
+      <thm15:themeFamily xmlns:thm15="http://schemas.microsoft.com/office/thememl/2012/main" name="Office Theme" id="{62F939B6-93AF-4DB8-9C6B-D6C7DFDC589F}" vid="{4A3C46E8-61CC-4603-A589-7422A47A8E4A}"/>
+    </a:ext>
+  </a:extLst>
+</a:theme>
+</file>
+
+<file path=ppt/theme/theme2.xml><?xml version="1.0" encoding="utf-8"?>
+<a:theme xmlns:a="http://schemas.openxmlformats.org/drawingml/2006/main" name="Office Theme">
+  <a:themeElements>
+    <a:clrScheme name="Office">
+      <a:dk1>
+        <a:sysClr val="windowText" lastClr="000000"/>
+      </a:dk1>
+      <a:lt1>
+        <a:sysClr val="window" lastClr="FFFFFF"/>
+      </a:lt1>
+      <a:dk2>
+        <a:srgbClr val="44546A"/>
+      </a:dk2>
+      <a:lt2>
+        <a:srgbClr val="E7E6E6"/>
+      </a:lt2>
+      <a:accent1>
+        <a:srgbClr val="4472C4"/>
+      </a:accent1>
+      <a:accent2>
+        <a:srgbClr val="ED7D31"/>
+      </a:accent2>
+      <a:accent3>
+        <a:srgbClr val="A5A5A5"/>
+      </a:accent3>
+      <a:accent4>
+        <a:srgbClr val="FFC000"/>
+      </a:accent4>
+      <a:accent5>
+        <a:srgbClr val="5B9BD5"/>
+      </a:accent5>
+      <a:accent6>
+        <a:srgbClr val="70AD47"/>
+      </a:accent6>
+      <a:hlink>
+        <a:srgbClr val="0563C1"/>
+      </a:hlink>
+      <a:folHlink>
+        <a:srgbClr val="954F72"/>
+      </a:folHlink>
+    </a:clrScheme>
+    <a:fontScheme name="Office">
+      <a:majorFont>
+        <a:latin typeface="Calibri Light"/>
+        <a:ea typeface=""/>
+        <a:cs typeface=""/>
+        <a:font script="Jpan" typeface="游ゴシック Light"/>
+        <a:font script="Hang" typeface="맑은 고딕"/>
+        <a:font script="Hans" typeface="等线 Light"/>
+        <a:font script="Hant" typeface="新細明體"/>
+        <a:font script="Arab" typeface="Times New Roman"/>
+        <a:font script="Hebr" typeface="Times New Roman"/>
+        <a:font script="Thai" typeface="Angsana New"/>
+        <a:font script="Ethi" typeface="Nyala"/>
+        <a:font script="Beng" typeface="Vrinda"/>
+        <a:font script="Gujr" typeface="Shruti"/>
+        <a:font script="Khmr" typeface="MoolBoran"/>
+        <a:font script="Knda" typeface="Tunga"/>
+        <a:font script="Guru" typeface="Raavi"/>
+        <a:font script="Cans" typeface="Euphemia"/>
+        <a:font script="Cher" typeface="Plantagenet Cherokee"/>
+        <a:font script="Yiii" typeface="Microsoft Yi Baiti"/>
+        <a:font script="Tibt" typeface="Microsoft Himalaya"/>
+        <a:font script="Thaa" typeface="MV Boli"/>
+        <a:font script="Deva" typeface="Mangal"/>
+        <a:font script="Telu" typeface="Gautami"/>
+        <a:font script="Taml" typeface="Latha"/>
+        <a:font script="Syrc" typeface="Estrangelo Edessa"/>
+        <a:font script="Orya" typeface="Kalinga"/>
+        <a:font script="Mlym" typeface="Kartika"/>
+        <a:font script="Laoo" typeface="DokChampa"/>
+        <a:font script="Sinh" typeface="Iskoola Pota"/>
+        <a:font script="Mong" typeface="Mongolian Baiti"/>
+        <a:font script="Viet" typeface="Times New Roman"/>
+        <a:font script="Uigh" typeface="Microsoft Uighur"/>
+        <a:font script="Geor" typeface="Sylfaen"/>
+      </a:majorFont>
+      <a:minorFont>
+        <a:latin typeface="Calibri"/>
+        <a:ea typeface=""/>
+        <a:cs typeface=""/>
+        <a:font script="Jpan" typeface="游ゴシック"/>
+        <a:font script="Hang" typeface="맑은 고딕"/>
+        <a:font script="Hans" typeface="等线"/>
+        <a:font script="Hant" typeface="新細明體"/>
+        <a:font script="Arab" typeface="Arial"/>
+        <a:font script="Hebr" typeface="Arial"/>
+        <a:font script="Thai" typeface="Cordia New"/>
+        <a:font script="Ethi" typeface="Nyala"/>
+        <a:font script="Beng" typeface="Vrinda"/>
+        <a:font script="Gujr" typeface="Shruti"/>
+        <a:font script="Khmr" typeface="DaunPenh"/>
+        <a:font script="Knda" typeface="Tunga"/>
+        <a:font script="Guru" typeface="Raavi"/>
+        <a:font script="Cans" typeface="Euphemia"/>
+        <a:font script="Cher" typeface="Plantagenet Cherokee"/>
+        <a:font script="Yiii" typeface="Microsoft Yi Baiti"/>
+        <a:font script="Tibt" typeface="Microsoft Himalaya"/>
+        <a:font script="Thaa" typeface="MV Boli"/>
+        <a:font script="Deva" typeface="Mangal"/>
+        <a:font script="Telu" typeface="Gautami"/>
+        <a:font script="Taml" typeface="Latha"/>
+        <a:font script="Syrc" typeface="Estrangelo Edessa"/>
+        <a:font script="Orya" typeface="Kalinga"/>
+        <a:font script="Mlym" typeface="Kartika"/>
+        <a:font script="Laoo" typeface="DokChampa"/>
+        <a:font script="Sinh" typeface="Iskoola Pota"/>
+        <a:font script="Mong" typeface="Mongolian Baiti"/>
+        <a:font script="Viet" typeface="Arial"/>
+        <a:font script="Uigh" typeface="Microsoft Uighur"/>
+        <a:font script="Geor" typeface="Sylfaen"/>
+      </a:minorFont>
+    </a:fontScheme>
+    <a:fmtScheme name="Office">
+      <a:fillStyleLst>
+        <a:solidFill>
+          <a:schemeClr val="phClr"/>
+        </a:solidFill>
+        <a:gradFill rotWithShape="1">
+          <a:gsLst>
+            <a:gs pos="0">
+              <a:schemeClr val="phClr">
+                <a:lumMod val="110000"/>
+                <a:satMod val="105000"/>
+                <a:tint val="67000"/>
+              </a:schemeClr>
+            </a:gs>
+            <a:gs pos="50000">
+              <a:schemeClr val="phClr">
+                <a:lumMod val="105000"/>
+                <a:satMod val="103000"/>
+                <a:tint val="73000"/>
+              </a:schemeClr>
+            </a:gs>
+            <a:gs pos="100000">
+              <a:schemeClr val="phClr">
+                <a:lumMod val="105000"/>
+                <a:satMod val="109000"/>
+                <a:tint val="81000"/>
+              </a:schemeClr>
+            </a:gs>
+          </a:gsLst>
+          <a:lin ang="5400000" scaled="0"/>
+        </a:gradFill>
+        <a:gradFill rotWithShape="1">
+          <a:gsLst>
+            <a:gs pos="0">
+              <a:schemeClr val="phClr">
+                <a:satMod val="103000"/>
+                <a:lumMod val="102000"/>
+                <a:tint val="94000"/>
+              </a:schemeClr>
+            </a:gs>
+            <a:gs pos="50000">
+              <a:schemeClr val="phClr">
+                <a:satMod val="110000"/>
+                <a:lumMod val="100000"/>
+                <a:shade val="100000"/>
+              </a:schemeClr>
+            </a:gs>
+            <a:gs pos="100000">
+              <a:schemeClr val="phClr">
+                <a:lumMod val="99000"/>
+                <a:satMod val="120000"/>
+                <a:shade val="78000"/>
+              </a:schemeClr>
+            </a:gs>
+          </a:gsLst>
+          <a:lin ang="5400000" scaled="0"/>
+        </a:gradFill>
+      </a:fillStyleLst>
+      <a:lnStyleLst>
+        <a:ln w="6350" cap="flat" cmpd="sng" algn="ctr">
+          <a:solidFill>
+            <a:schemeClr val="phClr"/>
+          </a:solidFill>
+          <a:prstDash val="solid"/>
+          <a:miter lim="800000"/>
+        </a:ln>
+        <a:ln w="12700" cap="flat" cmpd="sng" algn="ctr">
+          <a:solidFill>
+            <a:schemeClr val="phClr"/>
+          </a:solidFill>
+          <a:prstDash val="solid"/>
+          <a:miter lim="800000"/>
+        </a:ln>
+        <a:ln w="19050" cap="flat" cmpd="sng" algn="ctr">
+          <a:solidFill>
+            <a:schemeClr val="phClr"/>
+          </a:solidFill>
+          <a:prstDash val="solid"/>
+          <a:miter lim="800000"/>
+        </a:ln>
+      </a:lnStyleLst>
+      <a:effectStyleLst>
+        <a:effectStyle>
+          <a:effectLst/>
+        </a:effectStyle>
+        <a:effectStyle>
+          <a:effectLst/>
+        </a:effectStyle>
+        <a:effectStyle>
+          <a:effectLst>
+            <a:outerShdw blurRad="57150" dist="19050" dir="5400000" algn="ctr" rotWithShape="0">
+              <a:srgbClr val="000000">
+                <a:alpha val="63000"/>
+              </a:srgbClr>
+            </a:outerShdw>
+          </a:effectLst>
+        </a:effectStyle>
+      </a:effectStyleLst>
+      <a:bgFillStyleLst>
+        <a:solidFill>
+          <a:schemeClr val="phClr"/>
+        </a:solidFill>
+        <a:solidFill>
+          <a:schemeClr val="phClr">
+            <a:tint val="95000"/>
+            <a:satMod val="170000"/>
+          </a:schemeClr>
+        </a:solidFill>
+        <a:gradFill rotWithShape="1">
+          <a:gsLst>
+            <a:gs pos="0">
+              <a:schemeClr val="phClr">
+                <a:tint val="93000"/>
+                <a:satMod val="150000"/>
+                <a:shade val="98000"/>
+                <a:lumMod val="102000"/>
+              </a:schemeClr>
+            </a:gs>
+            <a:gs pos="50000">
+              <a:schemeClr val="phClr">
+                <a:tint val="98000"/>
+                <a:satMod val="130000"/>
+                <a:shade val="90000"/>
+                <a:lumMod val="103000"/>
+              </a:schemeClr>
+            </a:gs>
+            <a:gs pos="100000">
+              <a:schemeClr val="phClr">
+                <a:shade val="63000"/>
+                <a:satMod val="120000"/>
+              </a:schemeClr>
+            </a:gs>
+          </a:gsLst>
+          <a:lin ang="5400000" scaled="0"/>
+        </a:gradFill>
+      </a:bgFillStyleLst>
+    </a:fmtScheme>
+  </a:themeElements>
   <a:extLst>
     <a:ext uri="{05A4C25C-085E-4340-85A3-A5531E510DB2}">
       <thm15:themeFamily xmlns:thm15="http://schemas.microsoft.com/office/thememl/2012/main" name="Office Theme" id="{62F939B6-93AF-4DB8-9C6B-D6C7DFDC589F}" vid="{4A3C46E8-61CC-4603-A589-7422A47A8E4A}"/>
